--- a/docs/pptx/carbo/jx-carbo-linsubhr-ratio-throm3.pptx
+++ b/docs/pptx/carbo/jx-carbo-linsubhr-ratio-throm3.pptx
@@ -2271,7 +2271,7 @@
           </p:nvSpPr>
           <p:spPr>
             <a:xfrm>
-              <a:off x="817517" y="5114368"/>
+              <a:off x="817517" y="5142518"/>
               <a:ext cx="7799693" cy="0"/>
             </a:xfrm>
             <a:custGeom>
@@ -2314,7 +2314,7 @@
           </p:nvSpPr>
           <p:spPr>
             <a:xfrm>
-              <a:off x="817517" y="4244691"/>
+              <a:off x="817517" y="4313054"/>
               <a:ext cx="7799693" cy="0"/>
             </a:xfrm>
             <a:custGeom>
@@ -2357,7 +2357,7 @@
           </p:nvSpPr>
           <p:spPr>
             <a:xfrm>
-              <a:off x="817517" y="3375014"/>
+              <a:off x="817517" y="3483591"/>
               <a:ext cx="7799693" cy="0"/>
             </a:xfrm>
             <a:custGeom>
@@ -2400,7 +2400,7 @@
           </p:nvSpPr>
           <p:spPr>
             <a:xfrm>
-              <a:off x="817517" y="2505337"/>
+              <a:off x="817517" y="2654127"/>
               <a:ext cx="7799693" cy="0"/>
             </a:xfrm>
             <a:custGeom>
@@ -2443,15 +2443,15 @@
           </p:nvSpPr>
           <p:spPr>
             <a:xfrm>
-              <a:off x="1615213" y="1896563"/>
-              <a:ext cx="0" cy="3826579"/>
+              <a:off x="1615213" y="2073503"/>
+              <a:ext cx="0" cy="3649639"/>
             </a:xfrm>
             <a:custGeom>
               <a:avLst/>
               <a:pathLst>
-                <a:path w="0" h="3826579">
+                <a:path w="0" h="3649639">
                   <a:moveTo>
-                    <a:pt x="0" y="3826579"/>
+                    <a:pt x="0" y="3649639"/>
                   </a:moveTo>
                   <a:lnTo>
                     <a:pt x="0" y="0"/>
@@ -2486,15 +2486,15 @@
           </p:nvSpPr>
           <p:spPr>
             <a:xfrm>
-              <a:off x="3387871" y="1896563"/>
-              <a:ext cx="0" cy="3826579"/>
+              <a:off x="3387871" y="2073503"/>
+              <a:ext cx="0" cy="3649639"/>
             </a:xfrm>
             <a:custGeom>
               <a:avLst/>
               <a:pathLst>
-                <a:path w="0" h="3826579">
+                <a:path w="0" h="3649639">
                   <a:moveTo>
-                    <a:pt x="0" y="3826579"/>
+                    <a:pt x="0" y="3649639"/>
                   </a:moveTo>
                   <a:lnTo>
                     <a:pt x="0" y="0"/>
@@ -2529,15 +2529,15 @@
           </p:nvSpPr>
           <p:spPr>
             <a:xfrm>
-              <a:off x="5160528" y="1896563"/>
-              <a:ext cx="0" cy="3826579"/>
+              <a:off x="5160528" y="2073503"/>
+              <a:ext cx="0" cy="3649639"/>
             </a:xfrm>
             <a:custGeom>
               <a:avLst/>
               <a:pathLst>
-                <a:path w="0" h="3826579">
+                <a:path w="0" h="3649639">
                   <a:moveTo>
-                    <a:pt x="0" y="3826579"/>
+                    <a:pt x="0" y="3649639"/>
                   </a:moveTo>
                   <a:lnTo>
                     <a:pt x="0" y="0"/>
@@ -2572,15 +2572,15 @@
           </p:nvSpPr>
           <p:spPr>
             <a:xfrm>
-              <a:off x="6933186" y="1896563"/>
-              <a:ext cx="0" cy="3826579"/>
+              <a:off x="6933186" y="2073503"/>
+              <a:ext cx="0" cy="3649639"/>
             </a:xfrm>
             <a:custGeom>
               <a:avLst/>
               <a:pathLst>
-                <a:path w="0" h="3826579">
+                <a:path w="0" h="3649639">
                   <a:moveTo>
-                    <a:pt x="0" y="3826579"/>
+                    <a:pt x="0" y="3649639"/>
                   </a:moveTo>
                   <a:lnTo>
                     <a:pt x="0" y="0"/>
@@ -2615,7 +2615,7 @@
           </p:nvSpPr>
           <p:spPr>
             <a:xfrm>
-              <a:off x="817517" y="5549207"/>
+              <a:off x="817517" y="5557249"/>
               <a:ext cx="7799693" cy="0"/>
             </a:xfrm>
             <a:custGeom>
@@ -2658,7 +2658,7 @@
           </p:nvSpPr>
           <p:spPr>
             <a:xfrm>
-              <a:off x="817517" y="4679530"/>
+              <a:off x="817517" y="4727786"/>
               <a:ext cx="7799693" cy="0"/>
             </a:xfrm>
             <a:custGeom>
@@ -2701,7 +2701,7 @@
           </p:nvSpPr>
           <p:spPr>
             <a:xfrm>
-              <a:off x="817517" y="3809853"/>
+              <a:off x="817517" y="3898322"/>
               <a:ext cx="7799693" cy="0"/>
             </a:xfrm>
             <a:custGeom>
@@ -2744,7 +2744,7 @@
           </p:nvSpPr>
           <p:spPr>
             <a:xfrm>
-              <a:off x="817517" y="2940175"/>
+              <a:off x="817517" y="3068859"/>
               <a:ext cx="7799693" cy="0"/>
             </a:xfrm>
             <a:custGeom>
@@ -2787,7 +2787,7 @@
           </p:nvSpPr>
           <p:spPr>
             <a:xfrm>
-              <a:off x="817517" y="2070498"/>
+              <a:off x="817517" y="2239395"/>
               <a:ext cx="7799693" cy="0"/>
             </a:xfrm>
             <a:custGeom>
@@ -2830,15 +2830,15 @@
           </p:nvSpPr>
           <p:spPr>
             <a:xfrm>
-              <a:off x="2501542" y="1896563"/>
-              <a:ext cx="0" cy="3826579"/>
+              <a:off x="2501542" y="2073503"/>
+              <a:ext cx="0" cy="3649639"/>
             </a:xfrm>
             <a:custGeom>
               <a:avLst/>
               <a:pathLst>
-                <a:path w="0" h="3826579">
+                <a:path w="0" h="3649639">
                   <a:moveTo>
-                    <a:pt x="0" y="3826579"/>
+                    <a:pt x="0" y="3649639"/>
                   </a:moveTo>
                   <a:lnTo>
                     <a:pt x="0" y="0"/>
@@ -2873,15 +2873,15 @@
           </p:nvSpPr>
           <p:spPr>
             <a:xfrm>
-              <a:off x="4274200" y="1896563"/>
-              <a:ext cx="0" cy="3826579"/>
+              <a:off x="4274200" y="2073503"/>
+              <a:ext cx="0" cy="3649639"/>
             </a:xfrm>
             <a:custGeom>
               <a:avLst/>
               <a:pathLst>
-                <a:path w="0" h="3826579">
+                <a:path w="0" h="3649639">
                   <a:moveTo>
-                    <a:pt x="0" y="3826579"/>
+                    <a:pt x="0" y="3649639"/>
                   </a:moveTo>
                   <a:lnTo>
                     <a:pt x="0" y="0"/>
@@ -2916,15 +2916,15 @@
           </p:nvSpPr>
           <p:spPr>
             <a:xfrm>
-              <a:off x="6046857" y="1896563"/>
-              <a:ext cx="0" cy="3826579"/>
+              <a:off x="6046857" y="2073503"/>
+              <a:ext cx="0" cy="3649639"/>
             </a:xfrm>
             <a:custGeom>
               <a:avLst/>
               <a:pathLst>
-                <a:path w="0" h="3826579">
+                <a:path w="0" h="3649639">
                   <a:moveTo>
-                    <a:pt x="0" y="3826579"/>
+                    <a:pt x="0" y="3649639"/>
                   </a:moveTo>
                   <a:lnTo>
                     <a:pt x="0" y="0"/>
@@ -2959,15 +2959,15 @@
           </p:nvSpPr>
           <p:spPr>
             <a:xfrm>
-              <a:off x="7819515" y="1896563"/>
-              <a:ext cx="0" cy="3826579"/>
+              <a:off x="7819515" y="2073503"/>
+              <a:ext cx="0" cy="3649639"/>
             </a:xfrm>
             <a:custGeom>
               <a:avLst/>
               <a:pathLst>
-                <a:path w="0" h="3826579">
+                <a:path w="0" h="3649639">
                   <a:moveTo>
-                    <a:pt x="0" y="3826579"/>
+                    <a:pt x="0" y="3649639"/>
                   </a:moveTo>
                   <a:lnTo>
                     <a:pt x="0" y="0"/>
@@ -3002,522 +3002,522 @@
           </p:nvSpPr>
           <p:spPr>
             <a:xfrm>
-              <a:off x="817517" y="1896563"/>
-              <a:ext cx="7403783" cy="3636774"/>
+              <a:off x="817517" y="2073503"/>
+              <a:ext cx="7403783" cy="3468611"/>
             </a:xfrm>
             <a:custGeom>
               <a:avLst/>
               <a:pathLst>
-                <a:path w="7403783" h="3636774">
+                <a:path w="7403783" h="3468611">
                   <a:moveTo>
                     <a:pt x="1974434" y="0"/>
                   </a:moveTo>
                   <a:lnTo>
-                    <a:pt x="2039504" y="231752"/>
-                  </a:lnTo>
-                  <a:lnTo>
-                    <a:pt x="2116137" y="484518"/>
-                  </a:lnTo>
-                  <a:lnTo>
-                    <a:pt x="2192769" y="718608"/>
-                  </a:lnTo>
-                  <a:lnTo>
-                    <a:pt x="2269402" y="935401"/>
-                  </a:lnTo>
-                  <a:lnTo>
-                    <a:pt x="2346034" y="1136175"/>
-                  </a:lnTo>
-                  <a:lnTo>
-                    <a:pt x="2422667" y="1322115"/>
-                  </a:lnTo>
-                  <a:lnTo>
-                    <a:pt x="2499300" y="1494315"/>
-                  </a:lnTo>
-                  <a:lnTo>
-                    <a:pt x="2575932" y="1653792"/>
-                  </a:lnTo>
-                  <a:lnTo>
-                    <a:pt x="2652565" y="1801485"/>
-                  </a:lnTo>
-                  <a:lnTo>
-                    <a:pt x="2729197" y="1938265"/>
-                  </a:lnTo>
-                  <a:lnTo>
-                    <a:pt x="2805830" y="2064939"/>
-                  </a:lnTo>
-                  <a:lnTo>
-                    <a:pt x="2882462" y="2182253"/>
-                  </a:lnTo>
-                  <a:lnTo>
-                    <a:pt x="2959095" y="2290899"/>
-                  </a:lnTo>
-                  <a:lnTo>
-                    <a:pt x="3035727" y="2391517"/>
-                  </a:lnTo>
-                  <a:lnTo>
-                    <a:pt x="3112360" y="2484700"/>
-                  </a:lnTo>
-                  <a:lnTo>
-                    <a:pt x="3188993" y="2570998"/>
-                  </a:lnTo>
-                  <a:lnTo>
-                    <a:pt x="3265625" y="2650920"/>
-                  </a:lnTo>
-                  <a:lnTo>
-                    <a:pt x="3342258" y="2724936"/>
-                  </a:lnTo>
-                  <a:lnTo>
-                    <a:pt x="3418890" y="2786306"/>
-                  </a:lnTo>
-                  <a:lnTo>
-                    <a:pt x="3495523" y="2807084"/>
-                  </a:lnTo>
-                  <a:lnTo>
-                    <a:pt x="3572155" y="2827363"/>
-                  </a:lnTo>
-                  <a:lnTo>
-                    <a:pt x="3648788" y="2847156"/>
-                  </a:lnTo>
-                  <a:lnTo>
-                    <a:pt x="3725420" y="2866474"/>
-                  </a:lnTo>
-                  <a:lnTo>
-                    <a:pt x="3802053" y="2885329"/>
-                  </a:lnTo>
-                  <a:lnTo>
-                    <a:pt x="3878685" y="2903732"/>
-                  </a:lnTo>
-                  <a:lnTo>
-                    <a:pt x="3955318" y="2921693"/>
-                  </a:lnTo>
-                  <a:lnTo>
-                    <a:pt x="4031951" y="2939224"/>
-                  </a:lnTo>
-                  <a:lnTo>
-                    <a:pt x="4108583" y="2956334"/>
-                  </a:lnTo>
-                  <a:lnTo>
-                    <a:pt x="4185216" y="2973034"/>
-                  </a:lnTo>
-                  <a:lnTo>
-                    <a:pt x="4261848" y="2989333"/>
-                  </a:lnTo>
-                  <a:lnTo>
-                    <a:pt x="4338481" y="3005241"/>
-                  </a:lnTo>
-                  <a:lnTo>
-                    <a:pt x="4415113" y="3020768"/>
-                  </a:lnTo>
-                  <a:lnTo>
-                    <a:pt x="4491746" y="3035923"/>
-                  </a:lnTo>
-                  <a:lnTo>
-                    <a:pt x="4568378" y="3050714"/>
-                  </a:lnTo>
-                  <a:lnTo>
-                    <a:pt x="4645011" y="3065150"/>
-                  </a:lnTo>
-                  <a:lnTo>
-                    <a:pt x="4721644" y="3079240"/>
-                  </a:lnTo>
-                  <a:lnTo>
-                    <a:pt x="4798276" y="3092992"/>
-                  </a:lnTo>
-                  <a:lnTo>
-                    <a:pt x="4874909" y="3106414"/>
-                  </a:lnTo>
-                  <a:lnTo>
-                    <a:pt x="4951541" y="3119515"/>
-                  </a:lnTo>
-                  <a:lnTo>
-                    <a:pt x="5028174" y="3132301"/>
-                  </a:lnTo>
-                  <a:lnTo>
-                    <a:pt x="5104806" y="3144780"/>
-                  </a:lnTo>
-                  <a:lnTo>
-                    <a:pt x="5181439" y="3156961"/>
-                  </a:lnTo>
-                  <a:lnTo>
-                    <a:pt x="5258071" y="3168849"/>
-                  </a:lnTo>
-                  <a:lnTo>
-                    <a:pt x="5334704" y="3180452"/>
-                  </a:lnTo>
-                  <a:lnTo>
-                    <a:pt x="5411336" y="3191776"/>
-                  </a:lnTo>
-                  <a:lnTo>
-                    <a:pt x="5487969" y="3202830"/>
-                  </a:lnTo>
-                  <a:lnTo>
-                    <a:pt x="5564602" y="3213618"/>
-                  </a:lnTo>
-                  <a:lnTo>
-                    <a:pt x="5641234" y="3224147"/>
-                  </a:lnTo>
-                  <a:lnTo>
-                    <a:pt x="5717867" y="3234424"/>
-                  </a:lnTo>
-                  <a:lnTo>
-                    <a:pt x="5794499" y="3244454"/>
-                  </a:lnTo>
-                  <a:lnTo>
-                    <a:pt x="5871132" y="3254244"/>
-                  </a:lnTo>
-                  <a:lnTo>
-                    <a:pt x="5947764" y="3263799"/>
-                  </a:lnTo>
-                  <a:lnTo>
-                    <a:pt x="6024397" y="3273124"/>
-                  </a:lnTo>
-                  <a:lnTo>
-                    <a:pt x="6101029" y="3282226"/>
-                  </a:lnTo>
-                  <a:lnTo>
-                    <a:pt x="6177662" y="3291110"/>
-                  </a:lnTo>
-                  <a:lnTo>
-                    <a:pt x="6254294" y="3299781"/>
-                  </a:lnTo>
-                  <a:lnTo>
-                    <a:pt x="6330927" y="3308244"/>
-                  </a:lnTo>
-                  <a:lnTo>
-                    <a:pt x="6407560" y="3316504"/>
-                  </a:lnTo>
-                  <a:lnTo>
-                    <a:pt x="6484192" y="3324565"/>
-                  </a:lnTo>
-                  <a:lnTo>
-                    <a:pt x="6560825" y="3332434"/>
-                  </a:lnTo>
-                  <a:lnTo>
-                    <a:pt x="6637457" y="3340113"/>
-                  </a:lnTo>
-                  <a:lnTo>
-                    <a:pt x="6714090" y="3347609"/>
-                  </a:lnTo>
-                  <a:lnTo>
-                    <a:pt x="6790722" y="3354925"/>
-                  </a:lnTo>
-                  <a:lnTo>
-                    <a:pt x="6867355" y="3362065"/>
-                  </a:lnTo>
-                  <a:lnTo>
-                    <a:pt x="6943987" y="3369034"/>
-                  </a:lnTo>
-                  <a:lnTo>
-                    <a:pt x="7020620" y="3375836"/>
-                  </a:lnTo>
-                  <a:lnTo>
-                    <a:pt x="7097253" y="3382475"/>
-                  </a:lnTo>
-                  <a:lnTo>
-                    <a:pt x="7173885" y="3388954"/>
-                  </a:lnTo>
-                  <a:lnTo>
-                    <a:pt x="7250518" y="3395278"/>
-                  </a:lnTo>
-                  <a:lnTo>
-                    <a:pt x="7327150" y="3401451"/>
-                  </a:lnTo>
-                  <a:lnTo>
-                    <a:pt x="7403783" y="3407475"/>
-                  </a:lnTo>
-                  <a:lnTo>
-                    <a:pt x="7403783" y="3636774"/>
-                  </a:lnTo>
-                  <a:lnTo>
-                    <a:pt x="7327150" y="3635508"/>
-                  </a:lnTo>
-                  <a:lnTo>
-                    <a:pt x="7250518" y="3634141"/>
-                  </a:lnTo>
-                  <a:lnTo>
-                    <a:pt x="7173885" y="3632665"/>
-                  </a:lnTo>
-                  <a:lnTo>
-                    <a:pt x="7097253" y="3631071"/>
-                  </a:lnTo>
-                  <a:lnTo>
-                    <a:pt x="7020620" y="3629350"/>
-                  </a:lnTo>
-                  <a:lnTo>
-                    <a:pt x="6943987" y="3627491"/>
-                  </a:lnTo>
-                  <a:lnTo>
-                    <a:pt x="6867355" y="3625484"/>
-                  </a:lnTo>
-                  <a:lnTo>
-                    <a:pt x="6790722" y="3623318"/>
-                  </a:lnTo>
-                  <a:lnTo>
-                    <a:pt x="6714090" y="3620978"/>
-                  </a:lnTo>
-                  <a:lnTo>
-                    <a:pt x="6637457" y="3618452"/>
-                  </a:lnTo>
-                  <a:lnTo>
-                    <a:pt x="6560825" y="3615724"/>
-                  </a:lnTo>
-                  <a:lnTo>
-                    <a:pt x="6484192" y="3612778"/>
-                  </a:lnTo>
-                  <a:lnTo>
-                    <a:pt x="6407560" y="3609597"/>
-                  </a:lnTo>
-                  <a:lnTo>
-                    <a:pt x="6330927" y="3606163"/>
-                  </a:lnTo>
-                  <a:lnTo>
-                    <a:pt x="6254294" y="3602455"/>
-                  </a:lnTo>
-                  <a:lnTo>
-                    <a:pt x="6177662" y="3598450"/>
-                  </a:lnTo>
-                  <a:lnTo>
-                    <a:pt x="6101029" y="3594127"/>
-                  </a:lnTo>
-                  <a:lnTo>
-                    <a:pt x="6024397" y="3589458"/>
-                  </a:lnTo>
-                  <a:lnTo>
-                    <a:pt x="5947764" y="3584417"/>
-                  </a:lnTo>
-                  <a:lnTo>
-                    <a:pt x="5871132" y="3578973"/>
-                  </a:lnTo>
-                  <a:lnTo>
-                    <a:pt x="5794499" y="3573096"/>
-                  </a:lnTo>
-                  <a:lnTo>
-                    <a:pt x="5717867" y="3566749"/>
-                  </a:lnTo>
-                  <a:lnTo>
-                    <a:pt x="5641234" y="3559896"/>
-                  </a:lnTo>
-                  <a:lnTo>
-                    <a:pt x="5564602" y="3552496"/>
-                  </a:lnTo>
-                  <a:lnTo>
-                    <a:pt x="5487969" y="3544506"/>
-                  </a:lnTo>
-                  <a:lnTo>
-                    <a:pt x="5411336" y="3535878"/>
-                  </a:lnTo>
-                  <a:lnTo>
-                    <a:pt x="5334704" y="3526562"/>
-                  </a:lnTo>
-                  <a:lnTo>
-                    <a:pt x="5258071" y="3516503"/>
-                  </a:lnTo>
-                  <a:lnTo>
-                    <a:pt x="5181439" y="3505641"/>
-                  </a:lnTo>
-                  <a:lnTo>
-                    <a:pt x="5104806" y="3493913"/>
-                  </a:lnTo>
-                  <a:lnTo>
-                    <a:pt x="5028174" y="3481248"/>
-                  </a:lnTo>
-                  <a:lnTo>
-                    <a:pt x="4951541" y="3467574"/>
-                  </a:lnTo>
-                  <a:lnTo>
-                    <a:pt x="4874909" y="3452808"/>
-                  </a:lnTo>
-                  <a:lnTo>
-                    <a:pt x="4798276" y="3436865"/>
-                  </a:lnTo>
-                  <a:lnTo>
-                    <a:pt x="4721644" y="3419649"/>
-                  </a:lnTo>
-                  <a:lnTo>
-                    <a:pt x="4645011" y="3401060"/>
-                  </a:lnTo>
-                  <a:lnTo>
-                    <a:pt x="4568378" y="3380987"/>
-                  </a:lnTo>
-                  <a:lnTo>
-                    <a:pt x="4491746" y="3359313"/>
-                  </a:lnTo>
-                  <a:lnTo>
-                    <a:pt x="4415113" y="3335910"/>
-                  </a:lnTo>
-                  <a:lnTo>
-                    <a:pt x="4338481" y="3310640"/>
-                  </a:lnTo>
-                  <a:lnTo>
-                    <a:pt x="4261848" y="3283353"/>
-                  </a:lnTo>
-                  <a:lnTo>
-                    <a:pt x="4185216" y="3253890"/>
-                  </a:lnTo>
-                  <a:lnTo>
-                    <a:pt x="4108583" y="3222076"/>
-                  </a:lnTo>
-                  <a:lnTo>
-                    <a:pt x="4031951" y="3187723"/>
-                  </a:lnTo>
-                  <a:lnTo>
-                    <a:pt x="3955318" y="3150630"/>
-                  </a:lnTo>
-                  <a:lnTo>
-                    <a:pt x="3878685" y="3110577"/>
-                  </a:lnTo>
-                  <a:lnTo>
-                    <a:pt x="3802053" y="3067329"/>
-                  </a:lnTo>
-                  <a:lnTo>
-                    <a:pt x="3725420" y="3020630"/>
-                  </a:lnTo>
-                  <a:lnTo>
-                    <a:pt x="3648788" y="2970206"/>
-                  </a:lnTo>
-                  <a:lnTo>
-                    <a:pt x="3572155" y="2915758"/>
-                  </a:lnTo>
-                  <a:lnTo>
-                    <a:pt x="3495523" y="2856966"/>
-                  </a:lnTo>
-                  <a:lnTo>
-                    <a:pt x="3418890" y="2793484"/>
-                  </a:lnTo>
-                  <a:lnTo>
-                    <a:pt x="3342258" y="2765018"/>
-                  </a:lnTo>
-                  <a:lnTo>
-                    <a:pt x="3265625" y="2743207"/>
-                  </a:lnTo>
-                  <a:lnTo>
-                    <a:pt x="3188993" y="2720859"/>
-                  </a:lnTo>
-                  <a:lnTo>
-                    <a:pt x="3112360" y="2697963"/>
-                  </a:lnTo>
-                  <a:lnTo>
-                    <a:pt x="3035727" y="2674504"/>
-                  </a:lnTo>
-                  <a:lnTo>
-                    <a:pt x="2959095" y="2650469"/>
-                  </a:lnTo>
-                  <a:lnTo>
-                    <a:pt x="2882462" y="2625843"/>
-                  </a:lnTo>
-                  <a:lnTo>
-                    <a:pt x="2805830" y="2600611"/>
-                  </a:lnTo>
-                  <a:lnTo>
-                    <a:pt x="2729197" y="2574760"/>
-                  </a:lnTo>
-                  <a:lnTo>
-                    <a:pt x="2652565" y="2548274"/>
-                  </a:lnTo>
-                  <a:lnTo>
-                    <a:pt x="2575932" y="2521136"/>
-                  </a:lnTo>
-                  <a:lnTo>
-                    <a:pt x="2499300" y="2493332"/>
-                  </a:lnTo>
-                  <a:lnTo>
-                    <a:pt x="2422667" y="2464845"/>
-                  </a:lnTo>
-                  <a:lnTo>
-                    <a:pt x="2346034" y="2435658"/>
-                  </a:lnTo>
-                  <a:lnTo>
-                    <a:pt x="2269402" y="2405753"/>
-                  </a:lnTo>
-                  <a:lnTo>
-                    <a:pt x="2192769" y="2375114"/>
-                  </a:lnTo>
-                  <a:lnTo>
-                    <a:pt x="2116137" y="2343722"/>
-                  </a:lnTo>
-                  <a:lnTo>
-                    <a:pt x="2039504" y="2311558"/>
-                  </a:lnTo>
-                  <a:lnTo>
-                    <a:pt x="1962872" y="2278604"/>
-                  </a:lnTo>
-                  <a:lnTo>
-                    <a:pt x="1886239" y="2244840"/>
-                  </a:lnTo>
-                  <a:lnTo>
-                    <a:pt x="1809607" y="2210247"/>
-                  </a:lnTo>
-                  <a:lnTo>
-                    <a:pt x="1732974" y="2174803"/>
-                  </a:lnTo>
-                  <a:lnTo>
-                    <a:pt x="1656342" y="2138489"/>
-                  </a:lnTo>
-                  <a:lnTo>
-                    <a:pt x="1579709" y="2101282"/>
-                  </a:lnTo>
-                  <a:lnTo>
-                    <a:pt x="1503076" y="2063161"/>
-                  </a:lnTo>
-                  <a:lnTo>
-                    <a:pt x="1426444" y="2024103"/>
-                  </a:lnTo>
-                  <a:lnTo>
-                    <a:pt x="1349811" y="1984086"/>
-                  </a:lnTo>
-                  <a:lnTo>
-                    <a:pt x="1273179" y="1943085"/>
-                  </a:lnTo>
-                  <a:lnTo>
-                    <a:pt x="1196546" y="1901077"/>
-                  </a:lnTo>
-                  <a:lnTo>
-                    <a:pt x="1119914" y="1858036"/>
-                  </a:lnTo>
-                  <a:lnTo>
-                    <a:pt x="1043281" y="1813938"/>
-                  </a:lnTo>
-                  <a:lnTo>
-                    <a:pt x="966649" y="1768756"/>
-                  </a:lnTo>
-                  <a:lnTo>
-                    <a:pt x="890016" y="1722464"/>
-                  </a:lnTo>
-                  <a:lnTo>
-                    <a:pt x="813384" y="1675035"/>
-                  </a:lnTo>
-                  <a:lnTo>
-                    <a:pt x="736751" y="1626439"/>
-                  </a:lnTo>
-                  <a:lnTo>
-                    <a:pt x="660118" y="1576650"/>
-                  </a:lnTo>
-                  <a:lnTo>
-                    <a:pt x="583486" y="1525638"/>
-                  </a:lnTo>
-                  <a:lnTo>
-                    <a:pt x="506853" y="1473372"/>
-                  </a:lnTo>
-                  <a:lnTo>
-                    <a:pt x="430221" y="1419821"/>
-                  </a:lnTo>
-                  <a:lnTo>
-                    <a:pt x="353588" y="1364955"/>
-                  </a:lnTo>
-                  <a:lnTo>
-                    <a:pt x="276956" y="1308740"/>
-                  </a:lnTo>
-                  <a:lnTo>
-                    <a:pt x="200323" y="1251145"/>
-                  </a:lnTo>
-                  <a:lnTo>
-                    <a:pt x="123691" y="1192133"/>
-                  </a:lnTo>
-                  <a:lnTo>
-                    <a:pt x="47058" y="1131672"/>
-                  </a:lnTo>
-                  <a:lnTo>
-                    <a:pt x="0" y="1093632"/>
+                    <a:pt x="2039504" y="221036"/>
+                  </a:lnTo>
+                  <a:lnTo>
+                    <a:pt x="2116137" y="462114"/>
+                  </a:lnTo>
+                  <a:lnTo>
+                    <a:pt x="2192769" y="685380"/>
+                  </a:lnTo>
+                  <a:lnTo>
+                    <a:pt x="2269402" y="892148"/>
+                  </a:lnTo>
+                  <a:lnTo>
+                    <a:pt x="2346034" y="1083639"/>
+                  </a:lnTo>
+                  <a:lnTo>
+                    <a:pt x="2422667" y="1260981"/>
+                  </a:lnTo>
+                  <a:lnTo>
+                    <a:pt x="2499300" y="1425219"/>
+                  </a:lnTo>
+                  <a:lnTo>
+                    <a:pt x="2575932" y="1577321"/>
+                  </a:lnTo>
+                  <a:lnTo>
+                    <a:pt x="2652565" y="1718185"/>
+                  </a:lnTo>
+                  <a:lnTo>
+                    <a:pt x="2729197" y="1848641"/>
+                  </a:lnTo>
+                  <a:lnTo>
+                    <a:pt x="2805830" y="1969457"/>
+                  </a:lnTo>
+                  <a:lnTo>
+                    <a:pt x="2882462" y="2081346"/>
+                  </a:lnTo>
+                  <a:lnTo>
+                    <a:pt x="2959095" y="2184968"/>
+                  </a:lnTo>
+                  <a:lnTo>
+                    <a:pt x="3035727" y="2280934"/>
+                  </a:lnTo>
+                  <a:lnTo>
+                    <a:pt x="3112360" y="2369808"/>
+                  </a:lnTo>
+                  <a:lnTo>
+                    <a:pt x="3188993" y="2452116"/>
+                  </a:lnTo>
+                  <a:lnTo>
+                    <a:pt x="3265625" y="2528342"/>
+                  </a:lnTo>
+                  <a:lnTo>
+                    <a:pt x="3342258" y="2598936"/>
+                  </a:lnTo>
+                  <a:lnTo>
+                    <a:pt x="3418890" y="2657468"/>
+                  </a:lnTo>
+                  <a:lnTo>
+                    <a:pt x="3495523" y="2677285"/>
+                  </a:lnTo>
+                  <a:lnTo>
+                    <a:pt x="3572155" y="2696627"/>
+                  </a:lnTo>
+                  <a:lnTo>
+                    <a:pt x="3648788" y="2715505"/>
+                  </a:lnTo>
+                  <a:lnTo>
+                    <a:pt x="3725420" y="2733930"/>
+                  </a:lnTo>
+                  <a:lnTo>
+                    <a:pt x="3802053" y="2751913"/>
+                  </a:lnTo>
+                  <a:lnTo>
+                    <a:pt x="3878685" y="2769464"/>
+                  </a:lnTo>
+                  <a:lnTo>
+                    <a:pt x="3955318" y="2786595"/>
+                  </a:lnTo>
+                  <a:lnTo>
+                    <a:pt x="4031951" y="2803315"/>
+                  </a:lnTo>
+                  <a:lnTo>
+                    <a:pt x="4108583" y="2819634"/>
+                  </a:lnTo>
+                  <a:lnTo>
+                    <a:pt x="4185216" y="2835562"/>
+                  </a:lnTo>
+                  <a:lnTo>
+                    <a:pt x="4261848" y="2851107"/>
+                  </a:lnTo>
+                  <a:lnTo>
+                    <a:pt x="4338481" y="2866280"/>
+                  </a:lnTo>
+                  <a:lnTo>
+                    <a:pt x="4415113" y="2881089"/>
+                  </a:lnTo>
+                  <a:lnTo>
+                    <a:pt x="4491746" y="2895543"/>
+                  </a:lnTo>
+                  <a:lnTo>
+                    <a:pt x="4568378" y="2909650"/>
+                  </a:lnTo>
+                  <a:lnTo>
+                    <a:pt x="4645011" y="2923419"/>
+                  </a:lnTo>
+                  <a:lnTo>
+                    <a:pt x="4721644" y="2936857"/>
+                  </a:lnTo>
+                  <a:lnTo>
+                    <a:pt x="4798276" y="2949973"/>
+                  </a:lnTo>
+                  <a:lnTo>
+                    <a:pt x="4874909" y="2962775"/>
+                  </a:lnTo>
+                  <a:lnTo>
+                    <a:pt x="4951541" y="2975269"/>
+                  </a:lnTo>
+                  <a:lnTo>
+                    <a:pt x="5028174" y="2987464"/>
+                  </a:lnTo>
+                  <a:lnTo>
+                    <a:pt x="5104806" y="2999367"/>
+                  </a:lnTo>
+                  <a:lnTo>
+                    <a:pt x="5181439" y="3010984"/>
+                  </a:lnTo>
+                  <a:lnTo>
+                    <a:pt x="5258071" y="3022322"/>
+                  </a:lnTo>
+                  <a:lnTo>
+                    <a:pt x="5334704" y="3033389"/>
+                  </a:lnTo>
+                  <a:lnTo>
+                    <a:pt x="5411336" y="3044190"/>
+                  </a:lnTo>
+                  <a:lnTo>
+                    <a:pt x="5487969" y="3054732"/>
+                  </a:lnTo>
+                  <a:lnTo>
+                    <a:pt x="5564602" y="3065021"/>
+                  </a:lnTo>
+                  <a:lnTo>
+                    <a:pt x="5641234" y="3075063"/>
+                  </a:lnTo>
+                  <a:lnTo>
+                    <a:pt x="5717867" y="3084865"/>
+                  </a:lnTo>
+                  <a:lnTo>
+                    <a:pt x="5794499" y="3094432"/>
+                  </a:lnTo>
+                  <a:lnTo>
+                    <a:pt x="5871132" y="3103769"/>
+                  </a:lnTo>
+                  <a:lnTo>
+                    <a:pt x="5947764" y="3112882"/>
+                  </a:lnTo>
+                  <a:lnTo>
+                    <a:pt x="6024397" y="3121776"/>
+                  </a:lnTo>
+                  <a:lnTo>
+                    <a:pt x="6101029" y="3130457"/>
+                  </a:lnTo>
+                  <a:lnTo>
+                    <a:pt x="6177662" y="3138931"/>
+                  </a:lnTo>
+                  <a:lnTo>
+                    <a:pt x="6254294" y="3147200"/>
+                  </a:lnTo>
+                  <a:lnTo>
+                    <a:pt x="6330927" y="3155272"/>
+                  </a:lnTo>
+                  <a:lnTo>
+                    <a:pt x="6407560" y="3163150"/>
+                  </a:lnTo>
+                  <a:lnTo>
+                    <a:pt x="6484192" y="3170839"/>
+                  </a:lnTo>
+                  <a:lnTo>
+                    <a:pt x="6560825" y="3178343"/>
+                  </a:lnTo>
+                  <a:lnTo>
+                    <a:pt x="6637457" y="3185668"/>
+                  </a:lnTo>
+                  <a:lnTo>
+                    <a:pt x="6714090" y="3192817"/>
+                  </a:lnTo>
+                  <a:lnTo>
+                    <a:pt x="6790722" y="3199794"/>
+                  </a:lnTo>
+                  <a:lnTo>
+                    <a:pt x="6867355" y="3206604"/>
+                  </a:lnTo>
+                  <a:lnTo>
+                    <a:pt x="6943987" y="3213251"/>
+                  </a:lnTo>
+                  <a:lnTo>
+                    <a:pt x="7020620" y="3219738"/>
+                  </a:lnTo>
+                  <a:lnTo>
+                    <a:pt x="7097253" y="3226070"/>
+                  </a:lnTo>
+                  <a:lnTo>
+                    <a:pt x="7173885" y="3232250"/>
+                  </a:lnTo>
+                  <a:lnTo>
+                    <a:pt x="7250518" y="3238282"/>
+                  </a:lnTo>
+                  <a:lnTo>
+                    <a:pt x="7327150" y="3244169"/>
+                  </a:lnTo>
+                  <a:lnTo>
+                    <a:pt x="7403783" y="3249915"/>
+                  </a:lnTo>
+                  <a:lnTo>
+                    <a:pt x="7403783" y="3468611"/>
+                  </a:lnTo>
+                  <a:lnTo>
+                    <a:pt x="7327150" y="3467404"/>
+                  </a:lnTo>
+                  <a:lnTo>
+                    <a:pt x="7250518" y="3466100"/>
+                  </a:lnTo>
+                  <a:lnTo>
+                    <a:pt x="7173885" y="3464692"/>
+                  </a:lnTo>
+                  <a:lnTo>
+                    <a:pt x="7097253" y="3463171"/>
+                  </a:lnTo>
+                  <a:lnTo>
+                    <a:pt x="7020620" y="3461530"/>
+                  </a:lnTo>
+                  <a:lnTo>
+                    <a:pt x="6943987" y="3459757"/>
+                  </a:lnTo>
+                  <a:lnTo>
+                    <a:pt x="6867355" y="3457843"/>
+                  </a:lnTo>
+                  <a:lnTo>
+                    <a:pt x="6790722" y="3455777"/>
+                  </a:lnTo>
+                  <a:lnTo>
+                    <a:pt x="6714090" y="3453545"/>
+                  </a:lnTo>
+                  <a:lnTo>
+                    <a:pt x="6637457" y="3451136"/>
+                  </a:lnTo>
+                  <a:lnTo>
+                    <a:pt x="6560825" y="3448534"/>
+                  </a:lnTo>
+                  <a:lnTo>
+                    <a:pt x="6484192" y="3445724"/>
+                  </a:lnTo>
+                  <a:lnTo>
+                    <a:pt x="6407560" y="3442691"/>
+                  </a:lnTo>
+                  <a:lnTo>
+                    <a:pt x="6330927" y="3439415"/>
+                  </a:lnTo>
+                  <a:lnTo>
+                    <a:pt x="6254294" y="3435878"/>
+                  </a:lnTo>
+                  <a:lnTo>
+                    <a:pt x="6177662" y="3432059"/>
+                  </a:lnTo>
+                  <a:lnTo>
+                    <a:pt x="6101029" y="3427935"/>
+                  </a:lnTo>
+                  <a:lnTo>
+                    <a:pt x="6024397" y="3423483"/>
+                  </a:lnTo>
+                  <a:lnTo>
+                    <a:pt x="5947764" y="3418675"/>
+                  </a:lnTo>
+                  <a:lnTo>
+                    <a:pt x="5871132" y="3413483"/>
+                  </a:lnTo>
+                  <a:lnTo>
+                    <a:pt x="5794499" y="3407877"/>
+                  </a:lnTo>
+                  <a:lnTo>
+                    <a:pt x="5717867" y="3401824"/>
+                  </a:lnTo>
+                  <a:lnTo>
+                    <a:pt x="5641234" y="3395288"/>
+                  </a:lnTo>
+                  <a:lnTo>
+                    <a:pt x="5564602" y="3388230"/>
+                  </a:lnTo>
+                  <a:lnTo>
+                    <a:pt x="5487969" y="3380609"/>
+                  </a:lnTo>
+                  <a:lnTo>
+                    <a:pt x="5411336" y="3372381"/>
+                  </a:lnTo>
+                  <a:lnTo>
+                    <a:pt x="5334704" y="3363495"/>
+                  </a:lnTo>
+                  <a:lnTo>
+                    <a:pt x="5258071" y="3353901"/>
+                  </a:lnTo>
+                  <a:lnTo>
+                    <a:pt x="5181439" y="3343542"/>
+                  </a:lnTo>
+                  <a:lnTo>
+                    <a:pt x="5104806" y="3332355"/>
+                  </a:lnTo>
+                  <a:lnTo>
+                    <a:pt x="5028174" y="3320277"/>
+                  </a:lnTo>
+                  <a:lnTo>
+                    <a:pt x="4951541" y="3307235"/>
+                  </a:lnTo>
+                  <a:lnTo>
+                    <a:pt x="4874909" y="3293152"/>
+                  </a:lnTo>
+                  <a:lnTo>
+                    <a:pt x="4798276" y="3277945"/>
+                  </a:lnTo>
+                  <a:lnTo>
+                    <a:pt x="4721644" y="3261526"/>
+                  </a:lnTo>
+                  <a:lnTo>
+                    <a:pt x="4645011" y="3243796"/>
+                  </a:lnTo>
+                  <a:lnTo>
+                    <a:pt x="4568378" y="3224652"/>
+                  </a:lnTo>
+                  <a:lnTo>
+                    <a:pt x="4491746" y="3203980"/>
+                  </a:lnTo>
+                  <a:lnTo>
+                    <a:pt x="4415113" y="3181659"/>
+                  </a:lnTo>
+                  <a:lnTo>
+                    <a:pt x="4338481" y="3157557"/>
+                  </a:lnTo>
+                  <a:lnTo>
+                    <a:pt x="4261848" y="3131532"/>
+                  </a:lnTo>
+                  <a:lnTo>
+                    <a:pt x="4185216" y="3103431"/>
+                  </a:lnTo>
+                  <a:lnTo>
+                    <a:pt x="4108583" y="3073088"/>
+                  </a:lnTo>
+                  <a:lnTo>
+                    <a:pt x="4031951" y="3040324"/>
+                  </a:lnTo>
+                  <a:lnTo>
+                    <a:pt x="3955318" y="3004946"/>
+                  </a:lnTo>
+                  <a:lnTo>
+                    <a:pt x="3878685" y="2966745"/>
+                  </a:lnTo>
+                  <a:lnTo>
+                    <a:pt x="3802053" y="2925497"/>
+                  </a:lnTo>
+                  <a:lnTo>
+                    <a:pt x="3725420" y="2880957"/>
+                  </a:lnTo>
+                  <a:lnTo>
+                    <a:pt x="3648788" y="2832864"/>
+                  </a:lnTo>
+                  <a:lnTo>
+                    <a:pt x="3572155" y="2780934"/>
+                  </a:lnTo>
+                  <a:lnTo>
+                    <a:pt x="3495523" y="2724861"/>
+                  </a:lnTo>
+                  <a:lnTo>
+                    <a:pt x="3418890" y="2664314"/>
+                  </a:lnTo>
+                  <a:lnTo>
+                    <a:pt x="3342258" y="2637165"/>
+                  </a:lnTo>
+                  <a:lnTo>
+                    <a:pt x="3265625" y="2616362"/>
+                  </a:lnTo>
+                  <a:lnTo>
+                    <a:pt x="3188993" y="2595048"/>
+                  </a:lnTo>
+                  <a:lnTo>
+                    <a:pt x="3112360" y="2573210"/>
+                  </a:lnTo>
+                  <a:lnTo>
+                    <a:pt x="3035727" y="2550836"/>
+                  </a:lnTo>
+                  <a:lnTo>
+                    <a:pt x="2959095" y="2527912"/>
+                  </a:lnTo>
+                  <a:lnTo>
+                    <a:pt x="2882462" y="2504425"/>
+                  </a:lnTo>
+                  <a:lnTo>
+                    <a:pt x="2805830" y="2480360"/>
+                  </a:lnTo>
+                  <a:lnTo>
+                    <a:pt x="2729197" y="2455704"/>
+                  </a:lnTo>
+                  <a:lnTo>
+                    <a:pt x="2652565" y="2430442"/>
+                  </a:lnTo>
+                  <a:lnTo>
+                    <a:pt x="2575932" y="2404560"/>
+                  </a:lnTo>
+                  <a:lnTo>
+                    <a:pt x="2499300" y="2378042"/>
+                  </a:lnTo>
+                  <a:lnTo>
+                    <a:pt x="2422667" y="2350872"/>
+                  </a:lnTo>
+                  <a:lnTo>
+                    <a:pt x="2346034" y="2323034"/>
+                  </a:lnTo>
+                  <a:lnTo>
+                    <a:pt x="2269402" y="2294512"/>
+                  </a:lnTo>
+                  <a:lnTo>
+                    <a:pt x="2192769" y="2265289"/>
+                  </a:lnTo>
+                  <a:lnTo>
+                    <a:pt x="2116137" y="2235349"/>
+                  </a:lnTo>
+                  <a:lnTo>
+                    <a:pt x="2039504" y="2204672"/>
+                  </a:lnTo>
+                  <a:lnTo>
+                    <a:pt x="1962872" y="2173242"/>
+                  </a:lnTo>
+                  <a:lnTo>
+                    <a:pt x="1886239" y="2141040"/>
+                  </a:lnTo>
+                  <a:lnTo>
+                    <a:pt x="1809607" y="2108046"/>
+                  </a:lnTo>
+                  <a:lnTo>
+                    <a:pt x="1732974" y="2074241"/>
+                  </a:lnTo>
+                  <a:lnTo>
+                    <a:pt x="1656342" y="2039606"/>
+                  </a:lnTo>
+                  <a:lnTo>
+                    <a:pt x="1579709" y="2004120"/>
+                  </a:lnTo>
+                  <a:lnTo>
+                    <a:pt x="1503076" y="1967761"/>
+                  </a:lnTo>
+                  <a:lnTo>
+                    <a:pt x="1426444" y="1930510"/>
+                  </a:lnTo>
+                  <a:lnTo>
+                    <a:pt x="1349811" y="1892343"/>
+                  </a:lnTo>
+                  <a:lnTo>
+                    <a:pt x="1273179" y="1853238"/>
+                  </a:lnTo>
+                  <a:lnTo>
+                    <a:pt x="1196546" y="1813172"/>
+                  </a:lnTo>
+                  <a:lnTo>
+                    <a:pt x="1119914" y="1772121"/>
+                  </a:lnTo>
+                  <a:lnTo>
+                    <a:pt x="1043281" y="1730062"/>
+                  </a:lnTo>
+                  <a:lnTo>
+                    <a:pt x="966649" y="1686969"/>
+                  </a:lnTo>
+                  <a:lnTo>
+                    <a:pt x="890016" y="1642818"/>
+                  </a:lnTo>
+                  <a:lnTo>
+                    <a:pt x="813384" y="1597582"/>
+                  </a:lnTo>
+                  <a:lnTo>
+                    <a:pt x="736751" y="1551233"/>
+                  </a:lnTo>
+                  <a:lnTo>
+                    <a:pt x="660118" y="1503747"/>
+                  </a:lnTo>
+                  <a:lnTo>
+                    <a:pt x="583486" y="1455093"/>
+                  </a:lnTo>
+                  <a:lnTo>
+                    <a:pt x="506853" y="1405243"/>
+                  </a:lnTo>
+                  <a:lnTo>
+                    <a:pt x="430221" y="1354169"/>
+                  </a:lnTo>
+                  <a:lnTo>
+                    <a:pt x="353588" y="1301840"/>
+                  </a:lnTo>
+                  <a:lnTo>
+                    <a:pt x="276956" y="1248225"/>
+                  </a:lnTo>
+                  <a:lnTo>
+                    <a:pt x="200323" y="1193292"/>
+                  </a:lnTo>
+                  <a:lnTo>
+                    <a:pt x="123691" y="1137010"/>
+                  </a:lnTo>
+                  <a:lnTo>
+                    <a:pt x="47058" y="1079344"/>
+                  </a:lnTo>
+                  <a:lnTo>
+                    <a:pt x="0" y="1043063"/>
                   </a:lnTo>
                   <a:close/>
                 </a:path>
@@ -3543,228 +3543,228 @@
           </p:nvSpPr>
           <p:spPr>
             <a:xfrm>
-              <a:off x="2791952" y="1896563"/>
-              <a:ext cx="5429348" cy="3407475"/>
+              <a:off x="2791952" y="2073503"/>
+              <a:ext cx="5429348" cy="3249915"/>
             </a:xfrm>
             <a:custGeom>
               <a:avLst/>
               <a:pathLst>
-                <a:path w="5429348" h="3407475">
+                <a:path w="5429348" h="3249915">
                   <a:moveTo>
                     <a:pt x="0" y="0"/>
                   </a:moveTo>
                   <a:lnTo>
-                    <a:pt x="65070" y="231752"/>
-                  </a:lnTo>
-                  <a:lnTo>
-                    <a:pt x="141702" y="484518"/>
-                  </a:lnTo>
-                  <a:lnTo>
-                    <a:pt x="218335" y="718608"/>
-                  </a:lnTo>
-                  <a:lnTo>
-                    <a:pt x="294967" y="935401"/>
-                  </a:lnTo>
-                  <a:lnTo>
-                    <a:pt x="371600" y="1136175"/>
-                  </a:lnTo>
-                  <a:lnTo>
-                    <a:pt x="448232" y="1322115"/>
-                  </a:lnTo>
-                  <a:lnTo>
-                    <a:pt x="524865" y="1494315"/>
-                  </a:lnTo>
-                  <a:lnTo>
-                    <a:pt x="601498" y="1653792"/>
-                  </a:lnTo>
-                  <a:lnTo>
-                    <a:pt x="678130" y="1801485"/>
-                  </a:lnTo>
-                  <a:lnTo>
-                    <a:pt x="754763" y="1938265"/>
-                  </a:lnTo>
-                  <a:lnTo>
-                    <a:pt x="831395" y="2064939"/>
-                  </a:lnTo>
-                  <a:lnTo>
-                    <a:pt x="908028" y="2182253"/>
-                  </a:lnTo>
-                  <a:lnTo>
-                    <a:pt x="984660" y="2290899"/>
-                  </a:lnTo>
-                  <a:lnTo>
-                    <a:pt x="1061293" y="2391517"/>
-                  </a:lnTo>
-                  <a:lnTo>
-                    <a:pt x="1137925" y="2484700"/>
-                  </a:lnTo>
-                  <a:lnTo>
-                    <a:pt x="1214558" y="2570998"/>
-                  </a:lnTo>
-                  <a:lnTo>
-                    <a:pt x="1291190" y="2650920"/>
-                  </a:lnTo>
-                  <a:lnTo>
-                    <a:pt x="1367823" y="2724936"/>
-                  </a:lnTo>
-                  <a:lnTo>
-                    <a:pt x="1444456" y="2786306"/>
-                  </a:lnTo>
-                  <a:lnTo>
-                    <a:pt x="1521088" y="2807084"/>
-                  </a:lnTo>
-                  <a:lnTo>
-                    <a:pt x="1597721" y="2827363"/>
-                  </a:lnTo>
-                  <a:lnTo>
-                    <a:pt x="1674353" y="2847156"/>
-                  </a:lnTo>
-                  <a:lnTo>
-                    <a:pt x="1750986" y="2866474"/>
-                  </a:lnTo>
-                  <a:lnTo>
-                    <a:pt x="1827618" y="2885329"/>
-                  </a:lnTo>
-                  <a:lnTo>
-                    <a:pt x="1904251" y="2903732"/>
-                  </a:lnTo>
-                  <a:lnTo>
-                    <a:pt x="1980883" y="2921693"/>
-                  </a:lnTo>
-                  <a:lnTo>
-                    <a:pt x="2057516" y="2939224"/>
-                  </a:lnTo>
-                  <a:lnTo>
-                    <a:pt x="2134148" y="2956334"/>
-                  </a:lnTo>
-                  <a:lnTo>
-                    <a:pt x="2210781" y="2973034"/>
-                  </a:lnTo>
-                  <a:lnTo>
-                    <a:pt x="2287414" y="2989333"/>
-                  </a:lnTo>
-                  <a:lnTo>
-                    <a:pt x="2364046" y="3005241"/>
-                  </a:lnTo>
-                  <a:lnTo>
-                    <a:pt x="2440679" y="3020768"/>
-                  </a:lnTo>
-                  <a:lnTo>
-                    <a:pt x="2517311" y="3035923"/>
-                  </a:lnTo>
-                  <a:lnTo>
-                    <a:pt x="2593944" y="3050714"/>
-                  </a:lnTo>
-                  <a:lnTo>
-                    <a:pt x="2670576" y="3065150"/>
-                  </a:lnTo>
-                  <a:lnTo>
-                    <a:pt x="2747209" y="3079240"/>
-                  </a:lnTo>
-                  <a:lnTo>
-                    <a:pt x="2823841" y="3092992"/>
-                  </a:lnTo>
-                  <a:lnTo>
-                    <a:pt x="2900474" y="3106414"/>
-                  </a:lnTo>
-                  <a:lnTo>
-                    <a:pt x="2977107" y="3119515"/>
-                  </a:lnTo>
-                  <a:lnTo>
-                    <a:pt x="3053739" y="3132301"/>
-                  </a:lnTo>
-                  <a:lnTo>
-                    <a:pt x="3130372" y="3144780"/>
-                  </a:lnTo>
-                  <a:lnTo>
-                    <a:pt x="3207004" y="3156961"/>
-                  </a:lnTo>
-                  <a:lnTo>
-                    <a:pt x="3283637" y="3168849"/>
-                  </a:lnTo>
-                  <a:lnTo>
-                    <a:pt x="3360269" y="3180452"/>
-                  </a:lnTo>
-                  <a:lnTo>
-                    <a:pt x="3436902" y="3191776"/>
-                  </a:lnTo>
-                  <a:lnTo>
-                    <a:pt x="3513534" y="3202830"/>
-                  </a:lnTo>
-                  <a:lnTo>
-                    <a:pt x="3590167" y="3213618"/>
-                  </a:lnTo>
-                  <a:lnTo>
-                    <a:pt x="3666799" y="3224147"/>
-                  </a:lnTo>
-                  <a:lnTo>
-                    <a:pt x="3743432" y="3234424"/>
-                  </a:lnTo>
-                  <a:lnTo>
-                    <a:pt x="3820065" y="3244454"/>
-                  </a:lnTo>
-                  <a:lnTo>
-                    <a:pt x="3896697" y="3254244"/>
-                  </a:lnTo>
-                  <a:lnTo>
-                    <a:pt x="3973330" y="3263799"/>
-                  </a:lnTo>
-                  <a:lnTo>
-                    <a:pt x="4049962" y="3273124"/>
-                  </a:lnTo>
-                  <a:lnTo>
-                    <a:pt x="4126595" y="3282226"/>
-                  </a:lnTo>
-                  <a:lnTo>
-                    <a:pt x="4203227" y="3291110"/>
-                  </a:lnTo>
-                  <a:lnTo>
-                    <a:pt x="4279860" y="3299781"/>
-                  </a:lnTo>
-                  <a:lnTo>
-                    <a:pt x="4356492" y="3308244"/>
-                  </a:lnTo>
-                  <a:lnTo>
-                    <a:pt x="4433125" y="3316504"/>
-                  </a:lnTo>
-                  <a:lnTo>
-                    <a:pt x="4509758" y="3324565"/>
-                  </a:lnTo>
-                  <a:lnTo>
-                    <a:pt x="4586390" y="3332434"/>
-                  </a:lnTo>
-                  <a:lnTo>
-                    <a:pt x="4663023" y="3340113"/>
-                  </a:lnTo>
-                  <a:lnTo>
-                    <a:pt x="4739655" y="3347609"/>
-                  </a:lnTo>
-                  <a:lnTo>
-                    <a:pt x="4816288" y="3354925"/>
-                  </a:lnTo>
-                  <a:lnTo>
-                    <a:pt x="4892920" y="3362065"/>
-                  </a:lnTo>
-                  <a:lnTo>
-                    <a:pt x="4969553" y="3369034"/>
-                  </a:lnTo>
-                  <a:lnTo>
-                    <a:pt x="5046185" y="3375836"/>
-                  </a:lnTo>
-                  <a:lnTo>
-                    <a:pt x="5122818" y="3382475"/>
-                  </a:lnTo>
-                  <a:lnTo>
-                    <a:pt x="5199450" y="3388954"/>
-                  </a:lnTo>
-                  <a:lnTo>
-                    <a:pt x="5276083" y="3395278"/>
-                  </a:lnTo>
-                  <a:lnTo>
-                    <a:pt x="5352716" y="3401451"/>
-                  </a:lnTo>
-                  <a:lnTo>
-                    <a:pt x="5429348" y="3407475"/>
+                    <a:pt x="65070" y="221036"/>
+                  </a:lnTo>
+                  <a:lnTo>
+                    <a:pt x="141702" y="462114"/>
+                  </a:lnTo>
+                  <a:lnTo>
+                    <a:pt x="218335" y="685380"/>
+                  </a:lnTo>
+                  <a:lnTo>
+                    <a:pt x="294967" y="892148"/>
+                  </a:lnTo>
+                  <a:lnTo>
+                    <a:pt x="371600" y="1083639"/>
+                  </a:lnTo>
+                  <a:lnTo>
+                    <a:pt x="448232" y="1260981"/>
+                  </a:lnTo>
+                  <a:lnTo>
+                    <a:pt x="524865" y="1425219"/>
+                  </a:lnTo>
+                  <a:lnTo>
+                    <a:pt x="601498" y="1577321"/>
+                  </a:lnTo>
+                  <a:lnTo>
+                    <a:pt x="678130" y="1718185"/>
+                  </a:lnTo>
+                  <a:lnTo>
+                    <a:pt x="754763" y="1848641"/>
+                  </a:lnTo>
+                  <a:lnTo>
+                    <a:pt x="831395" y="1969457"/>
+                  </a:lnTo>
+                  <a:lnTo>
+                    <a:pt x="908028" y="2081346"/>
+                  </a:lnTo>
+                  <a:lnTo>
+                    <a:pt x="984660" y="2184968"/>
+                  </a:lnTo>
+                  <a:lnTo>
+                    <a:pt x="1061293" y="2280934"/>
+                  </a:lnTo>
+                  <a:lnTo>
+                    <a:pt x="1137925" y="2369808"/>
+                  </a:lnTo>
+                  <a:lnTo>
+                    <a:pt x="1214558" y="2452116"/>
+                  </a:lnTo>
+                  <a:lnTo>
+                    <a:pt x="1291190" y="2528342"/>
+                  </a:lnTo>
+                  <a:lnTo>
+                    <a:pt x="1367823" y="2598936"/>
+                  </a:lnTo>
+                  <a:lnTo>
+                    <a:pt x="1444456" y="2657468"/>
+                  </a:lnTo>
+                  <a:lnTo>
+                    <a:pt x="1521088" y="2677285"/>
+                  </a:lnTo>
+                  <a:lnTo>
+                    <a:pt x="1597721" y="2696627"/>
+                  </a:lnTo>
+                  <a:lnTo>
+                    <a:pt x="1674353" y="2715505"/>
+                  </a:lnTo>
+                  <a:lnTo>
+                    <a:pt x="1750986" y="2733930"/>
+                  </a:lnTo>
+                  <a:lnTo>
+                    <a:pt x="1827618" y="2751913"/>
+                  </a:lnTo>
+                  <a:lnTo>
+                    <a:pt x="1904251" y="2769464"/>
+                  </a:lnTo>
+                  <a:lnTo>
+                    <a:pt x="1980883" y="2786595"/>
+                  </a:lnTo>
+                  <a:lnTo>
+                    <a:pt x="2057516" y="2803315"/>
+                  </a:lnTo>
+                  <a:lnTo>
+                    <a:pt x="2134148" y="2819634"/>
+                  </a:lnTo>
+                  <a:lnTo>
+                    <a:pt x="2210781" y="2835562"/>
+                  </a:lnTo>
+                  <a:lnTo>
+                    <a:pt x="2287414" y="2851107"/>
+                  </a:lnTo>
+                  <a:lnTo>
+                    <a:pt x="2364046" y="2866280"/>
+                  </a:lnTo>
+                  <a:lnTo>
+                    <a:pt x="2440679" y="2881089"/>
+                  </a:lnTo>
+                  <a:lnTo>
+                    <a:pt x="2517311" y="2895543"/>
+                  </a:lnTo>
+                  <a:lnTo>
+                    <a:pt x="2593944" y="2909650"/>
+                  </a:lnTo>
+                  <a:lnTo>
+                    <a:pt x="2670576" y="2923419"/>
+                  </a:lnTo>
+                  <a:lnTo>
+                    <a:pt x="2747209" y="2936857"/>
+                  </a:lnTo>
+                  <a:lnTo>
+                    <a:pt x="2823841" y="2949973"/>
+                  </a:lnTo>
+                  <a:lnTo>
+                    <a:pt x="2900474" y="2962775"/>
+                  </a:lnTo>
+                  <a:lnTo>
+                    <a:pt x="2977107" y="2975269"/>
+                  </a:lnTo>
+                  <a:lnTo>
+                    <a:pt x="3053739" y="2987464"/>
+                  </a:lnTo>
+                  <a:lnTo>
+                    <a:pt x="3130372" y="2999367"/>
+                  </a:lnTo>
+                  <a:lnTo>
+                    <a:pt x="3207004" y="3010984"/>
+                  </a:lnTo>
+                  <a:lnTo>
+                    <a:pt x="3283637" y="3022322"/>
+                  </a:lnTo>
+                  <a:lnTo>
+                    <a:pt x="3360269" y="3033389"/>
+                  </a:lnTo>
+                  <a:lnTo>
+                    <a:pt x="3436902" y="3044190"/>
+                  </a:lnTo>
+                  <a:lnTo>
+                    <a:pt x="3513534" y="3054732"/>
+                  </a:lnTo>
+                  <a:lnTo>
+                    <a:pt x="3590167" y="3065021"/>
+                  </a:lnTo>
+                  <a:lnTo>
+                    <a:pt x="3666799" y="3075063"/>
+                  </a:lnTo>
+                  <a:lnTo>
+                    <a:pt x="3743432" y="3084865"/>
+                  </a:lnTo>
+                  <a:lnTo>
+                    <a:pt x="3820065" y="3094432"/>
+                  </a:lnTo>
+                  <a:lnTo>
+                    <a:pt x="3896697" y="3103769"/>
+                  </a:lnTo>
+                  <a:lnTo>
+                    <a:pt x="3973330" y="3112882"/>
+                  </a:lnTo>
+                  <a:lnTo>
+                    <a:pt x="4049962" y="3121776"/>
+                  </a:lnTo>
+                  <a:lnTo>
+                    <a:pt x="4126595" y="3130457"/>
+                  </a:lnTo>
+                  <a:lnTo>
+                    <a:pt x="4203227" y="3138931"/>
+                  </a:lnTo>
+                  <a:lnTo>
+                    <a:pt x="4279860" y="3147200"/>
+                  </a:lnTo>
+                  <a:lnTo>
+                    <a:pt x="4356492" y="3155272"/>
+                  </a:lnTo>
+                  <a:lnTo>
+                    <a:pt x="4433125" y="3163150"/>
+                  </a:lnTo>
+                  <a:lnTo>
+                    <a:pt x="4509758" y="3170839"/>
+                  </a:lnTo>
+                  <a:lnTo>
+                    <a:pt x="4586390" y="3178343"/>
+                  </a:lnTo>
+                  <a:lnTo>
+                    <a:pt x="4663023" y="3185668"/>
+                  </a:lnTo>
+                  <a:lnTo>
+                    <a:pt x="4739655" y="3192817"/>
+                  </a:lnTo>
+                  <a:lnTo>
+                    <a:pt x="4816288" y="3199794"/>
+                  </a:lnTo>
+                  <a:lnTo>
+                    <a:pt x="4892920" y="3206604"/>
+                  </a:lnTo>
+                  <a:lnTo>
+                    <a:pt x="4969553" y="3213251"/>
+                  </a:lnTo>
+                  <a:lnTo>
+                    <a:pt x="5046185" y="3219738"/>
+                  </a:lnTo>
+                  <a:lnTo>
+                    <a:pt x="5122818" y="3226070"/>
+                  </a:lnTo>
+                  <a:lnTo>
+                    <a:pt x="5199450" y="3232250"/>
+                  </a:lnTo>
+                  <a:lnTo>
+                    <a:pt x="5276083" y="3238282"/>
+                  </a:lnTo>
+                  <a:lnTo>
+                    <a:pt x="5352716" y="3244169"/>
+                  </a:lnTo>
+                  <a:lnTo>
+                    <a:pt x="5429348" y="3249915"/>
                   </a:lnTo>
                 </a:path>
               </a:pathLst>
@@ -3784,303 +3784,303 @@
           </p:nvSpPr>
           <p:spPr>
             <a:xfrm>
-              <a:off x="817517" y="2990195"/>
-              <a:ext cx="7403783" cy="2543142"/>
+              <a:off x="817517" y="3116566"/>
+              <a:ext cx="7403783" cy="2425548"/>
             </a:xfrm>
             <a:custGeom>
               <a:avLst/>
               <a:pathLst>
-                <a:path w="7403783" h="2543142">
+                <a:path w="7403783" h="2425548">
                   <a:moveTo>
-                    <a:pt x="7403783" y="2543142"/>
+                    <a:pt x="7403783" y="2425548"/>
                   </a:moveTo>
                   <a:lnTo>
-                    <a:pt x="7327150" y="2541876"/>
-                  </a:lnTo>
-                  <a:lnTo>
-                    <a:pt x="7250518" y="2540509"/>
-                  </a:lnTo>
-                  <a:lnTo>
-                    <a:pt x="7173885" y="2539032"/>
-                  </a:lnTo>
-                  <a:lnTo>
-                    <a:pt x="7097253" y="2537438"/>
-                  </a:lnTo>
-                  <a:lnTo>
-                    <a:pt x="7020620" y="2535717"/>
-                  </a:lnTo>
-                  <a:lnTo>
-                    <a:pt x="6943987" y="2533859"/>
-                  </a:lnTo>
-                  <a:lnTo>
-                    <a:pt x="6867355" y="2531852"/>
-                  </a:lnTo>
-                  <a:lnTo>
-                    <a:pt x="6790722" y="2529685"/>
-                  </a:lnTo>
-                  <a:lnTo>
-                    <a:pt x="6714090" y="2527346"/>
-                  </a:lnTo>
-                  <a:lnTo>
-                    <a:pt x="6637457" y="2524819"/>
-                  </a:lnTo>
-                  <a:lnTo>
-                    <a:pt x="6560825" y="2522091"/>
-                  </a:lnTo>
-                  <a:lnTo>
-                    <a:pt x="6484192" y="2519146"/>
-                  </a:lnTo>
-                  <a:lnTo>
-                    <a:pt x="6407560" y="2515965"/>
-                  </a:lnTo>
-                  <a:lnTo>
-                    <a:pt x="6330927" y="2512531"/>
-                  </a:lnTo>
-                  <a:lnTo>
-                    <a:pt x="6254294" y="2508822"/>
-                  </a:lnTo>
-                  <a:lnTo>
-                    <a:pt x="6177662" y="2504818"/>
-                  </a:lnTo>
-                  <a:lnTo>
-                    <a:pt x="6101029" y="2500494"/>
-                  </a:lnTo>
-                  <a:lnTo>
-                    <a:pt x="6024397" y="2495825"/>
-                  </a:lnTo>
-                  <a:lnTo>
-                    <a:pt x="5947764" y="2490784"/>
-                  </a:lnTo>
-                  <a:lnTo>
-                    <a:pt x="5871132" y="2485341"/>
-                  </a:lnTo>
-                  <a:lnTo>
-                    <a:pt x="5794499" y="2479463"/>
-                  </a:lnTo>
-                  <a:lnTo>
-                    <a:pt x="5717867" y="2473116"/>
-                  </a:lnTo>
-                  <a:lnTo>
-                    <a:pt x="5641234" y="2466263"/>
-                  </a:lnTo>
-                  <a:lnTo>
-                    <a:pt x="5564602" y="2458864"/>
-                  </a:lnTo>
-                  <a:lnTo>
-                    <a:pt x="5487969" y="2450874"/>
-                  </a:lnTo>
-                  <a:lnTo>
-                    <a:pt x="5411336" y="2442246"/>
-                  </a:lnTo>
-                  <a:lnTo>
-                    <a:pt x="5334704" y="2432930"/>
-                  </a:lnTo>
-                  <a:lnTo>
-                    <a:pt x="5258071" y="2422871"/>
-                  </a:lnTo>
-                  <a:lnTo>
-                    <a:pt x="5181439" y="2412009"/>
-                  </a:lnTo>
-                  <a:lnTo>
-                    <a:pt x="5104806" y="2400280"/>
-                  </a:lnTo>
-                  <a:lnTo>
-                    <a:pt x="5028174" y="2387616"/>
-                  </a:lnTo>
-                  <a:lnTo>
-                    <a:pt x="4951541" y="2373941"/>
-                  </a:lnTo>
-                  <a:lnTo>
-                    <a:pt x="4874909" y="2359176"/>
-                  </a:lnTo>
-                  <a:lnTo>
-                    <a:pt x="4798276" y="2343232"/>
-                  </a:lnTo>
-                  <a:lnTo>
-                    <a:pt x="4721644" y="2326016"/>
-                  </a:lnTo>
-                  <a:lnTo>
-                    <a:pt x="4645011" y="2307427"/>
-                  </a:lnTo>
-                  <a:lnTo>
-                    <a:pt x="4568378" y="2287355"/>
-                  </a:lnTo>
-                  <a:lnTo>
-                    <a:pt x="4491746" y="2265681"/>
-                  </a:lnTo>
-                  <a:lnTo>
-                    <a:pt x="4415113" y="2242278"/>
-                  </a:lnTo>
-                  <a:lnTo>
-                    <a:pt x="4338481" y="2217008"/>
-                  </a:lnTo>
-                  <a:lnTo>
-                    <a:pt x="4261848" y="2189721"/>
-                  </a:lnTo>
-                  <a:lnTo>
-                    <a:pt x="4185216" y="2160258"/>
-                  </a:lnTo>
-                  <a:lnTo>
-                    <a:pt x="4108583" y="2128443"/>
-                  </a:lnTo>
-                  <a:lnTo>
-                    <a:pt x="4031951" y="2094091"/>
-                  </a:lnTo>
-                  <a:lnTo>
-                    <a:pt x="3955318" y="2056998"/>
-                  </a:lnTo>
-                  <a:lnTo>
-                    <a:pt x="3878685" y="2016945"/>
-                  </a:lnTo>
-                  <a:lnTo>
-                    <a:pt x="3802053" y="1973697"/>
-                  </a:lnTo>
-                  <a:lnTo>
-                    <a:pt x="3725420" y="1926998"/>
-                  </a:lnTo>
-                  <a:lnTo>
-                    <a:pt x="3648788" y="1876573"/>
-                  </a:lnTo>
-                  <a:lnTo>
-                    <a:pt x="3572155" y="1822125"/>
-                  </a:lnTo>
-                  <a:lnTo>
-                    <a:pt x="3495523" y="1763334"/>
-                  </a:lnTo>
-                  <a:lnTo>
-                    <a:pt x="3418890" y="1699851"/>
-                  </a:lnTo>
-                  <a:lnTo>
-                    <a:pt x="3342258" y="1671386"/>
-                  </a:lnTo>
-                  <a:lnTo>
-                    <a:pt x="3265625" y="1649574"/>
-                  </a:lnTo>
-                  <a:lnTo>
-                    <a:pt x="3188993" y="1627227"/>
-                  </a:lnTo>
-                  <a:lnTo>
-                    <a:pt x="3112360" y="1604331"/>
-                  </a:lnTo>
-                  <a:lnTo>
-                    <a:pt x="3035727" y="1580872"/>
-                  </a:lnTo>
-                  <a:lnTo>
-                    <a:pt x="2959095" y="1556836"/>
-                  </a:lnTo>
-                  <a:lnTo>
-                    <a:pt x="2882462" y="1532210"/>
-                  </a:lnTo>
-                  <a:lnTo>
-                    <a:pt x="2805830" y="1506979"/>
-                  </a:lnTo>
-                  <a:lnTo>
-                    <a:pt x="2729197" y="1481128"/>
-                  </a:lnTo>
-                  <a:lnTo>
-                    <a:pt x="2652565" y="1454641"/>
-                  </a:lnTo>
-                  <a:lnTo>
-                    <a:pt x="2575932" y="1427504"/>
-                  </a:lnTo>
-                  <a:lnTo>
-                    <a:pt x="2499300" y="1399700"/>
-                  </a:lnTo>
-                  <a:lnTo>
-                    <a:pt x="2422667" y="1371213"/>
-                  </a:lnTo>
-                  <a:lnTo>
-                    <a:pt x="2346034" y="1342025"/>
-                  </a:lnTo>
-                  <a:lnTo>
-                    <a:pt x="2269402" y="1312121"/>
-                  </a:lnTo>
-                  <a:lnTo>
-                    <a:pt x="2192769" y="1281481"/>
-                  </a:lnTo>
-                  <a:lnTo>
-                    <a:pt x="2116137" y="1250089"/>
-                  </a:lnTo>
-                  <a:lnTo>
-                    <a:pt x="2039504" y="1217926"/>
-                  </a:lnTo>
-                  <a:lnTo>
-                    <a:pt x="1962872" y="1184972"/>
-                  </a:lnTo>
-                  <a:lnTo>
-                    <a:pt x="1886239" y="1151208"/>
-                  </a:lnTo>
-                  <a:lnTo>
-                    <a:pt x="1809607" y="1116614"/>
-                  </a:lnTo>
-                  <a:lnTo>
-                    <a:pt x="1732974" y="1081171"/>
-                  </a:lnTo>
-                  <a:lnTo>
-                    <a:pt x="1656342" y="1044857"/>
-                  </a:lnTo>
-                  <a:lnTo>
-                    <a:pt x="1579709" y="1007650"/>
-                  </a:lnTo>
-                  <a:lnTo>
-                    <a:pt x="1503076" y="969529"/>
-                  </a:lnTo>
-                  <a:lnTo>
-                    <a:pt x="1426444" y="930471"/>
-                  </a:lnTo>
-                  <a:lnTo>
-                    <a:pt x="1349811" y="890454"/>
-                  </a:lnTo>
-                  <a:lnTo>
-                    <a:pt x="1273179" y="849453"/>
-                  </a:lnTo>
-                  <a:lnTo>
-                    <a:pt x="1196546" y="807444"/>
-                  </a:lnTo>
-                  <a:lnTo>
-                    <a:pt x="1119914" y="764404"/>
-                  </a:lnTo>
-                  <a:lnTo>
-                    <a:pt x="1043281" y="720306"/>
-                  </a:lnTo>
-                  <a:lnTo>
-                    <a:pt x="966649" y="675124"/>
-                  </a:lnTo>
-                  <a:lnTo>
-                    <a:pt x="890016" y="628832"/>
-                  </a:lnTo>
-                  <a:lnTo>
-                    <a:pt x="813384" y="581402"/>
-                  </a:lnTo>
-                  <a:lnTo>
-                    <a:pt x="736751" y="532807"/>
-                  </a:lnTo>
-                  <a:lnTo>
-                    <a:pt x="660118" y="483018"/>
-                  </a:lnTo>
-                  <a:lnTo>
-                    <a:pt x="583486" y="432005"/>
-                  </a:lnTo>
-                  <a:lnTo>
-                    <a:pt x="506853" y="379739"/>
-                  </a:lnTo>
-                  <a:lnTo>
-                    <a:pt x="430221" y="326189"/>
-                  </a:lnTo>
-                  <a:lnTo>
-                    <a:pt x="353588" y="271323"/>
-                  </a:lnTo>
-                  <a:lnTo>
-                    <a:pt x="276956" y="215108"/>
-                  </a:lnTo>
-                  <a:lnTo>
-                    <a:pt x="200323" y="157512"/>
-                  </a:lnTo>
-                  <a:lnTo>
-                    <a:pt x="123691" y="98501"/>
-                  </a:lnTo>
-                  <a:lnTo>
-                    <a:pt x="47058" y="38040"/>
+                    <a:pt x="7327150" y="2424340"/>
+                  </a:lnTo>
+                  <a:lnTo>
+                    <a:pt x="7250518" y="2423036"/>
+                  </a:lnTo>
+                  <a:lnTo>
+                    <a:pt x="7173885" y="2421628"/>
+                  </a:lnTo>
+                  <a:lnTo>
+                    <a:pt x="7097253" y="2420108"/>
+                  </a:lnTo>
+                  <a:lnTo>
+                    <a:pt x="7020620" y="2418467"/>
+                  </a:lnTo>
+                  <a:lnTo>
+                    <a:pt x="6943987" y="2416694"/>
+                  </a:lnTo>
+                  <a:lnTo>
+                    <a:pt x="6867355" y="2414780"/>
+                  </a:lnTo>
+                  <a:lnTo>
+                    <a:pt x="6790722" y="2412714"/>
+                  </a:lnTo>
+                  <a:lnTo>
+                    <a:pt x="6714090" y="2410482"/>
+                  </a:lnTo>
+                  <a:lnTo>
+                    <a:pt x="6637457" y="2408072"/>
+                  </a:lnTo>
+                  <a:lnTo>
+                    <a:pt x="6560825" y="2405471"/>
+                  </a:lnTo>
+                  <a:lnTo>
+                    <a:pt x="6484192" y="2402661"/>
+                  </a:lnTo>
+                  <a:lnTo>
+                    <a:pt x="6407560" y="2399628"/>
+                  </a:lnTo>
+                  <a:lnTo>
+                    <a:pt x="6330927" y="2396352"/>
+                  </a:lnTo>
+                  <a:lnTo>
+                    <a:pt x="6254294" y="2392815"/>
+                  </a:lnTo>
+                  <a:lnTo>
+                    <a:pt x="6177662" y="2388996"/>
+                  </a:lnTo>
+                  <a:lnTo>
+                    <a:pt x="6101029" y="2384872"/>
+                  </a:lnTo>
+                  <a:lnTo>
+                    <a:pt x="6024397" y="2380419"/>
+                  </a:lnTo>
+                  <a:lnTo>
+                    <a:pt x="5947764" y="2375611"/>
+                  </a:lnTo>
+                  <a:lnTo>
+                    <a:pt x="5871132" y="2370420"/>
+                  </a:lnTo>
+                  <a:lnTo>
+                    <a:pt x="5794499" y="2364814"/>
+                  </a:lnTo>
+                  <a:lnTo>
+                    <a:pt x="5717867" y="2358760"/>
+                  </a:lnTo>
+                  <a:lnTo>
+                    <a:pt x="5641234" y="2352224"/>
+                  </a:lnTo>
+                  <a:lnTo>
+                    <a:pt x="5564602" y="2345167"/>
+                  </a:lnTo>
+                  <a:lnTo>
+                    <a:pt x="5487969" y="2337546"/>
+                  </a:lnTo>
+                  <a:lnTo>
+                    <a:pt x="5411336" y="2329317"/>
+                  </a:lnTo>
+                  <a:lnTo>
+                    <a:pt x="5334704" y="2320432"/>
+                  </a:lnTo>
+                  <a:lnTo>
+                    <a:pt x="5258071" y="2310838"/>
+                  </a:lnTo>
+                  <a:lnTo>
+                    <a:pt x="5181439" y="2300478"/>
+                  </a:lnTo>
+                  <a:lnTo>
+                    <a:pt x="5104806" y="2289292"/>
+                  </a:lnTo>
+                  <a:lnTo>
+                    <a:pt x="5028174" y="2277214"/>
+                  </a:lnTo>
+                  <a:lnTo>
+                    <a:pt x="4951541" y="2264171"/>
+                  </a:lnTo>
+                  <a:lnTo>
+                    <a:pt x="4874909" y="2250088"/>
+                  </a:lnTo>
+                  <a:lnTo>
+                    <a:pt x="4798276" y="2234882"/>
+                  </a:lnTo>
+                  <a:lnTo>
+                    <a:pt x="4721644" y="2218462"/>
+                  </a:lnTo>
+                  <a:lnTo>
+                    <a:pt x="4645011" y="2200733"/>
+                  </a:lnTo>
+                  <a:lnTo>
+                    <a:pt x="4568378" y="2181588"/>
+                  </a:lnTo>
+                  <a:lnTo>
+                    <a:pt x="4491746" y="2160917"/>
+                  </a:lnTo>
+                  <a:lnTo>
+                    <a:pt x="4415113" y="2138596"/>
+                  </a:lnTo>
+                  <a:lnTo>
+                    <a:pt x="4338481" y="2114494"/>
+                  </a:lnTo>
+                  <a:lnTo>
+                    <a:pt x="4261848" y="2088469"/>
+                  </a:lnTo>
+                  <a:lnTo>
+                    <a:pt x="4185216" y="2060368"/>
+                  </a:lnTo>
+                  <a:lnTo>
+                    <a:pt x="4108583" y="2030025"/>
+                  </a:lnTo>
+                  <a:lnTo>
+                    <a:pt x="4031951" y="1997261"/>
+                  </a:lnTo>
+                  <a:lnTo>
+                    <a:pt x="3955318" y="1961883"/>
+                  </a:lnTo>
+                  <a:lnTo>
+                    <a:pt x="3878685" y="1923682"/>
+                  </a:lnTo>
+                  <a:lnTo>
+                    <a:pt x="3802053" y="1882434"/>
+                  </a:lnTo>
+                  <a:lnTo>
+                    <a:pt x="3725420" y="1837894"/>
+                  </a:lnTo>
+                  <a:lnTo>
+                    <a:pt x="3648788" y="1789801"/>
+                  </a:lnTo>
+                  <a:lnTo>
+                    <a:pt x="3572155" y="1737871"/>
+                  </a:lnTo>
+                  <a:lnTo>
+                    <a:pt x="3495523" y="1681798"/>
+                  </a:lnTo>
+                  <a:lnTo>
+                    <a:pt x="3418890" y="1621251"/>
+                  </a:lnTo>
+                  <a:lnTo>
+                    <a:pt x="3342258" y="1594101"/>
+                  </a:lnTo>
+                  <a:lnTo>
+                    <a:pt x="3265625" y="1573299"/>
+                  </a:lnTo>
+                  <a:lnTo>
+                    <a:pt x="3188993" y="1551985"/>
+                  </a:lnTo>
+                  <a:lnTo>
+                    <a:pt x="3112360" y="1530147"/>
+                  </a:lnTo>
+                  <a:lnTo>
+                    <a:pt x="3035727" y="1507773"/>
+                  </a:lnTo>
+                  <a:lnTo>
+                    <a:pt x="2959095" y="1484849"/>
+                  </a:lnTo>
+                  <a:lnTo>
+                    <a:pt x="2882462" y="1461361"/>
+                  </a:lnTo>
+                  <a:lnTo>
+                    <a:pt x="2805830" y="1437297"/>
+                  </a:lnTo>
+                  <a:lnTo>
+                    <a:pt x="2729197" y="1412641"/>
+                  </a:lnTo>
+                  <a:lnTo>
+                    <a:pt x="2652565" y="1387379"/>
+                  </a:lnTo>
+                  <a:lnTo>
+                    <a:pt x="2575932" y="1361497"/>
+                  </a:lnTo>
+                  <a:lnTo>
+                    <a:pt x="2499300" y="1334978"/>
+                  </a:lnTo>
+                  <a:lnTo>
+                    <a:pt x="2422667" y="1307808"/>
+                  </a:lnTo>
+                  <a:lnTo>
+                    <a:pt x="2346034" y="1279971"/>
+                  </a:lnTo>
+                  <a:lnTo>
+                    <a:pt x="2269402" y="1251449"/>
+                  </a:lnTo>
+                  <a:lnTo>
+                    <a:pt x="2192769" y="1222226"/>
+                  </a:lnTo>
+                  <a:lnTo>
+                    <a:pt x="2116137" y="1192286"/>
+                  </a:lnTo>
+                  <a:lnTo>
+                    <a:pt x="2039504" y="1161609"/>
+                  </a:lnTo>
+                  <a:lnTo>
+                    <a:pt x="1962872" y="1130179"/>
+                  </a:lnTo>
+                  <a:lnTo>
+                    <a:pt x="1886239" y="1097976"/>
+                  </a:lnTo>
+                  <a:lnTo>
+                    <a:pt x="1809607" y="1064983"/>
+                  </a:lnTo>
+                  <a:lnTo>
+                    <a:pt x="1732974" y="1031178"/>
+                  </a:lnTo>
+                  <a:lnTo>
+                    <a:pt x="1656342" y="996543"/>
+                  </a:lnTo>
+                  <a:lnTo>
+                    <a:pt x="1579709" y="961056"/>
+                  </a:lnTo>
+                  <a:lnTo>
+                    <a:pt x="1503076" y="924698"/>
+                  </a:lnTo>
+                  <a:lnTo>
+                    <a:pt x="1426444" y="887446"/>
+                  </a:lnTo>
+                  <a:lnTo>
+                    <a:pt x="1349811" y="849279"/>
+                  </a:lnTo>
+                  <a:lnTo>
+                    <a:pt x="1273179" y="810174"/>
+                  </a:lnTo>
+                  <a:lnTo>
+                    <a:pt x="1196546" y="770108"/>
+                  </a:lnTo>
+                  <a:lnTo>
+                    <a:pt x="1119914" y="729058"/>
+                  </a:lnTo>
+                  <a:lnTo>
+                    <a:pt x="1043281" y="686999"/>
+                  </a:lnTo>
+                  <a:lnTo>
+                    <a:pt x="966649" y="643906"/>
+                  </a:lnTo>
+                  <a:lnTo>
+                    <a:pt x="890016" y="599755"/>
+                  </a:lnTo>
+                  <a:lnTo>
+                    <a:pt x="813384" y="554518"/>
+                  </a:lnTo>
+                  <a:lnTo>
+                    <a:pt x="736751" y="508170"/>
+                  </a:lnTo>
+                  <a:lnTo>
+                    <a:pt x="660118" y="460683"/>
+                  </a:lnTo>
+                  <a:lnTo>
+                    <a:pt x="583486" y="412030"/>
+                  </a:lnTo>
+                  <a:lnTo>
+                    <a:pt x="506853" y="362180"/>
+                  </a:lnTo>
+                  <a:lnTo>
+                    <a:pt x="430221" y="311106"/>
+                  </a:lnTo>
+                  <a:lnTo>
+                    <a:pt x="353588" y="258777"/>
+                  </a:lnTo>
+                  <a:lnTo>
+                    <a:pt x="276956" y="205161"/>
+                  </a:lnTo>
+                  <a:lnTo>
+                    <a:pt x="200323" y="150229"/>
+                  </a:lnTo>
+                  <a:lnTo>
+                    <a:pt x="123691" y="93946"/>
+                  </a:lnTo>
+                  <a:lnTo>
+                    <a:pt x="47058" y="36281"/>
                   </a:lnTo>
                   <a:lnTo>
                     <a:pt x="0" y="0"/>
@@ -4103,258 +4103,258 @@
           </p:nvSpPr>
           <p:spPr>
             <a:xfrm>
-              <a:off x="2047823" y="1896563"/>
-              <a:ext cx="6173477" cy="3590269"/>
+              <a:off x="2047823" y="2073503"/>
+              <a:ext cx="6173477" cy="3424256"/>
             </a:xfrm>
             <a:custGeom>
               <a:avLst/>
               <a:pathLst>
-                <a:path w="6173477" h="3590269">
+                <a:path w="6173477" h="3424256">
                   <a:moveTo>
                     <a:pt x="0" y="0"/>
                   </a:moveTo>
                   <a:lnTo>
-                    <a:pt x="42873" y="102905"/>
-                  </a:lnTo>
-                  <a:lnTo>
-                    <a:pt x="119505" y="277777"/>
-                  </a:lnTo>
-                  <a:lnTo>
-                    <a:pt x="196138" y="444035"/>
-                  </a:lnTo>
-                  <a:lnTo>
-                    <a:pt x="272771" y="602103"/>
-                  </a:lnTo>
-                  <a:lnTo>
-                    <a:pt x="349403" y="752383"/>
-                  </a:lnTo>
-                  <a:lnTo>
-                    <a:pt x="426036" y="895260"/>
-                  </a:lnTo>
-                  <a:lnTo>
-                    <a:pt x="502668" y="1031099"/>
-                  </a:lnTo>
-                  <a:lnTo>
-                    <a:pt x="579301" y="1160245"/>
-                  </a:lnTo>
-                  <a:lnTo>
-                    <a:pt x="655933" y="1283030"/>
-                  </a:lnTo>
-                  <a:lnTo>
-                    <a:pt x="732566" y="1399765"/>
-                  </a:lnTo>
-                  <a:lnTo>
-                    <a:pt x="809198" y="1510750"/>
-                  </a:lnTo>
-                  <a:lnTo>
-                    <a:pt x="885831" y="1616267"/>
-                  </a:lnTo>
-                  <a:lnTo>
-                    <a:pt x="962464" y="1716586"/>
-                  </a:lnTo>
-                  <a:lnTo>
-                    <a:pt x="1039096" y="1811963"/>
-                  </a:lnTo>
-                  <a:lnTo>
-                    <a:pt x="1115729" y="1902642"/>
-                  </a:lnTo>
-                  <a:lnTo>
-                    <a:pt x="1192361" y="1988853"/>
-                  </a:lnTo>
-                  <a:lnTo>
-                    <a:pt x="1268994" y="2070817"/>
-                  </a:lnTo>
-                  <a:lnTo>
-                    <a:pt x="1345626" y="2148744"/>
-                  </a:lnTo>
-                  <a:lnTo>
-                    <a:pt x="1422259" y="2222831"/>
-                  </a:lnTo>
-                  <a:lnTo>
-                    <a:pt x="1498891" y="2293269"/>
-                  </a:lnTo>
-                  <a:lnTo>
-                    <a:pt x="1575524" y="2360236"/>
-                  </a:lnTo>
-                  <a:lnTo>
-                    <a:pt x="1652156" y="2423905"/>
-                  </a:lnTo>
-                  <a:lnTo>
-                    <a:pt x="1728789" y="2484437"/>
-                  </a:lnTo>
-                  <a:lnTo>
-                    <a:pt x="1805422" y="2541987"/>
-                  </a:lnTo>
-                  <a:lnTo>
-                    <a:pt x="1882054" y="2596702"/>
-                  </a:lnTo>
-                  <a:lnTo>
-                    <a:pt x="1958687" y="2648721"/>
-                  </a:lnTo>
-                  <a:lnTo>
-                    <a:pt x="2035319" y="2698178"/>
-                  </a:lnTo>
-                  <a:lnTo>
-                    <a:pt x="2111952" y="2745198"/>
-                  </a:lnTo>
-                  <a:lnTo>
-                    <a:pt x="2188584" y="2789902"/>
-                  </a:lnTo>
-                  <a:lnTo>
-                    <a:pt x="2265217" y="2832404"/>
-                  </a:lnTo>
-                  <a:lnTo>
-                    <a:pt x="2341849" y="2872812"/>
-                  </a:lnTo>
-                  <a:lnTo>
-                    <a:pt x="2418482" y="2911229"/>
-                  </a:lnTo>
-                  <a:lnTo>
-                    <a:pt x="2495114" y="2947754"/>
-                  </a:lnTo>
-                  <a:lnTo>
-                    <a:pt x="2571747" y="2982479"/>
-                  </a:lnTo>
-                  <a:lnTo>
-                    <a:pt x="2648380" y="3015494"/>
-                  </a:lnTo>
-                  <a:lnTo>
-                    <a:pt x="2725012" y="3046882"/>
-                  </a:lnTo>
-                  <a:lnTo>
-                    <a:pt x="2801645" y="3076724"/>
-                  </a:lnTo>
-                  <a:lnTo>
-                    <a:pt x="2878277" y="3105096"/>
-                  </a:lnTo>
-                  <a:lnTo>
-                    <a:pt x="2954910" y="3132070"/>
-                  </a:lnTo>
-                  <a:lnTo>
-                    <a:pt x="3031542" y="3157715"/>
-                  </a:lnTo>
-                  <a:lnTo>
-                    <a:pt x="3108175" y="3182097"/>
-                  </a:lnTo>
-                  <a:lnTo>
-                    <a:pt x="3184807" y="3205278"/>
-                  </a:lnTo>
-                  <a:lnTo>
-                    <a:pt x="3261440" y="3227317"/>
-                  </a:lnTo>
-                  <a:lnTo>
-                    <a:pt x="3338073" y="3248270"/>
-                  </a:lnTo>
-                  <a:lnTo>
-                    <a:pt x="3414705" y="3268191"/>
-                  </a:lnTo>
-                  <a:lnTo>
-                    <a:pt x="3491338" y="3287130"/>
-                  </a:lnTo>
-                  <a:lnTo>
-                    <a:pt x="3567970" y="3305137"/>
-                  </a:lnTo>
-                  <a:lnTo>
-                    <a:pt x="3644603" y="3322256"/>
-                  </a:lnTo>
-                  <a:lnTo>
-                    <a:pt x="3721235" y="3338532"/>
-                  </a:lnTo>
-                  <a:lnTo>
-                    <a:pt x="3797868" y="3354006"/>
-                  </a:lnTo>
-                  <a:lnTo>
-                    <a:pt x="3874500" y="3368718"/>
-                  </a:lnTo>
-                  <a:lnTo>
-                    <a:pt x="3951133" y="3382705"/>
-                  </a:lnTo>
-                  <a:lnTo>
-                    <a:pt x="4027765" y="3396004"/>
-                  </a:lnTo>
-                  <a:lnTo>
-                    <a:pt x="4104398" y="3408647"/>
-                  </a:lnTo>
-                  <a:lnTo>
-                    <a:pt x="4181031" y="3420667"/>
-                  </a:lnTo>
-                  <a:lnTo>
-                    <a:pt x="4257663" y="3432095"/>
-                  </a:lnTo>
-                  <a:lnTo>
-                    <a:pt x="4334296" y="3442960"/>
-                  </a:lnTo>
-                  <a:lnTo>
-                    <a:pt x="4410928" y="3453289"/>
-                  </a:lnTo>
-                  <a:lnTo>
-                    <a:pt x="4487561" y="3463110"/>
-                  </a:lnTo>
-                  <a:lnTo>
-                    <a:pt x="4564193" y="3472447"/>
-                  </a:lnTo>
-                  <a:lnTo>
-                    <a:pt x="4640826" y="3481324"/>
-                  </a:lnTo>
-                  <a:lnTo>
-                    <a:pt x="4717458" y="3489764"/>
-                  </a:lnTo>
-                  <a:lnTo>
-                    <a:pt x="4794091" y="3497788"/>
-                  </a:lnTo>
-                  <a:lnTo>
-                    <a:pt x="4870724" y="3505417"/>
-                  </a:lnTo>
-                  <a:lnTo>
-                    <a:pt x="4947356" y="3512670"/>
-                  </a:lnTo>
-                  <a:lnTo>
-                    <a:pt x="5023989" y="3519565"/>
-                  </a:lnTo>
-                  <a:lnTo>
-                    <a:pt x="5100621" y="3526121"/>
-                  </a:lnTo>
-                  <a:lnTo>
-                    <a:pt x="5177254" y="3532354"/>
-                  </a:lnTo>
-                  <a:lnTo>
-                    <a:pt x="5253886" y="3538280"/>
-                  </a:lnTo>
-                  <a:lnTo>
-                    <a:pt x="5330519" y="3543914"/>
-                  </a:lnTo>
-                  <a:lnTo>
-                    <a:pt x="5407151" y="3549270"/>
-                  </a:lnTo>
-                  <a:lnTo>
-                    <a:pt x="5483784" y="3554363"/>
-                  </a:lnTo>
-                  <a:lnTo>
-                    <a:pt x="5560416" y="3559205"/>
-                  </a:lnTo>
-                  <a:lnTo>
-                    <a:pt x="5637049" y="3563808"/>
-                  </a:lnTo>
-                  <a:lnTo>
-                    <a:pt x="5713682" y="3568184"/>
-                  </a:lnTo>
-                  <a:lnTo>
-                    <a:pt x="5790314" y="3572345"/>
-                  </a:lnTo>
-                  <a:lnTo>
-                    <a:pt x="5866947" y="3576301"/>
-                  </a:lnTo>
-                  <a:lnTo>
-                    <a:pt x="5943579" y="3580062"/>
-                  </a:lnTo>
-                  <a:lnTo>
-                    <a:pt x="6020212" y="3583637"/>
-                  </a:lnTo>
-                  <a:lnTo>
-                    <a:pt x="6096844" y="3587037"/>
-                  </a:lnTo>
-                  <a:lnTo>
-                    <a:pt x="6173477" y="3590269"/>
+                    <a:pt x="42873" y="98146"/>
+                  </a:lnTo>
+                  <a:lnTo>
+                    <a:pt x="119505" y="264933"/>
+                  </a:lnTo>
+                  <a:lnTo>
+                    <a:pt x="196138" y="423503"/>
+                  </a:lnTo>
+                  <a:lnTo>
+                    <a:pt x="272771" y="574262"/>
+                  </a:lnTo>
+                  <a:lnTo>
+                    <a:pt x="349403" y="717593"/>
+                  </a:lnTo>
+                  <a:lnTo>
+                    <a:pt x="426036" y="853864"/>
+                  </a:lnTo>
+                  <a:lnTo>
+                    <a:pt x="502668" y="983421"/>
+                  </a:lnTo>
+                  <a:lnTo>
+                    <a:pt x="579301" y="1106596"/>
+                  </a:lnTo>
+                  <a:lnTo>
+                    <a:pt x="655933" y="1223703"/>
+                  </a:lnTo>
+                  <a:lnTo>
+                    <a:pt x="732566" y="1335041"/>
+                  </a:lnTo>
+                  <a:lnTo>
+                    <a:pt x="809198" y="1440893"/>
+                  </a:lnTo>
+                  <a:lnTo>
+                    <a:pt x="885831" y="1541532"/>
+                  </a:lnTo>
+                  <a:lnTo>
+                    <a:pt x="962464" y="1637212"/>
+                  </a:lnTo>
+                  <a:lnTo>
+                    <a:pt x="1039096" y="1728179"/>
+                  </a:lnTo>
+                  <a:lnTo>
+                    <a:pt x="1115729" y="1814664"/>
+                  </a:lnTo>
+                  <a:lnTo>
+                    <a:pt x="1192361" y="1896889"/>
+                  </a:lnTo>
+                  <a:lnTo>
+                    <a:pt x="1268994" y="1975063"/>
+                  </a:lnTo>
+                  <a:lnTo>
+                    <a:pt x="1345626" y="2049387"/>
+                  </a:lnTo>
+                  <a:lnTo>
+                    <a:pt x="1422259" y="2120048"/>
+                  </a:lnTo>
+                  <a:lnTo>
+                    <a:pt x="1498891" y="2187229"/>
+                  </a:lnTo>
+                  <a:lnTo>
+                    <a:pt x="1575524" y="2251100"/>
+                  </a:lnTo>
+                  <a:lnTo>
+                    <a:pt x="1652156" y="2311824"/>
+                  </a:lnTo>
+                  <a:lnTo>
+                    <a:pt x="1728789" y="2369557"/>
+                  </a:lnTo>
+                  <a:lnTo>
+                    <a:pt x="1805422" y="2424446"/>
+                  </a:lnTo>
+                  <a:lnTo>
+                    <a:pt x="1882054" y="2476631"/>
+                  </a:lnTo>
+                  <a:lnTo>
+                    <a:pt x="1958687" y="2526245"/>
+                  </a:lnTo>
+                  <a:lnTo>
+                    <a:pt x="2035319" y="2573415"/>
+                  </a:lnTo>
+                  <a:lnTo>
+                    <a:pt x="2111952" y="2618261"/>
+                  </a:lnTo>
+                  <a:lnTo>
+                    <a:pt x="2188584" y="2660898"/>
+                  </a:lnTo>
+                  <a:lnTo>
+                    <a:pt x="2265217" y="2701435"/>
+                  </a:lnTo>
+                  <a:lnTo>
+                    <a:pt x="2341849" y="2739974"/>
+                  </a:lnTo>
+                  <a:lnTo>
+                    <a:pt x="2418482" y="2776615"/>
+                  </a:lnTo>
+                  <a:lnTo>
+                    <a:pt x="2495114" y="2811451"/>
+                  </a:lnTo>
+                  <a:lnTo>
+                    <a:pt x="2571747" y="2844570"/>
+                  </a:lnTo>
+                  <a:lnTo>
+                    <a:pt x="2648380" y="2876059"/>
+                  </a:lnTo>
+                  <a:lnTo>
+                    <a:pt x="2725012" y="2905995"/>
+                  </a:lnTo>
+                  <a:lnTo>
+                    <a:pt x="2801645" y="2934457"/>
+                  </a:lnTo>
+                  <a:lnTo>
+                    <a:pt x="2878277" y="2961517"/>
+                  </a:lnTo>
+                  <a:lnTo>
+                    <a:pt x="2954910" y="2987244"/>
+                  </a:lnTo>
+                  <a:lnTo>
+                    <a:pt x="3031542" y="3011704"/>
+                  </a:lnTo>
+                  <a:lnTo>
+                    <a:pt x="3108175" y="3034958"/>
+                  </a:lnTo>
+                  <a:lnTo>
+                    <a:pt x="3184807" y="3057067"/>
+                  </a:lnTo>
+                  <a:lnTo>
+                    <a:pt x="3261440" y="3078087"/>
+                  </a:lnTo>
+                  <a:lnTo>
+                    <a:pt x="3338073" y="3098071"/>
+                  </a:lnTo>
+                  <a:lnTo>
+                    <a:pt x="3414705" y="3117071"/>
+                  </a:lnTo>
+                  <a:lnTo>
+                    <a:pt x="3491338" y="3135135"/>
+                  </a:lnTo>
+                  <a:lnTo>
+                    <a:pt x="3567970" y="3152308"/>
+                  </a:lnTo>
+                  <a:lnTo>
+                    <a:pt x="3644603" y="3168636"/>
+                  </a:lnTo>
+                  <a:lnTo>
+                    <a:pt x="3721235" y="3184160"/>
+                  </a:lnTo>
+                  <a:lnTo>
+                    <a:pt x="3797868" y="3198918"/>
+                  </a:lnTo>
+                  <a:lnTo>
+                    <a:pt x="3874500" y="3212950"/>
+                  </a:lnTo>
+                  <a:lnTo>
+                    <a:pt x="3951133" y="3226290"/>
+                  </a:lnTo>
+                  <a:lnTo>
+                    <a:pt x="4027765" y="3238974"/>
+                  </a:lnTo>
+                  <a:lnTo>
+                    <a:pt x="4104398" y="3251032"/>
+                  </a:lnTo>
+                  <a:lnTo>
+                    <a:pt x="4181031" y="3262496"/>
+                  </a:lnTo>
+                  <a:lnTo>
+                    <a:pt x="4257663" y="3273396"/>
+                  </a:lnTo>
+                  <a:lnTo>
+                    <a:pt x="4334296" y="3283758"/>
+                  </a:lnTo>
+                  <a:lnTo>
+                    <a:pt x="4410928" y="3293611"/>
+                  </a:lnTo>
+                  <a:lnTo>
+                    <a:pt x="4487561" y="3302977"/>
+                  </a:lnTo>
+                  <a:lnTo>
+                    <a:pt x="4564193" y="3311883"/>
+                  </a:lnTo>
+                  <a:lnTo>
+                    <a:pt x="4640826" y="3320349"/>
+                  </a:lnTo>
+                  <a:lnTo>
+                    <a:pt x="4717458" y="3328399"/>
+                  </a:lnTo>
+                  <a:lnTo>
+                    <a:pt x="4794091" y="3336052"/>
+                  </a:lnTo>
+                  <a:lnTo>
+                    <a:pt x="4870724" y="3343328"/>
+                  </a:lnTo>
+                  <a:lnTo>
+                    <a:pt x="4947356" y="3350245"/>
+                  </a:lnTo>
+                  <a:lnTo>
+                    <a:pt x="5023989" y="3356822"/>
+                  </a:lnTo>
+                  <a:lnTo>
+                    <a:pt x="5100621" y="3363075"/>
+                  </a:lnTo>
+                  <a:lnTo>
+                    <a:pt x="5177254" y="3369019"/>
+                  </a:lnTo>
+                  <a:lnTo>
+                    <a:pt x="5253886" y="3374671"/>
+                  </a:lnTo>
+                  <a:lnTo>
+                    <a:pt x="5330519" y="3380045"/>
+                  </a:lnTo>
+                  <a:lnTo>
+                    <a:pt x="5407151" y="3385153"/>
+                  </a:lnTo>
+                  <a:lnTo>
+                    <a:pt x="5483784" y="3390011"/>
+                  </a:lnTo>
+                  <a:lnTo>
+                    <a:pt x="5560416" y="3394628"/>
+                  </a:lnTo>
+                  <a:lnTo>
+                    <a:pt x="5637049" y="3399019"/>
+                  </a:lnTo>
+                  <a:lnTo>
+                    <a:pt x="5713682" y="3403193"/>
+                  </a:lnTo>
+                  <a:lnTo>
+                    <a:pt x="5790314" y="3407161"/>
+                  </a:lnTo>
+                  <a:lnTo>
+                    <a:pt x="5866947" y="3410934"/>
+                  </a:lnTo>
+                  <a:lnTo>
+                    <a:pt x="5943579" y="3414521"/>
+                  </a:lnTo>
+                  <a:lnTo>
+                    <a:pt x="6020212" y="3417931"/>
+                  </a:lnTo>
+                  <a:lnTo>
+                    <a:pt x="6096844" y="3421173"/>
+                  </a:lnTo>
+                  <a:lnTo>
+                    <a:pt x="6173477" y="3424256"/>
                   </a:lnTo>
                 </a:path>
               </a:pathLst>
@@ -4383,7 +4383,7 @@
           </p:nvSpPr>
           <p:spPr>
             <a:xfrm>
-              <a:off x="817517" y="4679530"/>
+              <a:off x="817517" y="4727786"/>
               <a:ext cx="7799693" cy="0"/>
             </a:xfrm>
             <a:custGeom>
@@ -4426,15 +4426,15 @@
           </p:nvSpPr>
           <p:spPr>
             <a:xfrm>
-              <a:off x="4224261" y="1896563"/>
-              <a:ext cx="0" cy="3826579"/>
+              <a:off x="4224261" y="2073503"/>
+              <a:ext cx="0" cy="3649639"/>
             </a:xfrm>
             <a:custGeom>
               <a:avLst/>
               <a:pathLst>
-                <a:path w="0" h="3826579">
+                <a:path w="0" h="3649639">
                   <a:moveTo>
-                    <a:pt x="0" y="3826579"/>
+                    <a:pt x="0" y="3649639"/>
                   </a:moveTo>
                   <a:lnTo>
                     <a:pt x="0" y="0"/>
@@ -4469,7 +4469,7 @@
           </p:nvSpPr>
           <p:spPr>
             <a:xfrm>
-              <a:off x="692708" y="5509156"/>
+              <a:off x="692708" y="5517199"/>
               <a:ext cx="62179" cy="80101"/>
             </a:xfrm>
             <a:prstGeom prst="rect">
@@ -4515,7 +4515,7 @@
           </p:nvSpPr>
           <p:spPr>
             <a:xfrm>
-              <a:off x="692708" y="4639479"/>
+              <a:off x="692708" y="4687735"/>
               <a:ext cx="62179" cy="80101"/>
             </a:xfrm>
             <a:prstGeom prst="rect">
@@ -4561,7 +4561,7 @@
           </p:nvSpPr>
           <p:spPr>
             <a:xfrm>
-              <a:off x="692708" y="3769802"/>
+              <a:off x="692708" y="3858272"/>
               <a:ext cx="62179" cy="80101"/>
             </a:xfrm>
             <a:prstGeom prst="rect">
@@ -4607,7 +4607,7 @@
           </p:nvSpPr>
           <p:spPr>
             <a:xfrm>
-              <a:off x="692708" y="2900125"/>
+              <a:off x="692708" y="3028808"/>
               <a:ext cx="62179" cy="80101"/>
             </a:xfrm>
             <a:prstGeom prst="rect">
@@ -4653,7 +4653,7 @@
           </p:nvSpPr>
           <p:spPr>
             <a:xfrm>
-              <a:off x="692708" y="2030448"/>
+              <a:off x="692708" y="2199345"/>
               <a:ext cx="62179" cy="80101"/>
             </a:xfrm>
             <a:prstGeom prst="rect">
@@ -4929,7 +4929,7 @@
           </p:nvSpPr>
           <p:spPr>
             <a:xfrm rot="-5400000">
-              <a:off x="68446" y="3759743"/>
+              <a:off x="68446" y="3848213"/>
               <a:ext cx="1016904" cy="100218"/>
             </a:xfrm>
             <a:prstGeom prst="rect">
@@ -4970,6 +4970,52 @@
         <p:sp>
           <p:nvSpPr>
             <p:cNvPr id="38" name="tx38"/>
+            <p:cNvSpPr/>
+            <p:nvPr/>
+          </p:nvSpPr>
+          <p:spPr>
+            <a:xfrm>
+              <a:off x="817517" y="1896563"/>
+              <a:ext cx="5689762" cy="82021"/>
+            </a:xfrm>
+            <a:prstGeom prst="rect">
+              <a:avLst/>
+            </a:prstGeom>
+            <a:noFill/>
+          </p:spPr>
+          <p:txBody>
+            <a:bodyPr lIns="0" rIns="0" tIns="0" bIns="0" anchorCtr="1" anchor="ctr" wrap="none"/>
+            <a:lstStyle/>
+            <a:p>
+              <a:pPr algn="l" marL="0" marR="0" indent="0">
+                <a:lnSpc>
+                  <a:spcPts val="900"/>
+                </a:lnSpc>
+                <a:spcBef>
+                  <a:spcPts val="0"/>
+                </a:spcBef>
+                <a:spcAft>
+                  <a:spcPts val="0"/>
+                </a:spcAft>
+              </a:pPr>
+              <a:r>
+                <a:rPr sz="900">
+                  <a:solidFill>
+                    <a:srgbClr val="404040">
+                      <a:alpha val="100000"/>
+                    </a:srgbClr>
+                  </a:solidFill>
+                  <a:latin typeface="Helvetica"/>
+                  <a:cs typeface="Helvetica"/>
+                </a:rPr>
+                <a:t>subHR per 0.1 ratio decline: 1.79 (1.32-2.43)  |  per IQR decline (Δ = 0.30): 5.74 (2.32-14.24)  |  IQR: [0.85, 1.15]</a:t>
+              </a:r>
+            </a:p>
+          </p:txBody>
+        </p:sp>
+        <p:sp>
+          <p:nvSpPr>
+            <p:cNvPr id="39" name="tx39"/>
             <p:cNvSpPr/>
             <p:nvPr/>
           </p:nvSpPr>

--- a/docs/pptx/carbo/jx-carbo-linsubhr-ratio-throm3.pptx
+++ b/docs/pptx/carbo/jx-carbo-linsubhr-ratio-throm3.pptx
@@ -4976,7 +4976,7 @@
           <p:spPr>
             <a:xfrm>
               <a:off x="817517" y="1896563"/>
-              <a:ext cx="5689762" cy="82021"/>
+              <a:ext cx="6299667" cy="82021"/>
             </a:xfrm>
             <a:prstGeom prst="rect">
               <a:avLst/>
@@ -5008,7 +5008,7 @@
                   <a:latin typeface="Helvetica"/>
                   <a:cs typeface="Helvetica"/>
                 </a:rPr>
-                <a:t>subHR per 0.1 ratio decline: 1.79 (1.32-2.43)  |  per IQR decline (Δ = 0.30): 5.74 (2.32-14.24)  |  IQR: [0.85, 1.15]</a:t>
+                <a:t>subHR per 0.1 ratio decline: 1.79 (1.32-2.43), p = &lt;0.001  |  per IQR decline (Δ = 0.30): 5.74 (2.32-14.24)  |  IQR: [0.85, 1.15]</a:t>
               </a:r>
             </a:p>
           </p:txBody>

--- a/docs/pptx/carbo/jx-carbo-linsubhr-ratio-throm3.pptx
+++ b/docs/pptx/carbo/jx-carbo-linsubhr-ratio-throm3.pptx
@@ -4976,7 +4976,7 @@
           <p:spPr>
             <a:xfrm>
               <a:off x="817517" y="1896563"/>
-              <a:ext cx="6299667" cy="82021"/>
+              <a:ext cx="6963430" cy="82021"/>
             </a:xfrm>
             <a:prstGeom prst="rect">
               <a:avLst/>
@@ -5008,7 +5008,7 @@
                   <a:latin typeface="Helvetica"/>
                   <a:cs typeface="Helvetica"/>
                 </a:rPr>
-                <a:t>subHR per 0.1 ratio decline: 1.79 (1.32-2.43), p = &lt;0.001  |  per IQR decline (Δ = 0.30): 5.74 (2.32-14.24)  |  IQR: [0.85, 1.15]</a:t>
+                <a:t>subHR per 0.1 ratio decline: 1.79 (1.32-2.43), p_Bonf = &lt;0.001 (n = 6)  |  per IQR decline (Δ = 0.30): 5.74 (2.32-14.24)  |  IQR: [0.85, 1.15]</a:t>
               </a:r>
             </a:p>
           </p:txBody>

--- a/docs/pptx/carbo/jx-carbo-linsubhr-ratio-throm3.pptx
+++ b/docs/pptx/carbo/jx-carbo-linsubhr-ratio-throm3.pptx
@@ -2443,7 +2443,7 @@
           </p:nvSpPr>
           <p:spPr>
             <a:xfrm>
-              <a:off x="1615213" y="2073503"/>
+              <a:off x="1467192" y="2073503"/>
               <a:ext cx="0" cy="3649639"/>
             </a:xfrm>
             <a:custGeom>
@@ -2486,7 +2486,7 @@
           </p:nvSpPr>
           <p:spPr>
             <a:xfrm>
-              <a:off x="3387871" y="2073503"/>
+              <a:off x="3538150" y="2073503"/>
               <a:ext cx="0" cy="3649639"/>
             </a:xfrm>
             <a:custGeom>
@@ -2529,7 +2529,7 @@
           </p:nvSpPr>
           <p:spPr>
             <a:xfrm>
-              <a:off x="5160528" y="2073503"/>
+              <a:off x="5609107" y="2073503"/>
               <a:ext cx="0" cy="3649639"/>
             </a:xfrm>
             <a:custGeom>
@@ -2572,7 +2572,7 @@
           </p:nvSpPr>
           <p:spPr>
             <a:xfrm>
-              <a:off x="6933186" y="2073503"/>
+              <a:off x="7680065" y="2073503"/>
               <a:ext cx="0" cy="3649639"/>
             </a:xfrm>
             <a:custGeom>
@@ -2830,7 +2830,7 @@
           </p:nvSpPr>
           <p:spPr>
             <a:xfrm>
-              <a:off x="2501542" y="2073503"/>
+              <a:off x="2502671" y="2073503"/>
               <a:ext cx="0" cy="3649639"/>
             </a:xfrm>
             <a:custGeom>
@@ -2873,7 +2873,7 @@
           </p:nvSpPr>
           <p:spPr>
             <a:xfrm>
-              <a:off x="4274200" y="2073503"/>
+              <a:off x="4573628" y="2073503"/>
               <a:ext cx="0" cy="3649639"/>
             </a:xfrm>
             <a:custGeom>
@@ -2916,7 +2916,7 @@
           </p:nvSpPr>
           <p:spPr>
             <a:xfrm>
-              <a:off x="6046857" y="2073503"/>
+              <a:off x="6644586" y="2073503"/>
               <a:ext cx="0" cy="3649639"/>
             </a:xfrm>
             <a:custGeom>
@@ -2953,571 +2953,534 @@
         </p:sp>
         <p:sp>
           <p:nvSpPr>
-            <p:cNvPr id="20" name="pl20"/>
+            <p:cNvPr id="20" name="pg20"/>
             <p:cNvSpPr/>
             <p:nvPr/>
           </p:nvSpPr>
           <p:spPr>
             <a:xfrm>
-              <a:off x="7819515" y="2073503"/>
-              <a:ext cx="0" cy="3649639"/>
+              <a:off x="1172049" y="2073503"/>
+              <a:ext cx="7090630" cy="3468611"/>
             </a:xfrm>
             <a:custGeom>
               <a:avLst/>
               <a:pathLst>
-                <a:path w="0" h="3649639">
+                <a:path w="7090630" h="3468611">
                   <a:moveTo>
-                    <a:pt x="0" y="3649639"/>
+                    <a:pt x="2016237" y="0"/>
                   </a:moveTo>
                   <a:lnTo>
-                    <a:pt x="0" y="0"/>
-                  </a:lnTo>
-                  <a:lnTo>
-                    <a:pt x="0" y="0"/>
-                  </a:lnTo>
-                </a:path>
-              </a:pathLst>
-            </a:custGeom>
-            <a:ln w="13550" cap="flat">
-              <a:solidFill>
-                <a:srgbClr val="EBEBEB">
-                  <a:alpha val="100000"/>
-                </a:srgbClr>
-              </a:solidFill>
-              <a:prstDash val="solid"/>
-              <a:round/>
-            </a:ln>
-          </p:spPr>
-          <p:txBody>
-            <a:bodyPr/>
-            <a:lstStyle/>
-            <a:p/>
-          </p:txBody>
-        </p:sp>
-        <p:sp>
-          <p:nvSpPr>
-            <p:cNvPr id="21" name="pg21"/>
-            <p:cNvSpPr/>
-            <p:nvPr/>
-          </p:nvSpPr>
-          <p:spPr>
-            <a:xfrm>
-              <a:off x="817517" y="2073503"/>
-              <a:ext cx="7403783" cy="3468611"/>
-            </a:xfrm>
-            <a:custGeom>
-              <a:avLst/>
-              <a:pathLst>
-                <a:path w="7403783" h="3468611">
-                  <a:moveTo>
-                    <a:pt x="1974434" y="0"/>
-                  </a:moveTo>
-                  <a:lnTo>
-                    <a:pt x="2039504" y="221036"/>
-                  </a:lnTo>
-                  <a:lnTo>
-                    <a:pt x="2116137" y="462114"/>
-                  </a:lnTo>
-                  <a:lnTo>
-                    <a:pt x="2192769" y="685380"/>
-                  </a:lnTo>
-                  <a:lnTo>
-                    <a:pt x="2269402" y="892148"/>
-                  </a:lnTo>
-                  <a:lnTo>
-                    <a:pt x="2346034" y="1083639"/>
-                  </a:lnTo>
-                  <a:lnTo>
-                    <a:pt x="2422667" y="1260981"/>
-                  </a:lnTo>
-                  <a:lnTo>
-                    <a:pt x="2499300" y="1425219"/>
-                  </a:lnTo>
-                  <a:lnTo>
-                    <a:pt x="2575932" y="1577321"/>
-                  </a:lnTo>
-                  <a:lnTo>
-                    <a:pt x="2652565" y="1718185"/>
-                  </a:lnTo>
-                  <a:lnTo>
-                    <a:pt x="2729197" y="1848641"/>
-                  </a:lnTo>
-                  <a:lnTo>
-                    <a:pt x="2805830" y="1969457"/>
-                  </a:lnTo>
-                  <a:lnTo>
-                    <a:pt x="2882462" y="2081346"/>
-                  </a:lnTo>
-                  <a:lnTo>
-                    <a:pt x="2959095" y="2184968"/>
-                  </a:lnTo>
-                  <a:lnTo>
-                    <a:pt x="3035727" y="2280934"/>
-                  </a:lnTo>
-                  <a:lnTo>
-                    <a:pt x="3112360" y="2369808"/>
-                  </a:lnTo>
-                  <a:lnTo>
-                    <a:pt x="3188993" y="2452116"/>
-                  </a:lnTo>
-                  <a:lnTo>
-                    <a:pt x="3265625" y="2528342"/>
-                  </a:lnTo>
-                  <a:lnTo>
-                    <a:pt x="3342258" y="2598936"/>
-                  </a:lnTo>
-                  <a:lnTo>
-                    <a:pt x="3418890" y="2657468"/>
-                  </a:lnTo>
-                  <a:lnTo>
-                    <a:pt x="3495523" y="2677285"/>
-                  </a:lnTo>
-                  <a:lnTo>
-                    <a:pt x="3572155" y="2696627"/>
-                  </a:lnTo>
-                  <a:lnTo>
-                    <a:pt x="3648788" y="2715505"/>
-                  </a:lnTo>
-                  <a:lnTo>
-                    <a:pt x="3725420" y="2733930"/>
-                  </a:lnTo>
-                  <a:lnTo>
-                    <a:pt x="3802053" y="2751913"/>
-                  </a:lnTo>
-                  <a:lnTo>
-                    <a:pt x="3878685" y="2769464"/>
-                  </a:lnTo>
-                  <a:lnTo>
-                    <a:pt x="3955318" y="2786595"/>
-                  </a:lnTo>
-                  <a:lnTo>
-                    <a:pt x="4031951" y="2803315"/>
-                  </a:lnTo>
-                  <a:lnTo>
-                    <a:pt x="4108583" y="2819634"/>
-                  </a:lnTo>
-                  <a:lnTo>
-                    <a:pt x="4185216" y="2835562"/>
-                  </a:lnTo>
-                  <a:lnTo>
-                    <a:pt x="4261848" y="2851107"/>
-                  </a:lnTo>
-                  <a:lnTo>
-                    <a:pt x="4338481" y="2866280"/>
-                  </a:lnTo>
-                  <a:lnTo>
-                    <a:pt x="4415113" y="2881089"/>
-                  </a:lnTo>
-                  <a:lnTo>
-                    <a:pt x="4491746" y="2895543"/>
-                  </a:lnTo>
-                  <a:lnTo>
-                    <a:pt x="4568378" y="2909650"/>
-                  </a:lnTo>
-                  <a:lnTo>
-                    <a:pt x="4645011" y="2923419"/>
-                  </a:lnTo>
-                  <a:lnTo>
-                    <a:pt x="4721644" y="2936857"/>
-                  </a:lnTo>
-                  <a:lnTo>
-                    <a:pt x="4798276" y="2949973"/>
-                  </a:lnTo>
-                  <a:lnTo>
-                    <a:pt x="4874909" y="2962775"/>
-                  </a:lnTo>
-                  <a:lnTo>
-                    <a:pt x="4951541" y="2975269"/>
-                  </a:lnTo>
-                  <a:lnTo>
-                    <a:pt x="5028174" y="2987464"/>
-                  </a:lnTo>
-                  <a:lnTo>
-                    <a:pt x="5104806" y="2999367"/>
-                  </a:lnTo>
-                  <a:lnTo>
-                    <a:pt x="5181439" y="3010984"/>
-                  </a:lnTo>
-                  <a:lnTo>
-                    <a:pt x="5258071" y="3022322"/>
-                  </a:lnTo>
-                  <a:lnTo>
-                    <a:pt x="5334704" y="3033389"/>
-                  </a:lnTo>
-                  <a:lnTo>
-                    <a:pt x="5411336" y="3044190"/>
-                  </a:lnTo>
-                  <a:lnTo>
-                    <a:pt x="5487969" y="3054732"/>
-                  </a:lnTo>
-                  <a:lnTo>
-                    <a:pt x="5564602" y="3065021"/>
-                  </a:lnTo>
-                  <a:lnTo>
-                    <a:pt x="5641234" y="3075063"/>
-                  </a:lnTo>
-                  <a:lnTo>
-                    <a:pt x="5717867" y="3084865"/>
-                  </a:lnTo>
-                  <a:lnTo>
-                    <a:pt x="5794499" y="3094432"/>
-                  </a:lnTo>
-                  <a:lnTo>
-                    <a:pt x="5871132" y="3103769"/>
-                  </a:lnTo>
-                  <a:lnTo>
-                    <a:pt x="5947764" y="3112882"/>
-                  </a:lnTo>
-                  <a:lnTo>
-                    <a:pt x="6024397" y="3121776"/>
-                  </a:lnTo>
-                  <a:lnTo>
-                    <a:pt x="6101029" y="3130457"/>
-                  </a:lnTo>
-                  <a:lnTo>
-                    <a:pt x="6177662" y="3138931"/>
-                  </a:lnTo>
-                  <a:lnTo>
-                    <a:pt x="6254294" y="3147200"/>
-                  </a:lnTo>
-                  <a:lnTo>
-                    <a:pt x="6330927" y="3155272"/>
-                  </a:lnTo>
-                  <a:lnTo>
-                    <a:pt x="6407560" y="3163150"/>
-                  </a:lnTo>
-                  <a:lnTo>
-                    <a:pt x="6484192" y="3170839"/>
-                  </a:lnTo>
-                  <a:lnTo>
-                    <a:pt x="6560825" y="3178343"/>
-                  </a:lnTo>
-                  <a:lnTo>
-                    <a:pt x="6637457" y="3185668"/>
-                  </a:lnTo>
-                  <a:lnTo>
-                    <a:pt x="6714090" y="3192817"/>
-                  </a:lnTo>
-                  <a:lnTo>
-                    <a:pt x="6790722" y="3199794"/>
-                  </a:lnTo>
-                  <a:lnTo>
-                    <a:pt x="6867355" y="3206604"/>
-                  </a:lnTo>
-                  <a:lnTo>
-                    <a:pt x="6943987" y="3213251"/>
-                  </a:lnTo>
-                  <a:lnTo>
-                    <a:pt x="7020620" y="3219738"/>
-                  </a:lnTo>
-                  <a:lnTo>
-                    <a:pt x="7097253" y="3226070"/>
-                  </a:lnTo>
-                  <a:lnTo>
-                    <a:pt x="7173885" y="3232250"/>
-                  </a:lnTo>
-                  <a:lnTo>
-                    <a:pt x="7250518" y="3238282"/>
-                  </a:lnTo>
-                  <a:lnTo>
-                    <a:pt x="7327150" y="3244169"/>
-                  </a:lnTo>
-                  <a:lnTo>
-                    <a:pt x="7403783" y="3249915"/>
-                  </a:lnTo>
-                  <a:lnTo>
-                    <a:pt x="7403783" y="3468611"/>
-                  </a:lnTo>
-                  <a:lnTo>
-                    <a:pt x="7327150" y="3467404"/>
-                  </a:lnTo>
-                  <a:lnTo>
-                    <a:pt x="7250518" y="3466100"/>
-                  </a:lnTo>
-                  <a:lnTo>
-                    <a:pt x="7173885" y="3464692"/>
-                  </a:lnTo>
-                  <a:lnTo>
-                    <a:pt x="7097253" y="3463171"/>
-                  </a:lnTo>
-                  <a:lnTo>
-                    <a:pt x="7020620" y="3461530"/>
-                  </a:lnTo>
-                  <a:lnTo>
-                    <a:pt x="6943987" y="3459757"/>
-                  </a:lnTo>
-                  <a:lnTo>
-                    <a:pt x="6867355" y="3457843"/>
-                  </a:lnTo>
-                  <a:lnTo>
-                    <a:pt x="6790722" y="3455777"/>
-                  </a:lnTo>
-                  <a:lnTo>
-                    <a:pt x="6714090" y="3453545"/>
-                  </a:lnTo>
-                  <a:lnTo>
-                    <a:pt x="6637457" y="3451136"/>
-                  </a:lnTo>
-                  <a:lnTo>
-                    <a:pt x="6560825" y="3448534"/>
-                  </a:lnTo>
-                  <a:lnTo>
-                    <a:pt x="6484192" y="3445724"/>
-                  </a:lnTo>
-                  <a:lnTo>
-                    <a:pt x="6407560" y="3442691"/>
-                  </a:lnTo>
-                  <a:lnTo>
-                    <a:pt x="6330927" y="3439415"/>
-                  </a:lnTo>
-                  <a:lnTo>
-                    <a:pt x="6254294" y="3435878"/>
-                  </a:lnTo>
-                  <a:lnTo>
-                    <a:pt x="6177662" y="3432059"/>
-                  </a:lnTo>
-                  <a:lnTo>
-                    <a:pt x="6101029" y="3427935"/>
-                  </a:lnTo>
-                  <a:lnTo>
-                    <a:pt x="6024397" y="3423483"/>
-                  </a:lnTo>
-                  <a:lnTo>
-                    <a:pt x="5947764" y="3418675"/>
-                  </a:lnTo>
-                  <a:lnTo>
-                    <a:pt x="5871132" y="3413483"/>
-                  </a:lnTo>
-                  <a:lnTo>
-                    <a:pt x="5794499" y="3407877"/>
-                  </a:lnTo>
-                  <a:lnTo>
-                    <a:pt x="5717867" y="3401824"/>
-                  </a:lnTo>
-                  <a:lnTo>
-                    <a:pt x="5641234" y="3395288"/>
-                  </a:lnTo>
-                  <a:lnTo>
-                    <a:pt x="5564602" y="3388230"/>
-                  </a:lnTo>
-                  <a:lnTo>
-                    <a:pt x="5487969" y="3380609"/>
-                  </a:lnTo>
-                  <a:lnTo>
-                    <a:pt x="5411336" y="3372381"/>
-                  </a:lnTo>
-                  <a:lnTo>
-                    <a:pt x="5334704" y="3363495"/>
-                  </a:lnTo>
-                  <a:lnTo>
-                    <a:pt x="5258071" y="3353901"/>
-                  </a:lnTo>
-                  <a:lnTo>
-                    <a:pt x="5181439" y="3343542"/>
-                  </a:lnTo>
-                  <a:lnTo>
-                    <a:pt x="5104806" y="3332355"/>
-                  </a:lnTo>
-                  <a:lnTo>
-                    <a:pt x="5028174" y="3320277"/>
-                  </a:lnTo>
-                  <a:lnTo>
-                    <a:pt x="4951541" y="3307235"/>
-                  </a:lnTo>
-                  <a:lnTo>
-                    <a:pt x="4874909" y="3293152"/>
-                  </a:lnTo>
-                  <a:lnTo>
-                    <a:pt x="4798276" y="3277945"/>
-                  </a:lnTo>
-                  <a:lnTo>
-                    <a:pt x="4721644" y="3261526"/>
-                  </a:lnTo>
-                  <a:lnTo>
-                    <a:pt x="4645011" y="3243796"/>
-                  </a:lnTo>
-                  <a:lnTo>
-                    <a:pt x="4568378" y="3224652"/>
-                  </a:lnTo>
-                  <a:lnTo>
-                    <a:pt x="4491746" y="3203980"/>
-                  </a:lnTo>
-                  <a:lnTo>
-                    <a:pt x="4415113" y="3181659"/>
-                  </a:lnTo>
-                  <a:lnTo>
-                    <a:pt x="4338481" y="3157557"/>
-                  </a:lnTo>
-                  <a:lnTo>
-                    <a:pt x="4261848" y="3131532"/>
-                  </a:lnTo>
-                  <a:lnTo>
-                    <a:pt x="4185216" y="3103431"/>
-                  </a:lnTo>
-                  <a:lnTo>
-                    <a:pt x="4108583" y="3073088"/>
-                  </a:lnTo>
-                  <a:lnTo>
-                    <a:pt x="4031951" y="3040324"/>
-                  </a:lnTo>
-                  <a:lnTo>
-                    <a:pt x="3955318" y="3004946"/>
-                  </a:lnTo>
-                  <a:lnTo>
-                    <a:pt x="3878685" y="2966745"/>
-                  </a:lnTo>
-                  <a:lnTo>
-                    <a:pt x="3802053" y="2925497"/>
-                  </a:lnTo>
-                  <a:lnTo>
-                    <a:pt x="3725420" y="2880957"/>
-                  </a:lnTo>
-                  <a:lnTo>
-                    <a:pt x="3648788" y="2832864"/>
-                  </a:lnTo>
-                  <a:lnTo>
-                    <a:pt x="3572155" y="2780934"/>
-                  </a:lnTo>
-                  <a:lnTo>
-                    <a:pt x="3495523" y="2724861"/>
-                  </a:lnTo>
-                  <a:lnTo>
-                    <a:pt x="3418890" y="2664314"/>
-                  </a:lnTo>
-                  <a:lnTo>
-                    <a:pt x="3342258" y="2637165"/>
-                  </a:lnTo>
-                  <a:lnTo>
-                    <a:pt x="3265625" y="2616362"/>
-                  </a:lnTo>
-                  <a:lnTo>
-                    <a:pt x="3188993" y="2595048"/>
-                  </a:lnTo>
-                  <a:lnTo>
-                    <a:pt x="3112360" y="2573210"/>
-                  </a:lnTo>
-                  <a:lnTo>
-                    <a:pt x="3035727" y="2550836"/>
-                  </a:lnTo>
-                  <a:lnTo>
-                    <a:pt x="2959095" y="2527912"/>
-                  </a:lnTo>
-                  <a:lnTo>
-                    <a:pt x="2882462" y="2504425"/>
-                  </a:lnTo>
-                  <a:lnTo>
-                    <a:pt x="2805830" y="2480360"/>
-                  </a:lnTo>
-                  <a:lnTo>
-                    <a:pt x="2729197" y="2455704"/>
-                  </a:lnTo>
-                  <a:lnTo>
-                    <a:pt x="2652565" y="2430442"/>
-                  </a:lnTo>
-                  <a:lnTo>
-                    <a:pt x="2575932" y="2404560"/>
-                  </a:lnTo>
-                  <a:lnTo>
-                    <a:pt x="2499300" y="2378042"/>
-                  </a:lnTo>
-                  <a:lnTo>
-                    <a:pt x="2422667" y="2350872"/>
-                  </a:lnTo>
-                  <a:lnTo>
-                    <a:pt x="2346034" y="2323034"/>
-                  </a:lnTo>
-                  <a:lnTo>
-                    <a:pt x="2269402" y="2294512"/>
-                  </a:lnTo>
-                  <a:lnTo>
-                    <a:pt x="2192769" y="2265289"/>
-                  </a:lnTo>
-                  <a:lnTo>
-                    <a:pt x="2116137" y="2235349"/>
-                  </a:lnTo>
-                  <a:lnTo>
-                    <a:pt x="2039504" y="2204672"/>
-                  </a:lnTo>
-                  <a:lnTo>
-                    <a:pt x="1962872" y="2173242"/>
-                  </a:lnTo>
-                  <a:lnTo>
-                    <a:pt x="1886239" y="2141040"/>
-                  </a:lnTo>
-                  <a:lnTo>
-                    <a:pt x="1809607" y="2108046"/>
-                  </a:lnTo>
-                  <a:lnTo>
-                    <a:pt x="1732974" y="2074241"/>
-                  </a:lnTo>
-                  <a:lnTo>
-                    <a:pt x="1656342" y="2039606"/>
-                  </a:lnTo>
-                  <a:lnTo>
-                    <a:pt x="1579709" y="2004120"/>
-                  </a:lnTo>
-                  <a:lnTo>
-                    <a:pt x="1503076" y="1967761"/>
-                  </a:lnTo>
-                  <a:lnTo>
-                    <a:pt x="1426444" y="1930510"/>
-                  </a:lnTo>
-                  <a:lnTo>
-                    <a:pt x="1349811" y="1892343"/>
-                  </a:lnTo>
-                  <a:lnTo>
-                    <a:pt x="1273179" y="1853238"/>
-                  </a:lnTo>
-                  <a:lnTo>
-                    <a:pt x="1196546" y="1813172"/>
-                  </a:lnTo>
-                  <a:lnTo>
-                    <a:pt x="1119914" y="1772121"/>
-                  </a:lnTo>
-                  <a:lnTo>
-                    <a:pt x="1043281" y="1730062"/>
-                  </a:lnTo>
-                  <a:lnTo>
-                    <a:pt x="966649" y="1686969"/>
-                  </a:lnTo>
-                  <a:lnTo>
-                    <a:pt x="890016" y="1642818"/>
-                  </a:lnTo>
-                  <a:lnTo>
-                    <a:pt x="813384" y="1597582"/>
-                  </a:lnTo>
-                  <a:lnTo>
-                    <a:pt x="736751" y="1551233"/>
-                  </a:lnTo>
-                  <a:lnTo>
-                    <a:pt x="660118" y="1503747"/>
-                  </a:lnTo>
-                  <a:lnTo>
-                    <a:pt x="583486" y="1455093"/>
-                  </a:lnTo>
-                  <a:lnTo>
-                    <a:pt x="506853" y="1405243"/>
-                  </a:lnTo>
-                  <a:lnTo>
-                    <a:pt x="430221" y="1354169"/>
-                  </a:lnTo>
-                  <a:lnTo>
-                    <a:pt x="353588" y="1301840"/>
-                  </a:lnTo>
-                  <a:lnTo>
-                    <a:pt x="276956" y="1248225"/>
-                  </a:lnTo>
-                  <a:lnTo>
-                    <a:pt x="200323" y="1193292"/>
-                  </a:lnTo>
-                  <a:lnTo>
-                    <a:pt x="123691" y="1137010"/>
-                  </a:lnTo>
-                  <a:lnTo>
-                    <a:pt x="47058" y="1079344"/>
-                  </a:lnTo>
-                  <a:lnTo>
-                    <a:pt x="0" y="1043063"/>
+                    <a:pt x="2077053" y="221036"/>
+                  </a:lnTo>
+                  <a:lnTo>
+                    <a:pt x="2148675" y="462114"/>
+                  </a:lnTo>
+                  <a:lnTo>
+                    <a:pt x="2220298" y="685380"/>
+                  </a:lnTo>
+                  <a:lnTo>
+                    <a:pt x="2291920" y="892148"/>
+                  </a:lnTo>
+                  <a:lnTo>
+                    <a:pt x="2363543" y="1083639"/>
+                  </a:lnTo>
+                  <a:lnTo>
+                    <a:pt x="2435165" y="1260981"/>
+                  </a:lnTo>
+                  <a:lnTo>
+                    <a:pt x="2506788" y="1425219"/>
+                  </a:lnTo>
+                  <a:lnTo>
+                    <a:pt x="2578410" y="1577321"/>
+                  </a:lnTo>
+                  <a:lnTo>
+                    <a:pt x="2650033" y="1718185"/>
+                  </a:lnTo>
+                  <a:lnTo>
+                    <a:pt x="2721655" y="1848641"/>
+                  </a:lnTo>
+                  <a:lnTo>
+                    <a:pt x="2793278" y="1969457"/>
+                  </a:lnTo>
+                  <a:lnTo>
+                    <a:pt x="2864901" y="2081346"/>
+                  </a:lnTo>
+                  <a:lnTo>
+                    <a:pt x="2936523" y="2184968"/>
+                  </a:lnTo>
+                  <a:lnTo>
+                    <a:pt x="3008146" y="2280934"/>
+                  </a:lnTo>
+                  <a:lnTo>
+                    <a:pt x="3079768" y="2369808"/>
+                  </a:lnTo>
+                  <a:lnTo>
+                    <a:pt x="3151391" y="2452116"/>
+                  </a:lnTo>
+                  <a:lnTo>
+                    <a:pt x="3223013" y="2528342"/>
+                  </a:lnTo>
+                  <a:lnTo>
+                    <a:pt x="3294636" y="2598936"/>
+                  </a:lnTo>
+                  <a:lnTo>
+                    <a:pt x="3366258" y="2657468"/>
+                  </a:lnTo>
+                  <a:lnTo>
+                    <a:pt x="3437881" y="2677285"/>
+                  </a:lnTo>
+                  <a:lnTo>
+                    <a:pt x="3509503" y="2696627"/>
+                  </a:lnTo>
+                  <a:lnTo>
+                    <a:pt x="3581126" y="2715505"/>
+                  </a:lnTo>
+                  <a:lnTo>
+                    <a:pt x="3652748" y="2733930"/>
+                  </a:lnTo>
+                  <a:lnTo>
+                    <a:pt x="3724371" y="2751913"/>
+                  </a:lnTo>
+                  <a:lnTo>
+                    <a:pt x="3795993" y="2769464"/>
+                  </a:lnTo>
+                  <a:lnTo>
+                    <a:pt x="3867616" y="2786595"/>
+                  </a:lnTo>
+                  <a:lnTo>
+                    <a:pt x="3939238" y="2803315"/>
+                  </a:lnTo>
+                  <a:lnTo>
+                    <a:pt x="4010861" y="2819634"/>
+                  </a:lnTo>
+                  <a:lnTo>
+                    <a:pt x="4082483" y="2835562"/>
+                  </a:lnTo>
+                  <a:lnTo>
+                    <a:pt x="4154106" y="2851107"/>
+                  </a:lnTo>
+                  <a:lnTo>
+                    <a:pt x="4225729" y="2866280"/>
+                  </a:lnTo>
+                  <a:lnTo>
+                    <a:pt x="4297351" y="2881089"/>
+                  </a:lnTo>
+                  <a:lnTo>
+                    <a:pt x="4368974" y="2895543"/>
+                  </a:lnTo>
+                  <a:lnTo>
+                    <a:pt x="4440596" y="2909650"/>
+                  </a:lnTo>
+                  <a:lnTo>
+                    <a:pt x="4512219" y="2923419"/>
+                  </a:lnTo>
+                  <a:lnTo>
+                    <a:pt x="4583841" y="2936857"/>
+                  </a:lnTo>
+                  <a:lnTo>
+                    <a:pt x="4655464" y="2949973"/>
+                  </a:lnTo>
+                  <a:lnTo>
+                    <a:pt x="4727086" y="2962775"/>
+                  </a:lnTo>
+                  <a:lnTo>
+                    <a:pt x="4798709" y="2975269"/>
+                  </a:lnTo>
+                  <a:lnTo>
+                    <a:pt x="4870331" y="2987464"/>
+                  </a:lnTo>
+                  <a:lnTo>
+                    <a:pt x="4941954" y="2999367"/>
+                  </a:lnTo>
+                  <a:lnTo>
+                    <a:pt x="5013576" y="3010984"/>
+                  </a:lnTo>
+                  <a:lnTo>
+                    <a:pt x="5085199" y="3022322"/>
+                  </a:lnTo>
+                  <a:lnTo>
+                    <a:pt x="5156821" y="3033389"/>
+                  </a:lnTo>
+                  <a:lnTo>
+                    <a:pt x="5228444" y="3044190"/>
+                  </a:lnTo>
+                  <a:lnTo>
+                    <a:pt x="5300066" y="3054732"/>
+                  </a:lnTo>
+                  <a:lnTo>
+                    <a:pt x="5371689" y="3065021"/>
+                  </a:lnTo>
+                  <a:lnTo>
+                    <a:pt x="5443311" y="3075063"/>
+                  </a:lnTo>
+                  <a:lnTo>
+                    <a:pt x="5514934" y="3084865"/>
+                  </a:lnTo>
+                  <a:lnTo>
+                    <a:pt x="5586557" y="3094432"/>
+                  </a:lnTo>
+                  <a:lnTo>
+                    <a:pt x="5658179" y="3103769"/>
+                  </a:lnTo>
+                  <a:lnTo>
+                    <a:pt x="5729802" y="3112882"/>
+                  </a:lnTo>
+                  <a:lnTo>
+                    <a:pt x="5801424" y="3121776"/>
+                  </a:lnTo>
+                  <a:lnTo>
+                    <a:pt x="5873047" y="3130457"/>
+                  </a:lnTo>
+                  <a:lnTo>
+                    <a:pt x="5944669" y="3138931"/>
+                  </a:lnTo>
+                  <a:lnTo>
+                    <a:pt x="6016292" y="3147200"/>
+                  </a:lnTo>
+                  <a:lnTo>
+                    <a:pt x="6087914" y="3155272"/>
+                  </a:lnTo>
+                  <a:lnTo>
+                    <a:pt x="6159537" y="3163150"/>
+                  </a:lnTo>
+                  <a:lnTo>
+                    <a:pt x="6231159" y="3170839"/>
+                  </a:lnTo>
+                  <a:lnTo>
+                    <a:pt x="6302782" y="3178343"/>
+                  </a:lnTo>
+                  <a:lnTo>
+                    <a:pt x="6374404" y="3185668"/>
+                  </a:lnTo>
+                  <a:lnTo>
+                    <a:pt x="6446027" y="3192817"/>
+                  </a:lnTo>
+                  <a:lnTo>
+                    <a:pt x="6517649" y="3199794"/>
+                  </a:lnTo>
+                  <a:lnTo>
+                    <a:pt x="6589272" y="3206604"/>
+                  </a:lnTo>
+                  <a:lnTo>
+                    <a:pt x="6660894" y="3213251"/>
+                  </a:lnTo>
+                  <a:lnTo>
+                    <a:pt x="6732517" y="3219738"/>
+                  </a:lnTo>
+                  <a:lnTo>
+                    <a:pt x="6804139" y="3226070"/>
+                  </a:lnTo>
+                  <a:lnTo>
+                    <a:pt x="6875762" y="3232250"/>
+                  </a:lnTo>
+                  <a:lnTo>
+                    <a:pt x="6947385" y="3238282"/>
+                  </a:lnTo>
+                  <a:lnTo>
+                    <a:pt x="7019007" y="3244169"/>
+                  </a:lnTo>
+                  <a:lnTo>
+                    <a:pt x="7090630" y="3249915"/>
+                  </a:lnTo>
+                  <a:lnTo>
+                    <a:pt x="7090630" y="3468611"/>
+                  </a:lnTo>
+                  <a:lnTo>
+                    <a:pt x="7019007" y="3467404"/>
+                  </a:lnTo>
+                  <a:lnTo>
+                    <a:pt x="6947385" y="3466100"/>
+                  </a:lnTo>
+                  <a:lnTo>
+                    <a:pt x="6875762" y="3464692"/>
+                  </a:lnTo>
+                  <a:lnTo>
+                    <a:pt x="6804139" y="3463171"/>
+                  </a:lnTo>
+                  <a:lnTo>
+                    <a:pt x="6732517" y="3461530"/>
+                  </a:lnTo>
+                  <a:lnTo>
+                    <a:pt x="6660894" y="3459757"/>
+                  </a:lnTo>
+                  <a:lnTo>
+                    <a:pt x="6589272" y="3457843"/>
+                  </a:lnTo>
+                  <a:lnTo>
+                    <a:pt x="6517649" y="3455777"/>
+                  </a:lnTo>
+                  <a:lnTo>
+                    <a:pt x="6446027" y="3453545"/>
+                  </a:lnTo>
+                  <a:lnTo>
+                    <a:pt x="6374404" y="3451136"/>
+                  </a:lnTo>
+                  <a:lnTo>
+                    <a:pt x="6302782" y="3448534"/>
+                  </a:lnTo>
+                  <a:lnTo>
+                    <a:pt x="6231159" y="3445724"/>
+                  </a:lnTo>
+                  <a:lnTo>
+                    <a:pt x="6159537" y="3442691"/>
+                  </a:lnTo>
+                  <a:lnTo>
+                    <a:pt x="6087914" y="3439415"/>
+                  </a:lnTo>
+                  <a:lnTo>
+                    <a:pt x="6016292" y="3435878"/>
+                  </a:lnTo>
+                  <a:lnTo>
+                    <a:pt x="5944669" y="3432059"/>
+                  </a:lnTo>
+                  <a:lnTo>
+                    <a:pt x="5873047" y="3427935"/>
+                  </a:lnTo>
+                  <a:lnTo>
+                    <a:pt x="5801424" y="3423483"/>
+                  </a:lnTo>
+                  <a:lnTo>
+                    <a:pt x="5729802" y="3418675"/>
+                  </a:lnTo>
+                  <a:lnTo>
+                    <a:pt x="5658179" y="3413483"/>
+                  </a:lnTo>
+                  <a:lnTo>
+                    <a:pt x="5586557" y="3407877"/>
+                  </a:lnTo>
+                  <a:lnTo>
+                    <a:pt x="5514934" y="3401824"/>
+                  </a:lnTo>
+                  <a:lnTo>
+                    <a:pt x="5443311" y="3395288"/>
+                  </a:lnTo>
+                  <a:lnTo>
+                    <a:pt x="5371689" y="3388230"/>
+                  </a:lnTo>
+                  <a:lnTo>
+                    <a:pt x="5300066" y="3380609"/>
+                  </a:lnTo>
+                  <a:lnTo>
+                    <a:pt x="5228444" y="3372381"/>
+                  </a:lnTo>
+                  <a:lnTo>
+                    <a:pt x="5156821" y="3363495"/>
+                  </a:lnTo>
+                  <a:lnTo>
+                    <a:pt x="5085199" y="3353901"/>
+                  </a:lnTo>
+                  <a:lnTo>
+                    <a:pt x="5013576" y="3343542"/>
+                  </a:lnTo>
+                  <a:lnTo>
+                    <a:pt x="4941954" y="3332355"/>
+                  </a:lnTo>
+                  <a:lnTo>
+                    <a:pt x="4870331" y="3320277"/>
+                  </a:lnTo>
+                  <a:lnTo>
+                    <a:pt x="4798709" y="3307235"/>
+                  </a:lnTo>
+                  <a:lnTo>
+                    <a:pt x="4727086" y="3293152"/>
+                  </a:lnTo>
+                  <a:lnTo>
+                    <a:pt x="4655464" y="3277945"/>
+                  </a:lnTo>
+                  <a:lnTo>
+                    <a:pt x="4583841" y="3261526"/>
+                  </a:lnTo>
+                  <a:lnTo>
+                    <a:pt x="4512219" y="3243796"/>
+                  </a:lnTo>
+                  <a:lnTo>
+                    <a:pt x="4440596" y="3224652"/>
+                  </a:lnTo>
+                  <a:lnTo>
+                    <a:pt x="4368974" y="3203980"/>
+                  </a:lnTo>
+                  <a:lnTo>
+                    <a:pt x="4297351" y="3181659"/>
+                  </a:lnTo>
+                  <a:lnTo>
+                    <a:pt x="4225729" y="3157557"/>
+                  </a:lnTo>
+                  <a:lnTo>
+                    <a:pt x="4154106" y="3131532"/>
+                  </a:lnTo>
+                  <a:lnTo>
+                    <a:pt x="4082483" y="3103431"/>
+                  </a:lnTo>
+                  <a:lnTo>
+                    <a:pt x="4010861" y="3073088"/>
+                  </a:lnTo>
+                  <a:lnTo>
+                    <a:pt x="3939238" y="3040324"/>
+                  </a:lnTo>
+                  <a:lnTo>
+                    <a:pt x="3867616" y="3004946"/>
+                  </a:lnTo>
+                  <a:lnTo>
+                    <a:pt x="3795993" y="2966745"/>
+                  </a:lnTo>
+                  <a:lnTo>
+                    <a:pt x="3724371" y="2925497"/>
+                  </a:lnTo>
+                  <a:lnTo>
+                    <a:pt x="3652748" y="2880957"/>
+                  </a:lnTo>
+                  <a:lnTo>
+                    <a:pt x="3581126" y="2832864"/>
+                  </a:lnTo>
+                  <a:lnTo>
+                    <a:pt x="3509503" y="2780934"/>
+                  </a:lnTo>
+                  <a:lnTo>
+                    <a:pt x="3437881" y="2724861"/>
+                  </a:lnTo>
+                  <a:lnTo>
+                    <a:pt x="3366258" y="2664314"/>
+                  </a:lnTo>
+                  <a:lnTo>
+                    <a:pt x="3294636" y="2637165"/>
+                  </a:lnTo>
+                  <a:lnTo>
+                    <a:pt x="3223013" y="2616362"/>
+                  </a:lnTo>
+                  <a:lnTo>
+                    <a:pt x="3151391" y="2595048"/>
+                  </a:lnTo>
+                  <a:lnTo>
+                    <a:pt x="3079768" y="2573210"/>
+                  </a:lnTo>
+                  <a:lnTo>
+                    <a:pt x="3008146" y="2550836"/>
+                  </a:lnTo>
+                  <a:lnTo>
+                    <a:pt x="2936523" y="2527912"/>
+                  </a:lnTo>
+                  <a:lnTo>
+                    <a:pt x="2864901" y="2504425"/>
+                  </a:lnTo>
+                  <a:lnTo>
+                    <a:pt x="2793278" y="2480360"/>
+                  </a:lnTo>
+                  <a:lnTo>
+                    <a:pt x="2721655" y="2455704"/>
+                  </a:lnTo>
+                  <a:lnTo>
+                    <a:pt x="2650033" y="2430442"/>
+                  </a:lnTo>
+                  <a:lnTo>
+                    <a:pt x="2578410" y="2404560"/>
+                  </a:lnTo>
+                  <a:lnTo>
+                    <a:pt x="2506788" y="2378042"/>
+                  </a:lnTo>
+                  <a:lnTo>
+                    <a:pt x="2435165" y="2350872"/>
+                  </a:lnTo>
+                  <a:lnTo>
+                    <a:pt x="2363543" y="2323034"/>
+                  </a:lnTo>
+                  <a:lnTo>
+                    <a:pt x="2291920" y="2294512"/>
+                  </a:lnTo>
+                  <a:lnTo>
+                    <a:pt x="2220298" y="2265289"/>
+                  </a:lnTo>
+                  <a:lnTo>
+                    <a:pt x="2148675" y="2235349"/>
+                  </a:lnTo>
+                  <a:lnTo>
+                    <a:pt x="2077053" y="2204672"/>
+                  </a:lnTo>
+                  <a:lnTo>
+                    <a:pt x="2005430" y="2173242"/>
+                  </a:lnTo>
+                  <a:lnTo>
+                    <a:pt x="1933808" y="2141040"/>
+                  </a:lnTo>
+                  <a:lnTo>
+                    <a:pt x="1862185" y="2108046"/>
+                  </a:lnTo>
+                  <a:lnTo>
+                    <a:pt x="1790563" y="2074241"/>
+                  </a:lnTo>
+                  <a:lnTo>
+                    <a:pt x="1718940" y="2039606"/>
+                  </a:lnTo>
+                  <a:lnTo>
+                    <a:pt x="1647318" y="2004120"/>
+                  </a:lnTo>
+                  <a:lnTo>
+                    <a:pt x="1575695" y="1967761"/>
+                  </a:lnTo>
+                  <a:lnTo>
+                    <a:pt x="1504073" y="1930510"/>
+                  </a:lnTo>
+                  <a:lnTo>
+                    <a:pt x="1432450" y="1892343"/>
+                  </a:lnTo>
+                  <a:lnTo>
+                    <a:pt x="1360827" y="1853238"/>
+                  </a:lnTo>
+                  <a:lnTo>
+                    <a:pt x="1289205" y="1813172"/>
+                  </a:lnTo>
+                  <a:lnTo>
+                    <a:pt x="1217582" y="1772121"/>
+                  </a:lnTo>
+                  <a:lnTo>
+                    <a:pt x="1145960" y="1730062"/>
+                  </a:lnTo>
+                  <a:lnTo>
+                    <a:pt x="1074337" y="1686969"/>
+                  </a:lnTo>
+                  <a:lnTo>
+                    <a:pt x="1002715" y="1642818"/>
+                  </a:lnTo>
+                  <a:lnTo>
+                    <a:pt x="931092" y="1597582"/>
+                  </a:lnTo>
+                  <a:lnTo>
+                    <a:pt x="859470" y="1551233"/>
+                  </a:lnTo>
+                  <a:lnTo>
+                    <a:pt x="787847" y="1503747"/>
+                  </a:lnTo>
+                  <a:lnTo>
+                    <a:pt x="716225" y="1455093"/>
+                  </a:lnTo>
+                  <a:lnTo>
+                    <a:pt x="644602" y="1405243"/>
+                  </a:lnTo>
+                  <a:lnTo>
+                    <a:pt x="572980" y="1354169"/>
+                  </a:lnTo>
+                  <a:lnTo>
+                    <a:pt x="501357" y="1301840"/>
+                  </a:lnTo>
+                  <a:lnTo>
+                    <a:pt x="429735" y="1248225"/>
+                  </a:lnTo>
+                  <a:lnTo>
+                    <a:pt x="358112" y="1193292"/>
+                  </a:lnTo>
+                  <a:lnTo>
+                    <a:pt x="286490" y="1137010"/>
+                  </a:lnTo>
+                  <a:lnTo>
+                    <a:pt x="214867" y="1079344"/>
+                  </a:lnTo>
+                  <a:lnTo>
+                    <a:pt x="143245" y="1020262"/>
+                  </a:lnTo>
+                  <a:lnTo>
+                    <a:pt x="71622" y="959727"/>
+                  </a:lnTo>
+                  <a:lnTo>
+                    <a:pt x="0" y="897706"/>
                   </a:lnTo>
                   <a:close/>
                 </a:path>
@@ -3537,234 +3500,559 @@
         </p:sp>
         <p:sp>
           <p:nvSpPr>
+            <p:cNvPr id="21" name="pl21"/>
+            <p:cNvSpPr/>
+            <p:nvPr/>
+          </p:nvSpPr>
+          <p:spPr>
+            <a:xfrm>
+              <a:off x="3188286" y="2073503"/>
+              <a:ext cx="5074392" cy="3249915"/>
+            </a:xfrm>
+            <a:custGeom>
+              <a:avLst/>
+              <a:pathLst>
+                <a:path w="5074392" h="3249915">
+                  <a:moveTo>
+                    <a:pt x="0" y="0"/>
+                  </a:moveTo>
+                  <a:lnTo>
+                    <a:pt x="60816" y="221036"/>
+                  </a:lnTo>
+                  <a:lnTo>
+                    <a:pt x="132438" y="462114"/>
+                  </a:lnTo>
+                  <a:lnTo>
+                    <a:pt x="204061" y="685380"/>
+                  </a:lnTo>
+                  <a:lnTo>
+                    <a:pt x="275683" y="892148"/>
+                  </a:lnTo>
+                  <a:lnTo>
+                    <a:pt x="347306" y="1083639"/>
+                  </a:lnTo>
+                  <a:lnTo>
+                    <a:pt x="418928" y="1260981"/>
+                  </a:lnTo>
+                  <a:lnTo>
+                    <a:pt x="490551" y="1425219"/>
+                  </a:lnTo>
+                  <a:lnTo>
+                    <a:pt x="562173" y="1577321"/>
+                  </a:lnTo>
+                  <a:lnTo>
+                    <a:pt x="633796" y="1718185"/>
+                  </a:lnTo>
+                  <a:lnTo>
+                    <a:pt x="705418" y="1848641"/>
+                  </a:lnTo>
+                  <a:lnTo>
+                    <a:pt x="777041" y="1969457"/>
+                  </a:lnTo>
+                  <a:lnTo>
+                    <a:pt x="848663" y="2081346"/>
+                  </a:lnTo>
+                  <a:lnTo>
+                    <a:pt x="920286" y="2184968"/>
+                  </a:lnTo>
+                  <a:lnTo>
+                    <a:pt x="991908" y="2280934"/>
+                  </a:lnTo>
+                  <a:lnTo>
+                    <a:pt x="1063531" y="2369808"/>
+                  </a:lnTo>
+                  <a:lnTo>
+                    <a:pt x="1135153" y="2452116"/>
+                  </a:lnTo>
+                  <a:lnTo>
+                    <a:pt x="1206776" y="2528342"/>
+                  </a:lnTo>
+                  <a:lnTo>
+                    <a:pt x="1278399" y="2598936"/>
+                  </a:lnTo>
+                  <a:lnTo>
+                    <a:pt x="1350021" y="2657468"/>
+                  </a:lnTo>
+                  <a:lnTo>
+                    <a:pt x="1421644" y="2677285"/>
+                  </a:lnTo>
+                  <a:lnTo>
+                    <a:pt x="1493266" y="2696627"/>
+                  </a:lnTo>
+                  <a:lnTo>
+                    <a:pt x="1564889" y="2715505"/>
+                  </a:lnTo>
+                  <a:lnTo>
+                    <a:pt x="1636511" y="2733930"/>
+                  </a:lnTo>
+                  <a:lnTo>
+                    <a:pt x="1708134" y="2751913"/>
+                  </a:lnTo>
+                  <a:lnTo>
+                    <a:pt x="1779756" y="2769464"/>
+                  </a:lnTo>
+                  <a:lnTo>
+                    <a:pt x="1851379" y="2786595"/>
+                  </a:lnTo>
+                  <a:lnTo>
+                    <a:pt x="1923001" y="2803315"/>
+                  </a:lnTo>
+                  <a:lnTo>
+                    <a:pt x="1994624" y="2819634"/>
+                  </a:lnTo>
+                  <a:lnTo>
+                    <a:pt x="2066246" y="2835562"/>
+                  </a:lnTo>
+                  <a:lnTo>
+                    <a:pt x="2137869" y="2851107"/>
+                  </a:lnTo>
+                  <a:lnTo>
+                    <a:pt x="2209491" y="2866280"/>
+                  </a:lnTo>
+                  <a:lnTo>
+                    <a:pt x="2281114" y="2881089"/>
+                  </a:lnTo>
+                  <a:lnTo>
+                    <a:pt x="2352736" y="2895543"/>
+                  </a:lnTo>
+                  <a:lnTo>
+                    <a:pt x="2424359" y="2909650"/>
+                  </a:lnTo>
+                  <a:lnTo>
+                    <a:pt x="2495981" y="2923419"/>
+                  </a:lnTo>
+                  <a:lnTo>
+                    <a:pt x="2567604" y="2936857"/>
+                  </a:lnTo>
+                  <a:lnTo>
+                    <a:pt x="2639227" y="2949973"/>
+                  </a:lnTo>
+                  <a:lnTo>
+                    <a:pt x="2710849" y="2962775"/>
+                  </a:lnTo>
+                  <a:lnTo>
+                    <a:pt x="2782472" y="2975269"/>
+                  </a:lnTo>
+                  <a:lnTo>
+                    <a:pt x="2854094" y="2987464"/>
+                  </a:lnTo>
+                  <a:lnTo>
+                    <a:pt x="2925717" y="2999367"/>
+                  </a:lnTo>
+                  <a:lnTo>
+                    <a:pt x="2997339" y="3010984"/>
+                  </a:lnTo>
+                  <a:lnTo>
+                    <a:pt x="3068962" y="3022322"/>
+                  </a:lnTo>
+                  <a:lnTo>
+                    <a:pt x="3140584" y="3033389"/>
+                  </a:lnTo>
+                  <a:lnTo>
+                    <a:pt x="3212207" y="3044190"/>
+                  </a:lnTo>
+                  <a:lnTo>
+                    <a:pt x="3283829" y="3054732"/>
+                  </a:lnTo>
+                  <a:lnTo>
+                    <a:pt x="3355452" y="3065021"/>
+                  </a:lnTo>
+                  <a:lnTo>
+                    <a:pt x="3427074" y="3075063"/>
+                  </a:lnTo>
+                  <a:lnTo>
+                    <a:pt x="3498697" y="3084865"/>
+                  </a:lnTo>
+                  <a:lnTo>
+                    <a:pt x="3570319" y="3094432"/>
+                  </a:lnTo>
+                  <a:lnTo>
+                    <a:pt x="3641942" y="3103769"/>
+                  </a:lnTo>
+                  <a:lnTo>
+                    <a:pt x="3713564" y="3112882"/>
+                  </a:lnTo>
+                  <a:lnTo>
+                    <a:pt x="3785187" y="3121776"/>
+                  </a:lnTo>
+                  <a:lnTo>
+                    <a:pt x="3856809" y="3130457"/>
+                  </a:lnTo>
+                  <a:lnTo>
+                    <a:pt x="3928432" y="3138931"/>
+                  </a:lnTo>
+                  <a:lnTo>
+                    <a:pt x="4000055" y="3147200"/>
+                  </a:lnTo>
+                  <a:lnTo>
+                    <a:pt x="4071677" y="3155272"/>
+                  </a:lnTo>
+                  <a:lnTo>
+                    <a:pt x="4143300" y="3163150"/>
+                  </a:lnTo>
+                  <a:lnTo>
+                    <a:pt x="4214922" y="3170839"/>
+                  </a:lnTo>
+                  <a:lnTo>
+                    <a:pt x="4286545" y="3178343"/>
+                  </a:lnTo>
+                  <a:lnTo>
+                    <a:pt x="4358167" y="3185668"/>
+                  </a:lnTo>
+                  <a:lnTo>
+                    <a:pt x="4429790" y="3192817"/>
+                  </a:lnTo>
+                  <a:lnTo>
+                    <a:pt x="4501412" y="3199794"/>
+                  </a:lnTo>
+                  <a:lnTo>
+                    <a:pt x="4573035" y="3206604"/>
+                  </a:lnTo>
+                  <a:lnTo>
+                    <a:pt x="4644657" y="3213251"/>
+                  </a:lnTo>
+                  <a:lnTo>
+                    <a:pt x="4716280" y="3219738"/>
+                  </a:lnTo>
+                  <a:lnTo>
+                    <a:pt x="4787902" y="3226070"/>
+                  </a:lnTo>
+                  <a:lnTo>
+                    <a:pt x="4859525" y="3232250"/>
+                  </a:lnTo>
+                  <a:lnTo>
+                    <a:pt x="4931147" y="3238282"/>
+                  </a:lnTo>
+                  <a:lnTo>
+                    <a:pt x="5002770" y="3244169"/>
+                  </a:lnTo>
+                  <a:lnTo>
+                    <a:pt x="5074392" y="3249915"/>
+                  </a:lnTo>
+                </a:path>
+              </a:pathLst>
+            </a:custGeom>
+          </p:spPr>
+          <p:txBody>
+            <a:bodyPr/>
+            <a:lstStyle/>
+            <a:p/>
+          </p:txBody>
+        </p:sp>
+        <p:sp>
+          <p:nvSpPr>
             <p:cNvPr id="22" name="pl22"/>
             <p:cNvSpPr/>
             <p:nvPr/>
           </p:nvSpPr>
           <p:spPr>
             <a:xfrm>
-              <a:off x="2791952" y="2073503"/>
-              <a:ext cx="5429348" cy="3249915"/>
+              <a:off x="1172049" y="2971209"/>
+              <a:ext cx="7090630" cy="2570905"/>
             </a:xfrm>
             <a:custGeom>
               <a:avLst/>
               <a:pathLst>
-                <a:path w="5429348" h="3249915">
+                <a:path w="7090630" h="2570905">
                   <a:moveTo>
+                    <a:pt x="7090630" y="2570905"/>
+                  </a:moveTo>
+                  <a:lnTo>
+                    <a:pt x="7019007" y="2569698"/>
+                  </a:lnTo>
+                  <a:lnTo>
+                    <a:pt x="6947385" y="2568394"/>
+                  </a:lnTo>
+                  <a:lnTo>
+                    <a:pt x="6875762" y="2566986"/>
+                  </a:lnTo>
+                  <a:lnTo>
+                    <a:pt x="6804139" y="2565465"/>
+                  </a:lnTo>
+                  <a:lnTo>
+                    <a:pt x="6732517" y="2563824"/>
+                  </a:lnTo>
+                  <a:lnTo>
+                    <a:pt x="6660894" y="2562051"/>
+                  </a:lnTo>
+                  <a:lnTo>
+                    <a:pt x="6589272" y="2560137"/>
+                  </a:lnTo>
+                  <a:lnTo>
+                    <a:pt x="6517649" y="2558071"/>
+                  </a:lnTo>
+                  <a:lnTo>
+                    <a:pt x="6446027" y="2555839"/>
+                  </a:lnTo>
+                  <a:lnTo>
+                    <a:pt x="6374404" y="2553430"/>
+                  </a:lnTo>
+                  <a:lnTo>
+                    <a:pt x="6302782" y="2550828"/>
+                  </a:lnTo>
+                  <a:lnTo>
+                    <a:pt x="6231159" y="2548018"/>
+                  </a:lnTo>
+                  <a:lnTo>
+                    <a:pt x="6159537" y="2544985"/>
+                  </a:lnTo>
+                  <a:lnTo>
+                    <a:pt x="6087914" y="2541709"/>
+                  </a:lnTo>
+                  <a:lnTo>
+                    <a:pt x="6016292" y="2538172"/>
+                  </a:lnTo>
+                  <a:lnTo>
+                    <a:pt x="5944669" y="2534353"/>
+                  </a:lnTo>
+                  <a:lnTo>
+                    <a:pt x="5873047" y="2530229"/>
+                  </a:lnTo>
+                  <a:lnTo>
+                    <a:pt x="5801424" y="2525777"/>
+                  </a:lnTo>
+                  <a:lnTo>
+                    <a:pt x="5729802" y="2520968"/>
+                  </a:lnTo>
+                  <a:lnTo>
+                    <a:pt x="5658179" y="2515777"/>
+                  </a:lnTo>
+                  <a:lnTo>
+                    <a:pt x="5586557" y="2510171"/>
+                  </a:lnTo>
+                  <a:lnTo>
+                    <a:pt x="5514934" y="2504118"/>
+                  </a:lnTo>
+                  <a:lnTo>
+                    <a:pt x="5443311" y="2497582"/>
+                  </a:lnTo>
+                  <a:lnTo>
+                    <a:pt x="5371689" y="2490524"/>
+                  </a:lnTo>
+                  <a:lnTo>
+                    <a:pt x="5300066" y="2482903"/>
+                  </a:lnTo>
+                  <a:lnTo>
+                    <a:pt x="5228444" y="2474674"/>
+                  </a:lnTo>
+                  <a:lnTo>
+                    <a:pt x="5156821" y="2465789"/>
+                  </a:lnTo>
+                  <a:lnTo>
+                    <a:pt x="5085199" y="2456195"/>
+                  </a:lnTo>
+                  <a:lnTo>
+                    <a:pt x="5013576" y="2445836"/>
+                  </a:lnTo>
+                  <a:lnTo>
+                    <a:pt x="4941954" y="2434649"/>
+                  </a:lnTo>
+                  <a:lnTo>
+                    <a:pt x="4870331" y="2422571"/>
+                  </a:lnTo>
+                  <a:lnTo>
+                    <a:pt x="4798709" y="2409528"/>
+                  </a:lnTo>
+                  <a:lnTo>
+                    <a:pt x="4727086" y="2395446"/>
+                  </a:lnTo>
+                  <a:lnTo>
+                    <a:pt x="4655464" y="2380239"/>
+                  </a:lnTo>
+                  <a:lnTo>
+                    <a:pt x="4583841" y="2363819"/>
+                  </a:lnTo>
+                  <a:lnTo>
+                    <a:pt x="4512219" y="2346090"/>
+                  </a:lnTo>
+                  <a:lnTo>
+                    <a:pt x="4440596" y="2326946"/>
+                  </a:lnTo>
+                  <a:lnTo>
+                    <a:pt x="4368974" y="2306274"/>
+                  </a:lnTo>
+                  <a:lnTo>
+                    <a:pt x="4297351" y="2283953"/>
+                  </a:lnTo>
+                  <a:lnTo>
+                    <a:pt x="4225729" y="2259851"/>
+                  </a:lnTo>
+                  <a:lnTo>
+                    <a:pt x="4154106" y="2233826"/>
+                  </a:lnTo>
+                  <a:lnTo>
+                    <a:pt x="4082483" y="2205725"/>
+                  </a:lnTo>
+                  <a:lnTo>
+                    <a:pt x="4010861" y="2175382"/>
+                  </a:lnTo>
+                  <a:lnTo>
+                    <a:pt x="3939238" y="2142618"/>
+                  </a:lnTo>
+                  <a:lnTo>
+                    <a:pt x="3867616" y="2107240"/>
+                  </a:lnTo>
+                  <a:lnTo>
+                    <a:pt x="3795993" y="2069039"/>
+                  </a:lnTo>
+                  <a:lnTo>
+                    <a:pt x="3724371" y="2027791"/>
+                  </a:lnTo>
+                  <a:lnTo>
+                    <a:pt x="3652748" y="1983251"/>
+                  </a:lnTo>
+                  <a:lnTo>
+                    <a:pt x="3581126" y="1935158"/>
+                  </a:lnTo>
+                  <a:lnTo>
+                    <a:pt x="3509503" y="1883228"/>
+                  </a:lnTo>
+                  <a:lnTo>
+                    <a:pt x="3437881" y="1827155"/>
+                  </a:lnTo>
+                  <a:lnTo>
+                    <a:pt x="3366258" y="1766608"/>
+                  </a:lnTo>
+                  <a:lnTo>
+                    <a:pt x="3294636" y="1739458"/>
+                  </a:lnTo>
+                  <a:lnTo>
+                    <a:pt x="3223013" y="1718656"/>
+                  </a:lnTo>
+                  <a:lnTo>
+                    <a:pt x="3151391" y="1697342"/>
+                  </a:lnTo>
+                  <a:lnTo>
+                    <a:pt x="3079768" y="1675504"/>
+                  </a:lnTo>
+                  <a:lnTo>
+                    <a:pt x="3008146" y="1653130"/>
+                  </a:lnTo>
+                  <a:lnTo>
+                    <a:pt x="2936523" y="1630206"/>
+                  </a:lnTo>
+                  <a:lnTo>
+                    <a:pt x="2864901" y="1606718"/>
+                  </a:lnTo>
+                  <a:lnTo>
+                    <a:pt x="2793278" y="1582654"/>
+                  </a:lnTo>
+                  <a:lnTo>
+                    <a:pt x="2721655" y="1557998"/>
+                  </a:lnTo>
+                  <a:lnTo>
+                    <a:pt x="2650033" y="1532736"/>
+                  </a:lnTo>
+                  <a:lnTo>
+                    <a:pt x="2578410" y="1506854"/>
+                  </a:lnTo>
+                  <a:lnTo>
+                    <a:pt x="2506788" y="1480336"/>
+                  </a:lnTo>
+                  <a:lnTo>
+                    <a:pt x="2435165" y="1453165"/>
+                  </a:lnTo>
+                  <a:lnTo>
+                    <a:pt x="2363543" y="1425328"/>
+                  </a:lnTo>
+                  <a:lnTo>
+                    <a:pt x="2291920" y="1396806"/>
+                  </a:lnTo>
+                  <a:lnTo>
+                    <a:pt x="2220298" y="1367583"/>
+                  </a:lnTo>
+                  <a:lnTo>
+                    <a:pt x="2148675" y="1337643"/>
+                  </a:lnTo>
+                  <a:lnTo>
+                    <a:pt x="2077053" y="1306966"/>
+                  </a:lnTo>
+                  <a:lnTo>
+                    <a:pt x="2005430" y="1275536"/>
+                  </a:lnTo>
+                  <a:lnTo>
+                    <a:pt x="1933808" y="1243334"/>
+                  </a:lnTo>
+                  <a:lnTo>
+                    <a:pt x="1862185" y="1210340"/>
+                  </a:lnTo>
+                  <a:lnTo>
+                    <a:pt x="1790563" y="1176535"/>
+                  </a:lnTo>
+                  <a:lnTo>
+                    <a:pt x="1718940" y="1141900"/>
+                  </a:lnTo>
+                  <a:lnTo>
+                    <a:pt x="1647318" y="1106414"/>
+                  </a:lnTo>
+                  <a:lnTo>
+                    <a:pt x="1575695" y="1070055"/>
+                  </a:lnTo>
+                  <a:lnTo>
+                    <a:pt x="1504073" y="1032804"/>
+                  </a:lnTo>
+                  <a:lnTo>
+                    <a:pt x="1432450" y="994636"/>
+                  </a:lnTo>
+                  <a:lnTo>
+                    <a:pt x="1360827" y="955531"/>
+                  </a:lnTo>
+                  <a:lnTo>
+                    <a:pt x="1289205" y="915466"/>
+                  </a:lnTo>
+                  <a:lnTo>
+                    <a:pt x="1217582" y="874415"/>
+                  </a:lnTo>
+                  <a:lnTo>
+                    <a:pt x="1145960" y="832356"/>
+                  </a:lnTo>
+                  <a:lnTo>
+                    <a:pt x="1074337" y="789263"/>
+                  </a:lnTo>
+                  <a:lnTo>
+                    <a:pt x="1002715" y="745112"/>
+                  </a:lnTo>
+                  <a:lnTo>
+                    <a:pt x="931092" y="699875"/>
+                  </a:lnTo>
+                  <a:lnTo>
+                    <a:pt x="859470" y="653527"/>
+                  </a:lnTo>
+                  <a:lnTo>
+                    <a:pt x="787847" y="606041"/>
+                  </a:lnTo>
+                  <a:lnTo>
+                    <a:pt x="716225" y="557387"/>
+                  </a:lnTo>
+                  <a:lnTo>
+                    <a:pt x="644602" y="507537"/>
+                  </a:lnTo>
+                  <a:lnTo>
+                    <a:pt x="572980" y="456463"/>
+                  </a:lnTo>
+                  <a:lnTo>
+                    <a:pt x="501357" y="404134"/>
+                  </a:lnTo>
+                  <a:lnTo>
+                    <a:pt x="429735" y="350519"/>
+                  </a:lnTo>
+                  <a:lnTo>
+                    <a:pt x="358112" y="295586"/>
+                  </a:lnTo>
+                  <a:lnTo>
+                    <a:pt x="286490" y="239304"/>
+                  </a:lnTo>
+                  <a:lnTo>
+                    <a:pt x="214867" y="181638"/>
+                  </a:lnTo>
+                  <a:lnTo>
+                    <a:pt x="143245" y="122556"/>
+                  </a:lnTo>
+                  <a:lnTo>
+                    <a:pt x="71622" y="62021"/>
+                  </a:lnTo>
+                  <a:lnTo>
                     <a:pt x="0" y="0"/>
-                  </a:moveTo>
-                  <a:lnTo>
-                    <a:pt x="65070" y="221036"/>
-                  </a:lnTo>
-                  <a:lnTo>
-                    <a:pt x="141702" y="462114"/>
-                  </a:lnTo>
-                  <a:lnTo>
-                    <a:pt x="218335" y="685380"/>
-                  </a:lnTo>
-                  <a:lnTo>
-                    <a:pt x="294967" y="892148"/>
-                  </a:lnTo>
-                  <a:lnTo>
-                    <a:pt x="371600" y="1083639"/>
-                  </a:lnTo>
-                  <a:lnTo>
-                    <a:pt x="448232" y="1260981"/>
-                  </a:lnTo>
-                  <a:lnTo>
-                    <a:pt x="524865" y="1425219"/>
-                  </a:lnTo>
-                  <a:lnTo>
-                    <a:pt x="601498" y="1577321"/>
-                  </a:lnTo>
-                  <a:lnTo>
-                    <a:pt x="678130" y="1718185"/>
-                  </a:lnTo>
-                  <a:lnTo>
-                    <a:pt x="754763" y="1848641"/>
-                  </a:lnTo>
-                  <a:lnTo>
-                    <a:pt x="831395" y="1969457"/>
-                  </a:lnTo>
-                  <a:lnTo>
-                    <a:pt x="908028" y="2081346"/>
-                  </a:lnTo>
-                  <a:lnTo>
-                    <a:pt x="984660" y="2184968"/>
-                  </a:lnTo>
-                  <a:lnTo>
-                    <a:pt x="1061293" y="2280934"/>
-                  </a:lnTo>
-                  <a:lnTo>
-                    <a:pt x="1137925" y="2369808"/>
-                  </a:lnTo>
-                  <a:lnTo>
-                    <a:pt x="1214558" y="2452116"/>
-                  </a:lnTo>
-                  <a:lnTo>
-                    <a:pt x="1291190" y="2528342"/>
-                  </a:lnTo>
-                  <a:lnTo>
-                    <a:pt x="1367823" y="2598936"/>
-                  </a:lnTo>
-                  <a:lnTo>
-                    <a:pt x="1444456" y="2657468"/>
-                  </a:lnTo>
-                  <a:lnTo>
-                    <a:pt x="1521088" y="2677285"/>
-                  </a:lnTo>
-                  <a:lnTo>
-                    <a:pt x="1597721" y="2696627"/>
-                  </a:lnTo>
-                  <a:lnTo>
-                    <a:pt x="1674353" y="2715505"/>
-                  </a:lnTo>
-                  <a:lnTo>
-                    <a:pt x="1750986" y="2733930"/>
-                  </a:lnTo>
-                  <a:lnTo>
-                    <a:pt x="1827618" y="2751913"/>
-                  </a:lnTo>
-                  <a:lnTo>
-                    <a:pt x="1904251" y="2769464"/>
-                  </a:lnTo>
-                  <a:lnTo>
-                    <a:pt x="1980883" y="2786595"/>
-                  </a:lnTo>
-                  <a:lnTo>
-                    <a:pt x="2057516" y="2803315"/>
-                  </a:lnTo>
-                  <a:lnTo>
-                    <a:pt x="2134148" y="2819634"/>
-                  </a:lnTo>
-                  <a:lnTo>
-                    <a:pt x="2210781" y="2835562"/>
-                  </a:lnTo>
-                  <a:lnTo>
-                    <a:pt x="2287414" y="2851107"/>
-                  </a:lnTo>
-                  <a:lnTo>
-                    <a:pt x="2364046" y="2866280"/>
-                  </a:lnTo>
-                  <a:lnTo>
-                    <a:pt x="2440679" y="2881089"/>
-                  </a:lnTo>
-                  <a:lnTo>
-                    <a:pt x="2517311" y="2895543"/>
-                  </a:lnTo>
-                  <a:lnTo>
-                    <a:pt x="2593944" y="2909650"/>
-                  </a:lnTo>
-                  <a:lnTo>
-                    <a:pt x="2670576" y="2923419"/>
-                  </a:lnTo>
-                  <a:lnTo>
-                    <a:pt x="2747209" y="2936857"/>
-                  </a:lnTo>
-                  <a:lnTo>
-                    <a:pt x="2823841" y="2949973"/>
-                  </a:lnTo>
-                  <a:lnTo>
-                    <a:pt x="2900474" y="2962775"/>
-                  </a:lnTo>
-                  <a:lnTo>
-                    <a:pt x="2977107" y="2975269"/>
-                  </a:lnTo>
-                  <a:lnTo>
-                    <a:pt x="3053739" y="2987464"/>
-                  </a:lnTo>
-                  <a:lnTo>
-                    <a:pt x="3130372" y="2999367"/>
-                  </a:lnTo>
-                  <a:lnTo>
-                    <a:pt x="3207004" y="3010984"/>
-                  </a:lnTo>
-                  <a:lnTo>
-                    <a:pt x="3283637" y="3022322"/>
-                  </a:lnTo>
-                  <a:lnTo>
-                    <a:pt x="3360269" y="3033389"/>
-                  </a:lnTo>
-                  <a:lnTo>
-                    <a:pt x="3436902" y="3044190"/>
-                  </a:lnTo>
-                  <a:lnTo>
-                    <a:pt x="3513534" y="3054732"/>
-                  </a:lnTo>
-                  <a:lnTo>
-                    <a:pt x="3590167" y="3065021"/>
-                  </a:lnTo>
-                  <a:lnTo>
-                    <a:pt x="3666799" y="3075063"/>
-                  </a:lnTo>
-                  <a:lnTo>
-                    <a:pt x="3743432" y="3084865"/>
-                  </a:lnTo>
-                  <a:lnTo>
-                    <a:pt x="3820065" y="3094432"/>
-                  </a:lnTo>
-                  <a:lnTo>
-                    <a:pt x="3896697" y="3103769"/>
-                  </a:lnTo>
-                  <a:lnTo>
-                    <a:pt x="3973330" y="3112882"/>
-                  </a:lnTo>
-                  <a:lnTo>
-                    <a:pt x="4049962" y="3121776"/>
-                  </a:lnTo>
-                  <a:lnTo>
-                    <a:pt x="4126595" y="3130457"/>
-                  </a:lnTo>
-                  <a:lnTo>
-                    <a:pt x="4203227" y="3138931"/>
-                  </a:lnTo>
-                  <a:lnTo>
-                    <a:pt x="4279860" y="3147200"/>
-                  </a:lnTo>
-                  <a:lnTo>
-                    <a:pt x="4356492" y="3155272"/>
-                  </a:lnTo>
-                  <a:lnTo>
-                    <a:pt x="4433125" y="3163150"/>
-                  </a:lnTo>
-                  <a:lnTo>
-                    <a:pt x="4509758" y="3170839"/>
-                  </a:lnTo>
-                  <a:lnTo>
-                    <a:pt x="4586390" y="3178343"/>
-                  </a:lnTo>
-                  <a:lnTo>
-                    <a:pt x="4663023" y="3185668"/>
-                  </a:lnTo>
-                  <a:lnTo>
-                    <a:pt x="4739655" y="3192817"/>
-                  </a:lnTo>
-                  <a:lnTo>
-                    <a:pt x="4816288" y="3199794"/>
-                  </a:lnTo>
-                  <a:lnTo>
-                    <a:pt x="4892920" y="3206604"/>
-                  </a:lnTo>
-                  <a:lnTo>
-                    <a:pt x="4969553" y="3213251"/>
-                  </a:lnTo>
-                  <a:lnTo>
-                    <a:pt x="5046185" y="3219738"/>
-                  </a:lnTo>
-                  <a:lnTo>
-                    <a:pt x="5122818" y="3226070"/>
-                  </a:lnTo>
-                  <a:lnTo>
-                    <a:pt x="5199450" y="3232250"/>
-                  </a:lnTo>
-                  <a:lnTo>
-                    <a:pt x="5276083" y="3238282"/>
-                  </a:lnTo>
-                  <a:lnTo>
-                    <a:pt x="5352716" y="3244169"/>
-                  </a:lnTo>
-                  <a:lnTo>
-                    <a:pt x="5429348" y="3249915"/>
                   </a:lnTo>
                 </a:path>
               </a:pathLst>
@@ -3784,577 +4072,258 @@
           </p:nvSpPr>
           <p:spPr>
             <a:xfrm>
-              <a:off x="817517" y="3116566"/>
-              <a:ext cx="7403783" cy="2425548"/>
+              <a:off x="2492806" y="2073503"/>
+              <a:ext cx="5769872" cy="3424256"/>
             </a:xfrm>
             <a:custGeom>
               <a:avLst/>
               <a:pathLst>
-                <a:path w="7403783" h="2425548">
-                  <a:moveTo>
-                    <a:pt x="7403783" y="2425548"/>
-                  </a:moveTo>
-                  <a:lnTo>
-                    <a:pt x="7327150" y="2424340"/>
-                  </a:lnTo>
-                  <a:lnTo>
-                    <a:pt x="7250518" y="2423036"/>
-                  </a:lnTo>
-                  <a:lnTo>
-                    <a:pt x="7173885" y="2421628"/>
-                  </a:lnTo>
-                  <a:lnTo>
-                    <a:pt x="7097253" y="2420108"/>
-                  </a:lnTo>
-                  <a:lnTo>
-                    <a:pt x="7020620" y="2418467"/>
-                  </a:lnTo>
-                  <a:lnTo>
-                    <a:pt x="6943987" y="2416694"/>
-                  </a:lnTo>
-                  <a:lnTo>
-                    <a:pt x="6867355" y="2414780"/>
-                  </a:lnTo>
-                  <a:lnTo>
-                    <a:pt x="6790722" y="2412714"/>
-                  </a:lnTo>
-                  <a:lnTo>
-                    <a:pt x="6714090" y="2410482"/>
-                  </a:lnTo>
-                  <a:lnTo>
-                    <a:pt x="6637457" y="2408072"/>
-                  </a:lnTo>
-                  <a:lnTo>
-                    <a:pt x="6560825" y="2405471"/>
-                  </a:lnTo>
-                  <a:lnTo>
-                    <a:pt x="6484192" y="2402661"/>
-                  </a:lnTo>
-                  <a:lnTo>
-                    <a:pt x="6407560" y="2399628"/>
-                  </a:lnTo>
-                  <a:lnTo>
-                    <a:pt x="6330927" y="2396352"/>
-                  </a:lnTo>
-                  <a:lnTo>
-                    <a:pt x="6254294" y="2392815"/>
-                  </a:lnTo>
-                  <a:lnTo>
-                    <a:pt x="6177662" y="2388996"/>
-                  </a:lnTo>
-                  <a:lnTo>
-                    <a:pt x="6101029" y="2384872"/>
-                  </a:lnTo>
-                  <a:lnTo>
-                    <a:pt x="6024397" y="2380419"/>
-                  </a:lnTo>
-                  <a:lnTo>
-                    <a:pt x="5947764" y="2375611"/>
-                  </a:lnTo>
-                  <a:lnTo>
-                    <a:pt x="5871132" y="2370420"/>
-                  </a:lnTo>
-                  <a:lnTo>
-                    <a:pt x="5794499" y="2364814"/>
-                  </a:lnTo>
-                  <a:lnTo>
-                    <a:pt x="5717867" y="2358760"/>
-                  </a:lnTo>
-                  <a:lnTo>
-                    <a:pt x="5641234" y="2352224"/>
-                  </a:lnTo>
-                  <a:lnTo>
-                    <a:pt x="5564602" y="2345167"/>
-                  </a:lnTo>
-                  <a:lnTo>
-                    <a:pt x="5487969" y="2337546"/>
-                  </a:lnTo>
-                  <a:lnTo>
-                    <a:pt x="5411336" y="2329317"/>
-                  </a:lnTo>
-                  <a:lnTo>
-                    <a:pt x="5334704" y="2320432"/>
-                  </a:lnTo>
-                  <a:lnTo>
-                    <a:pt x="5258071" y="2310838"/>
-                  </a:lnTo>
-                  <a:lnTo>
-                    <a:pt x="5181439" y="2300478"/>
-                  </a:lnTo>
-                  <a:lnTo>
-                    <a:pt x="5104806" y="2289292"/>
-                  </a:lnTo>
-                  <a:lnTo>
-                    <a:pt x="5028174" y="2277214"/>
-                  </a:lnTo>
-                  <a:lnTo>
-                    <a:pt x="4951541" y="2264171"/>
-                  </a:lnTo>
-                  <a:lnTo>
-                    <a:pt x="4874909" y="2250088"/>
-                  </a:lnTo>
-                  <a:lnTo>
-                    <a:pt x="4798276" y="2234882"/>
-                  </a:lnTo>
-                  <a:lnTo>
-                    <a:pt x="4721644" y="2218462"/>
-                  </a:lnTo>
-                  <a:lnTo>
-                    <a:pt x="4645011" y="2200733"/>
-                  </a:lnTo>
-                  <a:lnTo>
-                    <a:pt x="4568378" y="2181588"/>
-                  </a:lnTo>
-                  <a:lnTo>
-                    <a:pt x="4491746" y="2160917"/>
-                  </a:lnTo>
-                  <a:lnTo>
-                    <a:pt x="4415113" y="2138596"/>
-                  </a:lnTo>
-                  <a:lnTo>
-                    <a:pt x="4338481" y="2114494"/>
-                  </a:lnTo>
-                  <a:lnTo>
-                    <a:pt x="4261848" y="2088469"/>
-                  </a:lnTo>
-                  <a:lnTo>
-                    <a:pt x="4185216" y="2060368"/>
-                  </a:lnTo>
-                  <a:lnTo>
-                    <a:pt x="4108583" y="2030025"/>
-                  </a:lnTo>
-                  <a:lnTo>
-                    <a:pt x="4031951" y="1997261"/>
-                  </a:lnTo>
-                  <a:lnTo>
-                    <a:pt x="3955318" y="1961883"/>
-                  </a:lnTo>
-                  <a:lnTo>
-                    <a:pt x="3878685" y="1923682"/>
-                  </a:lnTo>
-                  <a:lnTo>
-                    <a:pt x="3802053" y="1882434"/>
-                  </a:lnTo>
-                  <a:lnTo>
-                    <a:pt x="3725420" y="1837894"/>
-                  </a:lnTo>
-                  <a:lnTo>
-                    <a:pt x="3648788" y="1789801"/>
-                  </a:lnTo>
-                  <a:lnTo>
-                    <a:pt x="3572155" y="1737871"/>
-                  </a:lnTo>
-                  <a:lnTo>
-                    <a:pt x="3495523" y="1681798"/>
-                  </a:lnTo>
-                  <a:lnTo>
-                    <a:pt x="3418890" y="1621251"/>
-                  </a:lnTo>
-                  <a:lnTo>
-                    <a:pt x="3342258" y="1594101"/>
-                  </a:lnTo>
-                  <a:lnTo>
-                    <a:pt x="3265625" y="1573299"/>
-                  </a:lnTo>
-                  <a:lnTo>
-                    <a:pt x="3188993" y="1551985"/>
-                  </a:lnTo>
-                  <a:lnTo>
-                    <a:pt x="3112360" y="1530147"/>
-                  </a:lnTo>
-                  <a:lnTo>
-                    <a:pt x="3035727" y="1507773"/>
-                  </a:lnTo>
-                  <a:lnTo>
-                    <a:pt x="2959095" y="1484849"/>
-                  </a:lnTo>
-                  <a:lnTo>
-                    <a:pt x="2882462" y="1461361"/>
-                  </a:lnTo>
-                  <a:lnTo>
-                    <a:pt x="2805830" y="1437297"/>
-                  </a:lnTo>
-                  <a:lnTo>
-                    <a:pt x="2729197" y="1412641"/>
-                  </a:lnTo>
-                  <a:lnTo>
-                    <a:pt x="2652565" y="1387379"/>
-                  </a:lnTo>
-                  <a:lnTo>
-                    <a:pt x="2575932" y="1361497"/>
-                  </a:lnTo>
-                  <a:lnTo>
-                    <a:pt x="2499300" y="1334978"/>
-                  </a:lnTo>
-                  <a:lnTo>
-                    <a:pt x="2422667" y="1307808"/>
-                  </a:lnTo>
-                  <a:lnTo>
-                    <a:pt x="2346034" y="1279971"/>
-                  </a:lnTo>
-                  <a:lnTo>
-                    <a:pt x="2269402" y="1251449"/>
-                  </a:lnTo>
-                  <a:lnTo>
-                    <a:pt x="2192769" y="1222226"/>
-                  </a:lnTo>
-                  <a:lnTo>
-                    <a:pt x="2116137" y="1192286"/>
-                  </a:lnTo>
-                  <a:lnTo>
-                    <a:pt x="2039504" y="1161609"/>
-                  </a:lnTo>
-                  <a:lnTo>
-                    <a:pt x="1962872" y="1130179"/>
-                  </a:lnTo>
-                  <a:lnTo>
-                    <a:pt x="1886239" y="1097976"/>
-                  </a:lnTo>
-                  <a:lnTo>
-                    <a:pt x="1809607" y="1064983"/>
-                  </a:lnTo>
-                  <a:lnTo>
-                    <a:pt x="1732974" y="1031178"/>
-                  </a:lnTo>
-                  <a:lnTo>
-                    <a:pt x="1656342" y="996543"/>
-                  </a:lnTo>
-                  <a:lnTo>
-                    <a:pt x="1579709" y="961056"/>
-                  </a:lnTo>
-                  <a:lnTo>
-                    <a:pt x="1503076" y="924698"/>
-                  </a:lnTo>
-                  <a:lnTo>
-                    <a:pt x="1426444" y="887446"/>
-                  </a:lnTo>
-                  <a:lnTo>
-                    <a:pt x="1349811" y="849279"/>
-                  </a:lnTo>
-                  <a:lnTo>
-                    <a:pt x="1273179" y="810174"/>
-                  </a:lnTo>
-                  <a:lnTo>
-                    <a:pt x="1196546" y="770108"/>
-                  </a:lnTo>
-                  <a:lnTo>
-                    <a:pt x="1119914" y="729058"/>
-                  </a:lnTo>
-                  <a:lnTo>
-                    <a:pt x="1043281" y="686999"/>
-                  </a:lnTo>
-                  <a:lnTo>
-                    <a:pt x="966649" y="643906"/>
-                  </a:lnTo>
-                  <a:lnTo>
-                    <a:pt x="890016" y="599755"/>
-                  </a:lnTo>
-                  <a:lnTo>
-                    <a:pt x="813384" y="554518"/>
-                  </a:lnTo>
-                  <a:lnTo>
-                    <a:pt x="736751" y="508170"/>
-                  </a:lnTo>
-                  <a:lnTo>
-                    <a:pt x="660118" y="460683"/>
-                  </a:lnTo>
-                  <a:lnTo>
-                    <a:pt x="583486" y="412030"/>
-                  </a:lnTo>
-                  <a:lnTo>
-                    <a:pt x="506853" y="362180"/>
-                  </a:lnTo>
-                  <a:lnTo>
-                    <a:pt x="430221" y="311106"/>
-                  </a:lnTo>
-                  <a:lnTo>
-                    <a:pt x="353588" y="258777"/>
-                  </a:lnTo>
-                  <a:lnTo>
-                    <a:pt x="276956" y="205161"/>
-                  </a:lnTo>
-                  <a:lnTo>
-                    <a:pt x="200323" y="150229"/>
-                  </a:lnTo>
-                  <a:lnTo>
-                    <a:pt x="123691" y="93946"/>
-                  </a:lnTo>
-                  <a:lnTo>
-                    <a:pt x="47058" y="36281"/>
-                  </a:lnTo>
-                  <a:lnTo>
-                    <a:pt x="0" y="0"/>
-                  </a:lnTo>
-                </a:path>
-              </a:pathLst>
-            </a:custGeom>
-          </p:spPr>
-          <p:txBody>
-            <a:bodyPr/>
-            <a:lstStyle/>
-            <a:p/>
-          </p:txBody>
-        </p:sp>
-        <p:sp>
-          <p:nvSpPr>
-            <p:cNvPr id="24" name="pl24"/>
-            <p:cNvSpPr/>
-            <p:nvPr/>
-          </p:nvSpPr>
-          <p:spPr>
-            <a:xfrm>
-              <a:off x="2047823" y="2073503"/>
-              <a:ext cx="6173477" cy="3424256"/>
-            </a:xfrm>
-            <a:custGeom>
-              <a:avLst/>
-              <a:pathLst>
-                <a:path w="6173477" h="3424256">
+                <a:path w="5769872" h="3424256">
                   <a:moveTo>
                     <a:pt x="0" y="0"/>
                   </a:moveTo>
                   <a:lnTo>
-                    <a:pt x="42873" y="98146"/>
-                  </a:lnTo>
-                  <a:lnTo>
-                    <a:pt x="119505" y="264933"/>
-                  </a:lnTo>
-                  <a:lnTo>
-                    <a:pt x="196138" y="423503"/>
-                  </a:lnTo>
-                  <a:lnTo>
-                    <a:pt x="272771" y="574262"/>
-                  </a:lnTo>
-                  <a:lnTo>
-                    <a:pt x="349403" y="717593"/>
-                  </a:lnTo>
-                  <a:lnTo>
-                    <a:pt x="426036" y="853864"/>
-                  </a:lnTo>
-                  <a:lnTo>
-                    <a:pt x="502668" y="983421"/>
-                  </a:lnTo>
-                  <a:lnTo>
-                    <a:pt x="579301" y="1106596"/>
-                  </a:lnTo>
-                  <a:lnTo>
-                    <a:pt x="655933" y="1223703"/>
-                  </a:lnTo>
-                  <a:lnTo>
-                    <a:pt x="732566" y="1335041"/>
-                  </a:lnTo>
-                  <a:lnTo>
-                    <a:pt x="809198" y="1440893"/>
-                  </a:lnTo>
-                  <a:lnTo>
-                    <a:pt x="885831" y="1541532"/>
-                  </a:lnTo>
-                  <a:lnTo>
-                    <a:pt x="962464" y="1637212"/>
-                  </a:lnTo>
-                  <a:lnTo>
-                    <a:pt x="1039096" y="1728179"/>
-                  </a:lnTo>
-                  <a:lnTo>
-                    <a:pt x="1115729" y="1814664"/>
-                  </a:lnTo>
-                  <a:lnTo>
-                    <a:pt x="1192361" y="1896889"/>
-                  </a:lnTo>
-                  <a:lnTo>
-                    <a:pt x="1268994" y="1975063"/>
-                  </a:lnTo>
-                  <a:lnTo>
-                    <a:pt x="1345626" y="2049387"/>
-                  </a:lnTo>
-                  <a:lnTo>
-                    <a:pt x="1422259" y="2120048"/>
-                  </a:lnTo>
-                  <a:lnTo>
-                    <a:pt x="1498891" y="2187229"/>
-                  </a:lnTo>
-                  <a:lnTo>
-                    <a:pt x="1575524" y="2251100"/>
-                  </a:lnTo>
-                  <a:lnTo>
-                    <a:pt x="1652156" y="2311824"/>
-                  </a:lnTo>
-                  <a:lnTo>
-                    <a:pt x="1728789" y="2369557"/>
-                  </a:lnTo>
-                  <a:lnTo>
-                    <a:pt x="1805422" y="2424446"/>
-                  </a:lnTo>
-                  <a:lnTo>
-                    <a:pt x="1882054" y="2476631"/>
-                  </a:lnTo>
-                  <a:lnTo>
-                    <a:pt x="1958687" y="2526245"/>
-                  </a:lnTo>
-                  <a:lnTo>
-                    <a:pt x="2035319" y="2573415"/>
-                  </a:lnTo>
-                  <a:lnTo>
-                    <a:pt x="2111952" y="2618261"/>
-                  </a:lnTo>
-                  <a:lnTo>
-                    <a:pt x="2188584" y="2660898"/>
-                  </a:lnTo>
-                  <a:lnTo>
-                    <a:pt x="2265217" y="2701435"/>
-                  </a:lnTo>
-                  <a:lnTo>
-                    <a:pt x="2341849" y="2739974"/>
-                  </a:lnTo>
-                  <a:lnTo>
-                    <a:pt x="2418482" y="2776615"/>
-                  </a:lnTo>
-                  <a:lnTo>
-                    <a:pt x="2495114" y="2811451"/>
-                  </a:lnTo>
-                  <a:lnTo>
-                    <a:pt x="2571747" y="2844570"/>
-                  </a:lnTo>
-                  <a:lnTo>
-                    <a:pt x="2648380" y="2876059"/>
-                  </a:lnTo>
-                  <a:lnTo>
-                    <a:pt x="2725012" y="2905995"/>
-                  </a:lnTo>
-                  <a:lnTo>
-                    <a:pt x="2801645" y="2934457"/>
-                  </a:lnTo>
-                  <a:lnTo>
-                    <a:pt x="2878277" y="2961517"/>
-                  </a:lnTo>
-                  <a:lnTo>
-                    <a:pt x="2954910" y="2987244"/>
-                  </a:lnTo>
-                  <a:lnTo>
-                    <a:pt x="3031542" y="3011704"/>
-                  </a:lnTo>
-                  <a:lnTo>
-                    <a:pt x="3108175" y="3034958"/>
-                  </a:lnTo>
-                  <a:lnTo>
-                    <a:pt x="3184807" y="3057067"/>
-                  </a:lnTo>
-                  <a:lnTo>
-                    <a:pt x="3261440" y="3078087"/>
-                  </a:lnTo>
-                  <a:lnTo>
-                    <a:pt x="3338073" y="3098071"/>
-                  </a:lnTo>
-                  <a:lnTo>
-                    <a:pt x="3414705" y="3117071"/>
-                  </a:lnTo>
-                  <a:lnTo>
-                    <a:pt x="3491338" y="3135135"/>
-                  </a:lnTo>
-                  <a:lnTo>
-                    <a:pt x="3567970" y="3152308"/>
-                  </a:lnTo>
-                  <a:lnTo>
-                    <a:pt x="3644603" y="3168636"/>
-                  </a:lnTo>
-                  <a:lnTo>
-                    <a:pt x="3721235" y="3184160"/>
-                  </a:lnTo>
-                  <a:lnTo>
-                    <a:pt x="3797868" y="3198918"/>
-                  </a:lnTo>
-                  <a:lnTo>
-                    <a:pt x="3874500" y="3212950"/>
-                  </a:lnTo>
-                  <a:lnTo>
-                    <a:pt x="3951133" y="3226290"/>
-                  </a:lnTo>
-                  <a:lnTo>
-                    <a:pt x="4027765" y="3238974"/>
-                  </a:lnTo>
-                  <a:lnTo>
-                    <a:pt x="4104398" y="3251032"/>
-                  </a:lnTo>
-                  <a:lnTo>
-                    <a:pt x="4181031" y="3262496"/>
-                  </a:lnTo>
-                  <a:lnTo>
-                    <a:pt x="4257663" y="3273396"/>
-                  </a:lnTo>
-                  <a:lnTo>
-                    <a:pt x="4334296" y="3283758"/>
-                  </a:lnTo>
-                  <a:lnTo>
-                    <a:pt x="4410928" y="3293611"/>
-                  </a:lnTo>
-                  <a:lnTo>
-                    <a:pt x="4487561" y="3302977"/>
-                  </a:lnTo>
-                  <a:lnTo>
-                    <a:pt x="4564193" y="3311883"/>
-                  </a:lnTo>
-                  <a:lnTo>
-                    <a:pt x="4640826" y="3320349"/>
-                  </a:lnTo>
-                  <a:lnTo>
-                    <a:pt x="4717458" y="3328399"/>
-                  </a:lnTo>
-                  <a:lnTo>
-                    <a:pt x="4794091" y="3336052"/>
-                  </a:lnTo>
-                  <a:lnTo>
-                    <a:pt x="4870724" y="3343328"/>
-                  </a:lnTo>
-                  <a:lnTo>
-                    <a:pt x="4947356" y="3350245"/>
-                  </a:lnTo>
-                  <a:lnTo>
-                    <a:pt x="5023989" y="3356822"/>
-                  </a:lnTo>
-                  <a:lnTo>
-                    <a:pt x="5100621" y="3363075"/>
-                  </a:lnTo>
-                  <a:lnTo>
-                    <a:pt x="5177254" y="3369019"/>
-                  </a:lnTo>
-                  <a:lnTo>
-                    <a:pt x="5253886" y="3374671"/>
-                  </a:lnTo>
-                  <a:lnTo>
-                    <a:pt x="5330519" y="3380045"/>
-                  </a:lnTo>
-                  <a:lnTo>
-                    <a:pt x="5407151" y="3385153"/>
-                  </a:lnTo>
-                  <a:lnTo>
-                    <a:pt x="5483784" y="3390011"/>
-                  </a:lnTo>
-                  <a:lnTo>
-                    <a:pt x="5560416" y="3394628"/>
-                  </a:lnTo>
-                  <a:lnTo>
-                    <a:pt x="5637049" y="3399019"/>
-                  </a:lnTo>
-                  <a:lnTo>
-                    <a:pt x="5713682" y="3403193"/>
-                  </a:lnTo>
-                  <a:lnTo>
-                    <a:pt x="5790314" y="3407161"/>
-                  </a:lnTo>
-                  <a:lnTo>
-                    <a:pt x="5866947" y="3410934"/>
-                  </a:lnTo>
-                  <a:lnTo>
-                    <a:pt x="5943579" y="3414521"/>
-                  </a:lnTo>
-                  <a:lnTo>
-                    <a:pt x="6020212" y="3417931"/>
-                  </a:lnTo>
-                  <a:lnTo>
-                    <a:pt x="6096844" y="3421173"/>
-                  </a:lnTo>
-                  <a:lnTo>
-                    <a:pt x="6173477" y="3424256"/>
+                    <a:pt x="40070" y="98146"/>
+                  </a:lnTo>
+                  <a:lnTo>
+                    <a:pt x="111693" y="264933"/>
+                  </a:lnTo>
+                  <a:lnTo>
+                    <a:pt x="183315" y="423503"/>
+                  </a:lnTo>
+                  <a:lnTo>
+                    <a:pt x="254938" y="574262"/>
+                  </a:lnTo>
+                  <a:lnTo>
+                    <a:pt x="326560" y="717593"/>
+                  </a:lnTo>
+                  <a:lnTo>
+                    <a:pt x="398183" y="853864"/>
+                  </a:lnTo>
+                  <a:lnTo>
+                    <a:pt x="469805" y="983421"/>
+                  </a:lnTo>
+                  <a:lnTo>
+                    <a:pt x="541428" y="1106596"/>
+                  </a:lnTo>
+                  <a:lnTo>
+                    <a:pt x="613050" y="1223703"/>
+                  </a:lnTo>
+                  <a:lnTo>
+                    <a:pt x="684673" y="1335041"/>
+                  </a:lnTo>
+                  <a:lnTo>
+                    <a:pt x="756295" y="1440893"/>
+                  </a:lnTo>
+                  <a:lnTo>
+                    <a:pt x="827918" y="1541532"/>
+                  </a:lnTo>
+                  <a:lnTo>
+                    <a:pt x="899540" y="1637212"/>
+                  </a:lnTo>
+                  <a:lnTo>
+                    <a:pt x="971163" y="1728179"/>
+                  </a:lnTo>
+                  <a:lnTo>
+                    <a:pt x="1042785" y="1814664"/>
+                  </a:lnTo>
+                  <a:lnTo>
+                    <a:pt x="1114408" y="1896889"/>
+                  </a:lnTo>
+                  <a:lnTo>
+                    <a:pt x="1186030" y="1975063"/>
+                  </a:lnTo>
+                  <a:lnTo>
+                    <a:pt x="1257653" y="2049387"/>
+                  </a:lnTo>
+                  <a:lnTo>
+                    <a:pt x="1329275" y="2120048"/>
+                  </a:lnTo>
+                  <a:lnTo>
+                    <a:pt x="1400898" y="2187229"/>
+                  </a:lnTo>
+                  <a:lnTo>
+                    <a:pt x="1472521" y="2251100"/>
+                  </a:lnTo>
+                  <a:lnTo>
+                    <a:pt x="1544143" y="2311824"/>
+                  </a:lnTo>
+                  <a:lnTo>
+                    <a:pt x="1615766" y="2369557"/>
+                  </a:lnTo>
+                  <a:lnTo>
+                    <a:pt x="1687388" y="2424446"/>
+                  </a:lnTo>
+                  <a:lnTo>
+                    <a:pt x="1759011" y="2476631"/>
+                  </a:lnTo>
+                  <a:lnTo>
+                    <a:pt x="1830633" y="2526245"/>
+                  </a:lnTo>
+                  <a:lnTo>
+                    <a:pt x="1902256" y="2573415"/>
+                  </a:lnTo>
+                  <a:lnTo>
+                    <a:pt x="1973878" y="2618261"/>
+                  </a:lnTo>
+                  <a:lnTo>
+                    <a:pt x="2045501" y="2660898"/>
+                  </a:lnTo>
+                  <a:lnTo>
+                    <a:pt x="2117123" y="2701435"/>
+                  </a:lnTo>
+                  <a:lnTo>
+                    <a:pt x="2188746" y="2739974"/>
+                  </a:lnTo>
+                  <a:lnTo>
+                    <a:pt x="2260368" y="2776615"/>
+                  </a:lnTo>
+                  <a:lnTo>
+                    <a:pt x="2331991" y="2811451"/>
+                  </a:lnTo>
+                  <a:lnTo>
+                    <a:pt x="2403613" y="2844570"/>
+                  </a:lnTo>
+                  <a:lnTo>
+                    <a:pt x="2475236" y="2876059"/>
+                  </a:lnTo>
+                  <a:lnTo>
+                    <a:pt x="2546858" y="2905995"/>
+                  </a:lnTo>
+                  <a:lnTo>
+                    <a:pt x="2618481" y="2934457"/>
+                  </a:lnTo>
+                  <a:lnTo>
+                    <a:pt x="2690103" y="2961517"/>
+                  </a:lnTo>
+                  <a:lnTo>
+                    <a:pt x="2761726" y="2987244"/>
+                  </a:lnTo>
+                  <a:lnTo>
+                    <a:pt x="2833349" y="3011704"/>
+                  </a:lnTo>
+                  <a:lnTo>
+                    <a:pt x="2904971" y="3034958"/>
+                  </a:lnTo>
+                  <a:lnTo>
+                    <a:pt x="2976594" y="3057067"/>
+                  </a:lnTo>
+                  <a:lnTo>
+                    <a:pt x="3048216" y="3078087"/>
+                  </a:lnTo>
+                  <a:lnTo>
+                    <a:pt x="3119839" y="3098071"/>
+                  </a:lnTo>
+                  <a:lnTo>
+                    <a:pt x="3191461" y="3117071"/>
+                  </a:lnTo>
+                  <a:lnTo>
+                    <a:pt x="3263084" y="3135135"/>
+                  </a:lnTo>
+                  <a:lnTo>
+                    <a:pt x="3334706" y="3152308"/>
+                  </a:lnTo>
+                  <a:lnTo>
+                    <a:pt x="3406329" y="3168636"/>
+                  </a:lnTo>
+                  <a:lnTo>
+                    <a:pt x="3477951" y="3184160"/>
+                  </a:lnTo>
+                  <a:lnTo>
+                    <a:pt x="3549574" y="3198918"/>
+                  </a:lnTo>
+                  <a:lnTo>
+                    <a:pt x="3621196" y="3212950"/>
+                  </a:lnTo>
+                  <a:lnTo>
+                    <a:pt x="3692819" y="3226290"/>
+                  </a:lnTo>
+                  <a:lnTo>
+                    <a:pt x="3764441" y="3238974"/>
+                  </a:lnTo>
+                  <a:lnTo>
+                    <a:pt x="3836064" y="3251032"/>
+                  </a:lnTo>
+                  <a:lnTo>
+                    <a:pt x="3907686" y="3262496"/>
+                  </a:lnTo>
+                  <a:lnTo>
+                    <a:pt x="3979309" y="3273396"/>
+                  </a:lnTo>
+                  <a:lnTo>
+                    <a:pt x="4050931" y="3283758"/>
+                  </a:lnTo>
+                  <a:lnTo>
+                    <a:pt x="4122554" y="3293611"/>
+                  </a:lnTo>
+                  <a:lnTo>
+                    <a:pt x="4194177" y="3302977"/>
+                  </a:lnTo>
+                  <a:lnTo>
+                    <a:pt x="4265799" y="3311883"/>
+                  </a:lnTo>
+                  <a:lnTo>
+                    <a:pt x="4337422" y="3320349"/>
+                  </a:lnTo>
+                  <a:lnTo>
+                    <a:pt x="4409044" y="3328399"/>
+                  </a:lnTo>
+                  <a:lnTo>
+                    <a:pt x="4480667" y="3336052"/>
+                  </a:lnTo>
+                  <a:lnTo>
+                    <a:pt x="4552289" y="3343328"/>
+                  </a:lnTo>
+                  <a:lnTo>
+                    <a:pt x="4623912" y="3350245"/>
+                  </a:lnTo>
+                  <a:lnTo>
+                    <a:pt x="4695534" y="3356822"/>
+                  </a:lnTo>
+                  <a:lnTo>
+                    <a:pt x="4767157" y="3363075"/>
+                  </a:lnTo>
+                  <a:lnTo>
+                    <a:pt x="4838779" y="3369019"/>
+                  </a:lnTo>
+                  <a:lnTo>
+                    <a:pt x="4910402" y="3374671"/>
+                  </a:lnTo>
+                  <a:lnTo>
+                    <a:pt x="4982024" y="3380045"/>
+                  </a:lnTo>
+                  <a:lnTo>
+                    <a:pt x="5053647" y="3385153"/>
+                  </a:lnTo>
+                  <a:lnTo>
+                    <a:pt x="5125269" y="3390011"/>
+                  </a:lnTo>
+                  <a:lnTo>
+                    <a:pt x="5196892" y="3394628"/>
+                  </a:lnTo>
+                  <a:lnTo>
+                    <a:pt x="5268514" y="3399019"/>
+                  </a:lnTo>
+                  <a:lnTo>
+                    <a:pt x="5340137" y="3403193"/>
+                  </a:lnTo>
+                  <a:lnTo>
+                    <a:pt x="5411759" y="3407161"/>
+                  </a:lnTo>
+                  <a:lnTo>
+                    <a:pt x="5483382" y="3410934"/>
+                  </a:lnTo>
+                  <a:lnTo>
+                    <a:pt x="5555004" y="3414521"/>
+                  </a:lnTo>
+                  <a:lnTo>
+                    <a:pt x="5626627" y="3417931"/>
+                  </a:lnTo>
+                  <a:lnTo>
+                    <a:pt x="5698250" y="3421173"/>
+                  </a:lnTo>
+                  <a:lnTo>
+                    <a:pt x="5769872" y="3424256"/>
                   </a:lnTo>
                 </a:path>
               </a:pathLst>
@@ -4377,7 +4346,7 @@
         </p:sp>
         <p:sp>
           <p:nvSpPr>
-            <p:cNvPr id="25" name="pl25"/>
+            <p:cNvPr id="24" name="pl24"/>
             <p:cNvSpPr/>
             <p:nvPr/>
           </p:nvSpPr>
@@ -4420,13 +4389,13 @@
         </p:sp>
         <p:sp>
           <p:nvSpPr>
-            <p:cNvPr id="26" name="pl26"/>
+            <p:cNvPr id="25" name="pl25"/>
             <p:cNvSpPr/>
             <p:nvPr/>
           </p:nvSpPr>
           <p:spPr>
             <a:xfrm>
-              <a:off x="4224261" y="2073503"/>
+              <a:off x="4526955" y="2073503"/>
               <a:ext cx="0" cy="3649639"/>
             </a:xfrm>
             <a:custGeom>
@@ -4463,7 +4432,7 @@
         </p:sp>
         <p:sp>
           <p:nvSpPr>
-            <p:cNvPr id="27" name="tx27"/>
+            <p:cNvPr id="26" name="tx26"/>
             <p:cNvSpPr/>
             <p:nvPr/>
           </p:nvSpPr>
@@ -4509,7 +4478,7 @@
         </p:sp>
         <p:sp>
           <p:nvSpPr>
-            <p:cNvPr id="28" name="tx28"/>
+            <p:cNvPr id="27" name="tx27"/>
             <p:cNvSpPr/>
             <p:nvPr/>
           </p:nvSpPr>
@@ -4555,7 +4524,7 @@
         </p:sp>
         <p:sp>
           <p:nvSpPr>
-            <p:cNvPr id="29" name="tx29"/>
+            <p:cNvPr id="28" name="tx28"/>
             <p:cNvSpPr/>
             <p:nvPr/>
           </p:nvSpPr>
@@ -4601,7 +4570,7 @@
         </p:sp>
         <p:sp>
           <p:nvSpPr>
-            <p:cNvPr id="30" name="tx30"/>
+            <p:cNvPr id="29" name="tx29"/>
             <p:cNvSpPr/>
             <p:nvPr/>
           </p:nvSpPr>
@@ -4647,7 +4616,7 @@
         </p:sp>
         <p:sp>
           <p:nvSpPr>
-            <p:cNvPr id="31" name="tx31"/>
+            <p:cNvPr id="30" name="tx30"/>
             <p:cNvSpPr/>
             <p:nvPr/>
           </p:nvSpPr>
@@ -4693,14 +4662,14 @@
         </p:sp>
         <p:sp>
           <p:nvSpPr>
-            <p:cNvPr id="32" name="tx32"/>
+            <p:cNvPr id="31" name="tx31"/>
             <p:cNvSpPr/>
             <p:nvPr/>
           </p:nvSpPr>
           <p:spPr>
             <a:xfrm>
-              <a:off x="2423864" y="5785772"/>
-              <a:ext cx="155356" cy="80101"/>
+              <a:off x="2421884" y="5785772"/>
+              <a:ext cx="161574" cy="80101"/>
             </a:xfrm>
             <a:prstGeom prst="rect">
               <a:avLst/>
@@ -4732,21 +4701,21 @@
                   <a:latin typeface="Helvetica"/>
                   <a:cs typeface="Helvetica"/>
                 </a:rPr>
-                <a:t>0.8</a:t>
+                <a:t>-25</a:t>
               </a:r>
             </a:p>
           </p:txBody>
         </p:sp>
         <p:sp>
           <p:nvSpPr>
-            <p:cNvPr id="33" name="tx33"/>
+            <p:cNvPr id="32" name="tx32"/>
             <p:cNvSpPr/>
             <p:nvPr/>
           </p:nvSpPr>
           <p:spPr>
             <a:xfrm>
-              <a:off x="4196521" y="5785772"/>
-              <a:ext cx="155356" cy="80101"/>
+              <a:off x="4542539" y="5785772"/>
+              <a:ext cx="62179" cy="80101"/>
             </a:xfrm>
             <a:prstGeom prst="rect">
               <a:avLst/>
@@ -4778,21 +4747,21 @@
                   <a:latin typeface="Helvetica"/>
                   <a:cs typeface="Helvetica"/>
                 </a:rPr>
-                <a:t>1.0</a:t>
+                <a:t>0</a:t>
               </a:r>
             </a:p>
           </p:txBody>
         </p:sp>
         <p:sp>
           <p:nvSpPr>
-            <p:cNvPr id="34" name="tx34"/>
+            <p:cNvPr id="33" name="tx33"/>
             <p:cNvSpPr/>
             <p:nvPr/>
           </p:nvSpPr>
           <p:spPr>
             <a:xfrm>
-              <a:off x="5969179" y="5785772"/>
-              <a:ext cx="155356" cy="80101"/>
+              <a:off x="6582407" y="5785772"/>
+              <a:ext cx="124358" cy="80101"/>
             </a:xfrm>
             <a:prstGeom prst="rect">
               <a:avLst/>
@@ -4824,67 +4793,21 @@
                   <a:latin typeface="Helvetica"/>
                   <a:cs typeface="Helvetica"/>
                 </a:rPr>
-                <a:t>1.2</a:t>
+                <a:t>25</a:t>
               </a:r>
             </a:p>
           </p:txBody>
         </p:sp>
         <p:sp>
           <p:nvSpPr>
-            <p:cNvPr id="35" name="tx35"/>
+            <p:cNvPr id="34" name="tx34"/>
             <p:cNvSpPr/>
             <p:nvPr/>
           </p:nvSpPr>
           <p:spPr>
             <a:xfrm>
-              <a:off x="7741836" y="5785772"/>
-              <a:ext cx="155356" cy="80101"/>
-            </a:xfrm>
-            <a:prstGeom prst="rect">
-              <a:avLst/>
-            </a:prstGeom>
-            <a:noFill/>
-          </p:spPr>
-          <p:txBody>
-            <a:bodyPr lIns="0" rIns="0" tIns="0" bIns="0" anchorCtr="1" anchor="ctr" wrap="none"/>
-            <a:lstStyle/>
-            <a:p>
-              <a:pPr algn="l" marL="0" marR="0" indent="0">
-                <a:lnSpc>
-                  <a:spcPts val="880"/>
-                </a:lnSpc>
-                <a:spcBef>
-                  <a:spcPts val="0"/>
-                </a:spcBef>
-                <a:spcAft>
-                  <a:spcPts val="0"/>
-                </a:spcAft>
-              </a:pPr>
-              <a:r>
-                <a:rPr sz="880">
-                  <a:solidFill>
-                    <a:srgbClr val="4D4D4D">
-                      <a:alpha val="100000"/>
-                    </a:srgbClr>
-                  </a:solidFill>
-                  <a:latin typeface="Helvetica"/>
-                  <a:cs typeface="Helvetica"/>
-                </a:rPr>
-                <a:t>1.4</a:t>
-              </a:r>
-            </a:p>
-          </p:txBody>
-        </p:sp>
-        <p:sp>
-          <p:nvSpPr>
-            <p:cNvPr id="36" name="tx36"/>
-            <p:cNvSpPr/>
-            <p:nvPr/>
-          </p:nvSpPr>
-          <p:spPr>
-            <a:xfrm>
-              <a:off x="3879271" y="5925448"/>
-              <a:ext cx="1676186" cy="100218"/>
+              <a:off x="2928340" y="5925448"/>
+              <a:ext cx="3578047" cy="100218"/>
             </a:xfrm>
             <a:prstGeom prst="rect">
               <a:avLst/>
@@ -4916,14 +4839,14 @@
                   <a:latin typeface="Helvetica"/>
                   <a:cs typeface="Helvetica"/>
                 </a:rPr>
-                <a:t>CKD-EPI Cr-Cys / CG ratio</a:t>
+                <a:t>eGFR difference (%): 100 × (CKD-EPI Cr-Cys − CG) / CG</a:t>
               </a:r>
             </a:p>
           </p:txBody>
         </p:sp>
         <p:sp>
           <p:nvSpPr>
-            <p:cNvPr id="37" name="tx37"/>
+            <p:cNvPr id="35" name="tx35"/>
             <p:cNvSpPr/>
             <p:nvPr/>
           </p:nvSpPr>
@@ -4969,14 +4892,14 @@
         </p:sp>
         <p:sp>
           <p:nvSpPr>
-            <p:cNvPr id="38" name="tx38"/>
+            <p:cNvPr id="36" name="tx36"/>
             <p:cNvSpPr/>
             <p:nvPr/>
           </p:nvSpPr>
           <p:spPr>
             <a:xfrm>
               <a:off x="817517" y="1896563"/>
-              <a:ext cx="6963430" cy="82021"/>
+              <a:ext cx="7115677" cy="82021"/>
             </a:xfrm>
             <a:prstGeom prst="rect">
               <a:avLst/>
@@ -5008,14 +4931,14 @@
                   <a:latin typeface="Helvetica"/>
                   <a:cs typeface="Helvetica"/>
                 </a:rPr>
-                <a:t>subHR per 0.1 ratio decline: 1.79 (1.32-2.43), p_Bonf = &lt;0.001 (n = 6)  |  per IQR decline (Δ = 0.30): 5.74 (2.32-14.24)  |  IQR: [0.85, 1.15]</a:t>
+                <a:t>subHR per 10 % decline: 1.79 (1.32-2.43), p_Bonf = &lt;0.001 (n = 6)  |  per IQR decline (Δ = 29.9 %): 5.74 (2.32-14.24)  |  IQR: [-15.0, 14.9] %</a:t>
               </a:r>
             </a:p>
           </p:txBody>
         </p:sp>
         <p:sp>
           <p:nvSpPr>
-            <p:cNvPr id="39" name="tx39"/>
+            <p:cNvPr id="37" name="tx37"/>
             <p:cNvSpPr/>
             <p:nvPr/>
           </p:nvSpPr>

--- a/docs/pptx/carbo/jx-carbo-linsubhr-ratio-throm3.pptx
+++ b/docs/pptx/carbo/jx-carbo-linsubhr-ratio-throm3.pptx
@@ -2265,34 +2265,26 @@
         </p:sp>
         <p:sp>
           <p:nvSpPr>
-            <p:cNvPr id="4" name="pl4"/>
+            <p:cNvPr id="4" name="rc4"/>
             <p:cNvSpPr/>
             <p:nvPr/>
           </p:nvSpPr>
           <p:spPr>
             <a:xfrm>
-              <a:off x="817517" y="5142518"/>
-              <a:ext cx="7799693" cy="0"/>
+              <a:off x="457200" y="1600200"/>
+              <a:ext cx="8229600" cy="4525962"/>
             </a:xfrm>
-            <a:custGeom>
+            <a:prstGeom prst="rect">
               <a:avLst/>
-              <a:pathLst>
-                <a:path w="7799693" h="0">
-                  <a:moveTo>
-                    <a:pt x="0" y="0"/>
-                  </a:moveTo>
-                  <a:lnTo>
-                    <a:pt x="7799693" y="0"/>
-                  </a:lnTo>
-                  <a:lnTo>
-                    <a:pt x="7799693" y="0"/>
-                  </a:lnTo>
-                </a:path>
-              </a:pathLst>
-            </a:custGeom>
-            <a:ln w="6775" cap="flat">
+            </a:prstGeom>
+            <a:solidFill>
+              <a:srgbClr val="FFFFFF">
+                <a:alpha val="100000"/>
+              </a:srgbClr>
+            </a:solidFill>
+            <a:ln w="13550" cap="rnd">
               <a:solidFill>
-                <a:srgbClr val="EBEBEB">
+                <a:srgbClr val="FFFFFF">
                   <a:alpha val="100000"/>
                 </a:srgbClr>
               </a:solidFill>
@@ -2314,21 +2306,21 @@
           </p:nvSpPr>
           <p:spPr>
             <a:xfrm>
-              <a:off x="817517" y="4313054"/>
-              <a:ext cx="7799693" cy="0"/>
+              <a:off x="887106" y="3250627"/>
+              <a:ext cx="7660515" cy="0"/>
             </a:xfrm>
             <a:custGeom>
               <a:avLst/>
               <a:pathLst>
-                <a:path w="7799693" h="0">
+                <a:path w="7660515" h="0">
                   <a:moveTo>
                     <a:pt x="0" y="0"/>
                   </a:moveTo>
                   <a:lnTo>
-                    <a:pt x="7799693" y="0"/>
-                  </a:lnTo>
-                  <a:lnTo>
-                    <a:pt x="7799693" y="0"/>
+                    <a:pt x="7660515" y="0"/>
+                  </a:lnTo>
+                  <a:lnTo>
+                    <a:pt x="7660515" y="0"/>
                   </a:lnTo>
                 </a:path>
               </a:pathLst>
@@ -2357,21 +2349,21 @@
           </p:nvSpPr>
           <p:spPr>
             <a:xfrm>
-              <a:off x="817517" y="3483591"/>
-              <a:ext cx="7799693" cy="0"/>
+              <a:off x="887106" y="2951293"/>
+              <a:ext cx="7660515" cy="0"/>
             </a:xfrm>
             <a:custGeom>
               <a:avLst/>
               <a:pathLst>
-                <a:path w="7799693" h="0">
+                <a:path w="7660515" h="0">
                   <a:moveTo>
                     <a:pt x="0" y="0"/>
                   </a:moveTo>
                   <a:lnTo>
-                    <a:pt x="7799693" y="0"/>
-                  </a:lnTo>
-                  <a:lnTo>
-                    <a:pt x="7799693" y="0"/>
+                    <a:pt x="7660515" y="0"/>
+                  </a:lnTo>
+                  <a:lnTo>
+                    <a:pt x="7660515" y="0"/>
                   </a:lnTo>
                 </a:path>
               </a:pathLst>
@@ -2400,21 +2392,21 @@
           </p:nvSpPr>
           <p:spPr>
             <a:xfrm>
-              <a:off x="817517" y="2654127"/>
-              <a:ext cx="7799693" cy="0"/>
+              <a:off x="887106" y="2651959"/>
+              <a:ext cx="7660515" cy="0"/>
             </a:xfrm>
             <a:custGeom>
               <a:avLst/>
               <a:pathLst>
-                <a:path w="7799693" h="0">
+                <a:path w="7660515" h="0">
                   <a:moveTo>
                     <a:pt x="0" y="0"/>
                   </a:moveTo>
                   <a:lnTo>
-                    <a:pt x="7799693" y="0"/>
-                  </a:lnTo>
-                  <a:lnTo>
-                    <a:pt x="7799693" y="0"/>
+                    <a:pt x="7660515" y="0"/>
+                  </a:lnTo>
+                  <a:lnTo>
+                    <a:pt x="7660515" y="0"/>
                   </a:lnTo>
                 </a:path>
               </a:pathLst>
@@ -2443,21 +2435,21 @@
           </p:nvSpPr>
           <p:spPr>
             <a:xfrm>
-              <a:off x="1467192" y="2073503"/>
-              <a:ext cx="0" cy="3649639"/>
+              <a:off x="887106" y="2352625"/>
+              <a:ext cx="7660515" cy="0"/>
             </a:xfrm>
             <a:custGeom>
               <a:avLst/>
               <a:pathLst>
-                <a:path w="0" h="3649639">
+                <a:path w="7660515" h="0">
                   <a:moveTo>
-                    <a:pt x="0" y="3649639"/>
+                    <a:pt x="0" y="0"/>
                   </a:moveTo>
                   <a:lnTo>
-                    <a:pt x="0" y="0"/>
-                  </a:lnTo>
-                  <a:lnTo>
-                    <a:pt x="0" y="0"/>
+                    <a:pt x="7660515" y="0"/>
+                  </a:lnTo>
+                  <a:lnTo>
+                    <a:pt x="7660515" y="0"/>
                   </a:lnTo>
                 </a:path>
               </a:pathLst>
@@ -2486,15 +2478,15 @@
           </p:nvSpPr>
           <p:spPr>
             <a:xfrm>
-              <a:off x="3538150" y="2073503"/>
-              <a:ext cx="0" cy="3649639"/>
+              <a:off x="1525188" y="2143092"/>
+              <a:ext cx="0" cy="1317069"/>
             </a:xfrm>
             <a:custGeom>
               <a:avLst/>
               <a:pathLst>
-                <a:path w="0" h="3649639">
+                <a:path w="0" h="1317069">
                   <a:moveTo>
-                    <a:pt x="0" y="3649639"/>
+                    <a:pt x="0" y="1317069"/>
                   </a:moveTo>
                   <a:lnTo>
                     <a:pt x="0" y="0"/>
@@ -2529,15 +2521,15 @@
           </p:nvSpPr>
           <p:spPr>
             <a:xfrm>
-              <a:off x="5609107" y="2073503"/>
-              <a:ext cx="0" cy="3649639"/>
+              <a:off x="3559192" y="2143092"/>
+              <a:ext cx="0" cy="1317069"/>
             </a:xfrm>
             <a:custGeom>
               <a:avLst/>
               <a:pathLst>
-                <a:path w="0" h="3649639">
+                <a:path w="0" h="1317069">
                   <a:moveTo>
-                    <a:pt x="0" y="3649639"/>
+                    <a:pt x="0" y="1317069"/>
                   </a:moveTo>
                   <a:lnTo>
                     <a:pt x="0" y="0"/>
@@ -2572,15 +2564,15 @@
           </p:nvSpPr>
           <p:spPr>
             <a:xfrm>
-              <a:off x="7680065" y="2073503"/>
-              <a:ext cx="0" cy="3649639"/>
+              <a:off x="5593195" y="2143092"/>
+              <a:ext cx="0" cy="1317069"/>
             </a:xfrm>
             <a:custGeom>
               <a:avLst/>
               <a:pathLst>
-                <a:path w="0" h="3649639">
+                <a:path w="0" h="1317069">
                   <a:moveTo>
-                    <a:pt x="0" y="3649639"/>
+                    <a:pt x="0" y="1317069"/>
                   </a:moveTo>
                   <a:lnTo>
                     <a:pt x="0" y="0"/>
@@ -2615,26 +2607,26 @@
           </p:nvSpPr>
           <p:spPr>
             <a:xfrm>
-              <a:off x="817517" y="5557249"/>
-              <a:ext cx="7799693" cy="0"/>
+              <a:off x="7627198" y="2143092"/>
+              <a:ext cx="0" cy="1317069"/>
             </a:xfrm>
             <a:custGeom>
               <a:avLst/>
               <a:pathLst>
-                <a:path w="7799693" h="0">
+                <a:path w="0" h="1317069">
                   <a:moveTo>
+                    <a:pt x="0" y="1317069"/>
+                  </a:moveTo>
+                  <a:lnTo>
                     <a:pt x="0" y="0"/>
-                  </a:moveTo>
-                  <a:lnTo>
-                    <a:pt x="7799693" y="0"/>
-                  </a:lnTo>
-                  <a:lnTo>
-                    <a:pt x="7799693" y="0"/>
+                  </a:lnTo>
+                  <a:lnTo>
+                    <a:pt x="0" y="0"/>
                   </a:lnTo>
                 </a:path>
               </a:pathLst>
             </a:custGeom>
-            <a:ln w="13550" cap="flat">
+            <a:ln w="6775" cap="flat">
               <a:solidFill>
                 <a:srgbClr val="EBEBEB">
                   <a:alpha val="100000"/>
@@ -2658,21 +2650,21 @@
           </p:nvSpPr>
           <p:spPr>
             <a:xfrm>
-              <a:off x="817517" y="4727786"/>
-              <a:ext cx="7799693" cy="0"/>
+              <a:off x="887106" y="3400294"/>
+              <a:ext cx="7660515" cy="0"/>
             </a:xfrm>
             <a:custGeom>
               <a:avLst/>
               <a:pathLst>
-                <a:path w="7799693" h="0">
+                <a:path w="7660515" h="0">
                   <a:moveTo>
                     <a:pt x="0" y="0"/>
                   </a:moveTo>
                   <a:lnTo>
-                    <a:pt x="7799693" y="0"/>
-                  </a:lnTo>
-                  <a:lnTo>
-                    <a:pt x="7799693" y="0"/>
+                    <a:pt x="7660515" y="0"/>
+                  </a:lnTo>
+                  <a:lnTo>
+                    <a:pt x="7660515" y="0"/>
                   </a:lnTo>
                 </a:path>
               </a:pathLst>
@@ -2701,21 +2693,21 @@
           </p:nvSpPr>
           <p:spPr>
             <a:xfrm>
-              <a:off x="817517" y="3898322"/>
-              <a:ext cx="7799693" cy="0"/>
+              <a:off x="887106" y="3100960"/>
+              <a:ext cx="7660515" cy="0"/>
             </a:xfrm>
             <a:custGeom>
               <a:avLst/>
               <a:pathLst>
-                <a:path w="7799693" h="0">
+                <a:path w="7660515" h="0">
                   <a:moveTo>
                     <a:pt x="0" y="0"/>
                   </a:moveTo>
                   <a:lnTo>
-                    <a:pt x="7799693" y="0"/>
-                  </a:lnTo>
-                  <a:lnTo>
-                    <a:pt x="7799693" y="0"/>
+                    <a:pt x="7660515" y="0"/>
+                  </a:lnTo>
+                  <a:lnTo>
+                    <a:pt x="7660515" y="0"/>
                   </a:lnTo>
                 </a:path>
               </a:pathLst>
@@ -2744,21 +2736,21 @@
           </p:nvSpPr>
           <p:spPr>
             <a:xfrm>
-              <a:off x="817517" y="3068859"/>
-              <a:ext cx="7799693" cy="0"/>
+              <a:off x="887106" y="2801626"/>
+              <a:ext cx="7660515" cy="0"/>
             </a:xfrm>
             <a:custGeom>
               <a:avLst/>
               <a:pathLst>
-                <a:path w="7799693" h="0">
+                <a:path w="7660515" h="0">
                   <a:moveTo>
                     <a:pt x="0" y="0"/>
                   </a:moveTo>
                   <a:lnTo>
-                    <a:pt x="7799693" y="0"/>
-                  </a:lnTo>
-                  <a:lnTo>
-                    <a:pt x="7799693" y="0"/>
+                    <a:pt x="7660515" y="0"/>
+                  </a:lnTo>
+                  <a:lnTo>
+                    <a:pt x="7660515" y="0"/>
                   </a:lnTo>
                 </a:path>
               </a:pathLst>
@@ -2787,21 +2779,21 @@
           </p:nvSpPr>
           <p:spPr>
             <a:xfrm>
-              <a:off x="817517" y="2239395"/>
-              <a:ext cx="7799693" cy="0"/>
+              <a:off x="887106" y="2502292"/>
+              <a:ext cx="7660515" cy="0"/>
             </a:xfrm>
             <a:custGeom>
               <a:avLst/>
               <a:pathLst>
-                <a:path w="7799693" h="0">
+                <a:path w="7660515" h="0">
                   <a:moveTo>
                     <a:pt x="0" y="0"/>
                   </a:moveTo>
                   <a:lnTo>
-                    <a:pt x="7799693" y="0"/>
-                  </a:lnTo>
-                  <a:lnTo>
-                    <a:pt x="7799693" y="0"/>
+                    <a:pt x="7660515" y="0"/>
+                  </a:lnTo>
+                  <a:lnTo>
+                    <a:pt x="7660515" y="0"/>
                   </a:lnTo>
                 </a:path>
               </a:pathLst>
@@ -2830,21 +2822,21 @@
           </p:nvSpPr>
           <p:spPr>
             <a:xfrm>
-              <a:off x="2502671" y="2073503"/>
-              <a:ext cx="0" cy="3649639"/>
+              <a:off x="887106" y="2202958"/>
+              <a:ext cx="7660515" cy="0"/>
             </a:xfrm>
             <a:custGeom>
               <a:avLst/>
               <a:pathLst>
-                <a:path w="0" h="3649639">
+                <a:path w="7660515" h="0">
                   <a:moveTo>
-                    <a:pt x="0" y="3649639"/>
+                    <a:pt x="0" y="0"/>
                   </a:moveTo>
                   <a:lnTo>
-                    <a:pt x="0" y="0"/>
-                  </a:lnTo>
-                  <a:lnTo>
-                    <a:pt x="0" y="0"/>
+                    <a:pt x="7660515" y="0"/>
+                  </a:lnTo>
+                  <a:lnTo>
+                    <a:pt x="7660515" y="0"/>
                   </a:lnTo>
                 </a:path>
               </a:pathLst>
@@ -2873,15 +2865,15 @@
           </p:nvSpPr>
           <p:spPr>
             <a:xfrm>
-              <a:off x="4573628" y="2073503"/>
-              <a:ext cx="0" cy="3649639"/>
+              <a:off x="2542190" y="2143092"/>
+              <a:ext cx="0" cy="1317069"/>
             </a:xfrm>
             <a:custGeom>
               <a:avLst/>
               <a:pathLst>
-                <a:path w="0" h="3649639">
+                <a:path w="0" h="1317069">
                   <a:moveTo>
-                    <a:pt x="0" y="3649639"/>
+                    <a:pt x="0" y="1317069"/>
                   </a:moveTo>
                   <a:lnTo>
                     <a:pt x="0" y="0"/>
@@ -2916,15 +2908,15 @@
           </p:nvSpPr>
           <p:spPr>
             <a:xfrm>
-              <a:off x="6644586" y="2073503"/>
-              <a:ext cx="0" cy="3649639"/>
+              <a:off x="4576193" y="2143092"/>
+              <a:ext cx="0" cy="1317069"/>
             </a:xfrm>
             <a:custGeom>
               <a:avLst/>
               <a:pathLst>
-                <a:path w="0" h="3649639">
+                <a:path w="0" h="1317069">
                   <a:moveTo>
-                    <a:pt x="0" y="3649639"/>
+                    <a:pt x="0" y="1317069"/>
                   </a:moveTo>
                   <a:lnTo>
                     <a:pt x="0" y="0"/>
@@ -2953,534 +2945,577 @@
         </p:sp>
         <p:sp>
           <p:nvSpPr>
-            <p:cNvPr id="20" name="pg20"/>
+            <p:cNvPr id="20" name="pl20"/>
             <p:cNvSpPr/>
             <p:nvPr/>
           </p:nvSpPr>
           <p:spPr>
             <a:xfrm>
-              <a:off x="1172049" y="2073503"/>
-              <a:ext cx="7090630" cy="3468611"/>
+              <a:off x="6610197" y="2143092"/>
+              <a:ext cx="0" cy="1317069"/>
             </a:xfrm>
             <a:custGeom>
               <a:avLst/>
               <a:pathLst>
-                <a:path w="7090630" h="3468611">
+                <a:path w="0" h="1317069">
                   <a:moveTo>
-                    <a:pt x="2016237" y="0"/>
+                    <a:pt x="0" y="1317069"/>
                   </a:moveTo>
                   <a:lnTo>
-                    <a:pt x="2077053" y="221036"/>
-                  </a:lnTo>
-                  <a:lnTo>
-                    <a:pt x="2148675" y="462114"/>
-                  </a:lnTo>
-                  <a:lnTo>
-                    <a:pt x="2220298" y="685380"/>
-                  </a:lnTo>
-                  <a:lnTo>
-                    <a:pt x="2291920" y="892148"/>
-                  </a:lnTo>
-                  <a:lnTo>
-                    <a:pt x="2363543" y="1083639"/>
-                  </a:lnTo>
-                  <a:lnTo>
-                    <a:pt x="2435165" y="1260981"/>
-                  </a:lnTo>
-                  <a:lnTo>
-                    <a:pt x="2506788" y="1425219"/>
-                  </a:lnTo>
-                  <a:lnTo>
-                    <a:pt x="2578410" y="1577321"/>
-                  </a:lnTo>
-                  <a:lnTo>
-                    <a:pt x="2650033" y="1718185"/>
-                  </a:lnTo>
-                  <a:lnTo>
-                    <a:pt x="2721655" y="1848641"/>
-                  </a:lnTo>
-                  <a:lnTo>
-                    <a:pt x="2793278" y="1969457"/>
-                  </a:lnTo>
-                  <a:lnTo>
-                    <a:pt x="2864901" y="2081346"/>
-                  </a:lnTo>
-                  <a:lnTo>
-                    <a:pt x="2936523" y="2184968"/>
-                  </a:lnTo>
-                  <a:lnTo>
-                    <a:pt x="3008146" y="2280934"/>
-                  </a:lnTo>
-                  <a:lnTo>
-                    <a:pt x="3079768" y="2369808"/>
-                  </a:lnTo>
-                  <a:lnTo>
-                    <a:pt x="3151391" y="2452116"/>
-                  </a:lnTo>
-                  <a:lnTo>
-                    <a:pt x="3223013" y="2528342"/>
-                  </a:lnTo>
-                  <a:lnTo>
-                    <a:pt x="3294636" y="2598936"/>
-                  </a:lnTo>
-                  <a:lnTo>
-                    <a:pt x="3366258" y="2657468"/>
-                  </a:lnTo>
-                  <a:lnTo>
-                    <a:pt x="3437881" y="2677285"/>
-                  </a:lnTo>
-                  <a:lnTo>
-                    <a:pt x="3509503" y="2696627"/>
-                  </a:lnTo>
-                  <a:lnTo>
-                    <a:pt x="3581126" y="2715505"/>
-                  </a:lnTo>
-                  <a:lnTo>
-                    <a:pt x="3652748" y="2733930"/>
-                  </a:lnTo>
-                  <a:lnTo>
-                    <a:pt x="3724371" y="2751913"/>
-                  </a:lnTo>
-                  <a:lnTo>
-                    <a:pt x="3795993" y="2769464"/>
-                  </a:lnTo>
-                  <a:lnTo>
-                    <a:pt x="3867616" y="2786595"/>
-                  </a:lnTo>
-                  <a:lnTo>
-                    <a:pt x="3939238" y="2803315"/>
-                  </a:lnTo>
-                  <a:lnTo>
-                    <a:pt x="4010861" y="2819634"/>
-                  </a:lnTo>
-                  <a:lnTo>
-                    <a:pt x="4082483" y="2835562"/>
-                  </a:lnTo>
-                  <a:lnTo>
-                    <a:pt x="4154106" y="2851107"/>
-                  </a:lnTo>
-                  <a:lnTo>
-                    <a:pt x="4225729" y="2866280"/>
-                  </a:lnTo>
-                  <a:lnTo>
-                    <a:pt x="4297351" y="2881089"/>
-                  </a:lnTo>
-                  <a:lnTo>
-                    <a:pt x="4368974" y="2895543"/>
-                  </a:lnTo>
-                  <a:lnTo>
-                    <a:pt x="4440596" y="2909650"/>
-                  </a:lnTo>
-                  <a:lnTo>
-                    <a:pt x="4512219" y="2923419"/>
-                  </a:lnTo>
-                  <a:lnTo>
-                    <a:pt x="4583841" y="2936857"/>
-                  </a:lnTo>
-                  <a:lnTo>
-                    <a:pt x="4655464" y="2949973"/>
-                  </a:lnTo>
-                  <a:lnTo>
-                    <a:pt x="4727086" y="2962775"/>
-                  </a:lnTo>
-                  <a:lnTo>
-                    <a:pt x="4798709" y="2975269"/>
-                  </a:lnTo>
-                  <a:lnTo>
-                    <a:pt x="4870331" y="2987464"/>
-                  </a:lnTo>
-                  <a:lnTo>
-                    <a:pt x="4941954" y="2999367"/>
-                  </a:lnTo>
-                  <a:lnTo>
-                    <a:pt x="5013576" y="3010984"/>
-                  </a:lnTo>
-                  <a:lnTo>
-                    <a:pt x="5085199" y="3022322"/>
-                  </a:lnTo>
-                  <a:lnTo>
-                    <a:pt x="5156821" y="3033389"/>
-                  </a:lnTo>
-                  <a:lnTo>
-                    <a:pt x="5228444" y="3044190"/>
-                  </a:lnTo>
-                  <a:lnTo>
-                    <a:pt x="5300066" y="3054732"/>
-                  </a:lnTo>
-                  <a:lnTo>
-                    <a:pt x="5371689" y="3065021"/>
-                  </a:lnTo>
-                  <a:lnTo>
-                    <a:pt x="5443311" y="3075063"/>
-                  </a:lnTo>
-                  <a:lnTo>
-                    <a:pt x="5514934" y="3084865"/>
-                  </a:lnTo>
-                  <a:lnTo>
-                    <a:pt x="5586557" y="3094432"/>
-                  </a:lnTo>
-                  <a:lnTo>
-                    <a:pt x="5658179" y="3103769"/>
-                  </a:lnTo>
-                  <a:lnTo>
-                    <a:pt x="5729802" y="3112882"/>
-                  </a:lnTo>
-                  <a:lnTo>
-                    <a:pt x="5801424" y="3121776"/>
-                  </a:lnTo>
-                  <a:lnTo>
-                    <a:pt x="5873047" y="3130457"/>
-                  </a:lnTo>
-                  <a:lnTo>
-                    <a:pt x="5944669" y="3138931"/>
-                  </a:lnTo>
-                  <a:lnTo>
-                    <a:pt x="6016292" y="3147200"/>
-                  </a:lnTo>
-                  <a:lnTo>
-                    <a:pt x="6087914" y="3155272"/>
-                  </a:lnTo>
-                  <a:lnTo>
-                    <a:pt x="6159537" y="3163150"/>
-                  </a:lnTo>
-                  <a:lnTo>
-                    <a:pt x="6231159" y="3170839"/>
-                  </a:lnTo>
-                  <a:lnTo>
-                    <a:pt x="6302782" y="3178343"/>
-                  </a:lnTo>
-                  <a:lnTo>
-                    <a:pt x="6374404" y="3185668"/>
-                  </a:lnTo>
-                  <a:lnTo>
-                    <a:pt x="6446027" y="3192817"/>
-                  </a:lnTo>
-                  <a:lnTo>
-                    <a:pt x="6517649" y="3199794"/>
-                  </a:lnTo>
-                  <a:lnTo>
-                    <a:pt x="6589272" y="3206604"/>
-                  </a:lnTo>
-                  <a:lnTo>
-                    <a:pt x="6660894" y="3213251"/>
-                  </a:lnTo>
-                  <a:lnTo>
-                    <a:pt x="6732517" y="3219738"/>
-                  </a:lnTo>
-                  <a:lnTo>
-                    <a:pt x="6804139" y="3226070"/>
-                  </a:lnTo>
-                  <a:lnTo>
-                    <a:pt x="6875762" y="3232250"/>
-                  </a:lnTo>
-                  <a:lnTo>
-                    <a:pt x="6947385" y="3238282"/>
-                  </a:lnTo>
-                  <a:lnTo>
-                    <a:pt x="7019007" y="3244169"/>
-                  </a:lnTo>
-                  <a:lnTo>
-                    <a:pt x="7090630" y="3249915"/>
-                  </a:lnTo>
-                  <a:lnTo>
-                    <a:pt x="7090630" y="3468611"/>
-                  </a:lnTo>
-                  <a:lnTo>
-                    <a:pt x="7019007" y="3467404"/>
-                  </a:lnTo>
-                  <a:lnTo>
-                    <a:pt x="6947385" y="3466100"/>
-                  </a:lnTo>
-                  <a:lnTo>
-                    <a:pt x="6875762" y="3464692"/>
-                  </a:lnTo>
-                  <a:lnTo>
-                    <a:pt x="6804139" y="3463171"/>
-                  </a:lnTo>
-                  <a:lnTo>
-                    <a:pt x="6732517" y="3461530"/>
-                  </a:lnTo>
-                  <a:lnTo>
-                    <a:pt x="6660894" y="3459757"/>
-                  </a:lnTo>
-                  <a:lnTo>
-                    <a:pt x="6589272" y="3457843"/>
-                  </a:lnTo>
-                  <a:lnTo>
-                    <a:pt x="6517649" y="3455777"/>
-                  </a:lnTo>
-                  <a:lnTo>
-                    <a:pt x="6446027" y="3453545"/>
-                  </a:lnTo>
-                  <a:lnTo>
-                    <a:pt x="6374404" y="3451136"/>
-                  </a:lnTo>
-                  <a:lnTo>
-                    <a:pt x="6302782" y="3448534"/>
-                  </a:lnTo>
-                  <a:lnTo>
-                    <a:pt x="6231159" y="3445724"/>
-                  </a:lnTo>
-                  <a:lnTo>
-                    <a:pt x="6159537" y="3442691"/>
-                  </a:lnTo>
-                  <a:lnTo>
-                    <a:pt x="6087914" y="3439415"/>
-                  </a:lnTo>
-                  <a:lnTo>
-                    <a:pt x="6016292" y="3435878"/>
-                  </a:lnTo>
-                  <a:lnTo>
-                    <a:pt x="5944669" y="3432059"/>
-                  </a:lnTo>
-                  <a:lnTo>
-                    <a:pt x="5873047" y="3427935"/>
-                  </a:lnTo>
-                  <a:lnTo>
-                    <a:pt x="5801424" y="3423483"/>
-                  </a:lnTo>
-                  <a:lnTo>
-                    <a:pt x="5729802" y="3418675"/>
-                  </a:lnTo>
-                  <a:lnTo>
-                    <a:pt x="5658179" y="3413483"/>
-                  </a:lnTo>
-                  <a:lnTo>
-                    <a:pt x="5586557" y="3407877"/>
-                  </a:lnTo>
-                  <a:lnTo>
-                    <a:pt x="5514934" y="3401824"/>
-                  </a:lnTo>
-                  <a:lnTo>
-                    <a:pt x="5443311" y="3395288"/>
-                  </a:lnTo>
-                  <a:lnTo>
-                    <a:pt x="5371689" y="3388230"/>
-                  </a:lnTo>
-                  <a:lnTo>
-                    <a:pt x="5300066" y="3380609"/>
-                  </a:lnTo>
-                  <a:lnTo>
-                    <a:pt x="5228444" y="3372381"/>
-                  </a:lnTo>
-                  <a:lnTo>
-                    <a:pt x="5156821" y="3363495"/>
-                  </a:lnTo>
-                  <a:lnTo>
-                    <a:pt x="5085199" y="3353901"/>
-                  </a:lnTo>
-                  <a:lnTo>
-                    <a:pt x="5013576" y="3343542"/>
-                  </a:lnTo>
-                  <a:lnTo>
-                    <a:pt x="4941954" y="3332355"/>
-                  </a:lnTo>
-                  <a:lnTo>
-                    <a:pt x="4870331" y="3320277"/>
-                  </a:lnTo>
-                  <a:lnTo>
-                    <a:pt x="4798709" y="3307235"/>
-                  </a:lnTo>
-                  <a:lnTo>
-                    <a:pt x="4727086" y="3293152"/>
-                  </a:lnTo>
-                  <a:lnTo>
-                    <a:pt x="4655464" y="3277945"/>
-                  </a:lnTo>
-                  <a:lnTo>
-                    <a:pt x="4583841" y="3261526"/>
-                  </a:lnTo>
-                  <a:lnTo>
-                    <a:pt x="4512219" y="3243796"/>
-                  </a:lnTo>
-                  <a:lnTo>
-                    <a:pt x="4440596" y="3224652"/>
-                  </a:lnTo>
-                  <a:lnTo>
-                    <a:pt x="4368974" y="3203980"/>
-                  </a:lnTo>
-                  <a:lnTo>
-                    <a:pt x="4297351" y="3181659"/>
-                  </a:lnTo>
-                  <a:lnTo>
-                    <a:pt x="4225729" y="3157557"/>
-                  </a:lnTo>
-                  <a:lnTo>
-                    <a:pt x="4154106" y="3131532"/>
-                  </a:lnTo>
-                  <a:lnTo>
-                    <a:pt x="4082483" y="3103431"/>
-                  </a:lnTo>
-                  <a:lnTo>
-                    <a:pt x="4010861" y="3073088"/>
-                  </a:lnTo>
-                  <a:lnTo>
-                    <a:pt x="3939238" y="3040324"/>
-                  </a:lnTo>
-                  <a:lnTo>
-                    <a:pt x="3867616" y="3004946"/>
-                  </a:lnTo>
-                  <a:lnTo>
-                    <a:pt x="3795993" y="2966745"/>
-                  </a:lnTo>
-                  <a:lnTo>
-                    <a:pt x="3724371" y="2925497"/>
-                  </a:lnTo>
-                  <a:lnTo>
-                    <a:pt x="3652748" y="2880957"/>
-                  </a:lnTo>
-                  <a:lnTo>
-                    <a:pt x="3581126" y="2832864"/>
-                  </a:lnTo>
-                  <a:lnTo>
-                    <a:pt x="3509503" y="2780934"/>
-                  </a:lnTo>
-                  <a:lnTo>
-                    <a:pt x="3437881" y="2724861"/>
-                  </a:lnTo>
-                  <a:lnTo>
-                    <a:pt x="3366258" y="2664314"/>
-                  </a:lnTo>
-                  <a:lnTo>
-                    <a:pt x="3294636" y="2637165"/>
-                  </a:lnTo>
-                  <a:lnTo>
-                    <a:pt x="3223013" y="2616362"/>
-                  </a:lnTo>
-                  <a:lnTo>
-                    <a:pt x="3151391" y="2595048"/>
-                  </a:lnTo>
-                  <a:lnTo>
-                    <a:pt x="3079768" y="2573210"/>
-                  </a:lnTo>
-                  <a:lnTo>
-                    <a:pt x="3008146" y="2550836"/>
-                  </a:lnTo>
-                  <a:lnTo>
-                    <a:pt x="2936523" y="2527912"/>
-                  </a:lnTo>
-                  <a:lnTo>
-                    <a:pt x="2864901" y="2504425"/>
-                  </a:lnTo>
-                  <a:lnTo>
-                    <a:pt x="2793278" y="2480360"/>
-                  </a:lnTo>
-                  <a:lnTo>
-                    <a:pt x="2721655" y="2455704"/>
-                  </a:lnTo>
-                  <a:lnTo>
-                    <a:pt x="2650033" y="2430442"/>
-                  </a:lnTo>
-                  <a:lnTo>
-                    <a:pt x="2578410" y="2404560"/>
-                  </a:lnTo>
-                  <a:lnTo>
-                    <a:pt x="2506788" y="2378042"/>
-                  </a:lnTo>
-                  <a:lnTo>
-                    <a:pt x="2435165" y="2350872"/>
-                  </a:lnTo>
-                  <a:lnTo>
-                    <a:pt x="2363543" y="2323034"/>
-                  </a:lnTo>
-                  <a:lnTo>
-                    <a:pt x="2291920" y="2294512"/>
-                  </a:lnTo>
-                  <a:lnTo>
-                    <a:pt x="2220298" y="2265289"/>
-                  </a:lnTo>
-                  <a:lnTo>
-                    <a:pt x="2148675" y="2235349"/>
-                  </a:lnTo>
-                  <a:lnTo>
-                    <a:pt x="2077053" y="2204672"/>
-                  </a:lnTo>
-                  <a:lnTo>
-                    <a:pt x="2005430" y="2173242"/>
-                  </a:lnTo>
-                  <a:lnTo>
-                    <a:pt x="1933808" y="2141040"/>
-                  </a:lnTo>
-                  <a:lnTo>
-                    <a:pt x="1862185" y="2108046"/>
-                  </a:lnTo>
-                  <a:lnTo>
-                    <a:pt x="1790563" y="2074241"/>
-                  </a:lnTo>
-                  <a:lnTo>
-                    <a:pt x="1718940" y="2039606"/>
-                  </a:lnTo>
-                  <a:lnTo>
-                    <a:pt x="1647318" y="2004120"/>
-                  </a:lnTo>
-                  <a:lnTo>
-                    <a:pt x="1575695" y="1967761"/>
-                  </a:lnTo>
-                  <a:lnTo>
-                    <a:pt x="1504073" y="1930510"/>
-                  </a:lnTo>
-                  <a:lnTo>
-                    <a:pt x="1432450" y="1892343"/>
-                  </a:lnTo>
-                  <a:lnTo>
-                    <a:pt x="1360827" y="1853238"/>
-                  </a:lnTo>
-                  <a:lnTo>
-                    <a:pt x="1289205" y="1813172"/>
-                  </a:lnTo>
-                  <a:lnTo>
-                    <a:pt x="1217582" y="1772121"/>
-                  </a:lnTo>
-                  <a:lnTo>
-                    <a:pt x="1145960" y="1730062"/>
-                  </a:lnTo>
-                  <a:lnTo>
-                    <a:pt x="1074337" y="1686969"/>
-                  </a:lnTo>
-                  <a:lnTo>
-                    <a:pt x="1002715" y="1642818"/>
-                  </a:lnTo>
-                  <a:lnTo>
-                    <a:pt x="931092" y="1597582"/>
-                  </a:lnTo>
-                  <a:lnTo>
-                    <a:pt x="859470" y="1551233"/>
-                  </a:lnTo>
-                  <a:lnTo>
-                    <a:pt x="787847" y="1503747"/>
-                  </a:lnTo>
-                  <a:lnTo>
-                    <a:pt x="716225" y="1455093"/>
-                  </a:lnTo>
-                  <a:lnTo>
-                    <a:pt x="644602" y="1405243"/>
-                  </a:lnTo>
-                  <a:lnTo>
-                    <a:pt x="572980" y="1354169"/>
-                  </a:lnTo>
-                  <a:lnTo>
-                    <a:pt x="501357" y="1301840"/>
-                  </a:lnTo>
-                  <a:lnTo>
-                    <a:pt x="429735" y="1248225"/>
-                  </a:lnTo>
-                  <a:lnTo>
-                    <a:pt x="358112" y="1193292"/>
-                  </a:lnTo>
-                  <a:lnTo>
-                    <a:pt x="286490" y="1137010"/>
-                  </a:lnTo>
-                  <a:lnTo>
-                    <a:pt x="214867" y="1079344"/>
-                  </a:lnTo>
-                  <a:lnTo>
-                    <a:pt x="143245" y="1020262"/>
-                  </a:lnTo>
-                  <a:lnTo>
-                    <a:pt x="71622" y="959727"/>
-                  </a:lnTo>
-                  <a:lnTo>
-                    <a:pt x="0" y="897706"/>
+                    <a:pt x="0" y="0"/>
+                  </a:lnTo>
+                  <a:lnTo>
+                    <a:pt x="0" y="0"/>
+                  </a:lnTo>
+                </a:path>
+              </a:pathLst>
+            </a:custGeom>
+            <a:ln w="13550" cap="flat">
+              <a:solidFill>
+                <a:srgbClr val="EBEBEB">
+                  <a:alpha val="100000"/>
+                </a:srgbClr>
+              </a:solidFill>
+              <a:prstDash val="solid"/>
+              <a:round/>
+            </a:ln>
+          </p:spPr>
+          <p:txBody>
+            <a:bodyPr/>
+            <a:lstStyle/>
+            <a:p/>
+          </p:txBody>
+        </p:sp>
+        <p:sp>
+          <p:nvSpPr>
+            <p:cNvPr id="21" name="pg21"/>
+            <p:cNvSpPr/>
+            <p:nvPr/>
+          </p:nvSpPr>
+          <p:spPr>
+            <a:xfrm>
+              <a:off x="1235312" y="2143092"/>
+              <a:ext cx="6964104" cy="1251740"/>
+            </a:xfrm>
+            <a:custGeom>
+              <a:avLst/>
+              <a:pathLst>
+                <a:path w="6964104" h="1251740">
+                  <a:moveTo>
+                    <a:pt x="1980259" y="0"/>
+                  </a:moveTo>
+                  <a:lnTo>
+                    <a:pt x="2039990" y="79766"/>
+                  </a:lnTo>
+                  <a:lnTo>
+                    <a:pt x="2110334" y="166766"/>
+                  </a:lnTo>
+                  <a:lnTo>
+                    <a:pt x="2180679" y="247337"/>
+                  </a:lnTo>
+                  <a:lnTo>
+                    <a:pt x="2251023" y="321955"/>
+                  </a:lnTo>
+                  <a:lnTo>
+                    <a:pt x="2321368" y="391060"/>
+                  </a:lnTo>
+                  <a:lnTo>
+                    <a:pt x="2391712" y="455058"/>
+                  </a:lnTo>
+                  <a:lnTo>
+                    <a:pt x="2462057" y="514328"/>
+                  </a:lnTo>
+                  <a:lnTo>
+                    <a:pt x="2532401" y="569218"/>
+                  </a:lnTo>
+                  <a:lnTo>
+                    <a:pt x="2602746" y="620052"/>
+                  </a:lnTo>
+                  <a:lnTo>
+                    <a:pt x="2673090" y="667131"/>
+                  </a:lnTo>
+                  <a:lnTo>
+                    <a:pt x="2743435" y="710730"/>
+                  </a:lnTo>
+                  <a:lnTo>
+                    <a:pt x="2813779" y="751109"/>
+                  </a:lnTo>
+                  <a:lnTo>
+                    <a:pt x="2884124" y="788503"/>
+                  </a:lnTo>
+                  <a:lnTo>
+                    <a:pt x="2954468" y="823135"/>
+                  </a:lnTo>
+                  <a:lnTo>
+                    <a:pt x="3024813" y="855208"/>
+                  </a:lnTo>
+                  <a:lnTo>
+                    <a:pt x="3095157" y="884911"/>
+                  </a:lnTo>
+                  <a:lnTo>
+                    <a:pt x="3165502" y="912419"/>
+                  </a:lnTo>
+                  <a:lnTo>
+                    <a:pt x="3235846" y="937895"/>
+                  </a:lnTo>
+                  <a:lnTo>
+                    <a:pt x="3306191" y="959017"/>
+                  </a:lnTo>
+                  <a:lnTo>
+                    <a:pt x="3376535" y="966169"/>
+                  </a:lnTo>
+                  <a:lnTo>
+                    <a:pt x="3446880" y="973149"/>
+                  </a:lnTo>
+                  <a:lnTo>
+                    <a:pt x="3517224" y="979961"/>
+                  </a:lnTo>
+                  <a:lnTo>
+                    <a:pt x="3587569" y="986611"/>
+                  </a:lnTo>
+                  <a:lnTo>
+                    <a:pt x="3657913" y="993100"/>
+                  </a:lnTo>
+                  <a:lnTo>
+                    <a:pt x="3728257" y="999434"/>
+                  </a:lnTo>
+                  <a:lnTo>
+                    <a:pt x="3798602" y="1005616"/>
+                  </a:lnTo>
+                  <a:lnTo>
+                    <a:pt x="3868946" y="1011650"/>
+                  </a:lnTo>
+                  <a:lnTo>
+                    <a:pt x="3939291" y="1017539"/>
+                  </a:lnTo>
+                  <a:lnTo>
+                    <a:pt x="4009635" y="1023287"/>
+                  </a:lnTo>
+                  <a:lnTo>
+                    <a:pt x="4079980" y="1028897"/>
+                  </a:lnTo>
+                  <a:lnTo>
+                    <a:pt x="4150324" y="1034373"/>
+                  </a:lnTo>
+                  <a:lnTo>
+                    <a:pt x="4220669" y="1039717"/>
+                  </a:lnTo>
+                  <a:lnTo>
+                    <a:pt x="4291013" y="1044933"/>
+                  </a:lnTo>
+                  <a:lnTo>
+                    <a:pt x="4361358" y="1050024"/>
+                  </a:lnTo>
+                  <a:lnTo>
+                    <a:pt x="4431702" y="1054993"/>
+                  </a:lnTo>
+                  <a:lnTo>
+                    <a:pt x="4502047" y="1059842"/>
+                  </a:lnTo>
+                  <a:lnTo>
+                    <a:pt x="4572391" y="1064576"/>
+                  </a:lnTo>
+                  <a:lnTo>
+                    <a:pt x="4642736" y="1069195"/>
+                  </a:lnTo>
+                  <a:lnTo>
+                    <a:pt x="4713080" y="1073704"/>
+                  </a:lnTo>
+                  <a:lnTo>
+                    <a:pt x="4783425" y="1078105"/>
+                  </a:lnTo>
+                  <a:lnTo>
+                    <a:pt x="4853769" y="1082401"/>
+                  </a:lnTo>
+                  <a:lnTo>
+                    <a:pt x="4924114" y="1086593"/>
+                  </a:lnTo>
+                  <a:lnTo>
+                    <a:pt x="4994458" y="1090685"/>
+                  </a:lnTo>
+                  <a:lnTo>
+                    <a:pt x="5064803" y="1094678"/>
+                  </a:lnTo>
+                  <a:lnTo>
+                    <a:pt x="5135147" y="1098576"/>
+                  </a:lnTo>
+                  <a:lnTo>
+                    <a:pt x="5205492" y="1102381"/>
+                  </a:lnTo>
+                  <a:lnTo>
+                    <a:pt x="5275836" y="1106094"/>
+                  </a:lnTo>
+                  <a:lnTo>
+                    <a:pt x="5346181" y="1109718"/>
+                  </a:lnTo>
+                  <a:lnTo>
+                    <a:pt x="5416525" y="1113255"/>
+                  </a:lnTo>
+                  <a:lnTo>
+                    <a:pt x="5486870" y="1116707"/>
+                  </a:lnTo>
+                  <a:lnTo>
+                    <a:pt x="5557214" y="1120077"/>
+                  </a:lnTo>
+                  <a:lnTo>
+                    <a:pt x="5627559" y="1123365"/>
+                  </a:lnTo>
+                  <a:lnTo>
+                    <a:pt x="5697903" y="1126575"/>
+                  </a:lnTo>
+                  <a:lnTo>
+                    <a:pt x="5768248" y="1129708"/>
+                  </a:lnTo>
+                  <a:lnTo>
+                    <a:pt x="5838592" y="1132766"/>
+                  </a:lnTo>
+                  <a:lnTo>
+                    <a:pt x="5908937" y="1135750"/>
+                  </a:lnTo>
+                  <a:lnTo>
+                    <a:pt x="5979281" y="1138663"/>
+                  </a:lnTo>
+                  <a:lnTo>
+                    <a:pt x="6049626" y="1141506"/>
+                  </a:lnTo>
+                  <a:lnTo>
+                    <a:pt x="6119970" y="1144281"/>
+                  </a:lnTo>
+                  <a:lnTo>
+                    <a:pt x="6190315" y="1146989"/>
+                  </a:lnTo>
+                  <a:lnTo>
+                    <a:pt x="6260659" y="1149632"/>
+                  </a:lnTo>
+                  <a:lnTo>
+                    <a:pt x="6331004" y="1152212"/>
+                  </a:lnTo>
+                  <a:lnTo>
+                    <a:pt x="6401348" y="1154730"/>
+                  </a:lnTo>
+                  <a:lnTo>
+                    <a:pt x="6471693" y="1157188"/>
+                  </a:lnTo>
+                  <a:lnTo>
+                    <a:pt x="6542037" y="1159586"/>
+                  </a:lnTo>
+                  <a:lnTo>
+                    <a:pt x="6612382" y="1161928"/>
+                  </a:lnTo>
+                  <a:lnTo>
+                    <a:pt x="6682726" y="1164213"/>
+                  </a:lnTo>
+                  <a:lnTo>
+                    <a:pt x="6753071" y="1166443"/>
+                  </a:lnTo>
+                  <a:lnTo>
+                    <a:pt x="6823415" y="1168619"/>
+                  </a:lnTo>
+                  <a:lnTo>
+                    <a:pt x="6893760" y="1170744"/>
+                  </a:lnTo>
+                  <a:lnTo>
+                    <a:pt x="6964104" y="1172817"/>
+                  </a:lnTo>
+                  <a:lnTo>
+                    <a:pt x="6964104" y="1251740"/>
+                  </a:lnTo>
+                  <a:lnTo>
+                    <a:pt x="6893760" y="1251304"/>
+                  </a:lnTo>
+                  <a:lnTo>
+                    <a:pt x="6823415" y="1250833"/>
+                  </a:lnTo>
+                  <a:lnTo>
+                    <a:pt x="6753071" y="1250325"/>
+                  </a:lnTo>
+                  <a:lnTo>
+                    <a:pt x="6682726" y="1249777"/>
+                  </a:lnTo>
+                  <a:lnTo>
+                    <a:pt x="6612382" y="1249184"/>
+                  </a:lnTo>
+                  <a:lnTo>
+                    <a:pt x="6542037" y="1248545"/>
+                  </a:lnTo>
+                  <a:lnTo>
+                    <a:pt x="6471693" y="1247854"/>
+                  </a:lnTo>
+                  <a:lnTo>
+                    <a:pt x="6401348" y="1247108"/>
+                  </a:lnTo>
+                  <a:lnTo>
+                    <a:pt x="6331004" y="1246303"/>
+                  </a:lnTo>
+                  <a:lnTo>
+                    <a:pt x="6260659" y="1245433"/>
+                  </a:lnTo>
+                  <a:lnTo>
+                    <a:pt x="6190315" y="1244494"/>
+                  </a:lnTo>
+                  <a:lnTo>
+                    <a:pt x="6119970" y="1243481"/>
+                  </a:lnTo>
+                  <a:lnTo>
+                    <a:pt x="6049626" y="1242386"/>
+                  </a:lnTo>
+                  <a:lnTo>
+                    <a:pt x="5979281" y="1241204"/>
+                  </a:lnTo>
+                  <a:lnTo>
+                    <a:pt x="5908937" y="1239927"/>
+                  </a:lnTo>
+                  <a:lnTo>
+                    <a:pt x="5838592" y="1238549"/>
+                  </a:lnTo>
+                  <a:lnTo>
+                    <a:pt x="5768248" y="1237061"/>
+                  </a:lnTo>
+                  <a:lnTo>
+                    <a:pt x="5697903" y="1235454"/>
+                  </a:lnTo>
+                  <a:lnTo>
+                    <a:pt x="5627559" y="1233719"/>
+                  </a:lnTo>
+                  <a:lnTo>
+                    <a:pt x="5557214" y="1231845"/>
+                  </a:lnTo>
+                  <a:lnTo>
+                    <a:pt x="5486870" y="1229822"/>
+                  </a:lnTo>
+                  <a:lnTo>
+                    <a:pt x="5416525" y="1227638"/>
+                  </a:lnTo>
+                  <a:lnTo>
+                    <a:pt x="5346181" y="1225279"/>
+                  </a:lnTo>
+                  <a:lnTo>
+                    <a:pt x="5275836" y="1222732"/>
+                  </a:lnTo>
+                  <a:lnTo>
+                    <a:pt x="5205492" y="1219982"/>
+                  </a:lnTo>
+                  <a:lnTo>
+                    <a:pt x="5135147" y="1217012"/>
+                  </a:lnTo>
+                  <a:lnTo>
+                    <a:pt x="5064803" y="1213806"/>
+                  </a:lnTo>
+                  <a:lnTo>
+                    <a:pt x="4994458" y="1210344"/>
+                  </a:lnTo>
+                  <a:lnTo>
+                    <a:pt x="4924114" y="1206605"/>
+                  </a:lnTo>
+                  <a:lnTo>
+                    <a:pt x="4853769" y="1202568"/>
+                  </a:lnTo>
+                  <a:lnTo>
+                    <a:pt x="4783425" y="1198209"/>
+                  </a:lnTo>
+                  <a:lnTo>
+                    <a:pt x="4713080" y="1193503"/>
+                  </a:lnTo>
+                  <a:lnTo>
+                    <a:pt x="4642736" y="1188421"/>
+                  </a:lnTo>
+                  <a:lnTo>
+                    <a:pt x="4572391" y="1182933"/>
+                  </a:lnTo>
+                  <a:lnTo>
+                    <a:pt x="4502047" y="1177008"/>
+                  </a:lnTo>
+                  <a:lnTo>
+                    <a:pt x="4431702" y="1170609"/>
+                  </a:lnTo>
+                  <a:lnTo>
+                    <a:pt x="4361358" y="1163701"/>
+                  </a:lnTo>
+                  <a:lnTo>
+                    <a:pt x="4291013" y="1156241"/>
+                  </a:lnTo>
+                  <a:lnTo>
+                    <a:pt x="4220669" y="1148186"/>
+                  </a:lnTo>
+                  <a:lnTo>
+                    <a:pt x="4150324" y="1139488"/>
+                  </a:lnTo>
+                  <a:lnTo>
+                    <a:pt x="4079980" y="1130096"/>
+                  </a:lnTo>
+                  <a:lnTo>
+                    <a:pt x="4009635" y="1119955"/>
+                  </a:lnTo>
+                  <a:lnTo>
+                    <a:pt x="3939291" y="1109005"/>
+                  </a:lnTo>
+                  <a:lnTo>
+                    <a:pt x="3868946" y="1097181"/>
+                  </a:lnTo>
+                  <a:lnTo>
+                    <a:pt x="3798602" y="1084414"/>
+                  </a:lnTo>
+                  <a:lnTo>
+                    <a:pt x="3728257" y="1070628"/>
+                  </a:lnTo>
+                  <a:lnTo>
+                    <a:pt x="3657913" y="1055743"/>
+                  </a:lnTo>
+                  <a:lnTo>
+                    <a:pt x="3587569" y="1039669"/>
+                  </a:lnTo>
+                  <a:lnTo>
+                    <a:pt x="3517224" y="1022314"/>
+                  </a:lnTo>
+                  <a:lnTo>
+                    <a:pt x="3446880" y="1003573"/>
+                  </a:lnTo>
+                  <a:lnTo>
+                    <a:pt x="3376535" y="983338"/>
+                  </a:lnTo>
+                  <a:lnTo>
+                    <a:pt x="3306191" y="961488"/>
+                  </a:lnTo>
+                  <a:lnTo>
+                    <a:pt x="3235846" y="951690"/>
+                  </a:lnTo>
+                  <a:lnTo>
+                    <a:pt x="3165502" y="944183"/>
+                  </a:lnTo>
+                  <a:lnTo>
+                    <a:pt x="3095157" y="936491"/>
+                  </a:lnTo>
+                  <a:lnTo>
+                    <a:pt x="3024813" y="928611"/>
+                  </a:lnTo>
+                  <a:lnTo>
+                    <a:pt x="2954468" y="920536"/>
+                  </a:lnTo>
+                  <a:lnTo>
+                    <a:pt x="2884124" y="912264"/>
+                  </a:lnTo>
+                  <a:lnTo>
+                    <a:pt x="2813779" y="903788"/>
+                  </a:lnTo>
+                  <a:lnTo>
+                    <a:pt x="2743435" y="895103"/>
+                  </a:lnTo>
+                  <a:lnTo>
+                    <a:pt x="2673090" y="886206"/>
+                  </a:lnTo>
+                  <a:lnTo>
+                    <a:pt x="2602746" y="877089"/>
+                  </a:lnTo>
+                  <a:lnTo>
+                    <a:pt x="2532401" y="867749"/>
+                  </a:lnTo>
+                  <a:lnTo>
+                    <a:pt x="2462057" y="858179"/>
+                  </a:lnTo>
+                  <a:lnTo>
+                    <a:pt x="2391712" y="848374"/>
+                  </a:lnTo>
+                  <a:lnTo>
+                    <a:pt x="2321368" y="838328"/>
+                  </a:lnTo>
+                  <a:lnTo>
+                    <a:pt x="2251023" y="828035"/>
+                  </a:lnTo>
+                  <a:lnTo>
+                    <a:pt x="2180679" y="817489"/>
+                  </a:lnTo>
+                  <a:lnTo>
+                    <a:pt x="2110334" y="806684"/>
+                  </a:lnTo>
+                  <a:lnTo>
+                    <a:pt x="2039990" y="795614"/>
+                  </a:lnTo>
+                  <a:lnTo>
+                    <a:pt x="1969645" y="784272"/>
+                  </a:lnTo>
+                  <a:lnTo>
+                    <a:pt x="1899301" y="772651"/>
+                  </a:lnTo>
+                  <a:lnTo>
+                    <a:pt x="1828956" y="760744"/>
+                  </a:lnTo>
+                  <a:lnTo>
+                    <a:pt x="1758612" y="748545"/>
+                  </a:lnTo>
+                  <a:lnTo>
+                    <a:pt x="1688267" y="736045"/>
+                  </a:lnTo>
+                  <a:lnTo>
+                    <a:pt x="1617923" y="723239"/>
+                  </a:lnTo>
+                  <a:lnTo>
+                    <a:pt x="1547578" y="710118"/>
+                  </a:lnTo>
+                  <a:lnTo>
+                    <a:pt x="1477234" y="696675"/>
+                  </a:lnTo>
+                  <a:lnTo>
+                    <a:pt x="1406889" y="682902"/>
+                  </a:lnTo>
+                  <a:lnTo>
+                    <a:pt x="1336545" y="668790"/>
+                  </a:lnTo>
+                  <a:lnTo>
+                    <a:pt x="1266200" y="654331"/>
+                  </a:lnTo>
+                  <a:lnTo>
+                    <a:pt x="1195856" y="639517"/>
+                  </a:lnTo>
+                  <a:lnTo>
+                    <a:pt x="1125511" y="624338"/>
+                  </a:lnTo>
+                  <a:lnTo>
+                    <a:pt x="1055167" y="608787"/>
+                  </a:lnTo>
+                  <a:lnTo>
+                    <a:pt x="984822" y="592854"/>
+                  </a:lnTo>
+                  <a:lnTo>
+                    <a:pt x="914478" y="576529"/>
+                  </a:lnTo>
+                  <a:lnTo>
+                    <a:pt x="844133" y="559803"/>
+                  </a:lnTo>
+                  <a:lnTo>
+                    <a:pt x="773789" y="542666"/>
+                  </a:lnTo>
+                  <a:lnTo>
+                    <a:pt x="703444" y="525108"/>
+                  </a:lnTo>
+                  <a:lnTo>
+                    <a:pt x="633100" y="507119"/>
+                  </a:lnTo>
+                  <a:lnTo>
+                    <a:pt x="562755" y="488687"/>
+                  </a:lnTo>
+                  <a:lnTo>
+                    <a:pt x="492411" y="469803"/>
+                  </a:lnTo>
+                  <a:lnTo>
+                    <a:pt x="422066" y="450455"/>
+                  </a:lnTo>
+                  <a:lnTo>
+                    <a:pt x="351722" y="430631"/>
+                  </a:lnTo>
+                  <a:lnTo>
+                    <a:pt x="281377" y="410320"/>
+                  </a:lnTo>
+                  <a:lnTo>
+                    <a:pt x="211033" y="389510"/>
+                  </a:lnTo>
+                  <a:lnTo>
+                    <a:pt x="140688" y="368188"/>
+                  </a:lnTo>
+                  <a:lnTo>
+                    <a:pt x="70344" y="346343"/>
+                  </a:lnTo>
+                  <a:lnTo>
+                    <a:pt x="0" y="323960"/>
                   </a:lnTo>
                   <a:close/>
                 </a:path>
@@ -3500,559 +3535,234 @@
         </p:sp>
         <p:sp>
           <p:nvSpPr>
-            <p:cNvPr id="21" name="pl21"/>
-            <p:cNvSpPr/>
-            <p:nvPr/>
-          </p:nvSpPr>
-          <p:spPr>
-            <a:xfrm>
-              <a:off x="3188286" y="2073503"/>
-              <a:ext cx="5074392" cy="3249915"/>
-            </a:xfrm>
-            <a:custGeom>
-              <a:avLst/>
-              <a:pathLst>
-                <a:path w="5074392" h="3249915">
-                  <a:moveTo>
-                    <a:pt x="0" y="0"/>
-                  </a:moveTo>
-                  <a:lnTo>
-                    <a:pt x="60816" y="221036"/>
-                  </a:lnTo>
-                  <a:lnTo>
-                    <a:pt x="132438" y="462114"/>
-                  </a:lnTo>
-                  <a:lnTo>
-                    <a:pt x="204061" y="685380"/>
-                  </a:lnTo>
-                  <a:lnTo>
-                    <a:pt x="275683" y="892148"/>
-                  </a:lnTo>
-                  <a:lnTo>
-                    <a:pt x="347306" y="1083639"/>
-                  </a:lnTo>
-                  <a:lnTo>
-                    <a:pt x="418928" y="1260981"/>
-                  </a:lnTo>
-                  <a:lnTo>
-                    <a:pt x="490551" y="1425219"/>
-                  </a:lnTo>
-                  <a:lnTo>
-                    <a:pt x="562173" y="1577321"/>
-                  </a:lnTo>
-                  <a:lnTo>
-                    <a:pt x="633796" y="1718185"/>
-                  </a:lnTo>
-                  <a:lnTo>
-                    <a:pt x="705418" y="1848641"/>
-                  </a:lnTo>
-                  <a:lnTo>
-                    <a:pt x="777041" y="1969457"/>
-                  </a:lnTo>
-                  <a:lnTo>
-                    <a:pt x="848663" y="2081346"/>
-                  </a:lnTo>
-                  <a:lnTo>
-                    <a:pt x="920286" y="2184968"/>
-                  </a:lnTo>
-                  <a:lnTo>
-                    <a:pt x="991908" y="2280934"/>
-                  </a:lnTo>
-                  <a:lnTo>
-                    <a:pt x="1063531" y="2369808"/>
-                  </a:lnTo>
-                  <a:lnTo>
-                    <a:pt x="1135153" y="2452116"/>
-                  </a:lnTo>
-                  <a:lnTo>
-                    <a:pt x="1206776" y="2528342"/>
-                  </a:lnTo>
-                  <a:lnTo>
-                    <a:pt x="1278399" y="2598936"/>
-                  </a:lnTo>
-                  <a:lnTo>
-                    <a:pt x="1350021" y="2657468"/>
-                  </a:lnTo>
-                  <a:lnTo>
-                    <a:pt x="1421644" y="2677285"/>
-                  </a:lnTo>
-                  <a:lnTo>
-                    <a:pt x="1493266" y="2696627"/>
-                  </a:lnTo>
-                  <a:lnTo>
-                    <a:pt x="1564889" y="2715505"/>
-                  </a:lnTo>
-                  <a:lnTo>
-                    <a:pt x="1636511" y="2733930"/>
-                  </a:lnTo>
-                  <a:lnTo>
-                    <a:pt x="1708134" y="2751913"/>
-                  </a:lnTo>
-                  <a:lnTo>
-                    <a:pt x="1779756" y="2769464"/>
-                  </a:lnTo>
-                  <a:lnTo>
-                    <a:pt x="1851379" y="2786595"/>
-                  </a:lnTo>
-                  <a:lnTo>
-                    <a:pt x="1923001" y="2803315"/>
-                  </a:lnTo>
-                  <a:lnTo>
-                    <a:pt x="1994624" y="2819634"/>
-                  </a:lnTo>
-                  <a:lnTo>
-                    <a:pt x="2066246" y="2835562"/>
-                  </a:lnTo>
-                  <a:lnTo>
-                    <a:pt x="2137869" y="2851107"/>
-                  </a:lnTo>
-                  <a:lnTo>
-                    <a:pt x="2209491" y="2866280"/>
-                  </a:lnTo>
-                  <a:lnTo>
-                    <a:pt x="2281114" y="2881089"/>
-                  </a:lnTo>
-                  <a:lnTo>
-                    <a:pt x="2352736" y="2895543"/>
-                  </a:lnTo>
-                  <a:lnTo>
-                    <a:pt x="2424359" y="2909650"/>
-                  </a:lnTo>
-                  <a:lnTo>
-                    <a:pt x="2495981" y="2923419"/>
-                  </a:lnTo>
-                  <a:lnTo>
-                    <a:pt x="2567604" y="2936857"/>
-                  </a:lnTo>
-                  <a:lnTo>
-                    <a:pt x="2639227" y="2949973"/>
-                  </a:lnTo>
-                  <a:lnTo>
-                    <a:pt x="2710849" y="2962775"/>
-                  </a:lnTo>
-                  <a:lnTo>
-                    <a:pt x="2782472" y="2975269"/>
-                  </a:lnTo>
-                  <a:lnTo>
-                    <a:pt x="2854094" y="2987464"/>
-                  </a:lnTo>
-                  <a:lnTo>
-                    <a:pt x="2925717" y="2999367"/>
-                  </a:lnTo>
-                  <a:lnTo>
-                    <a:pt x="2997339" y="3010984"/>
-                  </a:lnTo>
-                  <a:lnTo>
-                    <a:pt x="3068962" y="3022322"/>
-                  </a:lnTo>
-                  <a:lnTo>
-                    <a:pt x="3140584" y="3033389"/>
-                  </a:lnTo>
-                  <a:lnTo>
-                    <a:pt x="3212207" y="3044190"/>
-                  </a:lnTo>
-                  <a:lnTo>
-                    <a:pt x="3283829" y="3054732"/>
-                  </a:lnTo>
-                  <a:lnTo>
-                    <a:pt x="3355452" y="3065021"/>
-                  </a:lnTo>
-                  <a:lnTo>
-                    <a:pt x="3427074" y="3075063"/>
-                  </a:lnTo>
-                  <a:lnTo>
-                    <a:pt x="3498697" y="3084865"/>
-                  </a:lnTo>
-                  <a:lnTo>
-                    <a:pt x="3570319" y="3094432"/>
-                  </a:lnTo>
-                  <a:lnTo>
-                    <a:pt x="3641942" y="3103769"/>
-                  </a:lnTo>
-                  <a:lnTo>
-                    <a:pt x="3713564" y="3112882"/>
-                  </a:lnTo>
-                  <a:lnTo>
-                    <a:pt x="3785187" y="3121776"/>
-                  </a:lnTo>
-                  <a:lnTo>
-                    <a:pt x="3856809" y="3130457"/>
-                  </a:lnTo>
-                  <a:lnTo>
-                    <a:pt x="3928432" y="3138931"/>
-                  </a:lnTo>
-                  <a:lnTo>
-                    <a:pt x="4000055" y="3147200"/>
-                  </a:lnTo>
-                  <a:lnTo>
-                    <a:pt x="4071677" y="3155272"/>
-                  </a:lnTo>
-                  <a:lnTo>
-                    <a:pt x="4143300" y="3163150"/>
-                  </a:lnTo>
-                  <a:lnTo>
-                    <a:pt x="4214922" y="3170839"/>
-                  </a:lnTo>
-                  <a:lnTo>
-                    <a:pt x="4286545" y="3178343"/>
-                  </a:lnTo>
-                  <a:lnTo>
-                    <a:pt x="4358167" y="3185668"/>
-                  </a:lnTo>
-                  <a:lnTo>
-                    <a:pt x="4429790" y="3192817"/>
-                  </a:lnTo>
-                  <a:lnTo>
-                    <a:pt x="4501412" y="3199794"/>
-                  </a:lnTo>
-                  <a:lnTo>
-                    <a:pt x="4573035" y="3206604"/>
-                  </a:lnTo>
-                  <a:lnTo>
-                    <a:pt x="4644657" y="3213251"/>
-                  </a:lnTo>
-                  <a:lnTo>
-                    <a:pt x="4716280" y="3219738"/>
-                  </a:lnTo>
-                  <a:lnTo>
-                    <a:pt x="4787902" y="3226070"/>
-                  </a:lnTo>
-                  <a:lnTo>
-                    <a:pt x="4859525" y="3232250"/>
-                  </a:lnTo>
-                  <a:lnTo>
-                    <a:pt x="4931147" y="3238282"/>
-                  </a:lnTo>
-                  <a:lnTo>
-                    <a:pt x="5002770" y="3244169"/>
-                  </a:lnTo>
-                  <a:lnTo>
-                    <a:pt x="5074392" y="3249915"/>
-                  </a:lnTo>
-                </a:path>
-              </a:pathLst>
-            </a:custGeom>
-          </p:spPr>
-          <p:txBody>
-            <a:bodyPr/>
-            <a:lstStyle/>
-            <a:p/>
-          </p:txBody>
-        </p:sp>
-        <p:sp>
-          <p:nvSpPr>
             <p:cNvPr id="22" name="pl22"/>
             <p:cNvSpPr/>
             <p:nvPr/>
           </p:nvSpPr>
           <p:spPr>
             <a:xfrm>
-              <a:off x="1172049" y="2971209"/>
-              <a:ext cx="7090630" cy="2570905"/>
+              <a:off x="3215571" y="2143092"/>
+              <a:ext cx="4983845" cy="1172817"/>
             </a:xfrm>
             <a:custGeom>
               <a:avLst/>
               <a:pathLst>
-                <a:path w="7090630" h="2570905">
+                <a:path w="4983845" h="1172817">
                   <a:moveTo>
-                    <a:pt x="7090630" y="2570905"/>
+                    <a:pt x="0" y="0"/>
                   </a:moveTo>
                   <a:lnTo>
-                    <a:pt x="7019007" y="2569698"/>
-                  </a:lnTo>
-                  <a:lnTo>
-                    <a:pt x="6947385" y="2568394"/>
-                  </a:lnTo>
-                  <a:lnTo>
-                    <a:pt x="6875762" y="2566986"/>
-                  </a:lnTo>
-                  <a:lnTo>
-                    <a:pt x="6804139" y="2565465"/>
-                  </a:lnTo>
-                  <a:lnTo>
-                    <a:pt x="6732517" y="2563824"/>
-                  </a:lnTo>
-                  <a:lnTo>
-                    <a:pt x="6660894" y="2562051"/>
-                  </a:lnTo>
-                  <a:lnTo>
-                    <a:pt x="6589272" y="2560137"/>
-                  </a:lnTo>
-                  <a:lnTo>
-                    <a:pt x="6517649" y="2558071"/>
-                  </a:lnTo>
-                  <a:lnTo>
-                    <a:pt x="6446027" y="2555839"/>
-                  </a:lnTo>
-                  <a:lnTo>
-                    <a:pt x="6374404" y="2553430"/>
-                  </a:lnTo>
-                  <a:lnTo>
-                    <a:pt x="6302782" y="2550828"/>
-                  </a:lnTo>
-                  <a:lnTo>
-                    <a:pt x="6231159" y="2548018"/>
-                  </a:lnTo>
-                  <a:lnTo>
-                    <a:pt x="6159537" y="2544985"/>
-                  </a:lnTo>
-                  <a:lnTo>
-                    <a:pt x="6087914" y="2541709"/>
-                  </a:lnTo>
-                  <a:lnTo>
-                    <a:pt x="6016292" y="2538172"/>
-                  </a:lnTo>
-                  <a:lnTo>
-                    <a:pt x="5944669" y="2534353"/>
-                  </a:lnTo>
-                  <a:lnTo>
-                    <a:pt x="5873047" y="2530229"/>
-                  </a:lnTo>
-                  <a:lnTo>
-                    <a:pt x="5801424" y="2525777"/>
-                  </a:lnTo>
-                  <a:lnTo>
-                    <a:pt x="5729802" y="2520968"/>
-                  </a:lnTo>
-                  <a:lnTo>
-                    <a:pt x="5658179" y="2515777"/>
-                  </a:lnTo>
-                  <a:lnTo>
-                    <a:pt x="5586557" y="2510171"/>
-                  </a:lnTo>
-                  <a:lnTo>
-                    <a:pt x="5514934" y="2504118"/>
-                  </a:lnTo>
-                  <a:lnTo>
-                    <a:pt x="5443311" y="2497582"/>
-                  </a:lnTo>
-                  <a:lnTo>
-                    <a:pt x="5371689" y="2490524"/>
-                  </a:lnTo>
-                  <a:lnTo>
-                    <a:pt x="5300066" y="2482903"/>
-                  </a:lnTo>
-                  <a:lnTo>
-                    <a:pt x="5228444" y="2474674"/>
-                  </a:lnTo>
-                  <a:lnTo>
-                    <a:pt x="5156821" y="2465789"/>
-                  </a:lnTo>
-                  <a:lnTo>
-                    <a:pt x="5085199" y="2456195"/>
-                  </a:lnTo>
-                  <a:lnTo>
-                    <a:pt x="5013576" y="2445836"/>
-                  </a:lnTo>
-                  <a:lnTo>
-                    <a:pt x="4941954" y="2434649"/>
-                  </a:lnTo>
-                  <a:lnTo>
-                    <a:pt x="4870331" y="2422571"/>
-                  </a:lnTo>
-                  <a:lnTo>
-                    <a:pt x="4798709" y="2409528"/>
-                  </a:lnTo>
-                  <a:lnTo>
-                    <a:pt x="4727086" y="2395446"/>
-                  </a:lnTo>
-                  <a:lnTo>
-                    <a:pt x="4655464" y="2380239"/>
-                  </a:lnTo>
-                  <a:lnTo>
-                    <a:pt x="4583841" y="2363819"/>
-                  </a:lnTo>
-                  <a:lnTo>
-                    <a:pt x="4512219" y="2346090"/>
-                  </a:lnTo>
-                  <a:lnTo>
-                    <a:pt x="4440596" y="2326946"/>
-                  </a:lnTo>
-                  <a:lnTo>
-                    <a:pt x="4368974" y="2306274"/>
-                  </a:lnTo>
-                  <a:lnTo>
-                    <a:pt x="4297351" y="2283953"/>
-                  </a:lnTo>
-                  <a:lnTo>
-                    <a:pt x="4225729" y="2259851"/>
-                  </a:lnTo>
-                  <a:lnTo>
-                    <a:pt x="4154106" y="2233826"/>
-                  </a:lnTo>
-                  <a:lnTo>
-                    <a:pt x="4082483" y="2205725"/>
-                  </a:lnTo>
-                  <a:lnTo>
-                    <a:pt x="4010861" y="2175382"/>
-                  </a:lnTo>
-                  <a:lnTo>
-                    <a:pt x="3939238" y="2142618"/>
-                  </a:lnTo>
-                  <a:lnTo>
-                    <a:pt x="3867616" y="2107240"/>
-                  </a:lnTo>
-                  <a:lnTo>
-                    <a:pt x="3795993" y="2069039"/>
-                  </a:lnTo>
-                  <a:lnTo>
-                    <a:pt x="3724371" y="2027791"/>
-                  </a:lnTo>
-                  <a:lnTo>
-                    <a:pt x="3652748" y="1983251"/>
-                  </a:lnTo>
-                  <a:lnTo>
-                    <a:pt x="3581126" y="1935158"/>
-                  </a:lnTo>
-                  <a:lnTo>
-                    <a:pt x="3509503" y="1883228"/>
-                  </a:lnTo>
-                  <a:lnTo>
-                    <a:pt x="3437881" y="1827155"/>
-                  </a:lnTo>
-                  <a:lnTo>
-                    <a:pt x="3366258" y="1766608"/>
-                  </a:lnTo>
-                  <a:lnTo>
-                    <a:pt x="3294636" y="1739458"/>
-                  </a:lnTo>
-                  <a:lnTo>
-                    <a:pt x="3223013" y="1718656"/>
-                  </a:lnTo>
-                  <a:lnTo>
-                    <a:pt x="3151391" y="1697342"/>
-                  </a:lnTo>
-                  <a:lnTo>
-                    <a:pt x="3079768" y="1675504"/>
-                  </a:lnTo>
-                  <a:lnTo>
-                    <a:pt x="3008146" y="1653130"/>
-                  </a:lnTo>
-                  <a:lnTo>
-                    <a:pt x="2936523" y="1630206"/>
-                  </a:lnTo>
-                  <a:lnTo>
-                    <a:pt x="2864901" y="1606718"/>
-                  </a:lnTo>
-                  <a:lnTo>
-                    <a:pt x="2793278" y="1582654"/>
-                  </a:lnTo>
-                  <a:lnTo>
-                    <a:pt x="2721655" y="1557998"/>
-                  </a:lnTo>
-                  <a:lnTo>
-                    <a:pt x="2650033" y="1532736"/>
-                  </a:lnTo>
-                  <a:lnTo>
-                    <a:pt x="2578410" y="1506854"/>
-                  </a:lnTo>
-                  <a:lnTo>
-                    <a:pt x="2506788" y="1480336"/>
-                  </a:lnTo>
-                  <a:lnTo>
-                    <a:pt x="2435165" y="1453165"/>
-                  </a:lnTo>
-                  <a:lnTo>
-                    <a:pt x="2363543" y="1425328"/>
-                  </a:lnTo>
-                  <a:lnTo>
-                    <a:pt x="2291920" y="1396806"/>
-                  </a:lnTo>
-                  <a:lnTo>
-                    <a:pt x="2220298" y="1367583"/>
-                  </a:lnTo>
-                  <a:lnTo>
-                    <a:pt x="2148675" y="1337643"/>
-                  </a:lnTo>
-                  <a:lnTo>
-                    <a:pt x="2077053" y="1306966"/>
-                  </a:lnTo>
-                  <a:lnTo>
-                    <a:pt x="2005430" y="1275536"/>
-                  </a:lnTo>
-                  <a:lnTo>
-                    <a:pt x="1933808" y="1243334"/>
-                  </a:lnTo>
-                  <a:lnTo>
-                    <a:pt x="1862185" y="1210340"/>
-                  </a:lnTo>
-                  <a:lnTo>
-                    <a:pt x="1790563" y="1176535"/>
-                  </a:lnTo>
-                  <a:lnTo>
-                    <a:pt x="1718940" y="1141900"/>
-                  </a:lnTo>
-                  <a:lnTo>
-                    <a:pt x="1647318" y="1106414"/>
-                  </a:lnTo>
-                  <a:lnTo>
-                    <a:pt x="1575695" y="1070055"/>
-                  </a:lnTo>
-                  <a:lnTo>
-                    <a:pt x="1504073" y="1032804"/>
-                  </a:lnTo>
-                  <a:lnTo>
-                    <a:pt x="1432450" y="994636"/>
-                  </a:lnTo>
-                  <a:lnTo>
-                    <a:pt x="1360827" y="955531"/>
-                  </a:lnTo>
-                  <a:lnTo>
-                    <a:pt x="1289205" y="915466"/>
-                  </a:lnTo>
-                  <a:lnTo>
-                    <a:pt x="1217582" y="874415"/>
-                  </a:lnTo>
-                  <a:lnTo>
-                    <a:pt x="1145960" y="832356"/>
-                  </a:lnTo>
-                  <a:lnTo>
-                    <a:pt x="1074337" y="789263"/>
-                  </a:lnTo>
-                  <a:lnTo>
-                    <a:pt x="1002715" y="745112"/>
-                  </a:lnTo>
-                  <a:lnTo>
-                    <a:pt x="931092" y="699875"/>
-                  </a:lnTo>
-                  <a:lnTo>
-                    <a:pt x="859470" y="653527"/>
-                  </a:lnTo>
-                  <a:lnTo>
-                    <a:pt x="787847" y="606041"/>
-                  </a:lnTo>
-                  <a:lnTo>
-                    <a:pt x="716225" y="557387"/>
-                  </a:lnTo>
-                  <a:lnTo>
-                    <a:pt x="644602" y="507537"/>
-                  </a:lnTo>
-                  <a:lnTo>
-                    <a:pt x="572980" y="456463"/>
-                  </a:lnTo>
-                  <a:lnTo>
-                    <a:pt x="501357" y="404134"/>
-                  </a:lnTo>
-                  <a:lnTo>
-                    <a:pt x="429735" y="350519"/>
-                  </a:lnTo>
-                  <a:lnTo>
-                    <a:pt x="358112" y="295586"/>
-                  </a:lnTo>
-                  <a:lnTo>
-                    <a:pt x="286490" y="239304"/>
-                  </a:lnTo>
-                  <a:lnTo>
-                    <a:pt x="214867" y="181638"/>
-                  </a:lnTo>
-                  <a:lnTo>
-                    <a:pt x="143245" y="122556"/>
-                  </a:lnTo>
-                  <a:lnTo>
-                    <a:pt x="71622" y="62021"/>
-                  </a:lnTo>
-                  <a:lnTo>
-                    <a:pt x="0" y="0"/>
+                    <a:pt x="59730" y="79766"/>
+                  </a:lnTo>
+                  <a:lnTo>
+                    <a:pt x="130075" y="166766"/>
+                  </a:lnTo>
+                  <a:lnTo>
+                    <a:pt x="200419" y="247337"/>
+                  </a:lnTo>
+                  <a:lnTo>
+                    <a:pt x="270764" y="321955"/>
+                  </a:lnTo>
+                  <a:lnTo>
+                    <a:pt x="341108" y="391060"/>
+                  </a:lnTo>
+                  <a:lnTo>
+                    <a:pt x="411453" y="455058"/>
+                  </a:lnTo>
+                  <a:lnTo>
+                    <a:pt x="481797" y="514328"/>
+                  </a:lnTo>
+                  <a:lnTo>
+                    <a:pt x="552142" y="569218"/>
+                  </a:lnTo>
+                  <a:lnTo>
+                    <a:pt x="622486" y="620052"/>
+                  </a:lnTo>
+                  <a:lnTo>
+                    <a:pt x="692831" y="667131"/>
+                  </a:lnTo>
+                  <a:lnTo>
+                    <a:pt x="763175" y="710730"/>
+                  </a:lnTo>
+                  <a:lnTo>
+                    <a:pt x="833520" y="751109"/>
+                  </a:lnTo>
+                  <a:lnTo>
+                    <a:pt x="903864" y="788503"/>
+                  </a:lnTo>
+                  <a:lnTo>
+                    <a:pt x="974209" y="823135"/>
+                  </a:lnTo>
+                  <a:lnTo>
+                    <a:pt x="1044553" y="855208"/>
+                  </a:lnTo>
+                  <a:lnTo>
+                    <a:pt x="1114898" y="884911"/>
+                  </a:lnTo>
+                  <a:lnTo>
+                    <a:pt x="1185242" y="912419"/>
+                  </a:lnTo>
+                  <a:lnTo>
+                    <a:pt x="1255587" y="937895"/>
+                  </a:lnTo>
+                  <a:lnTo>
+                    <a:pt x="1325931" y="959017"/>
+                  </a:lnTo>
+                  <a:lnTo>
+                    <a:pt x="1396276" y="966169"/>
+                  </a:lnTo>
+                  <a:lnTo>
+                    <a:pt x="1466620" y="973149"/>
+                  </a:lnTo>
+                  <a:lnTo>
+                    <a:pt x="1536965" y="979961"/>
+                  </a:lnTo>
+                  <a:lnTo>
+                    <a:pt x="1607309" y="986611"/>
+                  </a:lnTo>
+                  <a:lnTo>
+                    <a:pt x="1677654" y="993100"/>
+                  </a:lnTo>
+                  <a:lnTo>
+                    <a:pt x="1747998" y="999434"/>
+                  </a:lnTo>
+                  <a:lnTo>
+                    <a:pt x="1818343" y="1005616"/>
+                  </a:lnTo>
+                  <a:lnTo>
+                    <a:pt x="1888687" y="1011650"/>
+                  </a:lnTo>
+                  <a:lnTo>
+                    <a:pt x="1959032" y="1017539"/>
+                  </a:lnTo>
+                  <a:lnTo>
+                    <a:pt x="2029376" y="1023287"/>
+                  </a:lnTo>
+                  <a:lnTo>
+                    <a:pt x="2099721" y="1028897"/>
+                  </a:lnTo>
+                  <a:lnTo>
+                    <a:pt x="2170065" y="1034373"/>
+                  </a:lnTo>
+                  <a:lnTo>
+                    <a:pt x="2240410" y="1039717"/>
+                  </a:lnTo>
+                  <a:lnTo>
+                    <a:pt x="2310754" y="1044933"/>
+                  </a:lnTo>
+                  <a:lnTo>
+                    <a:pt x="2381099" y="1050024"/>
+                  </a:lnTo>
+                  <a:lnTo>
+                    <a:pt x="2451443" y="1054993"/>
+                  </a:lnTo>
+                  <a:lnTo>
+                    <a:pt x="2521788" y="1059842"/>
+                  </a:lnTo>
+                  <a:lnTo>
+                    <a:pt x="2592132" y="1064576"/>
+                  </a:lnTo>
+                  <a:lnTo>
+                    <a:pt x="2662477" y="1069195"/>
+                  </a:lnTo>
+                  <a:lnTo>
+                    <a:pt x="2732821" y="1073704"/>
+                  </a:lnTo>
+                  <a:lnTo>
+                    <a:pt x="2803165" y="1078105"/>
+                  </a:lnTo>
+                  <a:lnTo>
+                    <a:pt x="2873510" y="1082401"/>
+                  </a:lnTo>
+                  <a:lnTo>
+                    <a:pt x="2943854" y="1086593"/>
+                  </a:lnTo>
+                  <a:lnTo>
+                    <a:pt x="3014199" y="1090685"/>
+                  </a:lnTo>
+                  <a:lnTo>
+                    <a:pt x="3084543" y="1094678"/>
+                  </a:lnTo>
+                  <a:lnTo>
+                    <a:pt x="3154888" y="1098576"/>
+                  </a:lnTo>
+                  <a:lnTo>
+                    <a:pt x="3225232" y="1102381"/>
+                  </a:lnTo>
+                  <a:lnTo>
+                    <a:pt x="3295577" y="1106094"/>
+                  </a:lnTo>
+                  <a:lnTo>
+                    <a:pt x="3365921" y="1109718"/>
+                  </a:lnTo>
+                  <a:lnTo>
+                    <a:pt x="3436266" y="1113255"/>
+                  </a:lnTo>
+                  <a:lnTo>
+                    <a:pt x="3506610" y="1116707"/>
+                  </a:lnTo>
+                  <a:lnTo>
+                    <a:pt x="3576955" y="1120077"/>
+                  </a:lnTo>
+                  <a:lnTo>
+                    <a:pt x="3647299" y="1123365"/>
+                  </a:lnTo>
+                  <a:lnTo>
+                    <a:pt x="3717644" y="1126575"/>
+                  </a:lnTo>
+                  <a:lnTo>
+                    <a:pt x="3787988" y="1129708"/>
+                  </a:lnTo>
+                  <a:lnTo>
+                    <a:pt x="3858333" y="1132766"/>
+                  </a:lnTo>
+                  <a:lnTo>
+                    <a:pt x="3928677" y="1135750"/>
+                  </a:lnTo>
+                  <a:lnTo>
+                    <a:pt x="3999022" y="1138663"/>
+                  </a:lnTo>
+                  <a:lnTo>
+                    <a:pt x="4069366" y="1141506"/>
+                  </a:lnTo>
+                  <a:lnTo>
+                    <a:pt x="4139711" y="1144281"/>
+                  </a:lnTo>
+                  <a:lnTo>
+                    <a:pt x="4210055" y="1146989"/>
+                  </a:lnTo>
+                  <a:lnTo>
+                    <a:pt x="4280400" y="1149632"/>
+                  </a:lnTo>
+                  <a:lnTo>
+                    <a:pt x="4350744" y="1152212"/>
+                  </a:lnTo>
+                  <a:lnTo>
+                    <a:pt x="4421089" y="1154730"/>
+                  </a:lnTo>
+                  <a:lnTo>
+                    <a:pt x="4491433" y="1157188"/>
+                  </a:lnTo>
+                  <a:lnTo>
+                    <a:pt x="4561778" y="1159586"/>
+                  </a:lnTo>
+                  <a:lnTo>
+                    <a:pt x="4632122" y="1161928"/>
+                  </a:lnTo>
+                  <a:lnTo>
+                    <a:pt x="4702467" y="1164213"/>
+                  </a:lnTo>
+                  <a:lnTo>
+                    <a:pt x="4772811" y="1166443"/>
+                  </a:lnTo>
+                  <a:lnTo>
+                    <a:pt x="4843156" y="1168619"/>
+                  </a:lnTo>
+                  <a:lnTo>
+                    <a:pt x="4913500" y="1170744"/>
+                  </a:lnTo>
+                  <a:lnTo>
+                    <a:pt x="4983845" y="1172817"/>
                   </a:lnTo>
                 </a:path>
               </a:pathLst>
@@ -4072,258 +3782,583 @@
           </p:nvSpPr>
           <p:spPr>
             <a:xfrm>
-              <a:off x="2492806" y="2073503"/>
-              <a:ext cx="5769872" cy="3424256"/>
+              <a:off x="1235312" y="2467053"/>
+              <a:ext cx="6964104" cy="927779"/>
             </a:xfrm>
             <a:custGeom>
               <a:avLst/>
               <a:pathLst>
-                <a:path w="5769872" h="3424256">
+                <a:path w="6964104" h="927779">
+                  <a:moveTo>
+                    <a:pt x="6964104" y="927779"/>
+                  </a:moveTo>
+                  <a:lnTo>
+                    <a:pt x="6893760" y="927343"/>
+                  </a:lnTo>
+                  <a:lnTo>
+                    <a:pt x="6823415" y="926873"/>
+                  </a:lnTo>
+                  <a:lnTo>
+                    <a:pt x="6753071" y="926364"/>
+                  </a:lnTo>
+                  <a:lnTo>
+                    <a:pt x="6682726" y="925816"/>
+                  </a:lnTo>
+                  <a:lnTo>
+                    <a:pt x="6612382" y="925223"/>
+                  </a:lnTo>
+                  <a:lnTo>
+                    <a:pt x="6542037" y="924584"/>
+                  </a:lnTo>
+                  <a:lnTo>
+                    <a:pt x="6471693" y="923893"/>
+                  </a:lnTo>
+                  <a:lnTo>
+                    <a:pt x="6401348" y="923147"/>
+                  </a:lnTo>
+                  <a:lnTo>
+                    <a:pt x="6331004" y="922342"/>
+                  </a:lnTo>
+                  <a:lnTo>
+                    <a:pt x="6260659" y="921472"/>
+                  </a:lnTo>
+                  <a:lnTo>
+                    <a:pt x="6190315" y="920533"/>
+                  </a:lnTo>
+                  <a:lnTo>
+                    <a:pt x="6119970" y="919520"/>
+                  </a:lnTo>
+                  <a:lnTo>
+                    <a:pt x="6049626" y="918425"/>
+                  </a:lnTo>
+                  <a:lnTo>
+                    <a:pt x="5979281" y="917243"/>
+                  </a:lnTo>
+                  <a:lnTo>
+                    <a:pt x="5908937" y="915966"/>
+                  </a:lnTo>
+                  <a:lnTo>
+                    <a:pt x="5838592" y="914588"/>
+                  </a:lnTo>
+                  <a:lnTo>
+                    <a:pt x="5768248" y="913100"/>
+                  </a:lnTo>
+                  <a:lnTo>
+                    <a:pt x="5697903" y="911493"/>
+                  </a:lnTo>
+                  <a:lnTo>
+                    <a:pt x="5627559" y="909758"/>
+                  </a:lnTo>
+                  <a:lnTo>
+                    <a:pt x="5557214" y="907884"/>
+                  </a:lnTo>
+                  <a:lnTo>
+                    <a:pt x="5486870" y="905861"/>
+                  </a:lnTo>
+                  <a:lnTo>
+                    <a:pt x="5416525" y="903677"/>
+                  </a:lnTo>
+                  <a:lnTo>
+                    <a:pt x="5346181" y="901318"/>
+                  </a:lnTo>
+                  <a:lnTo>
+                    <a:pt x="5275836" y="898771"/>
+                  </a:lnTo>
+                  <a:lnTo>
+                    <a:pt x="5205492" y="896021"/>
+                  </a:lnTo>
+                  <a:lnTo>
+                    <a:pt x="5135147" y="893051"/>
+                  </a:lnTo>
+                  <a:lnTo>
+                    <a:pt x="5064803" y="889845"/>
+                  </a:lnTo>
+                  <a:lnTo>
+                    <a:pt x="4994458" y="886383"/>
+                  </a:lnTo>
+                  <a:lnTo>
+                    <a:pt x="4924114" y="882644"/>
+                  </a:lnTo>
+                  <a:lnTo>
+                    <a:pt x="4853769" y="878607"/>
+                  </a:lnTo>
+                  <a:lnTo>
+                    <a:pt x="4783425" y="874248"/>
+                  </a:lnTo>
+                  <a:lnTo>
+                    <a:pt x="4713080" y="869542"/>
+                  </a:lnTo>
+                  <a:lnTo>
+                    <a:pt x="4642736" y="864460"/>
+                  </a:lnTo>
+                  <a:lnTo>
+                    <a:pt x="4572391" y="858972"/>
+                  </a:lnTo>
+                  <a:lnTo>
+                    <a:pt x="4502047" y="853047"/>
+                  </a:lnTo>
+                  <a:lnTo>
+                    <a:pt x="4431702" y="846648"/>
+                  </a:lnTo>
+                  <a:lnTo>
+                    <a:pt x="4361358" y="839740"/>
+                  </a:lnTo>
+                  <a:lnTo>
+                    <a:pt x="4291013" y="832280"/>
+                  </a:lnTo>
+                  <a:lnTo>
+                    <a:pt x="4220669" y="824225"/>
+                  </a:lnTo>
+                  <a:lnTo>
+                    <a:pt x="4150324" y="815527"/>
+                  </a:lnTo>
+                  <a:lnTo>
+                    <a:pt x="4079980" y="806135"/>
+                  </a:lnTo>
+                  <a:lnTo>
+                    <a:pt x="4009635" y="795994"/>
+                  </a:lnTo>
+                  <a:lnTo>
+                    <a:pt x="3939291" y="785044"/>
+                  </a:lnTo>
+                  <a:lnTo>
+                    <a:pt x="3868946" y="773220"/>
+                  </a:lnTo>
+                  <a:lnTo>
+                    <a:pt x="3798602" y="760453"/>
+                  </a:lnTo>
+                  <a:lnTo>
+                    <a:pt x="3728257" y="746667"/>
+                  </a:lnTo>
+                  <a:lnTo>
+                    <a:pt x="3657913" y="731782"/>
+                  </a:lnTo>
+                  <a:lnTo>
+                    <a:pt x="3587569" y="715708"/>
+                  </a:lnTo>
+                  <a:lnTo>
+                    <a:pt x="3517224" y="698353"/>
+                  </a:lnTo>
+                  <a:lnTo>
+                    <a:pt x="3446880" y="679612"/>
+                  </a:lnTo>
+                  <a:lnTo>
+                    <a:pt x="3376535" y="659377"/>
+                  </a:lnTo>
+                  <a:lnTo>
+                    <a:pt x="3306191" y="637527"/>
+                  </a:lnTo>
+                  <a:lnTo>
+                    <a:pt x="3235846" y="627729"/>
+                  </a:lnTo>
+                  <a:lnTo>
+                    <a:pt x="3165502" y="620222"/>
+                  </a:lnTo>
+                  <a:lnTo>
+                    <a:pt x="3095157" y="612530"/>
+                  </a:lnTo>
+                  <a:lnTo>
+                    <a:pt x="3024813" y="604650"/>
+                  </a:lnTo>
+                  <a:lnTo>
+                    <a:pt x="2954468" y="596575"/>
+                  </a:lnTo>
+                  <a:lnTo>
+                    <a:pt x="2884124" y="588303"/>
+                  </a:lnTo>
+                  <a:lnTo>
+                    <a:pt x="2813779" y="579827"/>
+                  </a:lnTo>
+                  <a:lnTo>
+                    <a:pt x="2743435" y="571142"/>
+                  </a:lnTo>
+                  <a:lnTo>
+                    <a:pt x="2673090" y="562245"/>
+                  </a:lnTo>
+                  <a:lnTo>
+                    <a:pt x="2602746" y="553128"/>
+                  </a:lnTo>
+                  <a:lnTo>
+                    <a:pt x="2532401" y="543788"/>
+                  </a:lnTo>
+                  <a:lnTo>
+                    <a:pt x="2462057" y="534218"/>
+                  </a:lnTo>
+                  <a:lnTo>
+                    <a:pt x="2391712" y="524413"/>
+                  </a:lnTo>
+                  <a:lnTo>
+                    <a:pt x="2321368" y="514367"/>
+                  </a:lnTo>
+                  <a:lnTo>
+                    <a:pt x="2251023" y="504074"/>
+                  </a:lnTo>
+                  <a:lnTo>
+                    <a:pt x="2180679" y="493528"/>
+                  </a:lnTo>
+                  <a:lnTo>
+                    <a:pt x="2110334" y="482723"/>
+                  </a:lnTo>
+                  <a:lnTo>
+                    <a:pt x="2039990" y="471653"/>
+                  </a:lnTo>
+                  <a:lnTo>
+                    <a:pt x="1969645" y="460311"/>
+                  </a:lnTo>
+                  <a:lnTo>
+                    <a:pt x="1899301" y="448690"/>
+                  </a:lnTo>
+                  <a:lnTo>
+                    <a:pt x="1828956" y="436783"/>
+                  </a:lnTo>
+                  <a:lnTo>
+                    <a:pt x="1758612" y="424584"/>
+                  </a:lnTo>
+                  <a:lnTo>
+                    <a:pt x="1688267" y="412085"/>
+                  </a:lnTo>
+                  <a:lnTo>
+                    <a:pt x="1617923" y="399278"/>
+                  </a:lnTo>
+                  <a:lnTo>
+                    <a:pt x="1547578" y="386157"/>
+                  </a:lnTo>
+                  <a:lnTo>
+                    <a:pt x="1477234" y="372714"/>
+                  </a:lnTo>
+                  <a:lnTo>
+                    <a:pt x="1406889" y="358941"/>
+                  </a:lnTo>
+                  <a:lnTo>
+                    <a:pt x="1336545" y="344829"/>
+                  </a:lnTo>
+                  <a:lnTo>
+                    <a:pt x="1266200" y="330370"/>
+                  </a:lnTo>
+                  <a:lnTo>
+                    <a:pt x="1195856" y="315556"/>
+                  </a:lnTo>
+                  <a:lnTo>
+                    <a:pt x="1125511" y="300377"/>
+                  </a:lnTo>
+                  <a:lnTo>
+                    <a:pt x="1055167" y="284826"/>
+                  </a:lnTo>
+                  <a:lnTo>
+                    <a:pt x="984822" y="268893"/>
+                  </a:lnTo>
+                  <a:lnTo>
+                    <a:pt x="914478" y="252568"/>
+                  </a:lnTo>
+                  <a:lnTo>
+                    <a:pt x="844133" y="235842"/>
+                  </a:lnTo>
+                  <a:lnTo>
+                    <a:pt x="773789" y="218705"/>
+                  </a:lnTo>
+                  <a:lnTo>
+                    <a:pt x="703444" y="201147"/>
+                  </a:lnTo>
+                  <a:lnTo>
+                    <a:pt x="633100" y="183158"/>
+                  </a:lnTo>
+                  <a:lnTo>
+                    <a:pt x="562755" y="164726"/>
+                  </a:lnTo>
+                  <a:lnTo>
+                    <a:pt x="492411" y="145842"/>
+                  </a:lnTo>
+                  <a:lnTo>
+                    <a:pt x="422066" y="126494"/>
+                  </a:lnTo>
+                  <a:lnTo>
+                    <a:pt x="351722" y="106670"/>
+                  </a:lnTo>
+                  <a:lnTo>
+                    <a:pt x="281377" y="86359"/>
+                  </a:lnTo>
+                  <a:lnTo>
+                    <a:pt x="211033" y="65549"/>
+                  </a:lnTo>
+                  <a:lnTo>
+                    <a:pt x="140688" y="44227"/>
+                  </a:lnTo>
+                  <a:lnTo>
+                    <a:pt x="70344" y="22382"/>
+                  </a:lnTo>
+                  <a:lnTo>
+                    <a:pt x="0" y="0"/>
+                  </a:lnTo>
+                </a:path>
+              </a:pathLst>
+            </a:custGeom>
+          </p:spPr>
+          <p:txBody>
+            <a:bodyPr/>
+            <a:lstStyle/>
+            <a:p/>
+          </p:txBody>
+        </p:sp>
+        <p:sp>
+          <p:nvSpPr>
+            <p:cNvPr id="24" name="pl24"/>
+            <p:cNvSpPr/>
+            <p:nvPr/>
+          </p:nvSpPr>
+          <p:spPr>
+            <a:xfrm>
+              <a:off x="2532501" y="2143092"/>
+              <a:ext cx="5666914" cy="1235733"/>
+            </a:xfrm>
+            <a:custGeom>
+              <a:avLst/>
+              <a:pathLst>
+                <a:path w="5666914" h="1235733">
                   <a:moveTo>
                     <a:pt x="0" y="0"/>
                   </a:moveTo>
                   <a:lnTo>
-                    <a:pt x="40070" y="98146"/>
-                  </a:lnTo>
-                  <a:lnTo>
-                    <a:pt x="111693" y="264933"/>
-                  </a:lnTo>
-                  <a:lnTo>
-                    <a:pt x="183315" y="423503"/>
-                  </a:lnTo>
-                  <a:lnTo>
-                    <a:pt x="254938" y="574262"/>
-                  </a:lnTo>
-                  <a:lnTo>
-                    <a:pt x="326560" y="717593"/>
-                  </a:lnTo>
-                  <a:lnTo>
-                    <a:pt x="398183" y="853864"/>
-                  </a:lnTo>
-                  <a:lnTo>
-                    <a:pt x="469805" y="983421"/>
-                  </a:lnTo>
-                  <a:lnTo>
-                    <a:pt x="541428" y="1106596"/>
-                  </a:lnTo>
-                  <a:lnTo>
-                    <a:pt x="613050" y="1223703"/>
-                  </a:lnTo>
-                  <a:lnTo>
-                    <a:pt x="684673" y="1335041"/>
-                  </a:lnTo>
-                  <a:lnTo>
-                    <a:pt x="756295" y="1440893"/>
-                  </a:lnTo>
-                  <a:lnTo>
-                    <a:pt x="827918" y="1541532"/>
-                  </a:lnTo>
-                  <a:lnTo>
-                    <a:pt x="899540" y="1637212"/>
-                  </a:lnTo>
-                  <a:lnTo>
-                    <a:pt x="971163" y="1728179"/>
-                  </a:lnTo>
-                  <a:lnTo>
-                    <a:pt x="1042785" y="1814664"/>
-                  </a:lnTo>
-                  <a:lnTo>
-                    <a:pt x="1114408" y="1896889"/>
-                  </a:lnTo>
-                  <a:lnTo>
-                    <a:pt x="1186030" y="1975063"/>
-                  </a:lnTo>
-                  <a:lnTo>
-                    <a:pt x="1257653" y="2049387"/>
-                  </a:lnTo>
-                  <a:lnTo>
-                    <a:pt x="1329275" y="2120048"/>
-                  </a:lnTo>
-                  <a:lnTo>
-                    <a:pt x="1400898" y="2187229"/>
-                  </a:lnTo>
-                  <a:lnTo>
-                    <a:pt x="1472521" y="2251100"/>
-                  </a:lnTo>
-                  <a:lnTo>
-                    <a:pt x="1544143" y="2311824"/>
-                  </a:lnTo>
-                  <a:lnTo>
-                    <a:pt x="1615766" y="2369557"/>
-                  </a:lnTo>
-                  <a:lnTo>
-                    <a:pt x="1687388" y="2424446"/>
-                  </a:lnTo>
-                  <a:lnTo>
-                    <a:pt x="1759011" y="2476631"/>
-                  </a:lnTo>
-                  <a:lnTo>
-                    <a:pt x="1830633" y="2526245"/>
-                  </a:lnTo>
-                  <a:lnTo>
-                    <a:pt x="1902256" y="2573415"/>
-                  </a:lnTo>
-                  <a:lnTo>
-                    <a:pt x="1973878" y="2618261"/>
-                  </a:lnTo>
-                  <a:lnTo>
-                    <a:pt x="2045501" y="2660898"/>
-                  </a:lnTo>
-                  <a:lnTo>
-                    <a:pt x="2117123" y="2701435"/>
-                  </a:lnTo>
-                  <a:lnTo>
-                    <a:pt x="2188746" y="2739974"/>
-                  </a:lnTo>
-                  <a:lnTo>
-                    <a:pt x="2260368" y="2776615"/>
-                  </a:lnTo>
-                  <a:lnTo>
-                    <a:pt x="2331991" y="2811451"/>
-                  </a:lnTo>
-                  <a:lnTo>
-                    <a:pt x="2403613" y="2844570"/>
-                  </a:lnTo>
-                  <a:lnTo>
-                    <a:pt x="2475236" y="2876059"/>
-                  </a:lnTo>
-                  <a:lnTo>
-                    <a:pt x="2546858" y="2905995"/>
-                  </a:lnTo>
-                  <a:lnTo>
-                    <a:pt x="2618481" y="2934457"/>
-                  </a:lnTo>
-                  <a:lnTo>
-                    <a:pt x="2690103" y="2961517"/>
-                  </a:lnTo>
-                  <a:lnTo>
-                    <a:pt x="2761726" y="2987244"/>
-                  </a:lnTo>
-                  <a:lnTo>
-                    <a:pt x="2833349" y="3011704"/>
-                  </a:lnTo>
-                  <a:lnTo>
-                    <a:pt x="2904971" y="3034958"/>
-                  </a:lnTo>
-                  <a:lnTo>
-                    <a:pt x="2976594" y="3057067"/>
-                  </a:lnTo>
-                  <a:lnTo>
-                    <a:pt x="3048216" y="3078087"/>
-                  </a:lnTo>
-                  <a:lnTo>
-                    <a:pt x="3119839" y="3098071"/>
-                  </a:lnTo>
-                  <a:lnTo>
-                    <a:pt x="3191461" y="3117071"/>
-                  </a:lnTo>
-                  <a:lnTo>
-                    <a:pt x="3263084" y="3135135"/>
-                  </a:lnTo>
-                  <a:lnTo>
-                    <a:pt x="3334706" y="3152308"/>
-                  </a:lnTo>
-                  <a:lnTo>
-                    <a:pt x="3406329" y="3168636"/>
-                  </a:lnTo>
-                  <a:lnTo>
-                    <a:pt x="3477951" y="3184160"/>
-                  </a:lnTo>
-                  <a:lnTo>
-                    <a:pt x="3549574" y="3198918"/>
-                  </a:lnTo>
-                  <a:lnTo>
-                    <a:pt x="3621196" y="3212950"/>
-                  </a:lnTo>
-                  <a:lnTo>
-                    <a:pt x="3692819" y="3226290"/>
-                  </a:lnTo>
-                  <a:lnTo>
-                    <a:pt x="3764441" y="3238974"/>
-                  </a:lnTo>
-                  <a:lnTo>
-                    <a:pt x="3836064" y="3251032"/>
-                  </a:lnTo>
-                  <a:lnTo>
-                    <a:pt x="3907686" y="3262496"/>
-                  </a:lnTo>
-                  <a:lnTo>
-                    <a:pt x="3979309" y="3273396"/>
-                  </a:lnTo>
-                  <a:lnTo>
-                    <a:pt x="4050931" y="3283758"/>
-                  </a:lnTo>
-                  <a:lnTo>
-                    <a:pt x="4122554" y="3293611"/>
-                  </a:lnTo>
-                  <a:lnTo>
-                    <a:pt x="4194177" y="3302977"/>
-                  </a:lnTo>
-                  <a:lnTo>
-                    <a:pt x="4265799" y="3311883"/>
-                  </a:lnTo>
-                  <a:lnTo>
-                    <a:pt x="4337422" y="3320349"/>
-                  </a:lnTo>
-                  <a:lnTo>
-                    <a:pt x="4409044" y="3328399"/>
-                  </a:lnTo>
-                  <a:lnTo>
-                    <a:pt x="4480667" y="3336052"/>
-                  </a:lnTo>
-                  <a:lnTo>
-                    <a:pt x="4552289" y="3343328"/>
-                  </a:lnTo>
-                  <a:lnTo>
-                    <a:pt x="4623912" y="3350245"/>
-                  </a:lnTo>
-                  <a:lnTo>
-                    <a:pt x="4695534" y="3356822"/>
-                  </a:lnTo>
-                  <a:lnTo>
-                    <a:pt x="4767157" y="3363075"/>
-                  </a:lnTo>
-                  <a:lnTo>
-                    <a:pt x="4838779" y="3369019"/>
-                  </a:lnTo>
-                  <a:lnTo>
-                    <a:pt x="4910402" y="3374671"/>
-                  </a:lnTo>
-                  <a:lnTo>
-                    <a:pt x="4982024" y="3380045"/>
-                  </a:lnTo>
-                  <a:lnTo>
-                    <a:pt x="5053647" y="3385153"/>
-                  </a:lnTo>
-                  <a:lnTo>
-                    <a:pt x="5125269" y="3390011"/>
-                  </a:lnTo>
-                  <a:lnTo>
-                    <a:pt x="5196892" y="3394628"/>
-                  </a:lnTo>
-                  <a:lnTo>
-                    <a:pt x="5268514" y="3399019"/>
-                  </a:lnTo>
-                  <a:lnTo>
-                    <a:pt x="5340137" y="3403193"/>
-                  </a:lnTo>
-                  <a:lnTo>
-                    <a:pt x="5411759" y="3407161"/>
-                  </a:lnTo>
-                  <a:lnTo>
-                    <a:pt x="5483382" y="3410934"/>
-                  </a:lnTo>
-                  <a:lnTo>
-                    <a:pt x="5555004" y="3414521"/>
-                  </a:lnTo>
-                  <a:lnTo>
-                    <a:pt x="5626627" y="3417931"/>
-                  </a:lnTo>
-                  <a:lnTo>
-                    <a:pt x="5698250" y="3421173"/>
-                  </a:lnTo>
-                  <a:lnTo>
-                    <a:pt x="5769872" y="3424256"/>
+                    <a:pt x="39355" y="35418"/>
+                  </a:lnTo>
+                  <a:lnTo>
+                    <a:pt x="109699" y="95608"/>
+                  </a:lnTo>
+                  <a:lnTo>
+                    <a:pt x="180044" y="152832"/>
+                  </a:lnTo>
+                  <a:lnTo>
+                    <a:pt x="250388" y="207237"/>
+                  </a:lnTo>
+                  <a:lnTo>
+                    <a:pt x="320733" y="258962"/>
+                  </a:lnTo>
+                  <a:lnTo>
+                    <a:pt x="391077" y="308139"/>
+                  </a:lnTo>
+                  <a:lnTo>
+                    <a:pt x="461422" y="354893"/>
+                  </a:lnTo>
+                  <a:lnTo>
+                    <a:pt x="531766" y="399344"/>
+                  </a:lnTo>
+                  <a:lnTo>
+                    <a:pt x="602111" y="441605"/>
+                  </a:lnTo>
+                  <a:lnTo>
+                    <a:pt x="672455" y="481784"/>
+                  </a:lnTo>
+                  <a:lnTo>
+                    <a:pt x="742800" y="519984"/>
+                  </a:lnTo>
+                  <a:lnTo>
+                    <a:pt x="813144" y="556302"/>
+                  </a:lnTo>
+                  <a:lnTo>
+                    <a:pt x="883489" y="590831"/>
+                  </a:lnTo>
+                  <a:lnTo>
+                    <a:pt x="953833" y="623659"/>
+                  </a:lnTo>
+                  <a:lnTo>
+                    <a:pt x="1024178" y="654869"/>
+                  </a:lnTo>
+                  <a:lnTo>
+                    <a:pt x="1094522" y="684542"/>
+                  </a:lnTo>
+                  <a:lnTo>
+                    <a:pt x="1164867" y="712754"/>
+                  </a:lnTo>
+                  <a:lnTo>
+                    <a:pt x="1235211" y="739575"/>
+                  </a:lnTo>
+                  <a:lnTo>
+                    <a:pt x="1305556" y="765075"/>
+                  </a:lnTo>
+                  <a:lnTo>
+                    <a:pt x="1375900" y="789319"/>
+                  </a:lnTo>
+                  <a:lnTo>
+                    <a:pt x="1446245" y="812369"/>
+                  </a:lnTo>
+                  <a:lnTo>
+                    <a:pt x="1516589" y="834283"/>
+                  </a:lnTo>
+                  <a:lnTo>
+                    <a:pt x="1586934" y="855117"/>
+                  </a:lnTo>
+                  <a:lnTo>
+                    <a:pt x="1657278" y="874925"/>
+                  </a:lnTo>
+                  <a:lnTo>
+                    <a:pt x="1727623" y="893758"/>
+                  </a:lnTo>
+                  <a:lnTo>
+                    <a:pt x="1797967" y="911662"/>
+                  </a:lnTo>
+                  <a:lnTo>
+                    <a:pt x="1868312" y="928685"/>
+                  </a:lnTo>
+                  <a:lnTo>
+                    <a:pt x="1938656" y="944869"/>
+                  </a:lnTo>
+                  <a:lnTo>
+                    <a:pt x="2009001" y="960255"/>
+                  </a:lnTo>
+                  <a:lnTo>
+                    <a:pt x="2079345" y="974884"/>
+                  </a:lnTo>
+                  <a:lnTo>
+                    <a:pt x="2149690" y="988792"/>
+                  </a:lnTo>
+                  <a:lnTo>
+                    <a:pt x="2220034" y="1002015"/>
+                  </a:lnTo>
+                  <a:lnTo>
+                    <a:pt x="2290379" y="1014586"/>
+                  </a:lnTo>
+                  <a:lnTo>
+                    <a:pt x="2360723" y="1026538"/>
+                  </a:lnTo>
+                  <a:lnTo>
+                    <a:pt x="2431068" y="1037902"/>
+                  </a:lnTo>
+                  <a:lnTo>
+                    <a:pt x="2501412" y="1048705"/>
+                  </a:lnTo>
+                  <a:lnTo>
+                    <a:pt x="2571757" y="1058976"/>
+                  </a:lnTo>
+                  <a:lnTo>
+                    <a:pt x="2642101" y="1068742"/>
+                  </a:lnTo>
+                  <a:lnTo>
+                    <a:pt x="2712446" y="1078026"/>
+                  </a:lnTo>
+                  <a:lnTo>
+                    <a:pt x="2782790" y="1086853"/>
+                  </a:lnTo>
+                  <a:lnTo>
+                    <a:pt x="2853135" y="1095245"/>
+                  </a:lnTo>
+                  <a:lnTo>
+                    <a:pt x="2923479" y="1103223"/>
+                  </a:lnTo>
+                  <a:lnTo>
+                    <a:pt x="2993824" y="1110809"/>
+                  </a:lnTo>
+                  <a:lnTo>
+                    <a:pt x="3064168" y="1118021"/>
+                  </a:lnTo>
+                  <a:lnTo>
+                    <a:pt x="3134513" y="1124877"/>
+                  </a:lnTo>
+                  <a:lnTo>
+                    <a:pt x="3204857" y="1131396"/>
+                  </a:lnTo>
+                  <a:lnTo>
+                    <a:pt x="3275202" y="1137594"/>
+                  </a:lnTo>
+                  <a:lnTo>
+                    <a:pt x="3345546" y="1143486"/>
+                  </a:lnTo>
+                  <a:lnTo>
+                    <a:pt x="3415891" y="1149088"/>
+                  </a:lnTo>
+                  <a:lnTo>
+                    <a:pt x="3486235" y="1154414"/>
+                  </a:lnTo>
+                  <a:lnTo>
+                    <a:pt x="3556579" y="1159478"/>
+                  </a:lnTo>
+                  <a:lnTo>
+                    <a:pt x="3626924" y="1164292"/>
+                  </a:lnTo>
+                  <a:lnTo>
+                    <a:pt x="3697268" y="1168869"/>
+                  </a:lnTo>
+                  <a:lnTo>
+                    <a:pt x="3767613" y="1173221"/>
+                  </a:lnTo>
+                  <a:lnTo>
+                    <a:pt x="3837957" y="1177358"/>
+                  </a:lnTo>
+                  <a:lnTo>
+                    <a:pt x="3908302" y="1181291"/>
+                  </a:lnTo>
+                  <a:lnTo>
+                    <a:pt x="3978646" y="1185031"/>
+                  </a:lnTo>
+                  <a:lnTo>
+                    <a:pt x="4048991" y="1188586"/>
+                  </a:lnTo>
+                  <a:lnTo>
+                    <a:pt x="4119335" y="1191967"/>
+                  </a:lnTo>
+                  <a:lnTo>
+                    <a:pt x="4189680" y="1195180"/>
+                  </a:lnTo>
+                  <a:lnTo>
+                    <a:pt x="4260024" y="1198236"/>
+                  </a:lnTo>
+                  <a:lnTo>
+                    <a:pt x="4330369" y="1201141"/>
+                  </a:lnTo>
+                  <a:lnTo>
+                    <a:pt x="4400713" y="1203902"/>
+                  </a:lnTo>
+                  <a:lnTo>
+                    <a:pt x="4471058" y="1206528"/>
+                  </a:lnTo>
+                  <a:lnTo>
+                    <a:pt x="4541402" y="1209024"/>
+                  </a:lnTo>
+                  <a:lnTo>
+                    <a:pt x="4611747" y="1211398"/>
+                  </a:lnTo>
+                  <a:lnTo>
+                    <a:pt x="4682091" y="1213654"/>
+                  </a:lnTo>
+                  <a:lnTo>
+                    <a:pt x="4752436" y="1215800"/>
+                  </a:lnTo>
+                  <a:lnTo>
+                    <a:pt x="4822780" y="1217839"/>
+                  </a:lnTo>
+                  <a:lnTo>
+                    <a:pt x="4893125" y="1219778"/>
+                  </a:lnTo>
+                  <a:lnTo>
+                    <a:pt x="4963469" y="1221622"/>
+                  </a:lnTo>
+                  <a:lnTo>
+                    <a:pt x="5033814" y="1223375"/>
+                  </a:lnTo>
+                  <a:lnTo>
+                    <a:pt x="5104158" y="1225041"/>
+                  </a:lnTo>
+                  <a:lnTo>
+                    <a:pt x="5174503" y="1226626"/>
+                  </a:lnTo>
+                  <a:lnTo>
+                    <a:pt x="5244847" y="1228132"/>
+                  </a:lnTo>
+                  <a:lnTo>
+                    <a:pt x="5315192" y="1229564"/>
+                  </a:lnTo>
+                  <a:lnTo>
+                    <a:pt x="5385536" y="1230925"/>
+                  </a:lnTo>
+                  <a:lnTo>
+                    <a:pt x="5455881" y="1232220"/>
+                  </a:lnTo>
+                  <a:lnTo>
+                    <a:pt x="5526225" y="1233451"/>
+                  </a:lnTo>
+                  <a:lnTo>
+                    <a:pt x="5596570" y="1234621"/>
+                  </a:lnTo>
+                  <a:lnTo>
+                    <a:pt x="5666914" y="1235733"/>
                   </a:lnTo>
                 </a:path>
               </a:pathLst>
@@ -4346,27 +4381,27 @@
         </p:sp>
         <p:sp>
           <p:nvSpPr>
-            <p:cNvPr id="24" name="pl24"/>
+            <p:cNvPr id="25" name="pl25"/>
             <p:cNvSpPr/>
             <p:nvPr/>
           </p:nvSpPr>
           <p:spPr>
             <a:xfrm>
-              <a:off x="817517" y="4727786"/>
-              <a:ext cx="7799693" cy="0"/>
+              <a:off x="887106" y="3100960"/>
+              <a:ext cx="7660515" cy="0"/>
             </a:xfrm>
             <a:custGeom>
               <a:avLst/>
               <a:pathLst>
-                <a:path w="7799693" h="0">
+                <a:path w="7660515" h="0">
                   <a:moveTo>
                     <a:pt x="0" y="0"/>
                   </a:moveTo>
                   <a:lnTo>
-                    <a:pt x="7799693" y="0"/>
-                  </a:lnTo>
-                  <a:lnTo>
-                    <a:pt x="7799693" y="0"/>
+                    <a:pt x="7660515" y="0"/>
+                  </a:lnTo>
+                  <a:lnTo>
+                    <a:pt x="7660515" y="0"/>
                   </a:lnTo>
                 </a:path>
               </a:pathLst>
@@ -4389,21 +4424,21 @@
         </p:sp>
         <p:sp>
           <p:nvSpPr>
-            <p:cNvPr id="25" name="pl25"/>
+            <p:cNvPr id="26" name="pl26"/>
             <p:cNvSpPr/>
             <p:nvPr/>
           </p:nvSpPr>
           <p:spPr>
             <a:xfrm>
-              <a:off x="4526955" y="2073503"/>
-              <a:ext cx="0" cy="3649639"/>
+              <a:off x="4530353" y="2143092"/>
+              <a:ext cx="0" cy="1317069"/>
             </a:xfrm>
             <a:custGeom>
               <a:avLst/>
               <a:pathLst>
-                <a:path w="0" h="3649639">
+                <a:path w="0" h="1317069">
                   <a:moveTo>
-                    <a:pt x="0" y="3649639"/>
+                    <a:pt x="0" y="1317069"/>
                   </a:moveTo>
                   <a:lnTo>
                     <a:pt x="0" y="0"/>
@@ -4432,13 +4467,13 @@
         </p:sp>
         <p:sp>
           <p:nvSpPr>
-            <p:cNvPr id="26" name="tx26"/>
+            <p:cNvPr id="27" name="tx27"/>
             <p:cNvSpPr/>
             <p:nvPr/>
           </p:nvSpPr>
           <p:spPr>
             <a:xfrm>
-              <a:off x="692708" y="5517199"/>
+              <a:off x="762297" y="3360243"/>
               <a:ext cx="62179" cy="80101"/>
             </a:xfrm>
             <a:prstGeom prst="rect">
@@ -4478,13 +4513,13 @@
         </p:sp>
         <p:sp>
           <p:nvSpPr>
-            <p:cNvPr id="27" name="tx27"/>
+            <p:cNvPr id="28" name="tx28"/>
             <p:cNvSpPr/>
             <p:nvPr/>
           </p:nvSpPr>
           <p:spPr>
             <a:xfrm>
-              <a:off x="692708" y="4687735"/>
+              <a:off x="762297" y="3060909"/>
               <a:ext cx="62179" cy="80101"/>
             </a:xfrm>
             <a:prstGeom prst="rect">
@@ -4524,13 +4559,13 @@
         </p:sp>
         <p:sp>
           <p:nvSpPr>
-            <p:cNvPr id="28" name="tx28"/>
+            <p:cNvPr id="29" name="tx29"/>
             <p:cNvSpPr/>
             <p:nvPr/>
           </p:nvSpPr>
           <p:spPr>
             <a:xfrm>
-              <a:off x="692708" y="3858272"/>
+              <a:off x="762297" y="2761575"/>
               <a:ext cx="62179" cy="80101"/>
             </a:xfrm>
             <a:prstGeom prst="rect">
@@ -4570,13 +4605,13 @@
         </p:sp>
         <p:sp>
           <p:nvSpPr>
-            <p:cNvPr id="29" name="tx29"/>
+            <p:cNvPr id="30" name="tx30"/>
             <p:cNvSpPr/>
             <p:nvPr/>
           </p:nvSpPr>
           <p:spPr>
             <a:xfrm>
-              <a:off x="692708" y="3028808"/>
+              <a:off x="762297" y="2462242"/>
               <a:ext cx="62179" cy="80101"/>
             </a:xfrm>
             <a:prstGeom prst="rect">
@@ -4616,13 +4651,13 @@
         </p:sp>
         <p:sp>
           <p:nvSpPr>
-            <p:cNvPr id="30" name="tx30"/>
+            <p:cNvPr id="31" name="tx31"/>
             <p:cNvSpPr/>
             <p:nvPr/>
           </p:nvSpPr>
           <p:spPr>
             <a:xfrm>
-              <a:off x="692708" y="2199345"/>
+              <a:off x="762297" y="2162908"/>
               <a:ext cx="62179" cy="80101"/>
             </a:xfrm>
             <a:prstGeom prst="rect">
@@ -4662,13 +4697,13 @@
         </p:sp>
         <p:sp>
           <p:nvSpPr>
-            <p:cNvPr id="31" name="tx31"/>
+            <p:cNvPr id="32" name="tx32"/>
             <p:cNvSpPr/>
             <p:nvPr/>
           </p:nvSpPr>
           <p:spPr>
             <a:xfrm>
-              <a:off x="2421884" y="5785772"/>
+              <a:off x="2461403" y="3522791"/>
               <a:ext cx="161574" cy="80101"/>
             </a:xfrm>
             <a:prstGeom prst="rect">
@@ -4708,13 +4743,13 @@
         </p:sp>
         <p:sp>
           <p:nvSpPr>
-            <p:cNvPr id="32" name="tx32"/>
+            <p:cNvPr id="33" name="tx33"/>
             <p:cNvSpPr/>
             <p:nvPr/>
           </p:nvSpPr>
           <p:spPr>
             <a:xfrm>
-              <a:off x="4542539" y="5785772"/>
+              <a:off x="4545104" y="3522791"/>
               <a:ext cx="62179" cy="80101"/>
             </a:xfrm>
             <a:prstGeom prst="rect">
@@ -4754,13 +4789,13 @@
         </p:sp>
         <p:sp>
           <p:nvSpPr>
-            <p:cNvPr id="33" name="tx33"/>
+            <p:cNvPr id="34" name="tx34"/>
             <p:cNvSpPr/>
             <p:nvPr/>
           </p:nvSpPr>
           <p:spPr>
             <a:xfrm>
-              <a:off x="6582407" y="5785772"/>
+              <a:off x="6548017" y="3522791"/>
               <a:ext cx="124358" cy="80101"/>
             </a:xfrm>
             <a:prstGeom prst="rect">
@@ -4800,13 +4835,13 @@
         </p:sp>
         <p:sp>
           <p:nvSpPr>
-            <p:cNvPr id="34" name="tx34"/>
+            <p:cNvPr id="35" name="tx35"/>
             <p:cNvSpPr/>
             <p:nvPr/>
           </p:nvSpPr>
           <p:spPr>
             <a:xfrm>
-              <a:off x="2928340" y="5925448"/>
+              <a:off x="2928340" y="3662467"/>
               <a:ext cx="3578047" cy="100218"/>
             </a:xfrm>
             <a:prstGeom prst="rect">
@@ -4846,13 +4881,13 @@
         </p:sp>
         <p:sp>
           <p:nvSpPr>
-            <p:cNvPr id="35" name="tx35"/>
+            <p:cNvPr id="36" name="tx36"/>
             <p:cNvSpPr/>
             <p:nvPr/>
           </p:nvSpPr>
           <p:spPr>
             <a:xfrm rot="-5400000">
-              <a:off x="68446" y="3848213"/>
+              <a:off x="138035" y="2751517"/>
               <a:ext cx="1016904" cy="100218"/>
             </a:xfrm>
             <a:prstGeom prst="rect">
@@ -4892,13 +4927,13 @@
         </p:sp>
         <p:sp>
           <p:nvSpPr>
-            <p:cNvPr id="36" name="tx36"/>
+            <p:cNvPr id="37" name="tx37"/>
             <p:cNvSpPr/>
             <p:nvPr/>
           </p:nvSpPr>
           <p:spPr>
             <a:xfrm>
-              <a:off x="817517" y="1896563"/>
+              <a:off x="887106" y="1966152"/>
               <a:ext cx="7115677" cy="82021"/>
             </a:xfrm>
             <a:prstGeom prst="rect">
@@ -4938,13 +4973,3524 @@
         </p:sp>
         <p:sp>
           <p:nvSpPr>
-            <p:cNvPr id="37" name="tx37"/>
+            <p:cNvPr id="38" name="tx38"/>
             <p:cNvSpPr/>
             <p:nvPr/>
           </p:nvSpPr>
           <p:spPr>
             <a:xfrm>
-              <a:off x="817517" y="1669789"/>
+              <a:off x="887106" y="1739378"/>
+              <a:ext cx="3054278" cy="120152"/>
+            </a:xfrm>
+            <a:prstGeom prst="rect">
+              <a:avLst/>
+            </a:prstGeom>
+            <a:noFill/>
+          </p:spPr>
+          <p:txBody>
+            <a:bodyPr lIns="0" rIns="0" tIns="0" bIns="0" anchorCtr="1" anchor="ctr" wrap="none"/>
+            <a:lstStyle/>
+            <a:p>
+              <a:pPr algn="l" marL="0" marR="0" indent="0">
+                <a:lnSpc>
+                  <a:spcPts val="1320"/>
+                </a:lnSpc>
+                <a:spcBef>
+                  <a:spcPts val="0"/>
+                </a:spcBef>
+                <a:spcAft>
+                  <a:spcPts val="0"/>
+                </a:spcAft>
+              </a:pPr>
+              <a:r>
+                <a:rPr sz="1320">
+                  <a:solidFill>
+                    <a:srgbClr val="000000">
+                      <a:alpha val="100000"/>
+                    </a:srgbClr>
+                  </a:solidFill>
+                  <a:latin typeface="Helvetica"/>
+                  <a:cs typeface="Helvetica"/>
+                </a:rPr>
+                <a:t>Thrombocytopenia Grade 3 (Carboplatin)</a:t>
+              </a:r>
+            </a:p>
+          </p:txBody>
+        </p:sp>
+        <p:sp>
+          <p:nvSpPr>
+            <p:cNvPr id="39" name="pl39"/>
+            <p:cNvSpPr/>
+            <p:nvPr/>
+          </p:nvSpPr>
+          <p:spPr>
+            <a:xfrm>
+              <a:off x="887106" y="5444019"/>
+              <a:ext cx="7660515" cy="0"/>
+            </a:xfrm>
+            <a:custGeom>
+              <a:avLst/>
+              <a:pathLst>
+                <a:path w="7660515" h="0">
+                  <a:moveTo>
+                    <a:pt x="0" y="0"/>
+                  </a:moveTo>
+                  <a:lnTo>
+                    <a:pt x="7660515" y="0"/>
+                  </a:lnTo>
+                  <a:lnTo>
+                    <a:pt x="7660515" y="0"/>
+                  </a:lnTo>
+                </a:path>
+              </a:pathLst>
+            </a:custGeom>
+            <a:ln w="6775" cap="flat">
+              <a:solidFill>
+                <a:srgbClr val="EBEBEB">
+                  <a:alpha val="100000"/>
+                </a:srgbClr>
+              </a:solidFill>
+              <a:prstDash val="solid"/>
+              <a:round/>
+            </a:ln>
+          </p:spPr>
+          <p:txBody>
+            <a:bodyPr/>
+            <a:lstStyle/>
+            <a:p/>
+          </p:txBody>
+        </p:sp>
+        <p:sp>
+          <p:nvSpPr>
+            <p:cNvPr id="40" name="pl40"/>
+            <p:cNvSpPr/>
+            <p:nvPr/>
+          </p:nvSpPr>
+          <p:spPr>
+            <a:xfrm>
+              <a:off x="887106" y="5144686"/>
+              <a:ext cx="7660515" cy="0"/>
+            </a:xfrm>
+            <a:custGeom>
+              <a:avLst/>
+              <a:pathLst>
+                <a:path w="7660515" h="0">
+                  <a:moveTo>
+                    <a:pt x="0" y="0"/>
+                  </a:moveTo>
+                  <a:lnTo>
+                    <a:pt x="7660515" y="0"/>
+                  </a:lnTo>
+                  <a:lnTo>
+                    <a:pt x="7660515" y="0"/>
+                  </a:lnTo>
+                </a:path>
+              </a:pathLst>
+            </a:custGeom>
+            <a:ln w="6775" cap="flat">
+              <a:solidFill>
+                <a:srgbClr val="EBEBEB">
+                  <a:alpha val="100000"/>
+                </a:srgbClr>
+              </a:solidFill>
+              <a:prstDash val="solid"/>
+              <a:round/>
+            </a:ln>
+          </p:spPr>
+          <p:txBody>
+            <a:bodyPr/>
+            <a:lstStyle/>
+            <a:p/>
+          </p:txBody>
+        </p:sp>
+        <p:sp>
+          <p:nvSpPr>
+            <p:cNvPr id="41" name="pl41"/>
+            <p:cNvSpPr/>
+            <p:nvPr/>
+          </p:nvSpPr>
+          <p:spPr>
+            <a:xfrm>
+              <a:off x="887106" y="4845352"/>
+              <a:ext cx="7660515" cy="0"/>
+            </a:xfrm>
+            <a:custGeom>
+              <a:avLst/>
+              <a:pathLst>
+                <a:path w="7660515" h="0">
+                  <a:moveTo>
+                    <a:pt x="0" y="0"/>
+                  </a:moveTo>
+                  <a:lnTo>
+                    <a:pt x="7660515" y="0"/>
+                  </a:lnTo>
+                  <a:lnTo>
+                    <a:pt x="7660515" y="0"/>
+                  </a:lnTo>
+                </a:path>
+              </a:pathLst>
+            </a:custGeom>
+            <a:ln w="6775" cap="flat">
+              <a:solidFill>
+                <a:srgbClr val="EBEBEB">
+                  <a:alpha val="100000"/>
+                </a:srgbClr>
+              </a:solidFill>
+              <a:prstDash val="solid"/>
+              <a:round/>
+            </a:ln>
+          </p:spPr>
+          <p:txBody>
+            <a:bodyPr/>
+            <a:lstStyle/>
+            <a:p/>
+          </p:txBody>
+        </p:sp>
+        <p:sp>
+          <p:nvSpPr>
+            <p:cNvPr id="42" name="pl42"/>
+            <p:cNvSpPr/>
+            <p:nvPr/>
+          </p:nvSpPr>
+          <p:spPr>
+            <a:xfrm>
+              <a:off x="887106" y="4546018"/>
+              <a:ext cx="7660515" cy="0"/>
+            </a:xfrm>
+            <a:custGeom>
+              <a:avLst/>
+              <a:pathLst>
+                <a:path w="7660515" h="0">
+                  <a:moveTo>
+                    <a:pt x="0" y="0"/>
+                  </a:moveTo>
+                  <a:lnTo>
+                    <a:pt x="7660515" y="0"/>
+                  </a:lnTo>
+                  <a:lnTo>
+                    <a:pt x="7660515" y="0"/>
+                  </a:lnTo>
+                </a:path>
+              </a:pathLst>
+            </a:custGeom>
+            <a:ln w="6775" cap="flat">
+              <a:solidFill>
+                <a:srgbClr val="EBEBEB">
+                  <a:alpha val="100000"/>
+                </a:srgbClr>
+              </a:solidFill>
+              <a:prstDash val="solid"/>
+              <a:round/>
+            </a:ln>
+          </p:spPr>
+          <p:txBody>
+            <a:bodyPr/>
+            <a:lstStyle/>
+            <a:p/>
+          </p:txBody>
+        </p:sp>
+        <p:sp>
+          <p:nvSpPr>
+            <p:cNvPr id="43" name="pl43"/>
+            <p:cNvSpPr/>
+            <p:nvPr/>
+          </p:nvSpPr>
+          <p:spPr>
+            <a:xfrm>
+              <a:off x="914987" y="4336484"/>
+              <a:ext cx="0" cy="1317069"/>
+            </a:xfrm>
+            <a:custGeom>
+              <a:avLst/>
+              <a:pathLst>
+                <a:path w="0" h="1317069">
+                  <a:moveTo>
+                    <a:pt x="0" y="1317069"/>
+                  </a:moveTo>
+                  <a:lnTo>
+                    <a:pt x="0" y="0"/>
+                  </a:lnTo>
+                  <a:lnTo>
+                    <a:pt x="0" y="0"/>
+                  </a:lnTo>
+                </a:path>
+              </a:pathLst>
+            </a:custGeom>
+            <a:ln w="6775" cap="flat">
+              <a:solidFill>
+                <a:srgbClr val="EBEBEB">
+                  <a:alpha val="100000"/>
+                </a:srgbClr>
+              </a:solidFill>
+              <a:prstDash val="solid"/>
+              <a:round/>
+            </a:ln>
+          </p:spPr>
+          <p:txBody>
+            <a:bodyPr/>
+            <a:lstStyle/>
+            <a:p/>
+          </p:txBody>
+        </p:sp>
+        <p:sp>
+          <p:nvSpPr>
+            <p:cNvPr id="44" name="pl44"/>
+            <p:cNvSpPr/>
+            <p:nvPr/>
+          </p:nvSpPr>
+          <p:spPr>
+            <a:xfrm>
+              <a:off x="1728588" y="4336484"/>
+              <a:ext cx="0" cy="1317069"/>
+            </a:xfrm>
+            <a:custGeom>
+              <a:avLst/>
+              <a:pathLst>
+                <a:path w="0" h="1317069">
+                  <a:moveTo>
+                    <a:pt x="0" y="1317069"/>
+                  </a:moveTo>
+                  <a:lnTo>
+                    <a:pt x="0" y="0"/>
+                  </a:lnTo>
+                  <a:lnTo>
+                    <a:pt x="0" y="0"/>
+                  </a:lnTo>
+                </a:path>
+              </a:pathLst>
+            </a:custGeom>
+            <a:ln w="6775" cap="flat">
+              <a:solidFill>
+                <a:srgbClr val="EBEBEB">
+                  <a:alpha val="100000"/>
+                </a:srgbClr>
+              </a:solidFill>
+              <a:prstDash val="solid"/>
+              <a:round/>
+            </a:ln>
+          </p:spPr>
+          <p:txBody>
+            <a:bodyPr/>
+            <a:lstStyle/>
+            <a:p/>
+          </p:txBody>
+        </p:sp>
+        <p:sp>
+          <p:nvSpPr>
+            <p:cNvPr id="45" name="pl45"/>
+            <p:cNvSpPr/>
+            <p:nvPr/>
+          </p:nvSpPr>
+          <p:spPr>
+            <a:xfrm>
+              <a:off x="2542190" y="4336484"/>
+              <a:ext cx="0" cy="1317069"/>
+            </a:xfrm>
+            <a:custGeom>
+              <a:avLst/>
+              <a:pathLst>
+                <a:path w="0" h="1317069">
+                  <a:moveTo>
+                    <a:pt x="0" y="1317069"/>
+                  </a:moveTo>
+                  <a:lnTo>
+                    <a:pt x="0" y="0"/>
+                  </a:lnTo>
+                  <a:lnTo>
+                    <a:pt x="0" y="0"/>
+                  </a:lnTo>
+                </a:path>
+              </a:pathLst>
+            </a:custGeom>
+            <a:ln w="6775" cap="flat">
+              <a:solidFill>
+                <a:srgbClr val="EBEBEB">
+                  <a:alpha val="100000"/>
+                </a:srgbClr>
+              </a:solidFill>
+              <a:prstDash val="solid"/>
+              <a:round/>
+            </a:ln>
+          </p:spPr>
+          <p:txBody>
+            <a:bodyPr/>
+            <a:lstStyle/>
+            <a:p/>
+          </p:txBody>
+        </p:sp>
+        <p:sp>
+          <p:nvSpPr>
+            <p:cNvPr id="46" name="pl46"/>
+            <p:cNvSpPr/>
+            <p:nvPr/>
+          </p:nvSpPr>
+          <p:spPr>
+            <a:xfrm>
+              <a:off x="3355791" y="4336484"/>
+              <a:ext cx="0" cy="1317069"/>
+            </a:xfrm>
+            <a:custGeom>
+              <a:avLst/>
+              <a:pathLst>
+                <a:path w="0" h="1317069">
+                  <a:moveTo>
+                    <a:pt x="0" y="1317069"/>
+                  </a:moveTo>
+                  <a:lnTo>
+                    <a:pt x="0" y="0"/>
+                  </a:lnTo>
+                  <a:lnTo>
+                    <a:pt x="0" y="0"/>
+                  </a:lnTo>
+                </a:path>
+              </a:pathLst>
+            </a:custGeom>
+            <a:ln w="6775" cap="flat">
+              <a:solidFill>
+                <a:srgbClr val="EBEBEB">
+                  <a:alpha val="100000"/>
+                </a:srgbClr>
+              </a:solidFill>
+              <a:prstDash val="solid"/>
+              <a:round/>
+            </a:ln>
+          </p:spPr>
+          <p:txBody>
+            <a:bodyPr/>
+            <a:lstStyle/>
+            <a:p/>
+          </p:txBody>
+        </p:sp>
+        <p:sp>
+          <p:nvSpPr>
+            <p:cNvPr id="47" name="pl47"/>
+            <p:cNvSpPr/>
+            <p:nvPr/>
+          </p:nvSpPr>
+          <p:spPr>
+            <a:xfrm>
+              <a:off x="4169393" y="4336484"/>
+              <a:ext cx="0" cy="1317069"/>
+            </a:xfrm>
+            <a:custGeom>
+              <a:avLst/>
+              <a:pathLst>
+                <a:path w="0" h="1317069">
+                  <a:moveTo>
+                    <a:pt x="0" y="1317069"/>
+                  </a:moveTo>
+                  <a:lnTo>
+                    <a:pt x="0" y="0"/>
+                  </a:lnTo>
+                  <a:lnTo>
+                    <a:pt x="0" y="0"/>
+                  </a:lnTo>
+                </a:path>
+              </a:pathLst>
+            </a:custGeom>
+            <a:ln w="6775" cap="flat">
+              <a:solidFill>
+                <a:srgbClr val="EBEBEB">
+                  <a:alpha val="100000"/>
+                </a:srgbClr>
+              </a:solidFill>
+              <a:prstDash val="solid"/>
+              <a:round/>
+            </a:ln>
+          </p:spPr>
+          <p:txBody>
+            <a:bodyPr/>
+            <a:lstStyle/>
+            <a:p/>
+          </p:txBody>
+        </p:sp>
+        <p:sp>
+          <p:nvSpPr>
+            <p:cNvPr id="48" name="pl48"/>
+            <p:cNvSpPr/>
+            <p:nvPr/>
+          </p:nvSpPr>
+          <p:spPr>
+            <a:xfrm>
+              <a:off x="4982994" y="4336484"/>
+              <a:ext cx="0" cy="1317069"/>
+            </a:xfrm>
+            <a:custGeom>
+              <a:avLst/>
+              <a:pathLst>
+                <a:path w="0" h="1317069">
+                  <a:moveTo>
+                    <a:pt x="0" y="1317069"/>
+                  </a:moveTo>
+                  <a:lnTo>
+                    <a:pt x="0" y="0"/>
+                  </a:lnTo>
+                  <a:lnTo>
+                    <a:pt x="0" y="0"/>
+                  </a:lnTo>
+                </a:path>
+              </a:pathLst>
+            </a:custGeom>
+            <a:ln w="6775" cap="flat">
+              <a:solidFill>
+                <a:srgbClr val="EBEBEB">
+                  <a:alpha val="100000"/>
+                </a:srgbClr>
+              </a:solidFill>
+              <a:prstDash val="solid"/>
+              <a:round/>
+            </a:ln>
+          </p:spPr>
+          <p:txBody>
+            <a:bodyPr/>
+            <a:lstStyle/>
+            <a:p/>
+          </p:txBody>
+        </p:sp>
+        <p:sp>
+          <p:nvSpPr>
+            <p:cNvPr id="49" name="pl49"/>
+            <p:cNvSpPr/>
+            <p:nvPr/>
+          </p:nvSpPr>
+          <p:spPr>
+            <a:xfrm>
+              <a:off x="5796595" y="4336484"/>
+              <a:ext cx="0" cy="1317069"/>
+            </a:xfrm>
+            <a:custGeom>
+              <a:avLst/>
+              <a:pathLst>
+                <a:path w="0" h="1317069">
+                  <a:moveTo>
+                    <a:pt x="0" y="1317069"/>
+                  </a:moveTo>
+                  <a:lnTo>
+                    <a:pt x="0" y="0"/>
+                  </a:lnTo>
+                  <a:lnTo>
+                    <a:pt x="0" y="0"/>
+                  </a:lnTo>
+                </a:path>
+              </a:pathLst>
+            </a:custGeom>
+            <a:ln w="6775" cap="flat">
+              <a:solidFill>
+                <a:srgbClr val="EBEBEB">
+                  <a:alpha val="100000"/>
+                </a:srgbClr>
+              </a:solidFill>
+              <a:prstDash val="solid"/>
+              <a:round/>
+            </a:ln>
+          </p:spPr>
+          <p:txBody>
+            <a:bodyPr/>
+            <a:lstStyle/>
+            <a:p/>
+          </p:txBody>
+        </p:sp>
+        <p:sp>
+          <p:nvSpPr>
+            <p:cNvPr id="50" name="pl50"/>
+            <p:cNvSpPr/>
+            <p:nvPr/>
+          </p:nvSpPr>
+          <p:spPr>
+            <a:xfrm>
+              <a:off x="6610197" y="4336484"/>
+              <a:ext cx="0" cy="1317069"/>
+            </a:xfrm>
+            <a:custGeom>
+              <a:avLst/>
+              <a:pathLst>
+                <a:path w="0" h="1317069">
+                  <a:moveTo>
+                    <a:pt x="0" y="1317069"/>
+                  </a:moveTo>
+                  <a:lnTo>
+                    <a:pt x="0" y="0"/>
+                  </a:lnTo>
+                  <a:lnTo>
+                    <a:pt x="0" y="0"/>
+                  </a:lnTo>
+                </a:path>
+              </a:pathLst>
+            </a:custGeom>
+            <a:ln w="6775" cap="flat">
+              <a:solidFill>
+                <a:srgbClr val="EBEBEB">
+                  <a:alpha val="100000"/>
+                </a:srgbClr>
+              </a:solidFill>
+              <a:prstDash val="solid"/>
+              <a:round/>
+            </a:ln>
+          </p:spPr>
+          <p:txBody>
+            <a:bodyPr/>
+            <a:lstStyle/>
+            <a:p/>
+          </p:txBody>
+        </p:sp>
+        <p:sp>
+          <p:nvSpPr>
+            <p:cNvPr id="51" name="pl51"/>
+            <p:cNvSpPr/>
+            <p:nvPr/>
+          </p:nvSpPr>
+          <p:spPr>
+            <a:xfrm>
+              <a:off x="7423798" y="4336484"/>
+              <a:ext cx="0" cy="1317069"/>
+            </a:xfrm>
+            <a:custGeom>
+              <a:avLst/>
+              <a:pathLst>
+                <a:path w="0" h="1317069">
+                  <a:moveTo>
+                    <a:pt x="0" y="1317069"/>
+                  </a:moveTo>
+                  <a:lnTo>
+                    <a:pt x="0" y="0"/>
+                  </a:lnTo>
+                  <a:lnTo>
+                    <a:pt x="0" y="0"/>
+                  </a:lnTo>
+                </a:path>
+              </a:pathLst>
+            </a:custGeom>
+            <a:ln w="6775" cap="flat">
+              <a:solidFill>
+                <a:srgbClr val="EBEBEB">
+                  <a:alpha val="100000"/>
+                </a:srgbClr>
+              </a:solidFill>
+              <a:prstDash val="solid"/>
+              <a:round/>
+            </a:ln>
+          </p:spPr>
+          <p:txBody>
+            <a:bodyPr/>
+            <a:lstStyle/>
+            <a:p/>
+          </p:txBody>
+        </p:sp>
+        <p:sp>
+          <p:nvSpPr>
+            <p:cNvPr id="52" name="pl52"/>
+            <p:cNvSpPr/>
+            <p:nvPr/>
+          </p:nvSpPr>
+          <p:spPr>
+            <a:xfrm>
+              <a:off x="8237399" y="4336484"/>
+              <a:ext cx="0" cy="1317069"/>
+            </a:xfrm>
+            <a:custGeom>
+              <a:avLst/>
+              <a:pathLst>
+                <a:path w="0" h="1317069">
+                  <a:moveTo>
+                    <a:pt x="0" y="1317069"/>
+                  </a:moveTo>
+                  <a:lnTo>
+                    <a:pt x="0" y="0"/>
+                  </a:lnTo>
+                  <a:lnTo>
+                    <a:pt x="0" y="0"/>
+                  </a:lnTo>
+                </a:path>
+              </a:pathLst>
+            </a:custGeom>
+            <a:ln w="6775" cap="flat">
+              <a:solidFill>
+                <a:srgbClr val="EBEBEB">
+                  <a:alpha val="100000"/>
+                </a:srgbClr>
+              </a:solidFill>
+              <a:prstDash val="solid"/>
+              <a:round/>
+            </a:ln>
+          </p:spPr>
+          <p:txBody>
+            <a:bodyPr/>
+            <a:lstStyle/>
+            <a:p/>
+          </p:txBody>
+        </p:sp>
+        <p:sp>
+          <p:nvSpPr>
+            <p:cNvPr id="53" name="pl53"/>
+            <p:cNvSpPr/>
+            <p:nvPr/>
+          </p:nvSpPr>
+          <p:spPr>
+            <a:xfrm>
+              <a:off x="887106" y="5593686"/>
+              <a:ext cx="7660515" cy="0"/>
+            </a:xfrm>
+            <a:custGeom>
+              <a:avLst/>
+              <a:pathLst>
+                <a:path w="7660515" h="0">
+                  <a:moveTo>
+                    <a:pt x="0" y="0"/>
+                  </a:moveTo>
+                  <a:lnTo>
+                    <a:pt x="7660515" y="0"/>
+                  </a:lnTo>
+                  <a:lnTo>
+                    <a:pt x="7660515" y="0"/>
+                  </a:lnTo>
+                </a:path>
+              </a:pathLst>
+            </a:custGeom>
+            <a:ln w="13550" cap="flat">
+              <a:solidFill>
+                <a:srgbClr val="EBEBEB">
+                  <a:alpha val="100000"/>
+                </a:srgbClr>
+              </a:solidFill>
+              <a:prstDash val="solid"/>
+              <a:round/>
+            </a:ln>
+          </p:spPr>
+          <p:txBody>
+            <a:bodyPr/>
+            <a:lstStyle/>
+            <a:p/>
+          </p:txBody>
+        </p:sp>
+        <p:sp>
+          <p:nvSpPr>
+            <p:cNvPr id="54" name="pl54"/>
+            <p:cNvSpPr/>
+            <p:nvPr/>
+          </p:nvSpPr>
+          <p:spPr>
+            <a:xfrm>
+              <a:off x="887106" y="5294352"/>
+              <a:ext cx="7660515" cy="0"/>
+            </a:xfrm>
+            <a:custGeom>
+              <a:avLst/>
+              <a:pathLst>
+                <a:path w="7660515" h="0">
+                  <a:moveTo>
+                    <a:pt x="0" y="0"/>
+                  </a:moveTo>
+                  <a:lnTo>
+                    <a:pt x="7660515" y="0"/>
+                  </a:lnTo>
+                  <a:lnTo>
+                    <a:pt x="7660515" y="0"/>
+                  </a:lnTo>
+                </a:path>
+              </a:pathLst>
+            </a:custGeom>
+            <a:ln w="13550" cap="flat">
+              <a:solidFill>
+                <a:srgbClr val="EBEBEB">
+                  <a:alpha val="100000"/>
+                </a:srgbClr>
+              </a:solidFill>
+              <a:prstDash val="solid"/>
+              <a:round/>
+            </a:ln>
+          </p:spPr>
+          <p:txBody>
+            <a:bodyPr/>
+            <a:lstStyle/>
+            <a:p/>
+          </p:txBody>
+        </p:sp>
+        <p:sp>
+          <p:nvSpPr>
+            <p:cNvPr id="55" name="pl55"/>
+            <p:cNvSpPr/>
+            <p:nvPr/>
+          </p:nvSpPr>
+          <p:spPr>
+            <a:xfrm>
+              <a:off x="887106" y="4995019"/>
+              <a:ext cx="7660515" cy="0"/>
+            </a:xfrm>
+            <a:custGeom>
+              <a:avLst/>
+              <a:pathLst>
+                <a:path w="7660515" h="0">
+                  <a:moveTo>
+                    <a:pt x="0" y="0"/>
+                  </a:moveTo>
+                  <a:lnTo>
+                    <a:pt x="7660515" y="0"/>
+                  </a:lnTo>
+                  <a:lnTo>
+                    <a:pt x="7660515" y="0"/>
+                  </a:lnTo>
+                </a:path>
+              </a:pathLst>
+            </a:custGeom>
+            <a:ln w="13550" cap="flat">
+              <a:solidFill>
+                <a:srgbClr val="EBEBEB">
+                  <a:alpha val="100000"/>
+                </a:srgbClr>
+              </a:solidFill>
+              <a:prstDash val="solid"/>
+              <a:round/>
+            </a:ln>
+          </p:spPr>
+          <p:txBody>
+            <a:bodyPr/>
+            <a:lstStyle/>
+            <a:p/>
+          </p:txBody>
+        </p:sp>
+        <p:sp>
+          <p:nvSpPr>
+            <p:cNvPr id="56" name="pl56"/>
+            <p:cNvSpPr/>
+            <p:nvPr/>
+          </p:nvSpPr>
+          <p:spPr>
+            <a:xfrm>
+              <a:off x="887106" y="4695685"/>
+              <a:ext cx="7660515" cy="0"/>
+            </a:xfrm>
+            <a:custGeom>
+              <a:avLst/>
+              <a:pathLst>
+                <a:path w="7660515" h="0">
+                  <a:moveTo>
+                    <a:pt x="0" y="0"/>
+                  </a:moveTo>
+                  <a:lnTo>
+                    <a:pt x="7660515" y="0"/>
+                  </a:lnTo>
+                  <a:lnTo>
+                    <a:pt x="7660515" y="0"/>
+                  </a:lnTo>
+                </a:path>
+              </a:pathLst>
+            </a:custGeom>
+            <a:ln w="13550" cap="flat">
+              <a:solidFill>
+                <a:srgbClr val="EBEBEB">
+                  <a:alpha val="100000"/>
+                </a:srgbClr>
+              </a:solidFill>
+              <a:prstDash val="solid"/>
+              <a:round/>
+            </a:ln>
+          </p:spPr>
+          <p:txBody>
+            <a:bodyPr/>
+            <a:lstStyle/>
+            <a:p/>
+          </p:txBody>
+        </p:sp>
+        <p:sp>
+          <p:nvSpPr>
+            <p:cNvPr id="57" name="pl57"/>
+            <p:cNvSpPr/>
+            <p:nvPr/>
+          </p:nvSpPr>
+          <p:spPr>
+            <a:xfrm>
+              <a:off x="887106" y="4396351"/>
+              <a:ext cx="7660515" cy="0"/>
+            </a:xfrm>
+            <a:custGeom>
+              <a:avLst/>
+              <a:pathLst>
+                <a:path w="7660515" h="0">
+                  <a:moveTo>
+                    <a:pt x="0" y="0"/>
+                  </a:moveTo>
+                  <a:lnTo>
+                    <a:pt x="7660515" y="0"/>
+                  </a:lnTo>
+                  <a:lnTo>
+                    <a:pt x="7660515" y="0"/>
+                  </a:lnTo>
+                </a:path>
+              </a:pathLst>
+            </a:custGeom>
+            <a:ln w="13550" cap="flat">
+              <a:solidFill>
+                <a:srgbClr val="EBEBEB">
+                  <a:alpha val="100000"/>
+                </a:srgbClr>
+              </a:solidFill>
+              <a:prstDash val="solid"/>
+              <a:round/>
+            </a:ln>
+          </p:spPr>
+          <p:txBody>
+            <a:bodyPr/>
+            <a:lstStyle/>
+            <a:p/>
+          </p:txBody>
+        </p:sp>
+        <p:sp>
+          <p:nvSpPr>
+            <p:cNvPr id="58" name="pl58"/>
+            <p:cNvSpPr/>
+            <p:nvPr/>
+          </p:nvSpPr>
+          <p:spPr>
+            <a:xfrm>
+              <a:off x="1321788" y="4336484"/>
+              <a:ext cx="0" cy="1317069"/>
+            </a:xfrm>
+            <a:custGeom>
+              <a:avLst/>
+              <a:pathLst>
+                <a:path w="0" h="1317069">
+                  <a:moveTo>
+                    <a:pt x="0" y="1317069"/>
+                  </a:moveTo>
+                  <a:lnTo>
+                    <a:pt x="0" y="0"/>
+                  </a:lnTo>
+                  <a:lnTo>
+                    <a:pt x="0" y="0"/>
+                  </a:lnTo>
+                </a:path>
+              </a:pathLst>
+            </a:custGeom>
+            <a:ln w="13550" cap="flat">
+              <a:solidFill>
+                <a:srgbClr val="EBEBEB">
+                  <a:alpha val="100000"/>
+                </a:srgbClr>
+              </a:solidFill>
+              <a:prstDash val="solid"/>
+              <a:round/>
+            </a:ln>
+          </p:spPr>
+          <p:txBody>
+            <a:bodyPr/>
+            <a:lstStyle/>
+            <a:p/>
+          </p:txBody>
+        </p:sp>
+        <p:sp>
+          <p:nvSpPr>
+            <p:cNvPr id="59" name="pl59"/>
+            <p:cNvSpPr/>
+            <p:nvPr/>
+          </p:nvSpPr>
+          <p:spPr>
+            <a:xfrm>
+              <a:off x="2135389" y="4336484"/>
+              <a:ext cx="0" cy="1317069"/>
+            </a:xfrm>
+            <a:custGeom>
+              <a:avLst/>
+              <a:pathLst>
+                <a:path w="0" h="1317069">
+                  <a:moveTo>
+                    <a:pt x="0" y="1317069"/>
+                  </a:moveTo>
+                  <a:lnTo>
+                    <a:pt x="0" y="0"/>
+                  </a:lnTo>
+                  <a:lnTo>
+                    <a:pt x="0" y="0"/>
+                  </a:lnTo>
+                </a:path>
+              </a:pathLst>
+            </a:custGeom>
+            <a:ln w="13550" cap="flat">
+              <a:solidFill>
+                <a:srgbClr val="EBEBEB">
+                  <a:alpha val="100000"/>
+                </a:srgbClr>
+              </a:solidFill>
+              <a:prstDash val="solid"/>
+              <a:round/>
+            </a:ln>
+          </p:spPr>
+          <p:txBody>
+            <a:bodyPr/>
+            <a:lstStyle/>
+            <a:p/>
+          </p:txBody>
+        </p:sp>
+        <p:sp>
+          <p:nvSpPr>
+            <p:cNvPr id="60" name="pl60"/>
+            <p:cNvSpPr/>
+            <p:nvPr/>
+          </p:nvSpPr>
+          <p:spPr>
+            <a:xfrm>
+              <a:off x="2948991" y="4336484"/>
+              <a:ext cx="0" cy="1317069"/>
+            </a:xfrm>
+            <a:custGeom>
+              <a:avLst/>
+              <a:pathLst>
+                <a:path w="0" h="1317069">
+                  <a:moveTo>
+                    <a:pt x="0" y="1317069"/>
+                  </a:moveTo>
+                  <a:lnTo>
+                    <a:pt x="0" y="0"/>
+                  </a:lnTo>
+                  <a:lnTo>
+                    <a:pt x="0" y="0"/>
+                  </a:lnTo>
+                </a:path>
+              </a:pathLst>
+            </a:custGeom>
+            <a:ln w="13550" cap="flat">
+              <a:solidFill>
+                <a:srgbClr val="EBEBEB">
+                  <a:alpha val="100000"/>
+                </a:srgbClr>
+              </a:solidFill>
+              <a:prstDash val="solid"/>
+              <a:round/>
+            </a:ln>
+          </p:spPr>
+          <p:txBody>
+            <a:bodyPr/>
+            <a:lstStyle/>
+            <a:p/>
+          </p:txBody>
+        </p:sp>
+        <p:sp>
+          <p:nvSpPr>
+            <p:cNvPr id="61" name="pl61"/>
+            <p:cNvSpPr/>
+            <p:nvPr/>
+          </p:nvSpPr>
+          <p:spPr>
+            <a:xfrm>
+              <a:off x="3762592" y="4336484"/>
+              <a:ext cx="0" cy="1317069"/>
+            </a:xfrm>
+            <a:custGeom>
+              <a:avLst/>
+              <a:pathLst>
+                <a:path w="0" h="1317069">
+                  <a:moveTo>
+                    <a:pt x="0" y="1317069"/>
+                  </a:moveTo>
+                  <a:lnTo>
+                    <a:pt x="0" y="0"/>
+                  </a:lnTo>
+                  <a:lnTo>
+                    <a:pt x="0" y="0"/>
+                  </a:lnTo>
+                </a:path>
+              </a:pathLst>
+            </a:custGeom>
+            <a:ln w="13550" cap="flat">
+              <a:solidFill>
+                <a:srgbClr val="EBEBEB">
+                  <a:alpha val="100000"/>
+                </a:srgbClr>
+              </a:solidFill>
+              <a:prstDash val="solid"/>
+              <a:round/>
+            </a:ln>
+          </p:spPr>
+          <p:txBody>
+            <a:bodyPr/>
+            <a:lstStyle/>
+            <a:p/>
+          </p:txBody>
+        </p:sp>
+        <p:sp>
+          <p:nvSpPr>
+            <p:cNvPr id="62" name="pl62"/>
+            <p:cNvSpPr/>
+            <p:nvPr/>
+          </p:nvSpPr>
+          <p:spPr>
+            <a:xfrm>
+              <a:off x="4576193" y="4336484"/>
+              <a:ext cx="0" cy="1317069"/>
+            </a:xfrm>
+            <a:custGeom>
+              <a:avLst/>
+              <a:pathLst>
+                <a:path w="0" h="1317069">
+                  <a:moveTo>
+                    <a:pt x="0" y="1317069"/>
+                  </a:moveTo>
+                  <a:lnTo>
+                    <a:pt x="0" y="0"/>
+                  </a:lnTo>
+                  <a:lnTo>
+                    <a:pt x="0" y="0"/>
+                  </a:lnTo>
+                </a:path>
+              </a:pathLst>
+            </a:custGeom>
+            <a:ln w="13550" cap="flat">
+              <a:solidFill>
+                <a:srgbClr val="EBEBEB">
+                  <a:alpha val="100000"/>
+                </a:srgbClr>
+              </a:solidFill>
+              <a:prstDash val="solid"/>
+              <a:round/>
+            </a:ln>
+          </p:spPr>
+          <p:txBody>
+            <a:bodyPr/>
+            <a:lstStyle/>
+            <a:p/>
+          </p:txBody>
+        </p:sp>
+        <p:sp>
+          <p:nvSpPr>
+            <p:cNvPr id="63" name="pl63"/>
+            <p:cNvSpPr/>
+            <p:nvPr/>
+          </p:nvSpPr>
+          <p:spPr>
+            <a:xfrm>
+              <a:off x="5389795" y="4336484"/>
+              <a:ext cx="0" cy="1317069"/>
+            </a:xfrm>
+            <a:custGeom>
+              <a:avLst/>
+              <a:pathLst>
+                <a:path w="0" h="1317069">
+                  <a:moveTo>
+                    <a:pt x="0" y="1317069"/>
+                  </a:moveTo>
+                  <a:lnTo>
+                    <a:pt x="0" y="0"/>
+                  </a:lnTo>
+                  <a:lnTo>
+                    <a:pt x="0" y="0"/>
+                  </a:lnTo>
+                </a:path>
+              </a:pathLst>
+            </a:custGeom>
+            <a:ln w="13550" cap="flat">
+              <a:solidFill>
+                <a:srgbClr val="EBEBEB">
+                  <a:alpha val="100000"/>
+                </a:srgbClr>
+              </a:solidFill>
+              <a:prstDash val="solid"/>
+              <a:round/>
+            </a:ln>
+          </p:spPr>
+          <p:txBody>
+            <a:bodyPr/>
+            <a:lstStyle/>
+            <a:p/>
+          </p:txBody>
+        </p:sp>
+        <p:sp>
+          <p:nvSpPr>
+            <p:cNvPr id="64" name="pl64"/>
+            <p:cNvSpPr/>
+            <p:nvPr/>
+          </p:nvSpPr>
+          <p:spPr>
+            <a:xfrm>
+              <a:off x="6203396" y="4336484"/>
+              <a:ext cx="0" cy="1317069"/>
+            </a:xfrm>
+            <a:custGeom>
+              <a:avLst/>
+              <a:pathLst>
+                <a:path w="0" h="1317069">
+                  <a:moveTo>
+                    <a:pt x="0" y="1317069"/>
+                  </a:moveTo>
+                  <a:lnTo>
+                    <a:pt x="0" y="0"/>
+                  </a:lnTo>
+                  <a:lnTo>
+                    <a:pt x="0" y="0"/>
+                  </a:lnTo>
+                </a:path>
+              </a:pathLst>
+            </a:custGeom>
+            <a:ln w="13550" cap="flat">
+              <a:solidFill>
+                <a:srgbClr val="EBEBEB">
+                  <a:alpha val="100000"/>
+                </a:srgbClr>
+              </a:solidFill>
+              <a:prstDash val="solid"/>
+              <a:round/>
+            </a:ln>
+          </p:spPr>
+          <p:txBody>
+            <a:bodyPr/>
+            <a:lstStyle/>
+            <a:p/>
+          </p:txBody>
+        </p:sp>
+        <p:sp>
+          <p:nvSpPr>
+            <p:cNvPr id="65" name="pl65"/>
+            <p:cNvSpPr/>
+            <p:nvPr/>
+          </p:nvSpPr>
+          <p:spPr>
+            <a:xfrm>
+              <a:off x="7016997" y="4336484"/>
+              <a:ext cx="0" cy="1317069"/>
+            </a:xfrm>
+            <a:custGeom>
+              <a:avLst/>
+              <a:pathLst>
+                <a:path w="0" h="1317069">
+                  <a:moveTo>
+                    <a:pt x="0" y="1317069"/>
+                  </a:moveTo>
+                  <a:lnTo>
+                    <a:pt x="0" y="0"/>
+                  </a:lnTo>
+                  <a:lnTo>
+                    <a:pt x="0" y="0"/>
+                  </a:lnTo>
+                </a:path>
+              </a:pathLst>
+            </a:custGeom>
+            <a:ln w="13550" cap="flat">
+              <a:solidFill>
+                <a:srgbClr val="EBEBEB">
+                  <a:alpha val="100000"/>
+                </a:srgbClr>
+              </a:solidFill>
+              <a:prstDash val="solid"/>
+              <a:round/>
+            </a:ln>
+          </p:spPr>
+          <p:txBody>
+            <a:bodyPr/>
+            <a:lstStyle/>
+            <a:p/>
+          </p:txBody>
+        </p:sp>
+        <p:sp>
+          <p:nvSpPr>
+            <p:cNvPr id="66" name="pl66"/>
+            <p:cNvSpPr/>
+            <p:nvPr/>
+          </p:nvSpPr>
+          <p:spPr>
+            <a:xfrm>
+              <a:off x="7830599" y="4336484"/>
+              <a:ext cx="0" cy="1317069"/>
+            </a:xfrm>
+            <a:custGeom>
+              <a:avLst/>
+              <a:pathLst>
+                <a:path w="0" h="1317069">
+                  <a:moveTo>
+                    <a:pt x="0" y="1317069"/>
+                  </a:moveTo>
+                  <a:lnTo>
+                    <a:pt x="0" y="0"/>
+                  </a:lnTo>
+                  <a:lnTo>
+                    <a:pt x="0" y="0"/>
+                  </a:lnTo>
+                </a:path>
+              </a:pathLst>
+            </a:custGeom>
+            <a:ln w="13550" cap="flat">
+              <a:solidFill>
+                <a:srgbClr val="EBEBEB">
+                  <a:alpha val="100000"/>
+                </a:srgbClr>
+              </a:solidFill>
+              <a:prstDash val="solid"/>
+              <a:round/>
+            </a:ln>
+          </p:spPr>
+          <p:txBody>
+            <a:bodyPr/>
+            <a:lstStyle/>
+            <a:p/>
+          </p:txBody>
+        </p:sp>
+        <p:sp>
+          <p:nvSpPr>
+            <p:cNvPr id="67" name="pg67"/>
+            <p:cNvSpPr/>
+            <p:nvPr/>
+          </p:nvSpPr>
+          <p:spPr>
+            <a:xfrm>
+              <a:off x="1235312" y="4336484"/>
+              <a:ext cx="6964104" cy="1251740"/>
+            </a:xfrm>
+            <a:custGeom>
+              <a:avLst/>
+              <a:pathLst>
+                <a:path w="6964104" h="1251740">
+                  <a:moveTo>
+                    <a:pt x="1980259" y="0"/>
+                  </a:moveTo>
+                  <a:lnTo>
+                    <a:pt x="2039990" y="79766"/>
+                  </a:lnTo>
+                  <a:lnTo>
+                    <a:pt x="2110334" y="166766"/>
+                  </a:lnTo>
+                  <a:lnTo>
+                    <a:pt x="2180679" y="247337"/>
+                  </a:lnTo>
+                  <a:lnTo>
+                    <a:pt x="2251023" y="321955"/>
+                  </a:lnTo>
+                  <a:lnTo>
+                    <a:pt x="2321368" y="391060"/>
+                  </a:lnTo>
+                  <a:lnTo>
+                    <a:pt x="2391712" y="455058"/>
+                  </a:lnTo>
+                  <a:lnTo>
+                    <a:pt x="2462057" y="514328"/>
+                  </a:lnTo>
+                  <a:lnTo>
+                    <a:pt x="2532401" y="569218"/>
+                  </a:lnTo>
+                  <a:lnTo>
+                    <a:pt x="2602746" y="620052"/>
+                  </a:lnTo>
+                  <a:lnTo>
+                    <a:pt x="2673090" y="667131"/>
+                  </a:lnTo>
+                  <a:lnTo>
+                    <a:pt x="2743435" y="710730"/>
+                  </a:lnTo>
+                  <a:lnTo>
+                    <a:pt x="2813779" y="751109"/>
+                  </a:lnTo>
+                  <a:lnTo>
+                    <a:pt x="2884124" y="788503"/>
+                  </a:lnTo>
+                  <a:lnTo>
+                    <a:pt x="2954468" y="823135"/>
+                  </a:lnTo>
+                  <a:lnTo>
+                    <a:pt x="3024813" y="855208"/>
+                  </a:lnTo>
+                  <a:lnTo>
+                    <a:pt x="3095157" y="884911"/>
+                  </a:lnTo>
+                  <a:lnTo>
+                    <a:pt x="3165502" y="912419"/>
+                  </a:lnTo>
+                  <a:lnTo>
+                    <a:pt x="3235846" y="937895"/>
+                  </a:lnTo>
+                  <a:lnTo>
+                    <a:pt x="3306191" y="959017"/>
+                  </a:lnTo>
+                  <a:lnTo>
+                    <a:pt x="3376535" y="966169"/>
+                  </a:lnTo>
+                  <a:lnTo>
+                    <a:pt x="3446880" y="973149"/>
+                  </a:lnTo>
+                  <a:lnTo>
+                    <a:pt x="3517224" y="979961"/>
+                  </a:lnTo>
+                  <a:lnTo>
+                    <a:pt x="3587569" y="986611"/>
+                  </a:lnTo>
+                  <a:lnTo>
+                    <a:pt x="3657913" y="993100"/>
+                  </a:lnTo>
+                  <a:lnTo>
+                    <a:pt x="3728257" y="999434"/>
+                  </a:lnTo>
+                  <a:lnTo>
+                    <a:pt x="3798602" y="1005616"/>
+                  </a:lnTo>
+                  <a:lnTo>
+                    <a:pt x="3868946" y="1011650"/>
+                  </a:lnTo>
+                  <a:lnTo>
+                    <a:pt x="3939291" y="1017539"/>
+                  </a:lnTo>
+                  <a:lnTo>
+                    <a:pt x="4009635" y="1023287"/>
+                  </a:lnTo>
+                  <a:lnTo>
+                    <a:pt x="4079980" y="1028897"/>
+                  </a:lnTo>
+                  <a:lnTo>
+                    <a:pt x="4150324" y="1034373"/>
+                  </a:lnTo>
+                  <a:lnTo>
+                    <a:pt x="4220669" y="1039717"/>
+                  </a:lnTo>
+                  <a:lnTo>
+                    <a:pt x="4291013" y="1044933"/>
+                  </a:lnTo>
+                  <a:lnTo>
+                    <a:pt x="4361358" y="1050024"/>
+                  </a:lnTo>
+                  <a:lnTo>
+                    <a:pt x="4431702" y="1054993"/>
+                  </a:lnTo>
+                  <a:lnTo>
+                    <a:pt x="4502047" y="1059842"/>
+                  </a:lnTo>
+                  <a:lnTo>
+                    <a:pt x="4572391" y="1064576"/>
+                  </a:lnTo>
+                  <a:lnTo>
+                    <a:pt x="4642736" y="1069195"/>
+                  </a:lnTo>
+                  <a:lnTo>
+                    <a:pt x="4713080" y="1073704"/>
+                  </a:lnTo>
+                  <a:lnTo>
+                    <a:pt x="4783425" y="1078105"/>
+                  </a:lnTo>
+                  <a:lnTo>
+                    <a:pt x="4853769" y="1082401"/>
+                  </a:lnTo>
+                  <a:lnTo>
+                    <a:pt x="4924114" y="1086593"/>
+                  </a:lnTo>
+                  <a:lnTo>
+                    <a:pt x="4994458" y="1090685"/>
+                  </a:lnTo>
+                  <a:lnTo>
+                    <a:pt x="5064803" y="1094678"/>
+                  </a:lnTo>
+                  <a:lnTo>
+                    <a:pt x="5135147" y="1098576"/>
+                  </a:lnTo>
+                  <a:lnTo>
+                    <a:pt x="5205492" y="1102381"/>
+                  </a:lnTo>
+                  <a:lnTo>
+                    <a:pt x="5275836" y="1106094"/>
+                  </a:lnTo>
+                  <a:lnTo>
+                    <a:pt x="5346181" y="1109718"/>
+                  </a:lnTo>
+                  <a:lnTo>
+                    <a:pt x="5416525" y="1113255"/>
+                  </a:lnTo>
+                  <a:lnTo>
+                    <a:pt x="5486870" y="1116707"/>
+                  </a:lnTo>
+                  <a:lnTo>
+                    <a:pt x="5557214" y="1120077"/>
+                  </a:lnTo>
+                  <a:lnTo>
+                    <a:pt x="5627559" y="1123365"/>
+                  </a:lnTo>
+                  <a:lnTo>
+                    <a:pt x="5697903" y="1126575"/>
+                  </a:lnTo>
+                  <a:lnTo>
+                    <a:pt x="5768248" y="1129708"/>
+                  </a:lnTo>
+                  <a:lnTo>
+                    <a:pt x="5838592" y="1132766"/>
+                  </a:lnTo>
+                  <a:lnTo>
+                    <a:pt x="5908937" y="1135750"/>
+                  </a:lnTo>
+                  <a:lnTo>
+                    <a:pt x="5979281" y="1138663"/>
+                  </a:lnTo>
+                  <a:lnTo>
+                    <a:pt x="6049626" y="1141506"/>
+                  </a:lnTo>
+                  <a:lnTo>
+                    <a:pt x="6119970" y="1144281"/>
+                  </a:lnTo>
+                  <a:lnTo>
+                    <a:pt x="6190315" y="1146989"/>
+                  </a:lnTo>
+                  <a:lnTo>
+                    <a:pt x="6260659" y="1149632"/>
+                  </a:lnTo>
+                  <a:lnTo>
+                    <a:pt x="6331004" y="1152212"/>
+                  </a:lnTo>
+                  <a:lnTo>
+                    <a:pt x="6401348" y="1154730"/>
+                  </a:lnTo>
+                  <a:lnTo>
+                    <a:pt x="6471693" y="1157188"/>
+                  </a:lnTo>
+                  <a:lnTo>
+                    <a:pt x="6542037" y="1159586"/>
+                  </a:lnTo>
+                  <a:lnTo>
+                    <a:pt x="6612382" y="1161928"/>
+                  </a:lnTo>
+                  <a:lnTo>
+                    <a:pt x="6682726" y="1164213"/>
+                  </a:lnTo>
+                  <a:lnTo>
+                    <a:pt x="6753071" y="1166443"/>
+                  </a:lnTo>
+                  <a:lnTo>
+                    <a:pt x="6823415" y="1168619"/>
+                  </a:lnTo>
+                  <a:lnTo>
+                    <a:pt x="6893760" y="1170744"/>
+                  </a:lnTo>
+                  <a:lnTo>
+                    <a:pt x="6964104" y="1172817"/>
+                  </a:lnTo>
+                  <a:lnTo>
+                    <a:pt x="6964104" y="1251740"/>
+                  </a:lnTo>
+                  <a:lnTo>
+                    <a:pt x="6893760" y="1251304"/>
+                  </a:lnTo>
+                  <a:lnTo>
+                    <a:pt x="6823415" y="1250833"/>
+                  </a:lnTo>
+                  <a:lnTo>
+                    <a:pt x="6753071" y="1250325"/>
+                  </a:lnTo>
+                  <a:lnTo>
+                    <a:pt x="6682726" y="1249777"/>
+                  </a:lnTo>
+                  <a:lnTo>
+                    <a:pt x="6612382" y="1249184"/>
+                  </a:lnTo>
+                  <a:lnTo>
+                    <a:pt x="6542037" y="1248545"/>
+                  </a:lnTo>
+                  <a:lnTo>
+                    <a:pt x="6471693" y="1247854"/>
+                  </a:lnTo>
+                  <a:lnTo>
+                    <a:pt x="6401348" y="1247108"/>
+                  </a:lnTo>
+                  <a:lnTo>
+                    <a:pt x="6331004" y="1246303"/>
+                  </a:lnTo>
+                  <a:lnTo>
+                    <a:pt x="6260659" y="1245433"/>
+                  </a:lnTo>
+                  <a:lnTo>
+                    <a:pt x="6190315" y="1244494"/>
+                  </a:lnTo>
+                  <a:lnTo>
+                    <a:pt x="6119970" y="1243481"/>
+                  </a:lnTo>
+                  <a:lnTo>
+                    <a:pt x="6049626" y="1242386"/>
+                  </a:lnTo>
+                  <a:lnTo>
+                    <a:pt x="5979281" y="1241204"/>
+                  </a:lnTo>
+                  <a:lnTo>
+                    <a:pt x="5908937" y="1239927"/>
+                  </a:lnTo>
+                  <a:lnTo>
+                    <a:pt x="5838592" y="1238549"/>
+                  </a:lnTo>
+                  <a:lnTo>
+                    <a:pt x="5768248" y="1237061"/>
+                  </a:lnTo>
+                  <a:lnTo>
+                    <a:pt x="5697903" y="1235454"/>
+                  </a:lnTo>
+                  <a:lnTo>
+                    <a:pt x="5627559" y="1233719"/>
+                  </a:lnTo>
+                  <a:lnTo>
+                    <a:pt x="5557214" y="1231845"/>
+                  </a:lnTo>
+                  <a:lnTo>
+                    <a:pt x="5486870" y="1229822"/>
+                  </a:lnTo>
+                  <a:lnTo>
+                    <a:pt x="5416525" y="1227638"/>
+                  </a:lnTo>
+                  <a:lnTo>
+                    <a:pt x="5346181" y="1225279"/>
+                  </a:lnTo>
+                  <a:lnTo>
+                    <a:pt x="5275836" y="1222732"/>
+                  </a:lnTo>
+                  <a:lnTo>
+                    <a:pt x="5205492" y="1219982"/>
+                  </a:lnTo>
+                  <a:lnTo>
+                    <a:pt x="5135147" y="1217012"/>
+                  </a:lnTo>
+                  <a:lnTo>
+                    <a:pt x="5064803" y="1213806"/>
+                  </a:lnTo>
+                  <a:lnTo>
+                    <a:pt x="4994458" y="1210344"/>
+                  </a:lnTo>
+                  <a:lnTo>
+                    <a:pt x="4924114" y="1206605"/>
+                  </a:lnTo>
+                  <a:lnTo>
+                    <a:pt x="4853769" y="1202568"/>
+                  </a:lnTo>
+                  <a:lnTo>
+                    <a:pt x="4783425" y="1198209"/>
+                  </a:lnTo>
+                  <a:lnTo>
+                    <a:pt x="4713080" y="1193503"/>
+                  </a:lnTo>
+                  <a:lnTo>
+                    <a:pt x="4642736" y="1188421"/>
+                  </a:lnTo>
+                  <a:lnTo>
+                    <a:pt x="4572391" y="1182933"/>
+                  </a:lnTo>
+                  <a:lnTo>
+                    <a:pt x="4502047" y="1177008"/>
+                  </a:lnTo>
+                  <a:lnTo>
+                    <a:pt x="4431702" y="1170609"/>
+                  </a:lnTo>
+                  <a:lnTo>
+                    <a:pt x="4361358" y="1163701"/>
+                  </a:lnTo>
+                  <a:lnTo>
+                    <a:pt x="4291013" y="1156241"/>
+                  </a:lnTo>
+                  <a:lnTo>
+                    <a:pt x="4220669" y="1148186"/>
+                  </a:lnTo>
+                  <a:lnTo>
+                    <a:pt x="4150324" y="1139488"/>
+                  </a:lnTo>
+                  <a:lnTo>
+                    <a:pt x="4079980" y="1130096"/>
+                  </a:lnTo>
+                  <a:lnTo>
+                    <a:pt x="4009635" y="1119955"/>
+                  </a:lnTo>
+                  <a:lnTo>
+                    <a:pt x="3939291" y="1109005"/>
+                  </a:lnTo>
+                  <a:lnTo>
+                    <a:pt x="3868946" y="1097181"/>
+                  </a:lnTo>
+                  <a:lnTo>
+                    <a:pt x="3798602" y="1084414"/>
+                  </a:lnTo>
+                  <a:lnTo>
+                    <a:pt x="3728257" y="1070628"/>
+                  </a:lnTo>
+                  <a:lnTo>
+                    <a:pt x="3657913" y="1055743"/>
+                  </a:lnTo>
+                  <a:lnTo>
+                    <a:pt x="3587569" y="1039669"/>
+                  </a:lnTo>
+                  <a:lnTo>
+                    <a:pt x="3517224" y="1022314"/>
+                  </a:lnTo>
+                  <a:lnTo>
+                    <a:pt x="3446880" y="1003573"/>
+                  </a:lnTo>
+                  <a:lnTo>
+                    <a:pt x="3376535" y="983338"/>
+                  </a:lnTo>
+                  <a:lnTo>
+                    <a:pt x="3306191" y="961488"/>
+                  </a:lnTo>
+                  <a:lnTo>
+                    <a:pt x="3235846" y="951690"/>
+                  </a:lnTo>
+                  <a:lnTo>
+                    <a:pt x="3165502" y="944183"/>
+                  </a:lnTo>
+                  <a:lnTo>
+                    <a:pt x="3095157" y="936491"/>
+                  </a:lnTo>
+                  <a:lnTo>
+                    <a:pt x="3024813" y="928611"/>
+                  </a:lnTo>
+                  <a:lnTo>
+                    <a:pt x="2954468" y="920536"/>
+                  </a:lnTo>
+                  <a:lnTo>
+                    <a:pt x="2884124" y="912264"/>
+                  </a:lnTo>
+                  <a:lnTo>
+                    <a:pt x="2813779" y="903788"/>
+                  </a:lnTo>
+                  <a:lnTo>
+                    <a:pt x="2743435" y="895103"/>
+                  </a:lnTo>
+                  <a:lnTo>
+                    <a:pt x="2673090" y="886206"/>
+                  </a:lnTo>
+                  <a:lnTo>
+                    <a:pt x="2602746" y="877089"/>
+                  </a:lnTo>
+                  <a:lnTo>
+                    <a:pt x="2532401" y="867749"/>
+                  </a:lnTo>
+                  <a:lnTo>
+                    <a:pt x="2462057" y="858179"/>
+                  </a:lnTo>
+                  <a:lnTo>
+                    <a:pt x="2391712" y="848374"/>
+                  </a:lnTo>
+                  <a:lnTo>
+                    <a:pt x="2321368" y="838328"/>
+                  </a:lnTo>
+                  <a:lnTo>
+                    <a:pt x="2251023" y="828035"/>
+                  </a:lnTo>
+                  <a:lnTo>
+                    <a:pt x="2180679" y="817489"/>
+                  </a:lnTo>
+                  <a:lnTo>
+                    <a:pt x="2110334" y="806684"/>
+                  </a:lnTo>
+                  <a:lnTo>
+                    <a:pt x="2039990" y="795614"/>
+                  </a:lnTo>
+                  <a:lnTo>
+                    <a:pt x="1969645" y="784272"/>
+                  </a:lnTo>
+                  <a:lnTo>
+                    <a:pt x="1899301" y="772651"/>
+                  </a:lnTo>
+                  <a:lnTo>
+                    <a:pt x="1828956" y="760744"/>
+                  </a:lnTo>
+                  <a:lnTo>
+                    <a:pt x="1758612" y="748545"/>
+                  </a:lnTo>
+                  <a:lnTo>
+                    <a:pt x="1688267" y="736045"/>
+                  </a:lnTo>
+                  <a:lnTo>
+                    <a:pt x="1617923" y="723239"/>
+                  </a:lnTo>
+                  <a:lnTo>
+                    <a:pt x="1547578" y="710118"/>
+                  </a:lnTo>
+                  <a:lnTo>
+                    <a:pt x="1477234" y="696675"/>
+                  </a:lnTo>
+                  <a:lnTo>
+                    <a:pt x="1406889" y="682902"/>
+                  </a:lnTo>
+                  <a:lnTo>
+                    <a:pt x="1336545" y="668790"/>
+                  </a:lnTo>
+                  <a:lnTo>
+                    <a:pt x="1266200" y="654331"/>
+                  </a:lnTo>
+                  <a:lnTo>
+                    <a:pt x="1195856" y="639517"/>
+                  </a:lnTo>
+                  <a:lnTo>
+                    <a:pt x="1125511" y="624338"/>
+                  </a:lnTo>
+                  <a:lnTo>
+                    <a:pt x="1055167" y="608787"/>
+                  </a:lnTo>
+                  <a:lnTo>
+                    <a:pt x="984822" y="592854"/>
+                  </a:lnTo>
+                  <a:lnTo>
+                    <a:pt x="914478" y="576529"/>
+                  </a:lnTo>
+                  <a:lnTo>
+                    <a:pt x="844133" y="559803"/>
+                  </a:lnTo>
+                  <a:lnTo>
+                    <a:pt x="773789" y="542666"/>
+                  </a:lnTo>
+                  <a:lnTo>
+                    <a:pt x="703444" y="525108"/>
+                  </a:lnTo>
+                  <a:lnTo>
+                    <a:pt x="633100" y="507119"/>
+                  </a:lnTo>
+                  <a:lnTo>
+                    <a:pt x="562755" y="488687"/>
+                  </a:lnTo>
+                  <a:lnTo>
+                    <a:pt x="492411" y="469803"/>
+                  </a:lnTo>
+                  <a:lnTo>
+                    <a:pt x="422066" y="450455"/>
+                  </a:lnTo>
+                  <a:lnTo>
+                    <a:pt x="351722" y="430631"/>
+                  </a:lnTo>
+                  <a:lnTo>
+                    <a:pt x="281377" y="410320"/>
+                  </a:lnTo>
+                  <a:lnTo>
+                    <a:pt x="211033" y="389510"/>
+                  </a:lnTo>
+                  <a:lnTo>
+                    <a:pt x="140688" y="368188"/>
+                  </a:lnTo>
+                  <a:lnTo>
+                    <a:pt x="70344" y="346343"/>
+                  </a:lnTo>
+                  <a:lnTo>
+                    <a:pt x="0" y="323960"/>
+                  </a:lnTo>
+                  <a:close/>
+                </a:path>
+              </a:pathLst>
+            </a:custGeom>
+            <a:solidFill>
+              <a:srgbClr val="FF8C00">
+                <a:alpha val="20000"/>
+              </a:srgbClr>
+            </a:solidFill>
+          </p:spPr>
+          <p:txBody>
+            <a:bodyPr/>
+            <a:lstStyle/>
+            <a:p/>
+          </p:txBody>
+        </p:sp>
+        <p:sp>
+          <p:nvSpPr>
+            <p:cNvPr id="68" name="pl68"/>
+            <p:cNvSpPr/>
+            <p:nvPr/>
+          </p:nvSpPr>
+          <p:spPr>
+            <a:xfrm>
+              <a:off x="3215571" y="4336484"/>
+              <a:ext cx="4983845" cy="1172817"/>
+            </a:xfrm>
+            <a:custGeom>
+              <a:avLst/>
+              <a:pathLst>
+                <a:path w="4983845" h="1172817">
+                  <a:moveTo>
+                    <a:pt x="0" y="0"/>
+                  </a:moveTo>
+                  <a:lnTo>
+                    <a:pt x="59730" y="79766"/>
+                  </a:lnTo>
+                  <a:lnTo>
+                    <a:pt x="130075" y="166766"/>
+                  </a:lnTo>
+                  <a:lnTo>
+                    <a:pt x="200419" y="247337"/>
+                  </a:lnTo>
+                  <a:lnTo>
+                    <a:pt x="270764" y="321955"/>
+                  </a:lnTo>
+                  <a:lnTo>
+                    <a:pt x="341108" y="391060"/>
+                  </a:lnTo>
+                  <a:lnTo>
+                    <a:pt x="411453" y="455058"/>
+                  </a:lnTo>
+                  <a:lnTo>
+                    <a:pt x="481797" y="514328"/>
+                  </a:lnTo>
+                  <a:lnTo>
+                    <a:pt x="552142" y="569218"/>
+                  </a:lnTo>
+                  <a:lnTo>
+                    <a:pt x="622486" y="620052"/>
+                  </a:lnTo>
+                  <a:lnTo>
+                    <a:pt x="692831" y="667131"/>
+                  </a:lnTo>
+                  <a:lnTo>
+                    <a:pt x="763175" y="710730"/>
+                  </a:lnTo>
+                  <a:lnTo>
+                    <a:pt x="833520" y="751109"/>
+                  </a:lnTo>
+                  <a:lnTo>
+                    <a:pt x="903864" y="788503"/>
+                  </a:lnTo>
+                  <a:lnTo>
+                    <a:pt x="974209" y="823135"/>
+                  </a:lnTo>
+                  <a:lnTo>
+                    <a:pt x="1044553" y="855208"/>
+                  </a:lnTo>
+                  <a:lnTo>
+                    <a:pt x="1114898" y="884911"/>
+                  </a:lnTo>
+                  <a:lnTo>
+                    <a:pt x="1185242" y="912419"/>
+                  </a:lnTo>
+                  <a:lnTo>
+                    <a:pt x="1255587" y="937895"/>
+                  </a:lnTo>
+                  <a:lnTo>
+                    <a:pt x="1325931" y="959017"/>
+                  </a:lnTo>
+                  <a:lnTo>
+                    <a:pt x="1396276" y="966169"/>
+                  </a:lnTo>
+                  <a:lnTo>
+                    <a:pt x="1466620" y="973149"/>
+                  </a:lnTo>
+                  <a:lnTo>
+                    <a:pt x="1536965" y="979961"/>
+                  </a:lnTo>
+                  <a:lnTo>
+                    <a:pt x="1607309" y="986611"/>
+                  </a:lnTo>
+                  <a:lnTo>
+                    <a:pt x="1677654" y="993100"/>
+                  </a:lnTo>
+                  <a:lnTo>
+                    <a:pt x="1747998" y="999434"/>
+                  </a:lnTo>
+                  <a:lnTo>
+                    <a:pt x="1818343" y="1005616"/>
+                  </a:lnTo>
+                  <a:lnTo>
+                    <a:pt x="1888687" y="1011650"/>
+                  </a:lnTo>
+                  <a:lnTo>
+                    <a:pt x="1959032" y="1017539"/>
+                  </a:lnTo>
+                  <a:lnTo>
+                    <a:pt x="2029376" y="1023287"/>
+                  </a:lnTo>
+                  <a:lnTo>
+                    <a:pt x="2099721" y="1028897"/>
+                  </a:lnTo>
+                  <a:lnTo>
+                    <a:pt x="2170065" y="1034373"/>
+                  </a:lnTo>
+                  <a:lnTo>
+                    <a:pt x="2240410" y="1039717"/>
+                  </a:lnTo>
+                  <a:lnTo>
+                    <a:pt x="2310754" y="1044933"/>
+                  </a:lnTo>
+                  <a:lnTo>
+                    <a:pt x="2381099" y="1050024"/>
+                  </a:lnTo>
+                  <a:lnTo>
+                    <a:pt x="2451443" y="1054993"/>
+                  </a:lnTo>
+                  <a:lnTo>
+                    <a:pt x="2521788" y="1059842"/>
+                  </a:lnTo>
+                  <a:lnTo>
+                    <a:pt x="2592132" y="1064576"/>
+                  </a:lnTo>
+                  <a:lnTo>
+                    <a:pt x="2662477" y="1069195"/>
+                  </a:lnTo>
+                  <a:lnTo>
+                    <a:pt x="2732821" y="1073704"/>
+                  </a:lnTo>
+                  <a:lnTo>
+                    <a:pt x="2803165" y="1078105"/>
+                  </a:lnTo>
+                  <a:lnTo>
+                    <a:pt x="2873510" y="1082401"/>
+                  </a:lnTo>
+                  <a:lnTo>
+                    <a:pt x="2943854" y="1086593"/>
+                  </a:lnTo>
+                  <a:lnTo>
+                    <a:pt x="3014199" y="1090685"/>
+                  </a:lnTo>
+                  <a:lnTo>
+                    <a:pt x="3084543" y="1094678"/>
+                  </a:lnTo>
+                  <a:lnTo>
+                    <a:pt x="3154888" y="1098576"/>
+                  </a:lnTo>
+                  <a:lnTo>
+                    <a:pt x="3225232" y="1102381"/>
+                  </a:lnTo>
+                  <a:lnTo>
+                    <a:pt x="3295577" y="1106094"/>
+                  </a:lnTo>
+                  <a:lnTo>
+                    <a:pt x="3365921" y="1109718"/>
+                  </a:lnTo>
+                  <a:lnTo>
+                    <a:pt x="3436266" y="1113255"/>
+                  </a:lnTo>
+                  <a:lnTo>
+                    <a:pt x="3506610" y="1116707"/>
+                  </a:lnTo>
+                  <a:lnTo>
+                    <a:pt x="3576955" y="1120077"/>
+                  </a:lnTo>
+                  <a:lnTo>
+                    <a:pt x="3647299" y="1123365"/>
+                  </a:lnTo>
+                  <a:lnTo>
+                    <a:pt x="3717644" y="1126575"/>
+                  </a:lnTo>
+                  <a:lnTo>
+                    <a:pt x="3787988" y="1129708"/>
+                  </a:lnTo>
+                  <a:lnTo>
+                    <a:pt x="3858333" y="1132766"/>
+                  </a:lnTo>
+                  <a:lnTo>
+                    <a:pt x="3928677" y="1135750"/>
+                  </a:lnTo>
+                  <a:lnTo>
+                    <a:pt x="3999022" y="1138663"/>
+                  </a:lnTo>
+                  <a:lnTo>
+                    <a:pt x="4069366" y="1141506"/>
+                  </a:lnTo>
+                  <a:lnTo>
+                    <a:pt x="4139711" y="1144281"/>
+                  </a:lnTo>
+                  <a:lnTo>
+                    <a:pt x="4210055" y="1146989"/>
+                  </a:lnTo>
+                  <a:lnTo>
+                    <a:pt x="4280400" y="1149632"/>
+                  </a:lnTo>
+                  <a:lnTo>
+                    <a:pt x="4350744" y="1152212"/>
+                  </a:lnTo>
+                  <a:lnTo>
+                    <a:pt x="4421089" y="1154730"/>
+                  </a:lnTo>
+                  <a:lnTo>
+                    <a:pt x="4491433" y="1157188"/>
+                  </a:lnTo>
+                  <a:lnTo>
+                    <a:pt x="4561778" y="1159586"/>
+                  </a:lnTo>
+                  <a:lnTo>
+                    <a:pt x="4632122" y="1161928"/>
+                  </a:lnTo>
+                  <a:lnTo>
+                    <a:pt x="4702467" y="1164213"/>
+                  </a:lnTo>
+                  <a:lnTo>
+                    <a:pt x="4772811" y="1166443"/>
+                  </a:lnTo>
+                  <a:lnTo>
+                    <a:pt x="4843156" y="1168619"/>
+                  </a:lnTo>
+                  <a:lnTo>
+                    <a:pt x="4913500" y="1170744"/>
+                  </a:lnTo>
+                  <a:lnTo>
+                    <a:pt x="4983845" y="1172817"/>
+                  </a:lnTo>
+                </a:path>
+              </a:pathLst>
+            </a:custGeom>
+          </p:spPr>
+          <p:txBody>
+            <a:bodyPr/>
+            <a:lstStyle/>
+            <a:p/>
+          </p:txBody>
+        </p:sp>
+        <p:sp>
+          <p:nvSpPr>
+            <p:cNvPr id="69" name="pl69"/>
+            <p:cNvSpPr/>
+            <p:nvPr/>
+          </p:nvSpPr>
+          <p:spPr>
+            <a:xfrm>
+              <a:off x="1235312" y="4660445"/>
+              <a:ext cx="6964104" cy="927779"/>
+            </a:xfrm>
+            <a:custGeom>
+              <a:avLst/>
+              <a:pathLst>
+                <a:path w="6964104" h="927779">
+                  <a:moveTo>
+                    <a:pt x="6964104" y="927779"/>
+                  </a:moveTo>
+                  <a:lnTo>
+                    <a:pt x="6893760" y="927343"/>
+                  </a:lnTo>
+                  <a:lnTo>
+                    <a:pt x="6823415" y="926873"/>
+                  </a:lnTo>
+                  <a:lnTo>
+                    <a:pt x="6753071" y="926364"/>
+                  </a:lnTo>
+                  <a:lnTo>
+                    <a:pt x="6682726" y="925816"/>
+                  </a:lnTo>
+                  <a:lnTo>
+                    <a:pt x="6612382" y="925223"/>
+                  </a:lnTo>
+                  <a:lnTo>
+                    <a:pt x="6542037" y="924584"/>
+                  </a:lnTo>
+                  <a:lnTo>
+                    <a:pt x="6471693" y="923893"/>
+                  </a:lnTo>
+                  <a:lnTo>
+                    <a:pt x="6401348" y="923147"/>
+                  </a:lnTo>
+                  <a:lnTo>
+                    <a:pt x="6331004" y="922342"/>
+                  </a:lnTo>
+                  <a:lnTo>
+                    <a:pt x="6260659" y="921472"/>
+                  </a:lnTo>
+                  <a:lnTo>
+                    <a:pt x="6190315" y="920533"/>
+                  </a:lnTo>
+                  <a:lnTo>
+                    <a:pt x="6119970" y="919520"/>
+                  </a:lnTo>
+                  <a:lnTo>
+                    <a:pt x="6049626" y="918425"/>
+                  </a:lnTo>
+                  <a:lnTo>
+                    <a:pt x="5979281" y="917243"/>
+                  </a:lnTo>
+                  <a:lnTo>
+                    <a:pt x="5908937" y="915966"/>
+                  </a:lnTo>
+                  <a:lnTo>
+                    <a:pt x="5838592" y="914588"/>
+                  </a:lnTo>
+                  <a:lnTo>
+                    <a:pt x="5768248" y="913100"/>
+                  </a:lnTo>
+                  <a:lnTo>
+                    <a:pt x="5697903" y="911493"/>
+                  </a:lnTo>
+                  <a:lnTo>
+                    <a:pt x="5627559" y="909758"/>
+                  </a:lnTo>
+                  <a:lnTo>
+                    <a:pt x="5557214" y="907884"/>
+                  </a:lnTo>
+                  <a:lnTo>
+                    <a:pt x="5486870" y="905861"/>
+                  </a:lnTo>
+                  <a:lnTo>
+                    <a:pt x="5416525" y="903677"/>
+                  </a:lnTo>
+                  <a:lnTo>
+                    <a:pt x="5346181" y="901318"/>
+                  </a:lnTo>
+                  <a:lnTo>
+                    <a:pt x="5275836" y="898771"/>
+                  </a:lnTo>
+                  <a:lnTo>
+                    <a:pt x="5205492" y="896021"/>
+                  </a:lnTo>
+                  <a:lnTo>
+                    <a:pt x="5135147" y="893051"/>
+                  </a:lnTo>
+                  <a:lnTo>
+                    <a:pt x="5064803" y="889845"/>
+                  </a:lnTo>
+                  <a:lnTo>
+                    <a:pt x="4994458" y="886383"/>
+                  </a:lnTo>
+                  <a:lnTo>
+                    <a:pt x="4924114" y="882644"/>
+                  </a:lnTo>
+                  <a:lnTo>
+                    <a:pt x="4853769" y="878607"/>
+                  </a:lnTo>
+                  <a:lnTo>
+                    <a:pt x="4783425" y="874248"/>
+                  </a:lnTo>
+                  <a:lnTo>
+                    <a:pt x="4713080" y="869542"/>
+                  </a:lnTo>
+                  <a:lnTo>
+                    <a:pt x="4642736" y="864460"/>
+                  </a:lnTo>
+                  <a:lnTo>
+                    <a:pt x="4572391" y="858972"/>
+                  </a:lnTo>
+                  <a:lnTo>
+                    <a:pt x="4502047" y="853047"/>
+                  </a:lnTo>
+                  <a:lnTo>
+                    <a:pt x="4431702" y="846648"/>
+                  </a:lnTo>
+                  <a:lnTo>
+                    <a:pt x="4361358" y="839740"/>
+                  </a:lnTo>
+                  <a:lnTo>
+                    <a:pt x="4291013" y="832280"/>
+                  </a:lnTo>
+                  <a:lnTo>
+                    <a:pt x="4220669" y="824225"/>
+                  </a:lnTo>
+                  <a:lnTo>
+                    <a:pt x="4150324" y="815527"/>
+                  </a:lnTo>
+                  <a:lnTo>
+                    <a:pt x="4079980" y="806135"/>
+                  </a:lnTo>
+                  <a:lnTo>
+                    <a:pt x="4009635" y="795994"/>
+                  </a:lnTo>
+                  <a:lnTo>
+                    <a:pt x="3939291" y="785044"/>
+                  </a:lnTo>
+                  <a:lnTo>
+                    <a:pt x="3868946" y="773220"/>
+                  </a:lnTo>
+                  <a:lnTo>
+                    <a:pt x="3798602" y="760453"/>
+                  </a:lnTo>
+                  <a:lnTo>
+                    <a:pt x="3728257" y="746667"/>
+                  </a:lnTo>
+                  <a:lnTo>
+                    <a:pt x="3657913" y="731782"/>
+                  </a:lnTo>
+                  <a:lnTo>
+                    <a:pt x="3587569" y="715708"/>
+                  </a:lnTo>
+                  <a:lnTo>
+                    <a:pt x="3517224" y="698353"/>
+                  </a:lnTo>
+                  <a:lnTo>
+                    <a:pt x="3446880" y="679612"/>
+                  </a:lnTo>
+                  <a:lnTo>
+                    <a:pt x="3376535" y="659377"/>
+                  </a:lnTo>
+                  <a:lnTo>
+                    <a:pt x="3306191" y="637527"/>
+                  </a:lnTo>
+                  <a:lnTo>
+                    <a:pt x="3235846" y="627729"/>
+                  </a:lnTo>
+                  <a:lnTo>
+                    <a:pt x="3165502" y="620222"/>
+                  </a:lnTo>
+                  <a:lnTo>
+                    <a:pt x="3095157" y="612530"/>
+                  </a:lnTo>
+                  <a:lnTo>
+                    <a:pt x="3024813" y="604650"/>
+                  </a:lnTo>
+                  <a:lnTo>
+                    <a:pt x="2954468" y="596575"/>
+                  </a:lnTo>
+                  <a:lnTo>
+                    <a:pt x="2884124" y="588303"/>
+                  </a:lnTo>
+                  <a:lnTo>
+                    <a:pt x="2813779" y="579827"/>
+                  </a:lnTo>
+                  <a:lnTo>
+                    <a:pt x="2743435" y="571142"/>
+                  </a:lnTo>
+                  <a:lnTo>
+                    <a:pt x="2673090" y="562245"/>
+                  </a:lnTo>
+                  <a:lnTo>
+                    <a:pt x="2602746" y="553128"/>
+                  </a:lnTo>
+                  <a:lnTo>
+                    <a:pt x="2532401" y="543788"/>
+                  </a:lnTo>
+                  <a:lnTo>
+                    <a:pt x="2462057" y="534218"/>
+                  </a:lnTo>
+                  <a:lnTo>
+                    <a:pt x="2391712" y="524413"/>
+                  </a:lnTo>
+                  <a:lnTo>
+                    <a:pt x="2321368" y="514367"/>
+                  </a:lnTo>
+                  <a:lnTo>
+                    <a:pt x="2251023" y="504074"/>
+                  </a:lnTo>
+                  <a:lnTo>
+                    <a:pt x="2180679" y="493528"/>
+                  </a:lnTo>
+                  <a:lnTo>
+                    <a:pt x="2110334" y="482723"/>
+                  </a:lnTo>
+                  <a:lnTo>
+                    <a:pt x="2039990" y="471653"/>
+                  </a:lnTo>
+                  <a:lnTo>
+                    <a:pt x="1969645" y="460311"/>
+                  </a:lnTo>
+                  <a:lnTo>
+                    <a:pt x="1899301" y="448690"/>
+                  </a:lnTo>
+                  <a:lnTo>
+                    <a:pt x="1828956" y="436783"/>
+                  </a:lnTo>
+                  <a:lnTo>
+                    <a:pt x="1758612" y="424584"/>
+                  </a:lnTo>
+                  <a:lnTo>
+                    <a:pt x="1688267" y="412085"/>
+                  </a:lnTo>
+                  <a:lnTo>
+                    <a:pt x="1617923" y="399278"/>
+                  </a:lnTo>
+                  <a:lnTo>
+                    <a:pt x="1547578" y="386157"/>
+                  </a:lnTo>
+                  <a:lnTo>
+                    <a:pt x="1477234" y="372714"/>
+                  </a:lnTo>
+                  <a:lnTo>
+                    <a:pt x="1406889" y="358941"/>
+                  </a:lnTo>
+                  <a:lnTo>
+                    <a:pt x="1336545" y="344829"/>
+                  </a:lnTo>
+                  <a:lnTo>
+                    <a:pt x="1266200" y="330370"/>
+                  </a:lnTo>
+                  <a:lnTo>
+                    <a:pt x="1195856" y="315556"/>
+                  </a:lnTo>
+                  <a:lnTo>
+                    <a:pt x="1125511" y="300377"/>
+                  </a:lnTo>
+                  <a:lnTo>
+                    <a:pt x="1055167" y="284826"/>
+                  </a:lnTo>
+                  <a:lnTo>
+                    <a:pt x="984822" y="268893"/>
+                  </a:lnTo>
+                  <a:lnTo>
+                    <a:pt x="914478" y="252568"/>
+                  </a:lnTo>
+                  <a:lnTo>
+                    <a:pt x="844133" y="235842"/>
+                  </a:lnTo>
+                  <a:lnTo>
+                    <a:pt x="773789" y="218705"/>
+                  </a:lnTo>
+                  <a:lnTo>
+                    <a:pt x="703444" y="201147"/>
+                  </a:lnTo>
+                  <a:lnTo>
+                    <a:pt x="633100" y="183158"/>
+                  </a:lnTo>
+                  <a:lnTo>
+                    <a:pt x="562755" y="164726"/>
+                  </a:lnTo>
+                  <a:lnTo>
+                    <a:pt x="492411" y="145842"/>
+                  </a:lnTo>
+                  <a:lnTo>
+                    <a:pt x="422066" y="126494"/>
+                  </a:lnTo>
+                  <a:lnTo>
+                    <a:pt x="351722" y="106670"/>
+                  </a:lnTo>
+                  <a:lnTo>
+                    <a:pt x="281377" y="86359"/>
+                  </a:lnTo>
+                  <a:lnTo>
+                    <a:pt x="211033" y="65549"/>
+                  </a:lnTo>
+                  <a:lnTo>
+                    <a:pt x="140688" y="44227"/>
+                  </a:lnTo>
+                  <a:lnTo>
+                    <a:pt x="70344" y="22382"/>
+                  </a:lnTo>
+                  <a:lnTo>
+                    <a:pt x="0" y="0"/>
+                  </a:lnTo>
+                </a:path>
+              </a:pathLst>
+            </a:custGeom>
+          </p:spPr>
+          <p:txBody>
+            <a:bodyPr/>
+            <a:lstStyle/>
+            <a:p/>
+          </p:txBody>
+        </p:sp>
+        <p:sp>
+          <p:nvSpPr>
+            <p:cNvPr id="70" name="pl70"/>
+            <p:cNvSpPr/>
+            <p:nvPr/>
+          </p:nvSpPr>
+          <p:spPr>
+            <a:xfrm>
+              <a:off x="2532501" y="4336484"/>
+              <a:ext cx="5666914" cy="1235733"/>
+            </a:xfrm>
+            <a:custGeom>
+              <a:avLst/>
+              <a:pathLst>
+                <a:path w="5666914" h="1235733">
+                  <a:moveTo>
+                    <a:pt x="0" y="0"/>
+                  </a:moveTo>
+                  <a:lnTo>
+                    <a:pt x="39355" y="35418"/>
+                  </a:lnTo>
+                  <a:lnTo>
+                    <a:pt x="109699" y="95608"/>
+                  </a:lnTo>
+                  <a:lnTo>
+                    <a:pt x="180044" y="152832"/>
+                  </a:lnTo>
+                  <a:lnTo>
+                    <a:pt x="250388" y="207237"/>
+                  </a:lnTo>
+                  <a:lnTo>
+                    <a:pt x="320733" y="258962"/>
+                  </a:lnTo>
+                  <a:lnTo>
+                    <a:pt x="391077" y="308139"/>
+                  </a:lnTo>
+                  <a:lnTo>
+                    <a:pt x="461422" y="354893"/>
+                  </a:lnTo>
+                  <a:lnTo>
+                    <a:pt x="531766" y="399344"/>
+                  </a:lnTo>
+                  <a:lnTo>
+                    <a:pt x="602111" y="441605"/>
+                  </a:lnTo>
+                  <a:lnTo>
+                    <a:pt x="672455" y="481784"/>
+                  </a:lnTo>
+                  <a:lnTo>
+                    <a:pt x="742800" y="519984"/>
+                  </a:lnTo>
+                  <a:lnTo>
+                    <a:pt x="813144" y="556302"/>
+                  </a:lnTo>
+                  <a:lnTo>
+                    <a:pt x="883489" y="590831"/>
+                  </a:lnTo>
+                  <a:lnTo>
+                    <a:pt x="953833" y="623659"/>
+                  </a:lnTo>
+                  <a:lnTo>
+                    <a:pt x="1024178" y="654869"/>
+                  </a:lnTo>
+                  <a:lnTo>
+                    <a:pt x="1094522" y="684542"/>
+                  </a:lnTo>
+                  <a:lnTo>
+                    <a:pt x="1164867" y="712754"/>
+                  </a:lnTo>
+                  <a:lnTo>
+                    <a:pt x="1235211" y="739575"/>
+                  </a:lnTo>
+                  <a:lnTo>
+                    <a:pt x="1305556" y="765075"/>
+                  </a:lnTo>
+                  <a:lnTo>
+                    <a:pt x="1375900" y="789319"/>
+                  </a:lnTo>
+                  <a:lnTo>
+                    <a:pt x="1446245" y="812369"/>
+                  </a:lnTo>
+                  <a:lnTo>
+                    <a:pt x="1516589" y="834283"/>
+                  </a:lnTo>
+                  <a:lnTo>
+                    <a:pt x="1586934" y="855117"/>
+                  </a:lnTo>
+                  <a:lnTo>
+                    <a:pt x="1657278" y="874925"/>
+                  </a:lnTo>
+                  <a:lnTo>
+                    <a:pt x="1727623" y="893758"/>
+                  </a:lnTo>
+                  <a:lnTo>
+                    <a:pt x="1797967" y="911662"/>
+                  </a:lnTo>
+                  <a:lnTo>
+                    <a:pt x="1868312" y="928685"/>
+                  </a:lnTo>
+                  <a:lnTo>
+                    <a:pt x="1938656" y="944869"/>
+                  </a:lnTo>
+                  <a:lnTo>
+                    <a:pt x="2009001" y="960255"/>
+                  </a:lnTo>
+                  <a:lnTo>
+                    <a:pt x="2079345" y="974884"/>
+                  </a:lnTo>
+                  <a:lnTo>
+                    <a:pt x="2149690" y="988792"/>
+                  </a:lnTo>
+                  <a:lnTo>
+                    <a:pt x="2220034" y="1002015"/>
+                  </a:lnTo>
+                  <a:lnTo>
+                    <a:pt x="2290379" y="1014586"/>
+                  </a:lnTo>
+                  <a:lnTo>
+                    <a:pt x="2360723" y="1026538"/>
+                  </a:lnTo>
+                  <a:lnTo>
+                    <a:pt x="2431068" y="1037902"/>
+                  </a:lnTo>
+                  <a:lnTo>
+                    <a:pt x="2501412" y="1048705"/>
+                  </a:lnTo>
+                  <a:lnTo>
+                    <a:pt x="2571757" y="1058976"/>
+                  </a:lnTo>
+                  <a:lnTo>
+                    <a:pt x="2642101" y="1068742"/>
+                  </a:lnTo>
+                  <a:lnTo>
+                    <a:pt x="2712446" y="1078026"/>
+                  </a:lnTo>
+                  <a:lnTo>
+                    <a:pt x="2782790" y="1086853"/>
+                  </a:lnTo>
+                  <a:lnTo>
+                    <a:pt x="2853135" y="1095245"/>
+                  </a:lnTo>
+                  <a:lnTo>
+                    <a:pt x="2923479" y="1103223"/>
+                  </a:lnTo>
+                  <a:lnTo>
+                    <a:pt x="2993824" y="1110809"/>
+                  </a:lnTo>
+                  <a:lnTo>
+                    <a:pt x="3064168" y="1118021"/>
+                  </a:lnTo>
+                  <a:lnTo>
+                    <a:pt x="3134513" y="1124877"/>
+                  </a:lnTo>
+                  <a:lnTo>
+                    <a:pt x="3204857" y="1131396"/>
+                  </a:lnTo>
+                  <a:lnTo>
+                    <a:pt x="3275202" y="1137594"/>
+                  </a:lnTo>
+                  <a:lnTo>
+                    <a:pt x="3345546" y="1143486"/>
+                  </a:lnTo>
+                  <a:lnTo>
+                    <a:pt x="3415891" y="1149088"/>
+                  </a:lnTo>
+                  <a:lnTo>
+                    <a:pt x="3486235" y="1154414"/>
+                  </a:lnTo>
+                  <a:lnTo>
+                    <a:pt x="3556579" y="1159478"/>
+                  </a:lnTo>
+                  <a:lnTo>
+                    <a:pt x="3626924" y="1164292"/>
+                  </a:lnTo>
+                  <a:lnTo>
+                    <a:pt x="3697268" y="1168869"/>
+                  </a:lnTo>
+                  <a:lnTo>
+                    <a:pt x="3767613" y="1173221"/>
+                  </a:lnTo>
+                  <a:lnTo>
+                    <a:pt x="3837957" y="1177358"/>
+                  </a:lnTo>
+                  <a:lnTo>
+                    <a:pt x="3908302" y="1181291"/>
+                  </a:lnTo>
+                  <a:lnTo>
+                    <a:pt x="3978646" y="1185031"/>
+                  </a:lnTo>
+                  <a:lnTo>
+                    <a:pt x="4048991" y="1188586"/>
+                  </a:lnTo>
+                  <a:lnTo>
+                    <a:pt x="4119335" y="1191967"/>
+                  </a:lnTo>
+                  <a:lnTo>
+                    <a:pt x="4189680" y="1195180"/>
+                  </a:lnTo>
+                  <a:lnTo>
+                    <a:pt x="4260024" y="1198236"/>
+                  </a:lnTo>
+                  <a:lnTo>
+                    <a:pt x="4330369" y="1201141"/>
+                  </a:lnTo>
+                  <a:lnTo>
+                    <a:pt x="4400713" y="1203902"/>
+                  </a:lnTo>
+                  <a:lnTo>
+                    <a:pt x="4471058" y="1206528"/>
+                  </a:lnTo>
+                  <a:lnTo>
+                    <a:pt x="4541402" y="1209024"/>
+                  </a:lnTo>
+                  <a:lnTo>
+                    <a:pt x="4611747" y="1211398"/>
+                  </a:lnTo>
+                  <a:lnTo>
+                    <a:pt x="4682091" y="1213654"/>
+                  </a:lnTo>
+                  <a:lnTo>
+                    <a:pt x="4752436" y="1215800"/>
+                  </a:lnTo>
+                  <a:lnTo>
+                    <a:pt x="4822780" y="1217839"/>
+                  </a:lnTo>
+                  <a:lnTo>
+                    <a:pt x="4893125" y="1219778"/>
+                  </a:lnTo>
+                  <a:lnTo>
+                    <a:pt x="4963469" y="1221622"/>
+                  </a:lnTo>
+                  <a:lnTo>
+                    <a:pt x="5033814" y="1223375"/>
+                  </a:lnTo>
+                  <a:lnTo>
+                    <a:pt x="5104158" y="1225041"/>
+                  </a:lnTo>
+                  <a:lnTo>
+                    <a:pt x="5174503" y="1226626"/>
+                  </a:lnTo>
+                  <a:lnTo>
+                    <a:pt x="5244847" y="1228132"/>
+                  </a:lnTo>
+                  <a:lnTo>
+                    <a:pt x="5315192" y="1229564"/>
+                  </a:lnTo>
+                  <a:lnTo>
+                    <a:pt x="5385536" y="1230925"/>
+                  </a:lnTo>
+                  <a:lnTo>
+                    <a:pt x="5455881" y="1232220"/>
+                  </a:lnTo>
+                  <a:lnTo>
+                    <a:pt x="5526225" y="1233451"/>
+                  </a:lnTo>
+                  <a:lnTo>
+                    <a:pt x="5596570" y="1234621"/>
+                  </a:lnTo>
+                  <a:lnTo>
+                    <a:pt x="5666914" y="1235733"/>
+                  </a:lnTo>
+                </a:path>
+              </a:pathLst>
+            </a:custGeom>
+            <a:ln w="27101" cap="flat">
+              <a:solidFill>
+                <a:srgbClr val="FF8C00">
+                  <a:alpha val="100000"/>
+                </a:srgbClr>
+              </a:solidFill>
+              <a:prstDash val="solid"/>
+              <a:round/>
+            </a:ln>
+          </p:spPr>
+          <p:txBody>
+            <a:bodyPr/>
+            <a:lstStyle/>
+            <a:p/>
+          </p:txBody>
+        </p:sp>
+        <p:sp>
+          <p:nvSpPr>
+            <p:cNvPr id="71" name="pl71"/>
+            <p:cNvSpPr/>
+            <p:nvPr/>
+          </p:nvSpPr>
+          <p:spPr>
+            <a:xfrm>
+              <a:off x="887106" y="5294352"/>
+              <a:ext cx="7660515" cy="0"/>
+            </a:xfrm>
+            <a:custGeom>
+              <a:avLst/>
+              <a:pathLst>
+                <a:path w="7660515" h="0">
+                  <a:moveTo>
+                    <a:pt x="0" y="0"/>
+                  </a:moveTo>
+                  <a:lnTo>
+                    <a:pt x="7660515" y="0"/>
+                  </a:lnTo>
+                  <a:lnTo>
+                    <a:pt x="7660515" y="0"/>
+                  </a:lnTo>
+                </a:path>
+              </a:pathLst>
+            </a:custGeom>
+            <a:ln w="13550" cap="flat">
+              <a:solidFill>
+                <a:srgbClr val="7F7F7F">
+                  <a:alpha val="100000"/>
+                </a:srgbClr>
+              </a:solidFill>
+              <a:prstDash val="dash"/>
+              <a:round/>
+            </a:ln>
+          </p:spPr>
+          <p:txBody>
+            <a:bodyPr/>
+            <a:lstStyle/>
+            <a:p/>
+          </p:txBody>
+        </p:sp>
+        <p:sp>
+          <p:nvSpPr>
+            <p:cNvPr id="72" name="pl72"/>
+            <p:cNvSpPr/>
+            <p:nvPr/>
+          </p:nvSpPr>
+          <p:spPr>
+            <a:xfrm>
+              <a:off x="4530353" y="4336484"/>
+              <a:ext cx="0" cy="1317069"/>
+            </a:xfrm>
+            <a:custGeom>
+              <a:avLst/>
+              <a:pathLst>
+                <a:path w="0" h="1317069">
+                  <a:moveTo>
+                    <a:pt x="0" y="1317069"/>
+                  </a:moveTo>
+                  <a:lnTo>
+                    <a:pt x="0" y="0"/>
+                  </a:lnTo>
+                  <a:lnTo>
+                    <a:pt x="0" y="0"/>
+                  </a:lnTo>
+                </a:path>
+              </a:pathLst>
+            </a:custGeom>
+            <a:ln w="13550" cap="flat">
+              <a:solidFill>
+                <a:srgbClr val="666666">
+                  <a:alpha val="100000"/>
+                </a:srgbClr>
+              </a:solidFill>
+              <a:prstDash val="dot"/>
+              <a:round/>
+            </a:ln>
+          </p:spPr>
+          <p:txBody>
+            <a:bodyPr/>
+            <a:lstStyle/>
+            <a:p/>
+          </p:txBody>
+        </p:sp>
+        <p:sp>
+          <p:nvSpPr>
+            <p:cNvPr id="73" name="tx73"/>
+            <p:cNvSpPr/>
+            <p:nvPr/>
+          </p:nvSpPr>
+          <p:spPr>
+            <a:xfrm>
+              <a:off x="762297" y="5553636"/>
+              <a:ext cx="62179" cy="80101"/>
+            </a:xfrm>
+            <a:prstGeom prst="rect">
+              <a:avLst/>
+            </a:prstGeom>
+            <a:noFill/>
+          </p:spPr>
+          <p:txBody>
+            <a:bodyPr lIns="0" rIns="0" tIns="0" bIns="0" anchorCtr="1" anchor="ctr" wrap="none"/>
+            <a:lstStyle/>
+            <a:p>
+              <a:pPr algn="l" marL="0" marR="0" indent="0">
+                <a:lnSpc>
+                  <a:spcPts val="880"/>
+                </a:lnSpc>
+                <a:spcBef>
+                  <a:spcPts val="0"/>
+                </a:spcBef>
+                <a:spcAft>
+                  <a:spcPts val="0"/>
+                </a:spcAft>
+              </a:pPr>
+              <a:r>
+                <a:rPr sz="880">
+                  <a:solidFill>
+                    <a:srgbClr val="4D4D4D">
+                      <a:alpha val="100000"/>
+                    </a:srgbClr>
+                  </a:solidFill>
+                  <a:latin typeface="Helvetica"/>
+                  <a:cs typeface="Helvetica"/>
+                </a:rPr>
+                <a:t>0</a:t>
+              </a:r>
+            </a:p>
+          </p:txBody>
+        </p:sp>
+        <p:sp>
+          <p:nvSpPr>
+            <p:cNvPr id="74" name="tx74"/>
+            <p:cNvSpPr/>
+            <p:nvPr/>
+          </p:nvSpPr>
+          <p:spPr>
+            <a:xfrm>
+              <a:off x="762297" y="5254302"/>
+              <a:ext cx="62179" cy="80101"/>
+            </a:xfrm>
+            <a:prstGeom prst="rect">
+              <a:avLst/>
+            </a:prstGeom>
+            <a:noFill/>
+          </p:spPr>
+          <p:txBody>
+            <a:bodyPr lIns="0" rIns="0" tIns="0" bIns="0" anchorCtr="1" anchor="ctr" wrap="none"/>
+            <a:lstStyle/>
+            <a:p>
+              <a:pPr algn="l" marL="0" marR="0" indent="0">
+                <a:lnSpc>
+                  <a:spcPts val="880"/>
+                </a:lnSpc>
+                <a:spcBef>
+                  <a:spcPts val="0"/>
+                </a:spcBef>
+                <a:spcAft>
+                  <a:spcPts val="0"/>
+                </a:spcAft>
+              </a:pPr>
+              <a:r>
+                <a:rPr sz="880">
+                  <a:solidFill>
+                    <a:srgbClr val="4D4D4D">
+                      <a:alpha val="100000"/>
+                    </a:srgbClr>
+                  </a:solidFill>
+                  <a:latin typeface="Helvetica"/>
+                  <a:cs typeface="Helvetica"/>
+                </a:rPr>
+                <a:t>1</a:t>
+              </a:r>
+            </a:p>
+          </p:txBody>
+        </p:sp>
+        <p:sp>
+          <p:nvSpPr>
+            <p:cNvPr id="75" name="tx75"/>
+            <p:cNvSpPr/>
+            <p:nvPr/>
+          </p:nvSpPr>
+          <p:spPr>
+            <a:xfrm>
+              <a:off x="762297" y="4954968"/>
+              <a:ext cx="62179" cy="80101"/>
+            </a:xfrm>
+            <a:prstGeom prst="rect">
+              <a:avLst/>
+            </a:prstGeom>
+            <a:noFill/>
+          </p:spPr>
+          <p:txBody>
+            <a:bodyPr lIns="0" rIns="0" tIns="0" bIns="0" anchorCtr="1" anchor="ctr" wrap="none"/>
+            <a:lstStyle/>
+            <a:p>
+              <a:pPr algn="l" marL="0" marR="0" indent="0">
+                <a:lnSpc>
+                  <a:spcPts val="880"/>
+                </a:lnSpc>
+                <a:spcBef>
+                  <a:spcPts val="0"/>
+                </a:spcBef>
+                <a:spcAft>
+                  <a:spcPts val="0"/>
+                </a:spcAft>
+              </a:pPr>
+              <a:r>
+                <a:rPr sz="880">
+                  <a:solidFill>
+                    <a:srgbClr val="4D4D4D">
+                      <a:alpha val="100000"/>
+                    </a:srgbClr>
+                  </a:solidFill>
+                  <a:latin typeface="Helvetica"/>
+                  <a:cs typeface="Helvetica"/>
+                </a:rPr>
+                <a:t>2</a:t>
+              </a:r>
+            </a:p>
+          </p:txBody>
+        </p:sp>
+        <p:sp>
+          <p:nvSpPr>
+            <p:cNvPr id="76" name="tx76"/>
+            <p:cNvSpPr/>
+            <p:nvPr/>
+          </p:nvSpPr>
+          <p:spPr>
+            <a:xfrm>
+              <a:off x="762297" y="4655634"/>
+              <a:ext cx="62179" cy="80101"/>
+            </a:xfrm>
+            <a:prstGeom prst="rect">
+              <a:avLst/>
+            </a:prstGeom>
+            <a:noFill/>
+          </p:spPr>
+          <p:txBody>
+            <a:bodyPr lIns="0" rIns="0" tIns="0" bIns="0" anchorCtr="1" anchor="ctr" wrap="none"/>
+            <a:lstStyle/>
+            <a:p>
+              <a:pPr algn="l" marL="0" marR="0" indent="0">
+                <a:lnSpc>
+                  <a:spcPts val="880"/>
+                </a:lnSpc>
+                <a:spcBef>
+                  <a:spcPts val="0"/>
+                </a:spcBef>
+                <a:spcAft>
+                  <a:spcPts val="0"/>
+                </a:spcAft>
+              </a:pPr>
+              <a:r>
+                <a:rPr sz="880">
+                  <a:solidFill>
+                    <a:srgbClr val="4D4D4D">
+                      <a:alpha val="100000"/>
+                    </a:srgbClr>
+                  </a:solidFill>
+                  <a:latin typeface="Helvetica"/>
+                  <a:cs typeface="Helvetica"/>
+                </a:rPr>
+                <a:t>3</a:t>
+              </a:r>
+            </a:p>
+          </p:txBody>
+        </p:sp>
+        <p:sp>
+          <p:nvSpPr>
+            <p:cNvPr id="77" name="tx77"/>
+            <p:cNvSpPr/>
+            <p:nvPr/>
+          </p:nvSpPr>
+          <p:spPr>
+            <a:xfrm>
+              <a:off x="762297" y="4356300"/>
+              <a:ext cx="62179" cy="80101"/>
+            </a:xfrm>
+            <a:prstGeom prst="rect">
+              <a:avLst/>
+            </a:prstGeom>
+            <a:noFill/>
+          </p:spPr>
+          <p:txBody>
+            <a:bodyPr lIns="0" rIns="0" tIns="0" bIns="0" anchorCtr="1" anchor="ctr" wrap="none"/>
+            <a:lstStyle/>
+            <a:p>
+              <a:pPr algn="l" marL="0" marR="0" indent="0">
+                <a:lnSpc>
+                  <a:spcPts val="880"/>
+                </a:lnSpc>
+                <a:spcBef>
+                  <a:spcPts val="0"/>
+                </a:spcBef>
+                <a:spcAft>
+                  <a:spcPts val="0"/>
+                </a:spcAft>
+              </a:pPr>
+              <a:r>
+                <a:rPr sz="880">
+                  <a:solidFill>
+                    <a:srgbClr val="4D4D4D">
+                      <a:alpha val="100000"/>
+                    </a:srgbClr>
+                  </a:solidFill>
+                  <a:latin typeface="Helvetica"/>
+                  <a:cs typeface="Helvetica"/>
+                </a:rPr>
+                <a:t>4</a:t>
+              </a:r>
+            </a:p>
+          </p:txBody>
+        </p:sp>
+        <p:sp>
+          <p:nvSpPr>
+            <p:cNvPr id="78" name="tx78"/>
+            <p:cNvSpPr/>
+            <p:nvPr/>
+          </p:nvSpPr>
+          <p:spPr>
+            <a:xfrm>
+              <a:off x="1241001" y="5716183"/>
+              <a:ext cx="161574" cy="80101"/>
+            </a:xfrm>
+            <a:prstGeom prst="rect">
+              <a:avLst/>
+            </a:prstGeom>
+            <a:noFill/>
+          </p:spPr>
+          <p:txBody>
+            <a:bodyPr lIns="0" rIns="0" tIns="0" bIns="0" anchorCtr="1" anchor="ctr" wrap="none"/>
+            <a:lstStyle/>
+            <a:p>
+              <a:pPr algn="l" marL="0" marR="0" indent="0">
+                <a:lnSpc>
+                  <a:spcPts val="880"/>
+                </a:lnSpc>
+                <a:spcBef>
+                  <a:spcPts val="0"/>
+                </a:spcBef>
+                <a:spcAft>
+                  <a:spcPts val="0"/>
+                </a:spcAft>
+              </a:pPr>
+              <a:r>
+                <a:rPr sz="880">
+                  <a:solidFill>
+                    <a:srgbClr val="4D4D4D">
+                      <a:alpha val="100000"/>
+                    </a:srgbClr>
+                  </a:solidFill>
+                  <a:latin typeface="Helvetica"/>
+                  <a:cs typeface="Helvetica"/>
+                </a:rPr>
+                <a:t>-40</a:t>
+              </a:r>
+            </a:p>
+          </p:txBody>
+        </p:sp>
+        <p:sp>
+          <p:nvSpPr>
+            <p:cNvPr id="79" name="tx79"/>
+            <p:cNvSpPr/>
+            <p:nvPr/>
+          </p:nvSpPr>
+          <p:spPr>
+            <a:xfrm>
+              <a:off x="2054602" y="5716183"/>
+              <a:ext cx="161574" cy="80101"/>
+            </a:xfrm>
+            <a:prstGeom prst="rect">
+              <a:avLst/>
+            </a:prstGeom>
+            <a:noFill/>
+          </p:spPr>
+          <p:txBody>
+            <a:bodyPr lIns="0" rIns="0" tIns="0" bIns="0" anchorCtr="1" anchor="ctr" wrap="none"/>
+            <a:lstStyle/>
+            <a:p>
+              <a:pPr algn="l" marL="0" marR="0" indent="0">
+                <a:lnSpc>
+                  <a:spcPts val="880"/>
+                </a:lnSpc>
+                <a:spcBef>
+                  <a:spcPts val="0"/>
+                </a:spcBef>
+                <a:spcAft>
+                  <a:spcPts val="0"/>
+                </a:spcAft>
+              </a:pPr>
+              <a:r>
+                <a:rPr sz="880">
+                  <a:solidFill>
+                    <a:srgbClr val="4D4D4D">
+                      <a:alpha val="100000"/>
+                    </a:srgbClr>
+                  </a:solidFill>
+                  <a:latin typeface="Helvetica"/>
+                  <a:cs typeface="Helvetica"/>
+                </a:rPr>
+                <a:t>-30</a:t>
+              </a:r>
+            </a:p>
+          </p:txBody>
+        </p:sp>
+        <p:sp>
+          <p:nvSpPr>
+            <p:cNvPr id="80" name="tx80"/>
+            <p:cNvSpPr/>
+            <p:nvPr/>
+          </p:nvSpPr>
+          <p:spPr>
+            <a:xfrm>
+              <a:off x="2868203" y="5716183"/>
+              <a:ext cx="161574" cy="80101"/>
+            </a:xfrm>
+            <a:prstGeom prst="rect">
+              <a:avLst/>
+            </a:prstGeom>
+            <a:noFill/>
+          </p:spPr>
+          <p:txBody>
+            <a:bodyPr lIns="0" rIns="0" tIns="0" bIns="0" anchorCtr="1" anchor="ctr" wrap="none"/>
+            <a:lstStyle/>
+            <a:p>
+              <a:pPr algn="l" marL="0" marR="0" indent="0">
+                <a:lnSpc>
+                  <a:spcPts val="880"/>
+                </a:lnSpc>
+                <a:spcBef>
+                  <a:spcPts val="0"/>
+                </a:spcBef>
+                <a:spcAft>
+                  <a:spcPts val="0"/>
+                </a:spcAft>
+              </a:pPr>
+              <a:r>
+                <a:rPr sz="880">
+                  <a:solidFill>
+                    <a:srgbClr val="4D4D4D">
+                      <a:alpha val="100000"/>
+                    </a:srgbClr>
+                  </a:solidFill>
+                  <a:latin typeface="Helvetica"/>
+                  <a:cs typeface="Helvetica"/>
+                </a:rPr>
+                <a:t>-20</a:t>
+              </a:r>
+            </a:p>
+          </p:txBody>
+        </p:sp>
+        <p:sp>
+          <p:nvSpPr>
+            <p:cNvPr id="81" name="tx81"/>
+            <p:cNvSpPr/>
+            <p:nvPr/>
+          </p:nvSpPr>
+          <p:spPr>
+            <a:xfrm>
+              <a:off x="3681805" y="5716183"/>
+              <a:ext cx="161574" cy="80101"/>
+            </a:xfrm>
+            <a:prstGeom prst="rect">
+              <a:avLst/>
+            </a:prstGeom>
+            <a:noFill/>
+          </p:spPr>
+          <p:txBody>
+            <a:bodyPr lIns="0" rIns="0" tIns="0" bIns="0" anchorCtr="1" anchor="ctr" wrap="none"/>
+            <a:lstStyle/>
+            <a:p>
+              <a:pPr algn="l" marL="0" marR="0" indent="0">
+                <a:lnSpc>
+                  <a:spcPts val="880"/>
+                </a:lnSpc>
+                <a:spcBef>
+                  <a:spcPts val="0"/>
+                </a:spcBef>
+                <a:spcAft>
+                  <a:spcPts val="0"/>
+                </a:spcAft>
+              </a:pPr>
+              <a:r>
+                <a:rPr sz="880">
+                  <a:solidFill>
+                    <a:srgbClr val="4D4D4D">
+                      <a:alpha val="100000"/>
+                    </a:srgbClr>
+                  </a:solidFill>
+                  <a:latin typeface="Helvetica"/>
+                  <a:cs typeface="Helvetica"/>
+                </a:rPr>
+                <a:t>-10</a:t>
+              </a:r>
+            </a:p>
+          </p:txBody>
+        </p:sp>
+        <p:sp>
+          <p:nvSpPr>
+            <p:cNvPr id="82" name="tx82"/>
+            <p:cNvSpPr/>
+            <p:nvPr/>
+          </p:nvSpPr>
+          <p:spPr>
+            <a:xfrm>
+              <a:off x="4545104" y="5716183"/>
+              <a:ext cx="62179" cy="80101"/>
+            </a:xfrm>
+            <a:prstGeom prst="rect">
+              <a:avLst/>
+            </a:prstGeom>
+            <a:noFill/>
+          </p:spPr>
+          <p:txBody>
+            <a:bodyPr lIns="0" rIns="0" tIns="0" bIns="0" anchorCtr="1" anchor="ctr" wrap="none"/>
+            <a:lstStyle/>
+            <a:p>
+              <a:pPr algn="l" marL="0" marR="0" indent="0">
+                <a:lnSpc>
+                  <a:spcPts val="880"/>
+                </a:lnSpc>
+                <a:spcBef>
+                  <a:spcPts val="0"/>
+                </a:spcBef>
+                <a:spcAft>
+                  <a:spcPts val="0"/>
+                </a:spcAft>
+              </a:pPr>
+              <a:r>
+                <a:rPr sz="880">
+                  <a:solidFill>
+                    <a:srgbClr val="4D4D4D">
+                      <a:alpha val="100000"/>
+                    </a:srgbClr>
+                  </a:solidFill>
+                  <a:latin typeface="Helvetica"/>
+                  <a:cs typeface="Helvetica"/>
+                </a:rPr>
+                <a:t>0</a:t>
+              </a:r>
+            </a:p>
+          </p:txBody>
+        </p:sp>
+        <p:sp>
+          <p:nvSpPr>
+            <p:cNvPr id="83" name="tx83"/>
+            <p:cNvSpPr/>
+            <p:nvPr/>
+          </p:nvSpPr>
+          <p:spPr>
+            <a:xfrm>
+              <a:off x="5327615" y="5716183"/>
+              <a:ext cx="124358" cy="80101"/>
+            </a:xfrm>
+            <a:prstGeom prst="rect">
+              <a:avLst/>
+            </a:prstGeom>
+            <a:noFill/>
+          </p:spPr>
+          <p:txBody>
+            <a:bodyPr lIns="0" rIns="0" tIns="0" bIns="0" anchorCtr="1" anchor="ctr" wrap="none"/>
+            <a:lstStyle/>
+            <a:p>
+              <a:pPr algn="l" marL="0" marR="0" indent="0">
+                <a:lnSpc>
+                  <a:spcPts val="880"/>
+                </a:lnSpc>
+                <a:spcBef>
+                  <a:spcPts val="0"/>
+                </a:spcBef>
+                <a:spcAft>
+                  <a:spcPts val="0"/>
+                </a:spcAft>
+              </a:pPr>
+              <a:r>
+                <a:rPr sz="880">
+                  <a:solidFill>
+                    <a:srgbClr val="4D4D4D">
+                      <a:alpha val="100000"/>
+                    </a:srgbClr>
+                  </a:solidFill>
+                  <a:latin typeface="Helvetica"/>
+                  <a:cs typeface="Helvetica"/>
+                </a:rPr>
+                <a:t>10</a:t>
+              </a:r>
+            </a:p>
+          </p:txBody>
+        </p:sp>
+        <p:sp>
+          <p:nvSpPr>
+            <p:cNvPr id="84" name="tx84"/>
+            <p:cNvSpPr/>
+            <p:nvPr/>
+          </p:nvSpPr>
+          <p:spPr>
+            <a:xfrm>
+              <a:off x="6141217" y="5716183"/>
+              <a:ext cx="124358" cy="80101"/>
+            </a:xfrm>
+            <a:prstGeom prst="rect">
+              <a:avLst/>
+            </a:prstGeom>
+            <a:noFill/>
+          </p:spPr>
+          <p:txBody>
+            <a:bodyPr lIns="0" rIns="0" tIns="0" bIns="0" anchorCtr="1" anchor="ctr" wrap="none"/>
+            <a:lstStyle/>
+            <a:p>
+              <a:pPr algn="l" marL="0" marR="0" indent="0">
+                <a:lnSpc>
+                  <a:spcPts val="880"/>
+                </a:lnSpc>
+                <a:spcBef>
+                  <a:spcPts val="0"/>
+                </a:spcBef>
+                <a:spcAft>
+                  <a:spcPts val="0"/>
+                </a:spcAft>
+              </a:pPr>
+              <a:r>
+                <a:rPr sz="880">
+                  <a:solidFill>
+                    <a:srgbClr val="4D4D4D">
+                      <a:alpha val="100000"/>
+                    </a:srgbClr>
+                  </a:solidFill>
+                  <a:latin typeface="Helvetica"/>
+                  <a:cs typeface="Helvetica"/>
+                </a:rPr>
+                <a:t>20</a:t>
+              </a:r>
+            </a:p>
+          </p:txBody>
+        </p:sp>
+        <p:sp>
+          <p:nvSpPr>
+            <p:cNvPr id="85" name="tx85"/>
+            <p:cNvSpPr/>
+            <p:nvPr/>
+          </p:nvSpPr>
+          <p:spPr>
+            <a:xfrm>
+              <a:off x="6954818" y="5716183"/>
+              <a:ext cx="124358" cy="80101"/>
+            </a:xfrm>
+            <a:prstGeom prst="rect">
+              <a:avLst/>
+            </a:prstGeom>
+            <a:noFill/>
+          </p:spPr>
+          <p:txBody>
+            <a:bodyPr lIns="0" rIns="0" tIns="0" bIns="0" anchorCtr="1" anchor="ctr" wrap="none"/>
+            <a:lstStyle/>
+            <a:p>
+              <a:pPr algn="l" marL="0" marR="0" indent="0">
+                <a:lnSpc>
+                  <a:spcPts val="880"/>
+                </a:lnSpc>
+                <a:spcBef>
+                  <a:spcPts val="0"/>
+                </a:spcBef>
+                <a:spcAft>
+                  <a:spcPts val="0"/>
+                </a:spcAft>
+              </a:pPr>
+              <a:r>
+                <a:rPr sz="880">
+                  <a:solidFill>
+                    <a:srgbClr val="4D4D4D">
+                      <a:alpha val="100000"/>
+                    </a:srgbClr>
+                  </a:solidFill>
+                  <a:latin typeface="Helvetica"/>
+                  <a:cs typeface="Helvetica"/>
+                </a:rPr>
+                <a:t>30</a:t>
+              </a:r>
+            </a:p>
+          </p:txBody>
+        </p:sp>
+        <p:sp>
+          <p:nvSpPr>
+            <p:cNvPr id="86" name="tx86"/>
+            <p:cNvSpPr/>
+            <p:nvPr/>
+          </p:nvSpPr>
+          <p:spPr>
+            <a:xfrm>
+              <a:off x="7768419" y="5716183"/>
+              <a:ext cx="124358" cy="80101"/>
+            </a:xfrm>
+            <a:prstGeom prst="rect">
+              <a:avLst/>
+            </a:prstGeom>
+            <a:noFill/>
+          </p:spPr>
+          <p:txBody>
+            <a:bodyPr lIns="0" rIns="0" tIns="0" bIns="0" anchorCtr="1" anchor="ctr" wrap="none"/>
+            <a:lstStyle/>
+            <a:p>
+              <a:pPr algn="l" marL="0" marR="0" indent="0">
+                <a:lnSpc>
+                  <a:spcPts val="880"/>
+                </a:lnSpc>
+                <a:spcBef>
+                  <a:spcPts val="0"/>
+                </a:spcBef>
+                <a:spcAft>
+                  <a:spcPts val="0"/>
+                </a:spcAft>
+              </a:pPr>
+              <a:r>
+                <a:rPr sz="880">
+                  <a:solidFill>
+                    <a:srgbClr val="4D4D4D">
+                      <a:alpha val="100000"/>
+                    </a:srgbClr>
+                  </a:solidFill>
+                  <a:latin typeface="Helvetica"/>
+                  <a:cs typeface="Helvetica"/>
+                </a:rPr>
+                <a:t>40</a:t>
+              </a:r>
+            </a:p>
+          </p:txBody>
+        </p:sp>
+        <p:sp>
+          <p:nvSpPr>
+            <p:cNvPr id="87" name="tx87"/>
+            <p:cNvSpPr/>
+            <p:nvPr/>
+          </p:nvSpPr>
+          <p:spPr>
+            <a:xfrm>
+              <a:off x="2928340" y="5855859"/>
+              <a:ext cx="3578047" cy="100218"/>
+            </a:xfrm>
+            <a:prstGeom prst="rect">
+              <a:avLst/>
+            </a:prstGeom>
+            <a:noFill/>
+          </p:spPr>
+          <p:txBody>
+            <a:bodyPr lIns="0" rIns="0" tIns="0" bIns="0" anchorCtr="1" anchor="ctr" wrap="none"/>
+            <a:lstStyle/>
+            <a:p>
+              <a:pPr algn="l" marL="0" marR="0" indent="0">
+                <a:lnSpc>
+                  <a:spcPts val="1100"/>
+                </a:lnSpc>
+                <a:spcBef>
+                  <a:spcPts val="0"/>
+                </a:spcBef>
+                <a:spcAft>
+                  <a:spcPts val="0"/>
+                </a:spcAft>
+              </a:pPr>
+              <a:r>
+                <a:rPr sz="1100">
+                  <a:solidFill>
+                    <a:srgbClr val="000000">
+                      <a:alpha val="100000"/>
+                    </a:srgbClr>
+                  </a:solidFill>
+                  <a:latin typeface="Helvetica"/>
+                  <a:cs typeface="Helvetica"/>
+                </a:rPr>
+                <a:t>eGFR difference (%): 100 × (CKD-EPI Cr-Cys − CG) / CG</a:t>
+              </a:r>
+            </a:p>
+          </p:txBody>
+        </p:sp>
+        <p:sp>
+          <p:nvSpPr>
+            <p:cNvPr id="88" name="tx88"/>
+            <p:cNvSpPr/>
+            <p:nvPr/>
+          </p:nvSpPr>
+          <p:spPr>
+            <a:xfrm rot="-5400000">
+              <a:off x="138035" y="4944909"/>
+              <a:ext cx="1016904" cy="100218"/>
+            </a:xfrm>
+            <a:prstGeom prst="rect">
+              <a:avLst/>
+            </a:prstGeom>
+            <a:noFill/>
+          </p:spPr>
+          <p:txBody>
+            <a:bodyPr lIns="0" rIns="0" tIns="0" bIns="0" anchorCtr="1" anchor="ctr" wrap="none"/>
+            <a:lstStyle/>
+            <a:p>
+              <a:pPr algn="l" marL="0" marR="0" indent="0">
+                <a:lnSpc>
+                  <a:spcPts val="1100"/>
+                </a:lnSpc>
+                <a:spcBef>
+                  <a:spcPts val="0"/>
+                </a:spcBef>
+                <a:spcAft>
+                  <a:spcPts val="0"/>
+                </a:spcAft>
+              </a:pPr>
+              <a:r>
+                <a:rPr sz="1100">
+                  <a:solidFill>
+                    <a:srgbClr val="000000">
+                      <a:alpha val="100000"/>
+                    </a:srgbClr>
+                  </a:solidFill>
+                  <a:latin typeface="Helvetica"/>
+                  <a:cs typeface="Helvetica"/>
+                </a:rPr>
+                <a:t>subHR (95% CI)</a:t>
+              </a:r>
+            </a:p>
+          </p:txBody>
+        </p:sp>
+        <p:sp>
+          <p:nvSpPr>
+            <p:cNvPr id="89" name="tx89"/>
+            <p:cNvSpPr/>
+            <p:nvPr/>
+          </p:nvSpPr>
+          <p:spPr>
+            <a:xfrm>
+              <a:off x="887106" y="4159544"/>
+              <a:ext cx="7115677" cy="82021"/>
+            </a:xfrm>
+            <a:prstGeom prst="rect">
+              <a:avLst/>
+            </a:prstGeom>
+            <a:noFill/>
+          </p:spPr>
+          <p:txBody>
+            <a:bodyPr lIns="0" rIns="0" tIns="0" bIns="0" anchorCtr="1" anchor="ctr" wrap="none"/>
+            <a:lstStyle/>
+            <a:p>
+              <a:pPr algn="l" marL="0" marR="0" indent="0">
+                <a:lnSpc>
+                  <a:spcPts val="900"/>
+                </a:lnSpc>
+                <a:spcBef>
+                  <a:spcPts val="0"/>
+                </a:spcBef>
+                <a:spcAft>
+                  <a:spcPts val="0"/>
+                </a:spcAft>
+              </a:pPr>
+              <a:r>
+                <a:rPr sz="900">
+                  <a:solidFill>
+                    <a:srgbClr val="404040">
+                      <a:alpha val="100000"/>
+                    </a:srgbClr>
+                  </a:solidFill>
+                  <a:latin typeface="Helvetica"/>
+                  <a:cs typeface="Helvetica"/>
+                </a:rPr>
+                <a:t>subHR per 10 % decline: 1.79 (1.32-2.43), p_Bonf = &lt;0.001 (n = 6)  |  per IQR decline (Δ = 29.9 %): 5.74 (2.32-14.24)  |  IQR: [-15.0, 14.9] %</a:t>
+              </a:r>
+            </a:p>
+          </p:txBody>
+        </p:sp>
+        <p:sp>
+          <p:nvSpPr>
+            <p:cNvPr id="90" name="tx90"/>
+            <p:cNvSpPr/>
+            <p:nvPr/>
+          </p:nvSpPr>
+          <p:spPr>
+            <a:xfrm>
+              <a:off x="887106" y="3932770"/>
               <a:ext cx="3054278" cy="120152"/>
             </a:xfrm>
             <a:prstGeom prst="rect">
